--- a/docs/architecture/GlobalPay_Mandatory_Architecture_Deliverables.pptx
+++ b/docs/architecture/GlobalPay_Mandatory_Architecture_Deliverables.pptx
@@ -14680,7 +14680,7 @@
 </file>
 
 <file path=ppt/slides/slide17.xml><?xml version="1.0" encoding="utf-8"?>
-<p:sld xmlns:a="http://schemas.openxmlformats.org/drawingml/2006/main" xmlns:r="http://schemas.openxmlformats.org/officeDocument/2006/relationships" xmlns:p="http://schemas.openxmlformats.org/presentationml/2006/main">
+<p:sld xmlns:a="http://schemas.openxmlformats.org/drawingml/2006/main" xmlns:p="http://schemas.openxmlformats.org/presentationml/2006/main">
   <p:cSld name="Slide 17">
     <p:bg>
       <p:bgPr>
@@ -17191,256 +17191,6 @@
       </p:sp>
       <p:sp>
         <p:nvSpPr>
-          <p:cNvPr id="65" name="Shape 63"/>
-          <p:cNvSpPr/>
-          <p:nvPr/>
-        </p:nvSpPr>
-        <p:spPr>
-          <a:xfrm>
-            <a:off x="1965960" y="1389888"/>
-            <a:ext cx="91440" cy="9144"/>
-          </a:xfrm>
-          <a:prstGeom prst="line">
-            <a:avLst/>
-          </a:prstGeom>
-          <a:noFill/>
-          <a:ln w="17780">
-            <a:solidFill>
-              <a:srgbClr val="666666"/>
-            </a:solidFill>
-            <a:prstDash val="solid"/>
-            <a:headEnd type="none"/>
-            <a:tailEnd type="triangle"/>
-          </a:ln>
-        </p:spPr>
-      </p:sp>
-      <p:sp>
-        <p:nvSpPr>
-          <p:cNvPr id="66" name="Shape 64"/>
-          <p:cNvSpPr/>
-          <p:nvPr/>
-        </p:nvSpPr>
-        <p:spPr>
-          <a:xfrm>
-            <a:off x="3749040" y="1389888"/>
-            <a:ext cx="91440" cy="9144"/>
-          </a:xfrm>
-          <a:prstGeom prst="line">
-            <a:avLst/>
-          </a:prstGeom>
-          <a:noFill/>
-          <a:ln w="17780">
-            <a:solidFill>
-              <a:srgbClr val="666666"/>
-            </a:solidFill>
-            <a:prstDash val="solid"/>
-            <a:headEnd type="none"/>
-            <a:tailEnd type="triangle"/>
-          </a:ln>
-        </p:spPr>
-      </p:sp>
-      <p:sp>
-        <p:nvSpPr>
-          <p:cNvPr id="67" name="Shape 65"/>
-          <p:cNvSpPr/>
-          <p:nvPr/>
-        </p:nvSpPr>
-        <p:spPr>
-          <a:xfrm>
-            <a:off x="5532120" y="1389888"/>
-            <a:ext cx="91440" cy="9144"/>
-          </a:xfrm>
-          <a:prstGeom prst="line">
-            <a:avLst/>
-          </a:prstGeom>
-          <a:noFill/>
-          <a:ln w="17780">
-            <a:solidFill>
-              <a:srgbClr val="666666"/>
-            </a:solidFill>
-            <a:prstDash val="solid"/>
-            <a:headEnd type="none"/>
-            <a:tailEnd type="triangle"/>
-          </a:ln>
-        </p:spPr>
-      </p:sp>
-      <p:sp>
-        <p:nvSpPr>
-          <p:cNvPr id="68" name="Shape 66"/>
-          <p:cNvSpPr/>
-          <p:nvPr/>
-        </p:nvSpPr>
-        <p:spPr>
-          <a:xfrm>
-            <a:off x="2903220" y="1828800"/>
-            <a:ext cx="9144" cy="182880"/>
-          </a:xfrm>
-          <a:prstGeom prst="line">
-            <a:avLst/>
-          </a:prstGeom>
-          <a:noFill/>
-          <a:ln w="17780">
-            <a:solidFill>
-              <a:srgbClr val="666666"/>
-            </a:solidFill>
-            <a:prstDash val="solid"/>
-            <a:headEnd type="none"/>
-            <a:tailEnd type="triangle"/>
-          </a:ln>
-        </p:spPr>
-      </p:sp>
-      <p:sp>
-        <p:nvSpPr>
-          <p:cNvPr id="69" name="Shape 67"/>
-          <p:cNvSpPr/>
-          <p:nvPr/>
-        </p:nvSpPr>
-        <p:spPr>
-          <a:xfrm>
-            <a:off x="1965960" y="2487168"/>
-            <a:ext cx="91440" cy="9144"/>
-          </a:xfrm>
-          <a:prstGeom prst="line">
-            <a:avLst/>
-          </a:prstGeom>
-          <a:noFill/>
-          <a:ln w="17780">
-            <a:solidFill>
-              <a:srgbClr val="666666"/>
-            </a:solidFill>
-            <a:prstDash val="solid"/>
-            <a:headEnd type="none"/>
-            <a:tailEnd type="triangle"/>
-          </a:ln>
-        </p:spPr>
-      </p:sp>
-      <p:sp>
-        <p:nvSpPr>
-          <p:cNvPr id="70" name="Shape 68"/>
-          <p:cNvSpPr/>
-          <p:nvPr/>
-        </p:nvSpPr>
-        <p:spPr>
-          <a:xfrm>
-            <a:off x="3749040" y="2487168"/>
-            <a:ext cx="91440" cy="9144"/>
-          </a:xfrm>
-          <a:prstGeom prst="line">
-            <a:avLst/>
-          </a:prstGeom>
-          <a:noFill/>
-          <a:ln w="17780">
-            <a:solidFill>
-              <a:srgbClr val="666666"/>
-            </a:solidFill>
-            <a:prstDash val="solid"/>
-            <a:headEnd type="none"/>
-            <a:tailEnd type="triangle"/>
-          </a:ln>
-        </p:spPr>
-      </p:sp>
-      <p:sp>
-        <p:nvSpPr>
-          <p:cNvPr id="71" name="Shape 69"/>
-          <p:cNvSpPr/>
-          <p:nvPr/>
-        </p:nvSpPr>
-        <p:spPr>
-          <a:xfrm>
-            <a:off x="5532120" y="2487168"/>
-            <a:ext cx="91440" cy="9144"/>
-          </a:xfrm>
-          <a:prstGeom prst="line">
-            <a:avLst/>
-          </a:prstGeom>
-          <a:noFill/>
-          <a:ln w="17780">
-            <a:solidFill>
-              <a:srgbClr val="666666"/>
-            </a:solidFill>
-            <a:prstDash val="solid"/>
-            <a:headEnd type="none"/>
-            <a:tailEnd type="triangle"/>
-          </a:ln>
-        </p:spPr>
-      </p:sp>
-      <p:sp>
-        <p:nvSpPr>
-          <p:cNvPr id="72" name="Shape 70"/>
-          <p:cNvSpPr/>
-          <p:nvPr/>
-        </p:nvSpPr>
-        <p:spPr>
-          <a:xfrm>
-            <a:off x="7315200" y="2487168"/>
-            <a:ext cx="91440" cy="9144"/>
-          </a:xfrm>
-          <a:prstGeom prst="line">
-            <a:avLst/>
-          </a:prstGeom>
-          <a:noFill/>
-          <a:ln w="17780">
-            <a:solidFill>
-              <a:srgbClr val="666666"/>
-            </a:solidFill>
-            <a:prstDash val="solid"/>
-            <a:headEnd type="none"/>
-            <a:tailEnd type="triangle"/>
-          </a:ln>
-        </p:spPr>
-      </p:sp>
-      <p:sp>
-        <p:nvSpPr>
-          <p:cNvPr id="73" name="Shape 71"/>
-          <p:cNvSpPr/>
-          <p:nvPr/>
-        </p:nvSpPr>
-        <p:spPr>
-          <a:xfrm>
-            <a:off x="1120140" y="2926080"/>
-            <a:ext cx="9144" cy="182880"/>
-          </a:xfrm>
-          <a:prstGeom prst="line">
-            <a:avLst/>
-          </a:prstGeom>
-          <a:noFill/>
-          <a:ln w="17780">
-            <a:solidFill>
-              <a:srgbClr val="666666"/>
-            </a:solidFill>
-            <a:prstDash val="solid"/>
-            <a:headEnd type="none"/>
-            <a:tailEnd type="triangle"/>
-          </a:ln>
-        </p:spPr>
-      </p:sp>
-      <p:sp>
-        <p:nvSpPr>
-          <p:cNvPr id="74" name="Shape 72"/>
-          <p:cNvSpPr/>
-          <p:nvPr/>
-        </p:nvSpPr>
-        <p:spPr>
-          <a:xfrm>
-            <a:off x="1965960" y="3520440"/>
-            <a:ext cx="91440" cy="9144"/>
-          </a:xfrm>
-          <a:prstGeom prst="line">
-            <a:avLst/>
-          </a:prstGeom>
-          <a:noFill/>
-          <a:ln w="17780">
-            <a:solidFill>
-              <a:srgbClr val="666666"/>
-            </a:solidFill>
-            <a:prstDash val="solid"/>
-            <a:headEnd type="none"/>
-            <a:tailEnd type="triangle"/>
-          </a:ln>
-        </p:spPr>
-      </p:sp>
-      <p:sp>
-        <p:nvSpPr>
           <p:cNvPr id="75" name="Text 73"/>
           <p:cNvSpPr/>
           <p:nvPr/>
@@ -17472,7 +17222,7 @@
                 <a:ea typeface="Calibri" pitchFamily="34" charset="-122"/>
                 <a:cs typeface="Calibri" pitchFamily="34" charset="-120"/>
               </a:rPr>
-              <a:t>User 1 to 0..1 Customer or Merchant; Customer/Merchant 1 to 0..* Wallets; Customer 1 to 0..* Consents and CBDC Wallets; Transaction 1 to 2..* Ledger Entries and 0..1 Fraud Alert; Fraud Alert 1 to 0..* Investigations. Model Registry and Audit Log are cross-cutting.</a:t>
+              <a:t>How to read it: FK means foreign key and identifies the related table. A user may have a customer or merchant profile. Profiles own wallets. Transactions create ledger entries and may trigger fraud alerts for investigation.</a:t>
             </a:r>
             <a:endParaRPr lang="en-US" sz="900" dirty="0"/>
           </a:p>

--- a/docs/architecture/GlobalPay_Mandatory_Architecture_Deliverables.pptx
+++ b/docs/architecture/GlobalPay_Mandatory_Architecture_Deliverables.pptx
@@ -6314,7 +6314,7 @@
 </file>
 
 <file path=ppt/slides/slide10.xml><?xml version="1.0" encoding="utf-8"?>
-<p:sld xmlns:a="http://schemas.openxmlformats.org/drawingml/2006/main" xmlns:r="http://schemas.openxmlformats.org/officeDocument/2006/relationships" xmlns:p="http://schemas.openxmlformats.org/presentationml/2006/main">
+<p:sld xmlns:a="http://schemas.openxmlformats.org/drawingml/2006/main" xmlns:p="http://schemas.openxmlformats.org/presentationml/2006/main" xmlns:r="http://schemas.openxmlformats.org/officeDocument/2006/relationships">
   <p:cSld name="Slide 10">
     <p:bg>
       <p:bgPr>
@@ -6337,1346 +6337,28 @@
           <a:chExt cx="0" cy="0"/>
         </a:xfrm>
       </p:grpSpPr>
-      <p:sp>
-        <p:nvSpPr>
-          <p:cNvPr id="2" name="Shape 0"/>
-          <p:cNvSpPr/>
-          <p:nvPr/>
-        </p:nvSpPr>
+      <p:pic>
+        <p:nvPicPr>
+          <p:cNvPr id="2" name="section8-network-architecture.png"/>
+          <p:cNvPicPr/>
+          <p:nvPr/>
+        </p:nvPicPr>
+        <p:blipFill>
+          <a:blip r:embed="rId1"/>
+          <a:stretch>
+            <a:fillRect/>
+          </a:stretch>
+        </p:blipFill>
         <p:spPr>
           <a:xfrm>
             <a:off x="0" y="0"/>
-            <a:ext cx="82296" cy="6858000"/>
-          </a:xfrm>
-          <a:prstGeom prst="rect">
-            <a:avLst/>
-          </a:prstGeom>
-          <a:solidFill>
-            <a:srgbClr val="1E2761"/>
-          </a:solidFill>
-          <a:ln/>
-        </p:spPr>
-      </p:sp>
-      <p:sp>
-        <p:nvSpPr>
-          <p:cNvPr id="3" name="Shape 1"/>
-          <p:cNvSpPr/>
-          <p:nvPr/>
-        </p:nvSpPr>
-        <p:spPr>
-          <a:xfrm>
-            <a:off x="292608" y="182880"/>
-            <a:ext cx="310896" cy="310896"/>
-          </a:xfrm>
-          <a:prstGeom prst="roundRect">
-            <a:avLst>
-              <a:gd name="adj" fmla="val 28000"/>
-            </a:avLst>
-          </a:prstGeom>
-          <a:solidFill>
-            <a:srgbClr val="1E2761"/>
-          </a:solidFill>
-          <a:ln/>
-        </p:spPr>
-      </p:sp>
-      <p:sp>
-        <p:nvSpPr>
-          <p:cNvPr id="4" name="Text 2"/>
-          <p:cNvSpPr/>
-          <p:nvPr/>
-        </p:nvSpPr>
-        <p:spPr>
-          <a:xfrm>
-            <a:off x="292608" y="182880"/>
-            <a:ext cx="310896" cy="310896"/>
-          </a:xfrm>
-          <a:prstGeom prst="rect">
-            <a:avLst/>
-          </a:prstGeom>
-          <a:noFill/>
-          <a:ln/>
-        </p:spPr>
-        <p:txBody>
-          <a:bodyPr wrap="square" lIns="0" tIns="0" rIns="0" bIns="0" rtlCol="0" anchor="ctr"/>
-          <a:lstStyle/>
-          <a:p>
-            <a:pPr algn="ctr" indent="0" marL="0">
-              <a:buNone/>
-            </a:pPr>
-            <a:r>
-              <a:rPr lang="en-US" sz="1428" b="1" dirty="0">
-                <a:solidFill>
-                  <a:srgbClr val="FFFFFF"/>
-                </a:solidFill>
-                <a:latin typeface="Cambria" pitchFamily="34" charset="0"/>
-                <a:ea typeface="Cambria" pitchFamily="34" charset="-122"/>
-                <a:cs typeface="Cambria" pitchFamily="34" charset="-120"/>
-              </a:rPr>
-              <a:t>G</a:t>
-            </a:r>
-            <a:endParaRPr lang="en-US" sz="1428" dirty="0"/>
-          </a:p>
-        </p:txBody>
-      </p:sp>
-      <p:sp>
-        <p:nvSpPr>
-          <p:cNvPr id="5" name="Text 3"/>
-          <p:cNvSpPr/>
-          <p:nvPr/>
-        </p:nvSpPr>
-        <p:spPr>
-          <a:xfrm>
-            <a:off x="749808" y="164592"/>
-            <a:ext cx="9857232" cy="384048"/>
-          </a:xfrm>
-          <a:prstGeom prst="rect">
-            <a:avLst/>
-          </a:prstGeom>
-          <a:noFill/>
-          <a:ln/>
-        </p:spPr>
-        <p:txBody>
-          <a:bodyPr wrap="square" lIns="0" tIns="0" rIns="0" bIns="0" rtlCol="0" anchor="ctr"/>
-          <a:lstStyle/>
-          <a:p>
-            <a:pPr indent="0" marL="0">
-              <a:buNone/>
-            </a:pPr>
-            <a:r>
-              <a:rPr lang="en-US" sz="2000" b="1" dirty="0">
-                <a:solidFill>
-                  <a:srgbClr val="1E2761"/>
-                </a:solidFill>
-                <a:latin typeface="Cambria" pitchFamily="34" charset="0"/>
-                <a:ea typeface="Cambria" pitchFamily="34" charset="-122"/>
-                <a:cs typeface="Cambria" pitchFamily="34" charset="-120"/>
-              </a:rPr>
-              <a:t>Enterprise Network Architecture</a:t>
-            </a:r>
-            <a:endParaRPr lang="en-US" sz="2000" dirty="0"/>
-          </a:p>
-        </p:txBody>
-      </p:sp>
-      <p:sp>
-        <p:nvSpPr>
-          <p:cNvPr id="6" name="Text 4"/>
-          <p:cNvSpPr/>
-          <p:nvPr/>
-        </p:nvSpPr>
-        <p:spPr>
-          <a:xfrm>
-            <a:off x="749808" y="548640"/>
-            <a:ext cx="10607040" cy="237744"/>
-          </a:xfrm>
-          <a:prstGeom prst="rect">
-            <a:avLst/>
-          </a:prstGeom>
-          <a:noFill/>
-          <a:ln/>
-        </p:spPr>
-        <p:txBody>
-          <a:bodyPr wrap="square" lIns="0" tIns="0" rIns="0" bIns="0" rtlCol="0" anchor="ctr"/>
-          <a:lstStyle/>
-          <a:p>
-            <a:pPr indent="0" marL="0">
-              <a:buNone/>
-            </a:pPr>
-            <a:r>
-              <a:rPr lang="en-US" sz="1050" dirty="0">
-                <a:solidFill>
-                  <a:srgbClr val="555555"/>
-                </a:solidFill>
-                <a:latin typeface="Calibri" pitchFamily="34" charset="0"/>
-                <a:ea typeface="Calibri" pitchFamily="34" charset="-122"/>
-                <a:cs typeface="Calibri" pitchFamily="34" charset="-120"/>
-              </a:rPr>
-              <a:t>Host-to-container topology, trust boundaries and service dependencies</a:t>
-            </a:r>
-            <a:endParaRPr lang="en-US" sz="1050" dirty="0"/>
-          </a:p>
-        </p:txBody>
-      </p:sp>
-      <p:sp>
-        <p:nvSpPr>
-          <p:cNvPr id="7" name="Shape 5"/>
-          <p:cNvSpPr/>
-          <p:nvPr/>
-        </p:nvSpPr>
-        <p:spPr>
-          <a:xfrm>
-            <a:off x="11475720" y="182880"/>
-            <a:ext cx="384048" cy="384048"/>
-          </a:xfrm>
-          <a:prstGeom prst="ellipse">
-            <a:avLst/>
-          </a:prstGeom>
-          <a:solidFill>
-            <a:srgbClr val="1E2761"/>
-          </a:solidFill>
-          <a:ln/>
-        </p:spPr>
-      </p:sp>
-      <p:sp>
-        <p:nvSpPr>
-          <p:cNvPr id="8" name="Text 6"/>
-          <p:cNvSpPr/>
-          <p:nvPr/>
-        </p:nvSpPr>
-        <p:spPr>
-          <a:xfrm>
-            <a:off x="11475720" y="182880"/>
-            <a:ext cx="384048" cy="384048"/>
-          </a:xfrm>
-          <a:prstGeom prst="rect">
-            <a:avLst/>
-          </a:prstGeom>
-          <a:noFill/>
-          <a:ln/>
-        </p:spPr>
-        <p:txBody>
-          <a:bodyPr wrap="square" lIns="0" tIns="0" rIns="0" bIns="0" rtlCol="0" anchor="ctr"/>
-          <a:lstStyle/>
-          <a:p>
-            <a:pPr algn="ctr" indent="0" marL="0">
-              <a:buNone/>
-            </a:pPr>
-            <a:r>
-              <a:rPr lang="en-US" sz="1400" b="1" dirty="0">
-                <a:solidFill>
-                  <a:srgbClr val="FFFFFF"/>
-                </a:solidFill>
-                <a:latin typeface="Calibri" pitchFamily="34" charset="0"/>
-                <a:ea typeface="Calibri" pitchFamily="34" charset="-122"/>
-                <a:cs typeface="Calibri" pitchFamily="34" charset="-120"/>
-              </a:rPr>
-              <a:t>9</a:t>
-            </a:r>
-            <a:endParaRPr lang="en-US" sz="1400" dirty="0"/>
-          </a:p>
-        </p:txBody>
-      </p:sp>
-      <p:sp>
-        <p:nvSpPr>
-          <p:cNvPr id="9" name="Shape 7"/>
-          <p:cNvSpPr/>
-          <p:nvPr/>
-        </p:nvSpPr>
-        <p:spPr>
-          <a:xfrm>
-            <a:off x="4937760" y="868680"/>
-            <a:ext cx="2286000" cy="384048"/>
-          </a:xfrm>
-          <a:prstGeom prst="roundRect">
-            <a:avLst>
-              <a:gd name="adj" fmla="val 14286"/>
-            </a:avLst>
-          </a:prstGeom>
-          <a:solidFill>
-            <a:srgbClr val="F2F2F2"/>
-          </a:solidFill>
-          <a:ln w="12700">
-            <a:solidFill>
-              <a:srgbClr val="B7B7B7"/>
-            </a:solidFill>
-            <a:prstDash val="solid"/>
-          </a:ln>
-        </p:spPr>
-      </p:sp>
-      <p:sp>
-        <p:nvSpPr>
-          <p:cNvPr id="10" name="Text 8"/>
-          <p:cNvSpPr/>
-          <p:nvPr/>
-        </p:nvSpPr>
-        <p:spPr>
-          <a:xfrm>
-            <a:off x="4992624" y="868680"/>
-            <a:ext cx="2176272" cy="384048"/>
-          </a:xfrm>
-          <a:prstGeom prst="rect">
-            <a:avLst/>
-          </a:prstGeom>
-          <a:noFill/>
-          <a:ln/>
-        </p:spPr>
-        <p:txBody>
-          <a:bodyPr wrap="square" lIns="0" tIns="0" rIns="0" bIns="0" rtlCol="0" anchor="ctr"/>
-          <a:lstStyle/>
-          <a:p>
-            <a:pPr algn="ctr" indent="0" marL="0">
-              <a:buNone/>
-            </a:pPr>
-            <a:r>
-              <a:rPr lang="en-US" sz="1000" b="1" dirty="0">
-                <a:solidFill>
-                  <a:srgbClr val="333333"/>
-                </a:solidFill>
-                <a:latin typeface="Calibri" pitchFamily="34" charset="0"/>
-                <a:ea typeface="Calibri" pitchFamily="34" charset="-122"/>
-                <a:cs typeface="Calibri" pitchFamily="34" charset="-120"/>
-              </a:rPr>
-              <a:t>User device / web browser</a:t>
-            </a:r>
-            <a:endParaRPr lang="en-US" sz="1000" dirty="0"/>
-          </a:p>
-        </p:txBody>
-      </p:sp>
-      <p:sp>
-        <p:nvSpPr>
-          <p:cNvPr id="11" name="Shape 9"/>
-          <p:cNvSpPr/>
-          <p:nvPr/>
-        </p:nvSpPr>
-        <p:spPr>
-          <a:xfrm>
-            <a:off x="6080760" y="1252728"/>
-            <a:ext cx="9144" cy="137160"/>
-          </a:xfrm>
-          <a:prstGeom prst="line">
-            <a:avLst/>
-          </a:prstGeom>
-          <a:noFill/>
-          <a:ln w="17780">
-            <a:solidFill>
-              <a:srgbClr val="666666"/>
-            </a:solidFill>
-            <a:prstDash val="solid"/>
-            <a:headEnd type="none"/>
-            <a:tailEnd type="triangle"/>
-          </a:ln>
-        </p:spPr>
-      </p:sp>
-      <p:sp>
-        <p:nvSpPr>
-          <p:cNvPr id="12" name="Shape 10"/>
-          <p:cNvSpPr/>
-          <p:nvPr/>
-        </p:nvSpPr>
-        <p:spPr>
-          <a:xfrm>
-            <a:off x="4937760" y="1389888"/>
-            <a:ext cx="2286000" cy="402336"/>
-          </a:xfrm>
-          <a:prstGeom prst="roundRect">
-            <a:avLst>
-              <a:gd name="adj" fmla="val 13636"/>
-            </a:avLst>
-          </a:prstGeom>
-          <a:solidFill>
-            <a:srgbClr val="FCEBC9"/>
-          </a:solidFill>
-          <a:ln w="12700">
-            <a:solidFill>
-              <a:srgbClr val="E0A83A"/>
-            </a:solidFill>
-            <a:prstDash val="solid"/>
-          </a:ln>
-        </p:spPr>
-      </p:sp>
-      <p:sp>
-        <p:nvSpPr>
-          <p:cNvPr id="13" name="Text 11"/>
-          <p:cNvSpPr/>
-          <p:nvPr/>
-        </p:nvSpPr>
-        <p:spPr>
-          <a:xfrm>
-            <a:off x="4992624" y="1417320"/>
-            <a:ext cx="2176272" cy="219456"/>
-          </a:xfrm>
-          <a:prstGeom prst="rect">
-            <a:avLst/>
-          </a:prstGeom>
-          <a:noFill/>
-          <a:ln/>
-        </p:spPr>
-        <p:txBody>
-          <a:bodyPr wrap="square" lIns="0" tIns="0" rIns="0" bIns="0" rtlCol="0" anchor="b"/>
-          <a:lstStyle/>
-          <a:p>
-            <a:pPr algn="ctr" indent="0" marL="0">
-              <a:buNone/>
-            </a:pPr>
-            <a:r>
-              <a:rPr lang="en-US" sz="950" b="1" dirty="0">
-                <a:solidFill>
-                  <a:srgbClr val="7A5A12"/>
-                </a:solidFill>
-                <a:latin typeface="Calibri" pitchFamily="34" charset="0"/>
-                <a:ea typeface="Calibri" pitchFamily="34" charset="-122"/>
-                <a:cs typeface="Calibri" pitchFamily="34" charset="-120"/>
-              </a:rPr>
-              <a:t>Nginx (frontend:80)</a:t>
-            </a:r>
-            <a:endParaRPr lang="en-US" sz="950" dirty="0"/>
-          </a:p>
-        </p:txBody>
-      </p:sp>
-      <p:sp>
-        <p:nvSpPr>
-          <p:cNvPr id="14" name="Text 12"/>
-          <p:cNvSpPr/>
-          <p:nvPr/>
-        </p:nvSpPr>
-        <p:spPr>
-          <a:xfrm>
-            <a:off x="4992624" y="1655064"/>
-            <a:ext cx="2176272" cy="164592"/>
-          </a:xfrm>
-          <a:prstGeom prst="rect">
-            <a:avLst/>
-          </a:prstGeom>
-          <a:noFill/>
-          <a:ln/>
-        </p:spPr>
-        <p:txBody>
-          <a:bodyPr wrap="square" lIns="0" tIns="0" rIns="0" bIns="0" rtlCol="0" anchor="t"/>
-          <a:lstStyle/>
-          <a:p>
-            <a:pPr algn="ctr" indent="0" marL="0">
-              <a:buNone/>
-            </a:pPr>
-            <a:r>
-              <a:rPr lang="en-US" sz="900" dirty="0">
-                <a:solidFill>
-                  <a:srgbClr val="7A5A12"/>
-                </a:solidFill>
-                <a:latin typeface="Calibri" pitchFamily="34" charset="0"/>
-                <a:ea typeface="Calibri" pitchFamily="34" charset="-122"/>
-                <a:cs typeface="Calibri" pitchFamily="34" charset="-120"/>
-              </a:rPr>
-              <a:t>host 3000 -&gt; 80</a:t>
-            </a:r>
-            <a:endParaRPr lang="en-US" sz="900" dirty="0"/>
-          </a:p>
-        </p:txBody>
-      </p:sp>
-      <p:sp>
-        <p:nvSpPr>
-          <p:cNvPr id="15" name="Shape 13"/>
-          <p:cNvSpPr/>
-          <p:nvPr/>
-        </p:nvSpPr>
-        <p:spPr>
-          <a:xfrm>
-            <a:off x="6080760" y="1792224"/>
-            <a:ext cx="9144" cy="137160"/>
-          </a:xfrm>
-          <a:prstGeom prst="line">
-            <a:avLst/>
-          </a:prstGeom>
-          <a:noFill/>
-          <a:ln w="17780">
-            <a:solidFill>
-              <a:srgbClr val="666666"/>
-            </a:solidFill>
-            <a:prstDash val="solid"/>
-            <a:headEnd type="none"/>
-            <a:tailEnd type="triangle"/>
-          </a:ln>
-        </p:spPr>
-      </p:sp>
-      <p:sp>
-        <p:nvSpPr>
-          <p:cNvPr id="16" name="Shape 14"/>
-          <p:cNvSpPr/>
-          <p:nvPr/>
-        </p:nvSpPr>
-        <p:spPr>
-          <a:xfrm>
-            <a:off x="4937760" y="1929384"/>
-            <a:ext cx="2286000" cy="402336"/>
-          </a:xfrm>
-          <a:prstGeom prst="roundRect">
-            <a:avLst>
-              <a:gd name="adj" fmla="val 13636"/>
-            </a:avLst>
-          </a:prstGeom>
-          <a:solidFill>
-            <a:srgbClr val="E8DFF5"/>
-          </a:solidFill>
-          <a:ln w="12700">
-            <a:solidFill>
-              <a:srgbClr val="8E6FC4"/>
-            </a:solidFill>
-            <a:prstDash val="solid"/>
-          </a:ln>
-        </p:spPr>
-      </p:sp>
-      <p:sp>
-        <p:nvSpPr>
-          <p:cNvPr id="17" name="Text 15"/>
-          <p:cNvSpPr/>
-          <p:nvPr/>
-        </p:nvSpPr>
-        <p:spPr>
-          <a:xfrm>
-            <a:off x="4992624" y="1956816"/>
-            <a:ext cx="2176272" cy="219456"/>
-          </a:xfrm>
-          <a:prstGeom prst="rect">
-            <a:avLst/>
-          </a:prstGeom>
-          <a:noFill/>
-          <a:ln/>
-        </p:spPr>
-        <p:txBody>
-          <a:bodyPr wrap="square" lIns="0" tIns="0" rIns="0" bIns="0" rtlCol="0" anchor="b"/>
-          <a:lstStyle/>
-          <a:p>
-            <a:pPr algn="ctr" indent="0" marL="0">
-              <a:buNone/>
-            </a:pPr>
-            <a:r>
-              <a:rPr lang="en-US" sz="900" b="1" dirty="0">
-                <a:solidFill>
-                  <a:srgbClr val="4B2E83"/>
-                </a:solidFill>
-                <a:latin typeface="Calibri" pitchFamily="34" charset="0"/>
-                <a:ea typeface="Calibri" pitchFamily="34" charset="-122"/>
-                <a:cs typeface="Calibri" pitchFamily="34" charset="-120"/>
-              </a:rPr>
-              <a:t>FastAPI (backend:8000)</a:t>
-            </a:r>
-            <a:endParaRPr lang="en-US" sz="900" dirty="0"/>
-          </a:p>
-        </p:txBody>
-      </p:sp>
-      <p:sp>
-        <p:nvSpPr>
-          <p:cNvPr id="18" name="Text 16"/>
-          <p:cNvSpPr/>
-          <p:nvPr/>
-        </p:nvSpPr>
-        <p:spPr>
-          <a:xfrm>
-            <a:off x="4992624" y="2194560"/>
-            <a:ext cx="2176272" cy="164592"/>
-          </a:xfrm>
-          <a:prstGeom prst="rect">
-            <a:avLst/>
-          </a:prstGeom>
-          <a:noFill/>
-          <a:ln/>
-        </p:spPr>
-        <p:txBody>
-          <a:bodyPr wrap="square" lIns="0" tIns="0" rIns="0" bIns="0" rtlCol="0" anchor="t"/>
-          <a:lstStyle/>
-          <a:p>
-            <a:pPr algn="ctr" indent="0" marL="0">
-              <a:buNone/>
-            </a:pPr>
-            <a:r>
-              <a:rPr lang="en-US" sz="900" dirty="0">
-                <a:solidFill>
-                  <a:srgbClr val="4B2E83"/>
-                </a:solidFill>
-                <a:latin typeface="Calibri" pitchFamily="34" charset="0"/>
-                <a:ea typeface="Calibri" pitchFamily="34" charset="-122"/>
-                <a:cs typeface="Calibri" pitchFamily="34" charset="-120"/>
-              </a:rPr>
-              <a:t>Correlation-ID, security headers</a:t>
-            </a:r>
-            <a:endParaRPr lang="en-US" sz="900" dirty="0"/>
-          </a:p>
-        </p:txBody>
-      </p:sp>
-      <p:sp>
-        <p:nvSpPr>
-          <p:cNvPr id="19" name="Shape 17"/>
-          <p:cNvSpPr/>
-          <p:nvPr/>
-        </p:nvSpPr>
-        <p:spPr>
-          <a:xfrm>
-            <a:off x="6080760" y="2331720"/>
-            <a:ext cx="9144" cy="155448"/>
-          </a:xfrm>
-          <a:prstGeom prst="line">
-            <a:avLst/>
-          </a:prstGeom>
-          <a:noFill/>
-          <a:ln w="17780">
-            <a:solidFill>
-              <a:srgbClr val="666666"/>
-            </a:solidFill>
-            <a:prstDash val="solid"/>
-            <a:headEnd type="none"/>
-            <a:tailEnd type="triangle"/>
-          </a:ln>
-        </p:spPr>
-      </p:sp>
-      <p:sp>
-        <p:nvSpPr>
-          <p:cNvPr id="20" name="Shape 18"/>
-          <p:cNvSpPr/>
-          <p:nvPr/>
-        </p:nvSpPr>
-        <p:spPr>
-          <a:xfrm>
-            <a:off x="548640" y="2487168"/>
-            <a:ext cx="11064240" cy="1691640"/>
-          </a:xfrm>
-          <a:prstGeom prst="roundRect">
-            <a:avLst>
-              <a:gd name="adj" fmla="val 5405"/>
-            </a:avLst>
-          </a:prstGeom>
-          <a:solidFill>
-            <a:srgbClr val="FAFAFA"/>
-          </a:solidFill>
-          <a:ln w="12700">
-            <a:solidFill>
-              <a:srgbClr val="CCCCCC"/>
-            </a:solidFill>
-            <a:prstDash val="solid"/>
-          </a:ln>
-        </p:spPr>
-      </p:sp>
-      <p:sp>
-        <p:nvSpPr>
-          <p:cNvPr id="21" name="Text 19"/>
-          <p:cNvSpPr/>
-          <p:nvPr/>
-        </p:nvSpPr>
-        <p:spPr>
-          <a:xfrm>
-            <a:off x="548640" y="2551176"/>
-            <a:ext cx="11064240" cy="219456"/>
-          </a:xfrm>
-          <a:prstGeom prst="rect">
-            <a:avLst/>
-          </a:prstGeom>
-          <a:noFill/>
-          <a:ln/>
-        </p:spPr>
-        <p:txBody>
-          <a:bodyPr wrap="square" lIns="0" tIns="0" rIns="0" bIns="0" rtlCol="0" anchor="ctr"/>
-          <a:lstStyle/>
-          <a:p>
-            <a:pPr algn="ctr" indent="0" marL="0">
-              <a:buNone/>
-            </a:pPr>
-            <a:r>
-              <a:rPr lang="en-US" sz="1050" b="1" dirty="0">
-                <a:solidFill>
-                  <a:srgbClr val="333333"/>
-                </a:solidFill>
-                <a:latin typeface="Calibri" pitchFamily="34" charset="0"/>
-                <a:ea typeface="Calibri" pitchFamily="34" charset="-122"/>
-                <a:cs typeface="Calibri" pitchFamily="34" charset="-120"/>
-              </a:rPr>
-              <a:t>Private application network / trust boundary — globalpay-net</a:t>
-            </a:r>
-            <a:endParaRPr lang="en-US" sz="1050" dirty="0"/>
-          </a:p>
-        </p:txBody>
-      </p:sp>
-      <p:sp>
-        <p:nvSpPr>
-          <p:cNvPr id="22" name="Shape 20"/>
-          <p:cNvSpPr/>
-          <p:nvPr/>
-        </p:nvSpPr>
-        <p:spPr>
-          <a:xfrm>
-            <a:off x="1143000" y="2834640"/>
-            <a:ext cx="3108960" cy="457200"/>
-          </a:xfrm>
-          <a:prstGeom prst="roundRect">
-            <a:avLst>
-              <a:gd name="adj" fmla="val 12000"/>
-            </a:avLst>
-          </a:prstGeom>
-          <a:solidFill>
-            <a:srgbClr val="D3F3EF"/>
-          </a:solidFill>
-          <a:ln w="12700">
-            <a:solidFill>
-              <a:srgbClr val="3FA79B"/>
-            </a:solidFill>
-            <a:prstDash val="solid"/>
-          </a:ln>
-        </p:spPr>
-      </p:sp>
-      <p:sp>
-        <p:nvSpPr>
-          <p:cNvPr id="23" name="Text 21"/>
-          <p:cNvSpPr/>
-          <p:nvPr/>
-        </p:nvSpPr>
-        <p:spPr>
-          <a:xfrm>
-            <a:off x="1197864" y="2862072"/>
-            <a:ext cx="2999232" cy="219456"/>
-          </a:xfrm>
-          <a:prstGeom prst="rect">
-            <a:avLst/>
-          </a:prstGeom>
-          <a:noFill/>
-          <a:ln/>
-        </p:spPr>
-        <p:txBody>
-          <a:bodyPr wrap="square" lIns="0" tIns="0" rIns="0" bIns="0" rtlCol="0" anchor="b"/>
-          <a:lstStyle/>
-          <a:p>
-            <a:pPr algn="ctr" indent="0" marL="0">
-              <a:buNone/>
-            </a:pPr>
-            <a:r>
-              <a:rPr lang="en-US" sz="900" b="1" dirty="0">
-                <a:solidFill>
-                  <a:srgbClr val="1F5F58"/>
-                </a:solidFill>
-                <a:latin typeface="Calibri" pitchFamily="34" charset="0"/>
-                <a:ea typeface="Calibri" pitchFamily="34" charset="-122"/>
-                <a:cs typeface="Calibri" pitchFamily="34" charset="-120"/>
-              </a:rPr>
-              <a:t>auth, customers, wallets</a:t>
-            </a:r>
-            <a:endParaRPr lang="en-US" sz="900" dirty="0"/>
-          </a:p>
-        </p:txBody>
-      </p:sp>
-      <p:sp>
-        <p:nvSpPr>
-          <p:cNvPr id="24" name="Text 22"/>
-          <p:cNvSpPr/>
-          <p:nvPr/>
-        </p:nvSpPr>
-        <p:spPr>
-          <a:xfrm>
-            <a:off x="1197864" y="3099816"/>
-            <a:ext cx="2999232" cy="164592"/>
-          </a:xfrm>
-          <a:prstGeom prst="rect">
-            <a:avLst/>
-          </a:prstGeom>
-          <a:noFill/>
-          <a:ln/>
-        </p:spPr>
-        <p:txBody>
-          <a:bodyPr wrap="square" lIns="0" tIns="0" rIns="0" bIns="0" rtlCol="0" anchor="t"/>
-          <a:lstStyle/>
-          <a:p>
-            <a:pPr algn="ctr" indent="0" marL="0">
-              <a:buNone/>
-            </a:pPr>
-            <a:r>
-              <a:rPr lang="en-US" sz="900" dirty="0">
-                <a:solidFill>
-                  <a:srgbClr val="1F5F58"/>
-                </a:solidFill>
-                <a:latin typeface="Calibri" pitchFamily="34" charset="0"/>
-                <a:ea typeface="Calibri" pitchFamily="34" charset="-122"/>
-                <a:cs typeface="Calibri" pitchFamily="34" charset="-120"/>
-              </a:rPr>
-              <a:t>Module 1</a:t>
-            </a:r>
-            <a:endParaRPr lang="en-US" sz="900" dirty="0"/>
-          </a:p>
-        </p:txBody>
-      </p:sp>
-      <p:sp>
-        <p:nvSpPr>
-          <p:cNvPr id="25" name="Shape 23"/>
-          <p:cNvSpPr/>
-          <p:nvPr/>
-        </p:nvSpPr>
-        <p:spPr>
-          <a:xfrm>
-            <a:off x="4526280" y="2834640"/>
-            <a:ext cx="3108960" cy="457200"/>
-          </a:xfrm>
-          <a:prstGeom prst="roundRect">
-            <a:avLst>
-              <a:gd name="adj" fmla="val 12000"/>
-            </a:avLst>
-          </a:prstGeom>
-          <a:solidFill>
-            <a:srgbClr val="D3F3EF"/>
-          </a:solidFill>
-          <a:ln w="12700">
-            <a:solidFill>
-              <a:srgbClr val="3FA79B"/>
-            </a:solidFill>
-            <a:prstDash val="solid"/>
-          </a:ln>
-        </p:spPr>
-      </p:sp>
-      <p:sp>
-        <p:nvSpPr>
-          <p:cNvPr id="26" name="Text 24"/>
-          <p:cNvSpPr/>
-          <p:nvPr/>
-        </p:nvSpPr>
-        <p:spPr>
-          <a:xfrm>
-            <a:off x="4581144" y="2862072"/>
-            <a:ext cx="2999232" cy="219456"/>
-          </a:xfrm>
-          <a:prstGeom prst="rect">
-            <a:avLst/>
-          </a:prstGeom>
-          <a:noFill/>
-          <a:ln/>
-        </p:spPr>
-        <p:txBody>
-          <a:bodyPr wrap="square" lIns="0" tIns="0" rIns="0" bIns="0" rtlCol="0" anchor="b"/>
-          <a:lstStyle/>
-          <a:p>
-            <a:pPr algn="ctr" indent="0" marL="0">
-              <a:buNone/>
-            </a:pPr>
-            <a:r>
-              <a:rPr lang="en-US" sz="900" b="1" dirty="0">
-                <a:solidFill>
-                  <a:srgbClr val="1F5F58"/>
-                </a:solidFill>
-                <a:latin typeface="Calibri" pitchFamily="34" charset="0"/>
-                <a:ea typeface="Calibri" pitchFamily="34" charset="-122"/>
-                <a:cs typeface="Calibri" pitchFamily="34" charset="-120"/>
-              </a:rPr>
-              <a:t>payments, fraud</a:t>
-            </a:r>
-            <a:endParaRPr lang="en-US" sz="900" dirty="0"/>
-          </a:p>
-        </p:txBody>
-      </p:sp>
-      <p:sp>
-        <p:nvSpPr>
-          <p:cNvPr id="27" name="Text 25"/>
-          <p:cNvSpPr/>
-          <p:nvPr/>
-        </p:nvSpPr>
-        <p:spPr>
-          <a:xfrm>
-            <a:off x="4581144" y="3099816"/>
-            <a:ext cx="2999232" cy="164592"/>
-          </a:xfrm>
-          <a:prstGeom prst="rect">
-            <a:avLst/>
-          </a:prstGeom>
-          <a:noFill/>
-          <a:ln/>
-        </p:spPr>
-        <p:txBody>
-          <a:bodyPr wrap="square" lIns="0" tIns="0" rIns="0" bIns="0" rtlCol="0" anchor="t"/>
-          <a:lstStyle/>
-          <a:p>
-            <a:pPr algn="ctr" indent="0" marL="0">
-              <a:buNone/>
-            </a:pPr>
-            <a:r>
-              <a:rPr lang="en-US" sz="900" dirty="0">
-                <a:solidFill>
-                  <a:srgbClr val="1F5F58"/>
-                </a:solidFill>
-                <a:latin typeface="Calibri" pitchFamily="34" charset="0"/>
-                <a:ea typeface="Calibri" pitchFamily="34" charset="-122"/>
-                <a:cs typeface="Calibri" pitchFamily="34" charset="-120"/>
-              </a:rPr>
-              <a:t>Modules 2-3</a:t>
-            </a:r>
-            <a:endParaRPr lang="en-US" sz="900" dirty="0"/>
-          </a:p>
-        </p:txBody>
-      </p:sp>
-      <p:sp>
-        <p:nvSpPr>
-          <p:cNvPr id="28" name="Shape 26"/>
-          <p:cNvSpPr/>
-          <p:nvPr/>
-        </p:nvSpPr>
-        <p:spPr>
-          <a:xfrm>
-            <a:off x="7909560" y="2834640"/>
-            <a:ext cx="3108960" cy="457200"/>
-          </a:xfrm>
-          <a:prstGeom prst="roundRect">
-            <a:avLst>
-              <a:gd name="adj" fmla="val 12000"/>
-            </a:avLst>
-          </a:prstGeom>
-          <a:solidFill>
-            <a:srgbClr val="D3F3EF"/>
-          </a:solidFill>
-          <a:ln w="12700">
-            <a:solidFill>
-              <a:srgbClr val="3FA79B"/>
-            </a:solidFill>
-            <a:prstDash val="solid"/>
-          </a:ln>
-        </p:spPr>
-      </p:sp>
-      <p:sp>
-        <p:nvSpPr>
-          <p:cNvPr id="29" name="Text 27"/>
-          <p:cNvSpPr/>
-          <p:nvPr/>
-        </p:nvSpPr>
-        <p:spPr>
-          <a:xfrm>
-            <a:off x="7964424" y="2862072"/>
-            <a:ext cx="2999232" cy="219456"/>
-          </a:xfrm>
-          <a:prstGeom prst="rect">
-            <a:avLst/>
-          </a:prstGeom>
-          <a:noFill/>
-          <a:ln/>
-        </p:spPr>
-        <p:txBody>
-          <a:bodyPr wrap="square" lIns="0" tIns="0" rIns="0" bIns="0" rtlCol="0" anchor="b"/>
-          <a:lstStyle/>
-          <a:p>
-            <a:pPr algn="ctr" indent="0" marL="0">
-              <a:buNone/>
-            </a:pPr>
-            <a:r>
-              <a:rPr lang="en-US" sz="900" b="1" dirty="0">
-                <a:solidFill>
-                  <a:srgbClr val="1F5F58"/>
-                </a:solidFill>
-                <a:latin typeface="Calibri" pitchFamily="34" charset="0"/>
-                <a:ea typeface="Calibri" pitchFamily="34" charset="-122"/>
-                <a:cs typeface="Calibri" pitchFamily="34" charset="-120"/>
-              </a:rPr>
-              <a:t>open_banking, cbdc, dashboard</a:t>
-            </a:r>
-            <a:endParaRPr lang="en-US" sz="900" dirty="0"/>
-          </a:p>
-        </p:txBody>
-      </p:sp>
-      <p:sp>
-        <p:nvSpPr>
-          <p:cNvPr id="30" name="Text 28"/>
-          <p:cNvSpPr/>
-          <p:nvPr/>
-        </p:nvSpPr>
-        <p:spPr>
-          <a:xfrm>
-            <a:off x="7964424" y="3099816"/>
-            <a:ext cx="2999232" cy="164592"/>
-          </a:xfrm>
-          <a:prstGeom prst="rect">
-            <a:avLst/>
-          </a:prstGeom>
-          <a:noFill/>
-          <a:ln/>
-        </p:spPr>
-        <p:txBody>
-          <a:bodyPr wrap="square" lIns="0" tIns="0" rIns="0" bIns="0" rtlCol="0" anchor="t"/>
-          <a:lstStyle/>
-          <a:p>
-            <a:pPr algn="ctr" indent="0" marL="0">
-              <a:buNone/>
-            </a:pPr>
-            <a:r>
-              <a:rPr lang="en-US" sz="900" dirty="0">
-                <a:solidFill>
-                  <a:srgbClr val="1F5F58"/>
-                </a:solidFill>
-                <a:latin typeface="Calibri" pitchFamily="34" charset="0"/>
-                <a:ea typeface="Calibri" pitchFamily="34" charset="-122"/>
-                <a:cs typeface="Calibri" pitchFamily="34" charset="-120"/>
-              </a:rPr>
-              <a:t>Modules 4-5</a:t>
-            </a:r>
-            <a:endParaRPr lang="en-US" sz="900" dirty="0"/>
-          </a:p>
-        </p:txBody>
-      </p:sp>
-      <p:sp>
-        <p:nvSpPr>
-          <p:cNvPr id="31" name="Shape 29"/>
-          <p:cNvSpPr/>
-          <p:nvPr/>
-        </p:nvSpPr>
-        <p:spPr>
-          <a:xfrm>
-            <a:off x="2697480" y="3291840"/>
-            <a:ext cx="9144" cy="137160"/>
-          </a:xfrm>
-          <a:prstGeom prst="line">
-            <a:avLst/>
-          </a:prstGeom>
-          <a:noFill/>
-          <a:ln w="17780">
-            <a:solidFill>
-              <a:srgbClr val="666666"/>
-            </a:solidFill>
-            <a:prstDash val="solid"/>
-            <a:headEnd type="none"/>
-            <a:tailEnd type="triangle"/>
-          </a:ln>
-        </p:spPr>
-      </p:sp>
-      <p:sp>
-        <p:nvSpPr>
-          <p:cNvPr id="32" name="Shape 30"/>
-          <p:cNvSpPr/>
-          <p:nvPr/>
-        </p:nvSpPr>
-        <p:spPr>
-          <a:xfrm>
-            <a:off x="6080760" y="3291840"/>
-            <a:ext cx="9144" cy="137160"/>
-          </a:xfrm>
-          <a:prstGeom prst="line">
-            <a:avLst/>
-          </a:prstGeom>
-          <a:noFill/>
-          <a:ln w="17780">
-            <a:solidFill>
-              <a:srgbClr val="666666"/>
-            </a:solidFill>
-            <a:prstDash val="solid"/>
-            <a:headEnd type="none"/>
-            <a:tailEnd type="triangle"/>
-          </a:ln>
-        </p:spPr>
-      </p:sp>
-      <p:sp>
-        <p:nvSpPr>
-          <p:cNvPr id="33" name="Shape 31"/>
-          <p:cNvSpPr/>
-          <p:nvPr/>
-        </p:nvSpPr>
-        <p:spPr>
-          <a:xfrm>
-            <a:off x="9464040" y="3291840"/>
-            <a:ext cx="9144" cy="137160"/>
-          </a:xfrm>
-          <a:prstGeom prst="line">
-            <a:avLst/>
-          </a:prstGeom>
-          <a:noFill/>
-          <a:ln w="17780">
-            <a:solidFill>
-              <a:srgbClr val="666666"/>
-            </a:solidFill>
-            <a:prstDash val="solid"/>
-            <a:headEnd type="none"/>
-            <a:tailEnd type="triangle"/>
-          </a:ln>
-        </p:spPr>
-      </p:sp>
-      <p:sp>
-        <p:nvSpPr>
-          <p:cNvPr id="34" name="Shape 32"/>
-          <p:cNvSpPr/>
-          <p:nvPr/>
-        </p:nvSpPr>
-        <p:spPr>
-          <a:xfrm>
-            <a:off x="3154680" y="3429000"/>
-            <a:ext cx="2743200" cy="384048"/>
-          </a:xfrm>
-          <a:prstGeom prst="roundRect">
-            <a:avLst>
-              <a:gd name="adj" fmla="val 14286"/>
-            </a:avLst>
-          </a:prstGeom>
-          <a:solidFill>
-            <a:srgbClr val="FBDCD5"/>
-          </a:solidFill>
-          <a:ln w="12700">
-            <a:solidFill>
-              <a:srgbClr val="E07856"/>
-            </a:solidFill>
-            <a:prstDash val="solid"/>
-          </a:ln>
-        </p:spPr>
-      </p:sp>
-      <p:sp>
-        <p:nvSpPr>
-          <p:cNvPr id="35" name="Text 33"/>
-          <p:cNvSpPr/>
-          <p:nvPr/>
-        </p:nvSpPr>
-        <p:spPr>
-          <a:xfrm>
-            <a:off x="3209544" y="3456432"/>
-            <a:ext cx="2633472" cy="219456"/>
-          </a:xfrm>
-          <a:prstGeom prst="rect">
-            <a:avLst/>
-          </a:prstGeom>
-          <a:noFill/>
-          <a:ln/>
-        </p:spPr>
-        <p:txBody>
-          <a:bodyPr wrap="square" lIns="0" tIns="0" rIns="0" bIns="0" rtlCol="0" anchor="b"/>
-          <a:lstStyle/>
-          <a:p>
-            <a:pPr algn="ctr" indent="0" marL="0">
-              <a:buNone/>
-            </a:pPr>
-            <a:r>
-              <a:rPr lang="en-US" sz="900" b="1" dirty="0">
-                <a:solidFill>
-                  <a:srgbClr val="8A3A1E"/>
-                </a:solidFill>
-                <a:latin typeface="Calibri" pitchFamily="34" charset="0"/>
-                <a:ea typeface="Calibri" pitchFamily="34" charset="-122"/>
-                <a:cs typeface="Calibri" pitchFamily="34" charset="-120"/>
-              </a:rPr>
-              <a:t>PostgreSQL (16-alpine)</a:t>
-            </a:r>
-            <a:endParaRPr lang="en-US" sz="900" dirty="0"/>
-          </a:p>
-        </p:txBody>
-      </p:sp>
-      <p:sp>
-        <p:nvSpPr>
-          <p:cNvPr id="36" name="Text 34"/>
-          <p:cNvSpPr/>
-          <p:nvPr/>
-        </p:nvSpPr>
-        <p:spPr>
-          <a:xfrm>
-            <a:off x="3209544" y="3694176"/>
-            <a:ext cx="2633472" cy="164592"/>
-          </a:xfrm>
-          <a:prstGeom prst="rect">
-            <a:avLst/>
-          </a:prstGeom>
-          <a:noFill/>
-          <a:ln/>
-        </p:spPr>
-        <p:txBody>
-          <a:bodyPr wrap="square" lIns="0" tIns="0" rIns="0" bIns="0" rtlCol="0" anchor="t"/>
-          <a:lstStyle/>
-          <a:p>
-            <a:pPr algn="ctr" indent="0" marL="0">
-              <a:buNone/>
-            </a:pPr>
-            <a:r>
-              <a:rPr lang="en-US" sz="900" dirty="0">
-                <a:solidFill>
-                  <a:srgbClr val="8A3A1E"/>
-                </a:solidFill>
-                <a:latin typeface="Calibri" pitchFamily="34" charset="0"/>
-                <a:ea typeface="Calibri" pitchFamily="34" charset="-122"/>
-                <a:cs typeface="Calibri" pitchFamily="34" charset="-120"/>
-              </a:rPr>
-              <a:t>Source of truth</a:t>
-            </a:r>
-            <a:endParaRPr lang="en-US" sz="900" dirty="0"/>
-          </a:p>
-        </p:txBody>
-      </p:sp>
-      <p:sp>
-        <p:nvSpPr>
-          <p:cNvPr id="37" name="Shape 35"/>
-          <p:cNvSpPr/>
-          <p:nvPr/>
-        </p:nvSpPr>
-        <p:spPr>
-          <a:xfrm>
-            <a:off x="6263640" y="3429000"/>
-            <a:ext cx="2743200" cy="384048"/>
-          </a:xfrm>
-          <a:prstGeom prst="roundRect">
-            <a:avLst>
-              <a:gd name="adj" fmla="val 14286"/>
-            </a:avLst>
-          </a:prstGeom>
-          <a:solidFill>
-            <a:srgbClr val="FBDCD5"/>
-          </a:solidFill>
-          <a:ln w="12700">
-            <a:solidFill>
-              <a:srgbClr val="E07856"/>
-            </a:solidFill>
-            <a:prstDash val="solid"/>
-          </a:ln>
-        </p:spPr>
-      </p:sp>
-      <p:sp>
-        <p:nvSpPr>
-          <p:cNvPr id="38" name="Text 36"/>
-          <p:cNvSpPr/>
-          <p:nvPr/>
-        </p:nvSpPr>
-        <p:spPr>
-          <a:xfrm>
-            <a:off x="6318504" y="3456432"/>
-            <a:ext cx="2633472" cy="219456"/>
-          </a:xfrm>
-          <a:prstGeom prst="rect">
-            <a:avLst/>
-          </a:prstGeom>
-          <a:noFill/>
-          <a:ln/>
-        </p:spPr>
-        <p:txBody>
-          <a:bodyPr wrap="square" lIns="0" tIns="0" rIns="0" bIns="0" rtlCol="0" anchor="b"/>
-          <a:lstStyle/>
-          <a:p>
-            <a:pPr algn="ctr" indent="0" marL="0">
-              <a:buNone/>
-            </a:pPr>
-            <a:r>
-              <a:rPr lang="en-US" sz="900" b="1" dirty="0">
-                <a:solidFill>
-                  <a:srgbClr val="8A3A1E"/>
-                </a:solidFill>
-                <a:latin typeface="Calibri" pitchFamily="34" charset="0"/>
-                <a:ea typeface="Calibri" pitchFamily="34" charset="-122"/>
-                <a:cs typeface="Calibri" pitchFamily="34" charset="-120"/>
-              </a:rPr>
-              <a:t>Redis (7-alpine)</a:t>
-            </a:r>
-            <a:endParaRPr lang="en-US" sz="900" dirty="0"/>
-          </a:p>
-        </p:txBody>
-      </p:sp>
-      <p:sp>
-        <p:nvSpPr>
-          <p:cNvPr id="39" name="Text 37"/>
-          <p:cNvSpPr/>
-          <p:nvPr/>
-        </p:nvSpPr>
-        <p:spPr>
-          <a:xfrm>
-            <a:off x="6318504" y="3694176"/>
-            <a:ext cx="2633472" cy="164592"/>
-          </a:xfrm>
-          <a:prstGeom prst="rect">
-            <a:avLst/>
-          </a:prstGeom>
-          <a:noFill/>
-          <a:ln/>
-        </p:spPr>
-        <p:txBody>
-          <a:bodyPr wrap="square" lIns="0" tIns="0" rIns="0" bIns="0" rtlCol="0" anchor="t"/>
-          <a:lstStyle/>
-          <a:p>
-            <a:pPr algn="ctr" indent="0" marL="0">
-              <a:buNone/>
-            </a:pPr>
-            <a:r>
-              <a:rPr lang="en-US" sz="900" dirty="0">
-                <a:solidFill>
-                  <a:srgbClr val="8A3A1E"/>
-                </a:solidFill>
-                <a:latin typeface="Calibri" pitchFamily="34" charset="0"/>
-                <a:ea typeface="Calibri" pitchFamily="34" charset="-122"/>
-                <a:cs typeface="Calibri" pitchFamily="34" charset="-120"/>
-              </a:rPr>
-              <a:t>Cache / rate-limit only</a:t>
-            </a:r>
-            <a:endParaRPr lang="en-US" sz="900" dirty="0"/>
-          </a:p>
-        </p:txBody>
-      </p:sp>
-      <p:sp>
-        <p:nvSpPr>
-          <p:cNvPr id="40" name="Shape 38"/>
-          <p:cNvSpPr/>
-          <p:nvPr/>
-        </p:nvSpPr>
-        <p:spPr>
-          <a:xfrm>
-            <a:off x="8823960" y="3931920"/>
-            <a:ext cx="2194560" cy="201168"/>
-          </a:xfrm>
-          <a:prstGeom prst="roundRect">
-            <a:avLst>
-              <a:gd name="adj" fmla="val 27273"/>
-            </a:avLst>
-          </a:prstGeom>
-          <a:solidFill>
-            <a:srgbClr val="E8DFF5"/>
-          </a:solidFill>
-          <a:ln w="12700">
-            <a:solidFill>
-              <a:srgbClr val="8E6FC4"/>
-            </a:solidFill>
-            <a:prstDash val="solid"/>
-          </a:ln>
-        </p:spPr>
-      </p:sp>
-      <p:sp>
-        <p:nvSpPr>
-          <p:cNvPr id="41" name="Text 39"/>
-          <p:cNvSpPr/>
-          <p:nvPr/>
-        </p:nvSpPr>
-        <p:spPr>
-          <a:xfrm>
-            <a:off x="8878824" y="3931920"/>
-            <a:ext cx="2084832" cy="201168"/>
-          </a:xfrm>
-          <a:prstGeom prst="rect">
-            <a:avLst/>
-          </a:prstGeom>
-          <a:noFill/>
-          <a:ln/>
-        </p:spPr>
-        <p:txBody>
-          <a:bodyPr wrap="square" lIns="0" tIns="0" rIns="0" bIns="0" rtlCol="0" anchor="ctr"/>
-          <a:lstStyle/>
-          <a:p>
-            <a:pPr algn="ctr" indent="0" marL="0">
-              <a:buNone/>
-            </a:pPr>
-            <a:r>
-              <a:rPr lang="en-US" sz="900" b="1" dirty="0">
-                <a:solidFill>
-                  <a:srgbClr val="4B2E83"/>
-                </a:solidFill>
-                <a:latin typeface="Calibri" pitchFamily="34" charset="0"/>
-                <a:ea typeface="Calibri" pitchFamily="34" charset="-122"/>
-                <a:cs typeface="Calibri" pitchFamily="34" charset="-120"/>
-              </a:rPr>
-              <a:t>Prometheus :9090 + Grafana :3001</a:t>
-            </a:r>
-            <a:endParaRPr lang="en-US" sz="900" dirty="0"/>
-          </a:p>
-        </p:txBody>
-      </p:sp>
-      <p:sp>
-        <p:nvSpPr>
-          <p:cNvPr id="42" name="Text 40"/>
-          <p:cNvSpPr/>
-          <p:nvPr/>
-        </p:nvSpPr>
-        <p:spPr>
-          <a:xfrm>
-            <a:off x="548640" y="4251960"/>
-            <a:ext cx="11064240" cy="201168"/>
-          </a:xfrm>
-          <a:prstGeom prst="rect">
-            <a:avLst/>
-          </a:prstGeom>
-          <a:noFill/>
-          <a:ln/>
-        </p:spPr>
-        <p:txBody>
-          <a:bodyPr wrap="square" lIns="0" tIns="0" rIns="0" bIns="0" rtlCol="0" anchor="ctr"/>
-          <a:lstStyle/>
-          <a:p>
-            <a:pPr algn="ctr" indent="0" marL="0">
-              <a:buNone/>
-            </a:pPr>
-            <a:r>
-              <a:rPr lang="en-US" sz="900" i="1" dirty="0">
-                <a:solidFill>
-                  <a:srgbClr val="666666"/>
-                </a:solidFill>
-                <a:latin typeface="Calibri" pitchFamily="34" charset="0"/>
-                <a:ea typeface="Calibri" pitchFamily="34" charset="-122"/>
-                <a:cs typeface="Calibri" pitchFamily="34" charset="-120"/>
-              </a:rPr>
-              <a:t>Redis never holds the authoritative wallet balance — Postgres is the single source of truth</a:t>
-            </a:r>
-            <a:endParaRPr lang="en-US" sz="900" dirty="0"/>
-          </a:p>
-        </p:txBody>
-      </p:sp>
+            <a:ext cx="12192000" cy="6858000"/>
+          </a:xfrm>
+          <a:prstGeom prst="rect">
+            <a:avLst/>
+          </a:prstGeom>
+        </p:spPr>
+      </p:pic>
     </p:spTree>
   </p:cSld>
   <p:clrMapOvr>
@@ -8691,7 +7373,7 @@
 </file>
 
 <file path=ppt/slides/slide12.xml><?xml version="1.0" encoding="utf-8"?>
-<p:sld xmlns:a="http://schemas.openxmlformats.org/drawingml/2006/main" xmlns:r="http://schemas.openxmlformats.org/officeDocument/2006/relationships" xmlns:p="http://schemas.openxmlformats.org/presentationml/2006/main">
+<p:sld xmlns:a="http://schemas.openxmlformats.org/drawingml/2006/main" xmlns:p="http://schemas.openxmlformats.org/presentationml/2006/main" xmlns:r="http://schemas.openxmlformats.org/officeDocument/2006/relationships">
   <p:cSld name="Slide 12">
     <p:bg>
       <p:bgPr>
@@ -8714,1023 +7396,28 @@
           <a:chExt cx="0" cy="0"/>
         </a:xfrm>
       </p:grpSpPr>
-      <p:sp>
-        <p:nvSpPr>
-          <p:cNvPr id="2" name="Shape 0"/>
-          <p:cNvSpPr/>
-          <p:nvPr/>
-        </p:nvSpPr>
+      <p:pic>
+        <p:nvPicPr>
+          <p:cNvPr id="2" name="section8-dfd-level-0.png"/>
+          <p:cNvPicPr/>
+          <p:nvPr/>
+        </p:nvPicPr>
+        <p:blipFill>
+          <a:blip r:embed="rId1"/>
+          <a:stretch>
+            <a:fillRect/>
+          </a:stretch>
+        </p:blipFill>
         <p:spPr>
           <a:xfrm>
             <a:off x="0" y="0"/>
-            <a:ext cx="82296" cy="6858000"/>
-          </a:xfrm>
-          <a:prstGeom prst="rect">
-            <a:avLst/>
-          </a:prstGeom>
-          <a:solidFill>
-            <a:srgbClr val="1E2761"/>
-          </a:solidFill>
-          <a:ln/>
-        </p:spPr>
-      </p:sp>
-      <p:sp>
-        <p:nvSpPr>
-          <p:cNvPr id="3" name="Shape 1"/>
-          <p:cNvSpPr/>
-          <p:nvPr/>
-        </p:nvSpPr>
-        <p:spPr>
-          <a:xfrm>
-            <a:off x="292608" y="182880"/>
-            <a:ext cx="310896" cy="310896"/>
-          </a:xfrm>
-          <a:prstGeom prst="roundRect">
-            <a:avLst>
-              <a:gd name="adj" fmla="val 28000"/>
-            </a:avLst>
-          </a:prstGeom>
-          <a:solidFill>
-            <a:srgbClr val="1E2761"/>
-          </a:solidFill>
-          <a:ln/>
-        </p:spPr>
-      </p:sp>
-      <p:sp>
-        <p:nvSpPr>
-          <p:cNvPr id="4" name="Text 2"/>
-          <p:cNvSpPr/>
-          <p:nvPr/>
-        </p:nvSpPr>
-        <p:spPr>
-          <a:xfrm>
-            <a:off x="292608" y="182880"/>
-            <a:ext cx="310896" cy="310896"/>
-          </a:xfrm>
-          <a:prstGeom prst="rect">
-            <a:avLst/>
-          </a:prstGeom>
-          <a:noFill/>
-          <a:ln/>
-        </p:spPr>
-        <p:txBody>
-          <a:bodyPr wrap="square" lIns="0" tIns="0" rIns="0" bIns="0" rtlCol="0" anchor="ctr"/>
-          <a:lstStyle/>
-          <a:p>
-            <a:pPr algn="ctr" indent="0" marL="0">
-              <a:buNone/>
-            </a:pPr>
-            <a:r>
-              <a:rPr lang="en-US" sz="1428" b="1" dirty="0">
-                <a:solidFill>
-                  <a:srgbClr val="FFFFFF"/>
-                </a:solidFill>
-                <a:latin typeface="Cambria" pitchFamily="34" charset="0"/>
-                <a:ea typeface="Cambria" pitchFamily="34" charset="-122"/>
-                <a:cs typeface="Cambria" pitchFamily="34" charset="-120"/>
-              </a:rPr>
-              <a:t>G</a:t>
-            </a:r>
-            <a:endParaRPr lang="en-US" sz="1428" dirty="0"/>
-          </a:p>
-        </p:txBody>
-      </p:sp>
-      <p:sp>
-        <p:nvSpPr>
-          <p:cNvPr id="5" name="Text 3"/>
-          <p:cNvSpPr/>
-          <p:nvPr/>
-        </p:nvSpPr>
-        <p:spPr>
-          <a:xfrm>
-            <a:off x="749808" y="164592"/>
-            <a:ext cx="9857232" cy="384048"/>
-          </a:xfrm>
-          <a:prstGeom prst="rect">
-            <a:avLst/>
-          </a:prstGeom>
-          <a:noFill/>
-          <a:ln/>
-        </p:spPr>
-        <p:txBody>
-          <a:bodyPr wrap="square" lIns="0" tIns="0" rIns="0" bIns="0" rtlCol="0" anchor="ctr"/>
-          <a:lstStyle/>
-          <a:p>
-            <a:pPr indent="0" marL="0">
-              <a:buNone/>
-            </a:pPr>
-            <a:r>
-              <a:rPr lang="en-US" sz="2000" b="1" dirty="0">
-                <a:solidFill>
-                  <a:srgbClr val="1E2761"/>
-                </a:solidFill>
-                <a:latin typeface="Cambria" pitchFamily="34" charset="0"/>
-                <a:ea typeface="Cambria" pitchFamily="34" charset="-122"/>
-                <a:cs typeface="Cambria" pitchFamily="34" charset="-120"/>
-              </a:rPr>
-              <a:t>Data Flow Diagram — Level 0 (Context)</a:t>
-            </a:r>
-            <a:endParaRPr lang="en-US" sz="2000" dirty="0"/>
-          </a:p>
-        </p:txBody>
-      </p:sp>
-      <p:sp>
-        <p:nvSpPr>
-          <p:cNvPr id="6" name="Text 4"/>
-          <p:cNvSpPr/>
-          <p:nvPr/>
-        </p:nvSpPr>
-        <p:spPr>
-          <a:xfrm>
-            <a:off x="749808" y="548640"/>
-            <a:ext cx="10607040" cy="237744"/>
-          </a:xfrm>
-          <a:prstGeom prst="rect">
-            <a:avLst/>
-          </a:prstGeom>
-          <a:noFill/>
-          <a:ln/>
-        </p:spPr>
-        <p:txBody>
-          <a:bodyPr wrap="square" lIns="0" tIns="0" rIns="0" bIns="0" rtlCol="0" anchor="ctr"/>
-          <a:lstStyle/>
-          <a:p>
-            <a:pPr indent="0" marL="0">
-              <a:buNone/>
-            </a:pPr>
-            <a:r>
-              <a:rPr lang="en-US" sz="1050" dirty="0">
-                <a:solidFill>
-                  <a:srgbClr val="555555"/>
-                </a:solidFill>
-                <a:latin typeface="Calibri" pitchFamily="34" charset="0"/>
-                <a:ea typeface="Calibri" pitchFamily="34" charset="-122"/>
-                <a:cs typeface="Calibri" pitchFamily="34" charset="-120"/>
-              </a:rPr>
-              <a:t>The platform as a single process, with its external entities</a:t>
-            </a:r>
-            <a:endParaRPr lang="en-US" sz="1050" dirty="0"/>
-          </a:p>
-        </p:txBody>
-      </p:sp>
-      <p:sp>
-        <p:nvSpPr>
-          <p:cNvPr id="7" name="Shape 5"/>
-          <p:cNvSpPr/>
-          <p:nvPr/>
-        </p:nvSpPr>
-        <p:spPr>
-          <a:xfrm>
-            <a:off x="11475720" y="182880"/>
-            <a:ext cx="384048" cy="384048"/>
-          </a:xfrm>
-          <a:prstGeom prst="ellipse">
-            <a:avLst/>
-          </a:prstGeom>
-          <a:solidFill>
-            <a:srgbClr val="1E2761"/>
-          </a:solidFill>
-          <a:ln/>
-        </p:spPr>
-      </p:sp>
-      <p:sp>
-        <p:nvSpPr>
-          <p:cNvPr id="8" name="Text 6"/>
-          <p:cNvSpPr/>
-          <p:nvPr/>
-        </p:nvSpPr>
-        <p:spPr>
-          <a:xfrm>
-            <a:off x="11475720" y="182880"/>
-            <a:ext cx="384048" cy="384048"/>
-          </a:xfrm>
-          <a:prstGeom prst="rect">
-            <a:avLst/>
-          </a:prstGeom>
-          <a:noFill/>
-          <a:ln/>
-        </p:spPr>
-        <p:txBody>
-          <a:bodyPr wrap="square" lIns="0" tIns="0" rIns="0" bIns="0" rtlCol="0" anchor="ctr"/>
-          <a:lstStyle/>
-          <a:p>
-            <a:pPr algn="ctr" indent="0" marL="0">
-              <a:buNone/>
-            </a:pPr>
-            <a:r>
-              <a:rPr lang="en-US" sz="1400" b="1" dirty="0">
-                <a:solidFill>
-                  <a:srgbClr val="FFFFFF"/>
-                </a:solidFill>
-                <a:latin typeface="Calibri" pitchFamily="34" charset="0"/>
-                <a:ea typeface="Calibri" pitchFamily="34" charset="-122"/>
-                <a:cs typeface="Calibri" pitchFamily="34" charset="-120"/>
-              </a:rPr>
-              <a:t>11</a:t>
-            </a:r>
-            <a:endParaRPr lang="en-US" sz="1400" dirty="0"/>
-          </a:p>
-        </p:txBody>
-      </p:sp>
-      <p:sp>
-        <p:nvSpPr>
-          <p:cNvPr id="9" name="Shape 7"/>
-          <p:cNvSpPr/>
-          <p:nvPr/>
-        </p:nvSpPr>
-        <p:spPr>
-          <a:xfrm>
-            <a:off x="4727448" y="2514600"/>
-            <a:ext cx="2743200" cy="1463040"/>
-          </a:xfrm>
-          <a:prstGeom prst="ellipse">
-            <a:avLst/>
-          </a:prstGeom>
-          <a:solidFill>
-            <a:srgbClr val="E8DFF5"/>
-          </a:solidFill>
-          <a:ln w="19050">
-            <a:solidFill>
-              <a:srgbClr val="8E6FC4"/>
-            </a:solidFill>
-            <a:prstDash val="solid"/>
-          </a:ln>
-        </p:spPr>
-      </p:sp>
-      <p:sp>
-        <p:nvSpPr>
-          <p:cNvPr id="10" name="Text 8"/>
-          <p:cNvSpPr/>
-          <p:nvPr/>
-        </p:nvSpPr>
-        <p:spPr>
-          <a:xfrm>
-            <a:off x="4727448" y="2514600"/>
-            <a:ext cx="2743200" cy="1463040"/>
-          </a:xfrm>
-          <a:prstGeom prst="rect">
-            <a:avLst/>
-          </a:prstGeom>
-          <a:noFill/>
-          <a:ln/>
-        </p:spPr>
-        <p:txBody>
-          <a:bodyPr wrap="square" lIns="0" tIns="0" rIns="0" bIns="0" rtlCol="0" anchor="ctr"/>
-          <a:lstStyle/>
-          <a:p>
-            <a:pPr algn="ctr" indent="0" marL="0">
-              <a:buNone/>
-            </a:pPr>
-            <a:r>
-              <a:rPr lang="en-US" sz="1300" b="1" dirty="0">
-                <a:solidFill>
-                  <a:srgbClr val="4B2E83"/>
-                </a:solidFill>
-                <a:latin typeface="Calibri" pitchFamily="34" charset="0"/>
-                <a:ea typeface="Calibri" pitchFamily="34" charset="-122"/>
-                <a:cs typeface="Calibri" pitchFamily="34" charset="-120"/>
-              </a:rPr>
-              <a:t>0</a:t>
-            </a:r>
-            <a:endParaRPr lang="en-US" sz="1300" dirty="0"/>
-          </a:p>
-          <a:p>
-            <a:pPr algn="ctr" indent="0" marL="0">
-              <a:buNone/>
-            </a:pPr>
-            <a:r>
-              <a:rPr lang="en-US" sz="1300" b="1" dirty="0">
-                <a:solidFill>
-                  <a:srgbClr val="4B2E83"/>
-                </a:solidFill>
-                <a:latin typeface="Calibri" pitchFamily="34" charset="0"/>
-                <a:ea typeface="Calibri" pitchFamily="34" charset="-122"/>
-                <a:cs typeface="Calibri" pitchFamily="34" charset="-120"/>
-              </a:rPr>
-              <a:t>GlobalPay</a:t>
-            </a:r>
-            <a:endParaRPr lang="en-US" sz="1300" dirty="0"/>
-          </a:p>
-          <a:p>
-            <a:pPr algn="ctr" indent="0" marL="0">
-              <a:buNone/>
-            </a:pPr>
-            <a:r>
-              <a:rPr lang="en-US" sz="1300" b="1" dirty="0">
-                <a:solidFill>
-                  <a:srgbClr val="4B2E83"/>
-                </a:solidFill>
-                <a:latin typeface="Calibri" pitchFamily="34" charset="0"/>
-                <a:ea typeface="Calibri" pitchFamily="34" charset="-122"/>
-                <a:cs typeface="Calibri" pitchFamily="34" charset="-120"/>
-              </a:rPr>
-              <a:t>Platform</a:t>
-            </a:r>
-            <a:endParaRPr lang="en-US" sz="1300" dirty="0"/>
-          </a:p>
-        </p:txBody>
-      </p:sp>
-      <p:sp>
-        <p:nvSpPr>
-          <p:cNvPr id="11" name="Shape 9"/>
-          <p:cNvSpPr/>
-          <p:nvPr/>
-        </p:nvSpPr>
-        <p:spPr>
-          <a:xfrm>
-            <a:off x="548640" y="868680"/>
-            <a:ext cx="2651760" cy="731520"/>
-          </a:xfrm>
-          <a:prstGeom prst="roundRect">
-            <a:avLst>
-              <a:gd name="adj" fmla="val 7500"/>
-            </a:avLst>
-          </a:prstGeom>
-          <a:solidFill>
-            <a:srgbClr val="F2F2F2"/>
-          </a:solidFill>
-          <a:ln w="12700">
-            <a:solidFill>
-              <a:srgbClr val="B7B7B7"/>
-            </a:solidFill>
-            <a:prstDash val="solid"/>
-          </a:ln>
-        </p:spPr>
-      </p:sp>
-      <p:sp>
-        <p:nvSpPr>
-          <p:cNvPr id="12" name="Text 10"/>
-          <p:cNvSpPr/>
-          <p:nvPr/>
-        </p:nvSpPr>
-        <p:spPr>
-          <a:xfrm>
-            <a:off x="603504" y="868680"/>
-            <a:ext cx="2542032" cy="731520"/>
-          </a:xfrm>
-          <a:prstGeom prst="rect">
-            <a:avLst/>
-          </a:prstGeom>
-          <a:noFill/>
-          <a:ln/>
-        </p:spPr>
-        <p:txBody>
-          <a:bodyPr wrap="square" lIns="0" tIns="0" rIns="0" bIns="0" rtlCol="0" anchor="ctr"/>
-          <a:lstStyle/>
-          <a:p>
-            <a:pPr algn="ctr" indent="0" marL="0">
-              <a:buNone/>
-            </a:pPr>
-            <a:r>
-              <a:rPr lang="en-US" sz="1050" b="1" dirty="0">
-                <a:solidFill>
-                  <a:srgbClr val="333333"/>
-                </a:solidFill>
-                <a:latin typeface="Calibri" pitchFamily="34" charset="0"/>
-                <a:ea typeface="Calibri" pitchFamily="34" charset="-122"/>
-                <a:cs typeface="Calibri" pitchFamily="34" charset="-120"/>
-              </a:rPr>
-              <a:t>Customer</a:t>
-            </a:r>
-            <a:endParaRPr lang="en-US" sz="1050" dirty="0"/>
-          </a:p>
-        </p:txBody>
-      </p:sp>
-      <p:sp>
-        <p:nvSpPr>
-          <p:cNvPr id="13" name="Shape 11"/>
-          <p:cNvSpPr/>
-          <p:nvPr/>
-        </p:nvSpPr>
-        <p:spPr>
-          <a:xfrm>
-            <a:off x="8961120" y="868680"/>
-            <a:ext cx="2651760" cy="731520"/>
-          </a:xfrm>
-          <a:prstGeom prst="roundRect">
-            <a:avLst>
-              <a:gd name="adj" fmla="val 7500"/>
-            </a:avLst>
-          </a:prstGeom>
-          <a:solidFill>
-            <a:srgbClr val="F2F2F2"/>
-          </a:solidFill>
-          <a:ln w="12700">
-            <a:solidFill>
-              <a:srgbClr val="B7B7B7"/>
-            </a:solidFill>
-            <a:prstDash val="solid"/>
-          </a:ln>
-        </p:spPr>
-      </p:sp>
-      <p:sp>
-        <p:nvSpPr>
-          <p:cNvPr id="14" name="Text 12"/>
-          <p:cNvSpPr/>
-          <p:nvPr/>
-        </p:nvSpPr>
-        <p:spPr>
-          <a:xfrm>
-            <a:off x="9015984" y="868680"/>
-            <a:ext cx="2542032" cy="731520"/>
-          </a:xfrm>
-          <a:prstGeom prst="rect">
-            <a:avLst/>
-          </a:prstGeom>
-          <a:noFill/>
-          <a:ln/>
-        </p:spPr>
-        <p:txBody>
-          <a:bodyPr wrap="square" lIns="0" tIns="0" rIns="0" bIns="0" rtlCol="0" anchor="ctr"/>
-          <a:lstStyle/>
-          <a:p>
-            <a:pPr algn="ctr" indent="0" marL="0">
-              <a:buNone/>
-            </a:pPr>
-            <a:r>
-              <a:rPr lang="en-US" sz="1050" b="1" dirty="0">
-                <a:solidFill>
-                  <a:srgbClr val="333333"/>
-                </a:solidFill>
-                <a:latin typeface="Calibri" pitchFamily="34" charset="0"/>
-                <a:ea typeface="Calibri" pitchFamily="34" charset="-122"/>
-                <a:cs typeface="Calibri" pitchFamily="34" charset="-120"/>
-              </a:rPr>
-              <a:t>Merchant</a:t>
-            </a:r>
-            <a:endParaRPr lang="en-US" sz="1050" dirty="0"/>
-          </a:p>
-        </p:txBody>
-      </p:sp>
-      <p:sp>
-        <p:nvSpPr>
-          <p:cNvPr id="15" name="Shape 13"/>
-          <p:cNvSpPr/>
-          <p:nvPr/>
-        </p:nvSpPr>
-        <p:spPr>
-          <a:xfrm>
-            <a:off x="548640" y="4709160"/>
-            <a:ext cx="2651760" cy="731520"/>
-          </a:xfrm>
-          <a:prstGeom prst="roundRect">
-            <a:avLst>
-              <a:gd name="adj" fmla="val 7500"/>
-            </a:avLst>
-          </a:prstGeom>
-          <a:solidFill>
-            <a:srgbClr val="F2F2F2"/>
-          </a:solidFill>
-          <a:ln w="12700">
-            <a:solidFill>
-              <a:srgbClr val="B7B7B7"/>
-            </a:solidFill>
-            <a:prstDash val="solid"/>
-          </a:ln>
-        </p:spPr>
-      </p:sp>
-      <p:sp>
-        <p:nvSpPr>
-          <p:cNvPr id="16" name="Text 14"/>
-          <p:cNvSpPr/>
-          <p:nvPr/>
-        </p:nvSpPr>
-        <p:spPr>
-          <a:xfrm>
-            <a:off x="603504" y="4709160"/>
-            <a:ext cx="2542032" cy="731520"/>
-          </a:xfrm>
-          <a:prstGeom prst="rect">
-            <a:avLst/>
-          </a:prstGeom>
-          <a:noFill/>
-          <a:ln/>
-        </p:spPr>
-        <p:txBody>
-          <a:bodyPr wrap="square" lIns="0" tIns="0" rIns="0" bIns="0" rtlCol="0" anchor="ctr"/>
-          <a:lstStyle/>
-          <a:p>
-            <a:pPr algn="ctr" indent="0" marL="0">
-              <a:buNone/>
-            </a:pPr>
-            <a:r>
-              <a:rPr lang="en-US" sz="1050" b="1" dirty="0">
-                <a:solidFill>
-                  <a:srgbClr val="333333"/>
-                </a:solidFill>
-                <a:latin typeface="Calibri" pitchFamily="34" charset="0"/>
-                <a:ea typeface="Calibri" pitchFamily="34" charset="-122"/>
-                <a:cs typeface="Calibri" pitchFamily="34" charset="-120"/>
-              </a:rPr>
-              <a:t>Fraud analyst /</a:t>
-            </a:r>
-            <a:endParaRPr lang="en-US" sz="1050" dirty="0"/>
-          </a:p>
-          <a:p>
-            <a:pPr algn="ctr" indent="0" marL="0">
-              <a:buNone/>
-            </a:pPr>
-            <a:r>
-              <a:rPr lang="en-US" sz="1050" b="1" dirty="0">
-                <a:solidFill>
-                  <a:srgbClr val="333333"/>
-                </a:solidFill>
-                <a:latin typeface="Calibri" pitchFamily="34" charset="0"/>
-                <a:ea typeface="Calibri" pitchFamily="34" charset="-122"/>
-                <a:cs typeface="Calibri" pitchFamily="34" charset="-120"/>
-              </a:rPr>
-              <a:t>compliance</a:t>
-            </a:r>
-            <a:endParaRPr lang="en-US" sz="1050" dirty="0"/>
-          </a:p>
-        </p:txBody>
-      </p:sp>
-      <p:sp>
-        <p:nvSpPr>
-          <p:cNvPr id="17" name="Shape 15"/>
-          <p:cNvSpPr/>
-          <p:nvPr/>
-        </p:nvSpPr>
-        <p:spPr>
-          <a:xfrm>
-            <a:off x="8961120" y="4709160"/>
-            <a:ext cx="2651760" cy="731520"/>
-          </a:xfrm>
-          <a:prstGeom prst="roundRect">
-            <a:avLst>
-              <a:gd name="adj" fmla="val 7500"/>
-            </a:avLst>
-          </a:prstGeom>
-          <a:solidFill>
-            <a:srgbClr val="F2F2F2"/>
-          </a:solidFill>
-          <a:ln w="12700">
-            <a:solidFill>
-              <a:srgbClr val="B7B7B7"/>
-            </a:solidFill>
-            <a:prstDash val="solid"/>
-          </a:ln>
-        </p:spPr>
-      </p:sp>
-      <p:sp>
-        <p:nvSpPr>
-          <p:cNvPr id="18" name="Text 16"/>
-          <p:cNvSpPr/>
-          <p:nvPr/>
-        </p:nvSpPr>
-        <p:spPr>
-          <a:xfrm>
-            <a:off x="9015984" y="4709160"/>
-            <a:ext cx="2542032" cy="731520"/>
-          </a:xfrm>
-          <a:prstGeom prst="rect">
-            <a:avLst/>
-          </a:prstGeom>
-          <a:noFill/>
-          <a:ln/>
-        </p:spPr>
-        <p:txBody>
-          <a:bodyPr wrap="square" lIns="0" tIns="0" rIns="0" bIns="0" rtlCol="0" anchor="ctr"/>
-          <a:lstStyle/>
-          <a:p>
-            <a:pPr algn="ctr" indent="0" marL="0">
-              <a:buNone/>
-            </a:pPr>
-            <a:r>
-              <a:rPr lang="en-US" sz="1050" b="1" dirty="0">
-                <a:solidFill>
-                  <a:srgbClr val="333333"/>
-                </a:solidFill>
-                <a:latin typeface="Calibri" pitchFamily="34" charset="0"/>
-                <a:ea typeface="Calibri" pitchFamily="34" charset="-122"/>
-                <a:cs typeface="Calibri" pitchFamily="34" charset="-120"/>
-              </a:rPr>
-              <a:t>Partner bank /</a:t>
-            </a:r>
-            <a:endParaRPr lang="en-US" sz="1050" dirty="0"/>
-          </a:p>
-          <a:p>
-            <a:pPr algn="ctr" indent="0" marL="0">
-              <a:buNone/>
-            </a:pPr>
-            <a:r>
-              <a:rPr lang="en-US" sz="1050" b="1" dirty="0">
-                <a:solidFill>
-                  <a:srgbClr val="333333"/>
-                </a:solidFill>
-                <a:latin typeface="Calibri" pitchFamily="34" charset="0"/>
-                <a:ea typeface="Calibri" pitchFamily="34" charset="-122"/>
-                <a:cs typeface="Calibri" pitchFamily="34" charset="-120"/>
-              </a:rPr>
-              <a:t>central bank (sim)</a:t>
-            </a:r>
-            <a:endParaRPr lang="en-US" sz="1050" dirty="0"/>
-          </a:p>
-        </p:txBody>
-      </p:sp>
-      <p:sp>
-        <p:nvSpPr>
-          <p:cNvPr id="19" name="Shape 17"/>
-          <p:cNvSpPr/>
-          <p:nvPr/>
-        </p:nvSpPr>
-        <p:spPr>
-          <a:xfrm>
-            <a:off x="4727448" y="5029200"/>
-            <a:ext cx="2651760" cy="731520"/>
-          </a:xfrm>
-          <a:prstGeom prst="roundRect">
-            <a:avLst>
-              <a:gd name="adj" fmla="val 7500"/>
-            </a:avLst>
-          </a:prstGeom>
-          <a:solidFill>
-            <a:srgbClr val="F2F2F2"/>
-          </a:solidFill>
-          <a:ln w="12700">
-            <a:solidFill>
-              <a:srgbClr val="B7B7B7"/>
-            </a:solidFill>
-            <a:prstDash val="solid"/>
-          </a:ln>
-        </p:spPr>
-      </p:sp>
-      <p:sp>
-        <p:nvSpPr>
-          <p:cNvPr id="20" name="Text 18"/>
-          <p:cNvSpPr/>
-          <p:nvPr/>
-        </p:nvSpPr>
-        <p:spPr>
-          <a:xfrm>
-            <a:off x="4782312" y="5029200"/>
-            <a:ext cx="2542032" cy="731520"/>
-          </a:xfrm>
-          <a:prstGeom prst="rect">
-            <a:avLst/>
-          </a:prstGeom>
-          <a:noFill/>
-          <a:ln/>
-        </p:spPr>
-        <p:txBody>
-          <a:bodyPr wrap="square" lIns="0" tIns="0" rIns="0" bIns="0" rtlCol="0" anchor="ctr"/>
-          <a:lstStyle/>
-          <a:p>
-            <a:pPr algn="ctr" indent="0" marL="0">
-              <a:buNone/>
-            </a:pPr>
-            <a:r>
-              <a:rPr lang="en-US" sz="1050" b="1" dirty="0">
-                <a:solidFill>
-                  <a:srgbClr val="333333"/>
-                </a:solidFill>
-                <a:latin typeface="Calibri" pitchFamily="34" charset="0"/>
-                <a:ea typeface="Calibri" pitchFamily="34" charset="-122"/>
-                <a:cs typeface="Calibri" pitchFamily="34" charset="-120"/>
-              </a:rPr>
-              <a:t>Executive /</a:t>
-            </a:r>
-            <a:endParaRPr lang="en-US" sz="1050" dirty="0"/>
-          </a:p>
-          <a:p>
-            <a:pPr algn="ctr" indent="0" marL="0">
-              <a:buNone/>
-            </a:pPr>
-            <a:r>
-              <a:rPr lang="en-US" sz="1050" b="1" dirty="0">
-                <a:solidFill>
-                  <a:srgbClr val="333333"/>
-                </a:solidFill>
-                <a:latin typeface="Calibri" pitchFamily="34" charset="0"/>
-                <a:ea typeface="Calibri" pitchFamily="34" charset="-122"/>
-                <a:cs typeface="Calibri" pitchFamily="34" charset="-120"/>
-              </a:rPr>
-              <a:t>board</a:t>
-            </a:r>
-            <a:endParaRPr lang="en-US" sz="1050" dirty="0"/>
-          </a:p>
-        </p:txBody>
-      </p:sp>
-      <p:sp>
-        <p:nvSpPr>
-          <p:cNvPr id="21" name="Shape 19"/>
-          <p:cNvSpPr/>
-          <p:nvPr/>
-        </p:nvSpPr>
-        <p:spPr>
-          <a:xfrm>
-            <a:off x="1874520" y="1600200"/>
-            <a:ext cx="5596128" cy="2377440"/>
-          </a:xfrm>
-          <a:prstGeom prst="line">
-            <a:avLst/>
-          </a:prstGeom>
-          <a:noFill/>
-          <a:ln w="17780">
-            <a:solidFill>
-              <a:srgbClr val="666666"/>
-            </a:solidFill>
-            <a:prstDash val="solid"/>
-            <a:headEnd type="triangle"/>
-            <a:tailEnd type="triangle"/>
-          </a:ln>
-        </p:spPr>
-      </p:sp>
-      <p:sp>
-        <p:nvSpPr>
-          <p:cNvPr id="22" name="Shape 20"/>
-          <p:cNvSpPr/>
-          <p:nvPr/>
-        </p:nvSpPr>
-        <p:spPr>
-          <a:xfrm flipH="1">
-            <a:off x="4727448" y="1600200"/>
-            <a:ext cx="5559552" cy="2377440"/>
-          </a:xfrm>
-          <a:prstGeom prst="line">
-            <a:avLst/>
-          </a:prstGeom>
-          <a:noFill/>
-          <a:ln w="17780">
-            <a:solidFill>
-              <a:srgbClr val="666666"/>
-            </a:solidFill>
-            <a:prstDash val="solid"/>
-            <a:headEnd type="triangle"/>
-            <a:tailEnd type="triangle"/>
-          </a:ln>
-        </p:spPr>
-      </p:sp>
-      <p:sp>
-        <p:nvSpPr>
-          <p:cNvPr id="23" name="Shape 21"/>
-          <p:cNvSpPr/>
-          <p:nvPr/>
-        </p:nvSpPr>
-        <p:spPr>
-          <a:xfrm flipV="1">
-            <a:off x="1874520" y="2514600"/>
-            <a:ext cx="5596128" cy="2194560"/>
-          </a:xfrm>
-          <a:prstGeom prst="line">
-            <a:avLst/>
-          </a:prstGeom>
-          <a:noFill/>
-          <a:ln w="17780">
-            <a:solidFill>
-              <a:srgbClr val="666666"/>
-            </a:solidFill>
-            <a:prstDash val="solid"/>
-            <a:headEnd type="triangle"/>
-            <a:tailEnd type="triangle"/>
-          </a:ln>
-        </p:spPr>
-      </p:sp>
-      <p:sp>
-        <p:nvSpPr>
-          <p:cNvPr id="24" name="Shape 22"/>
-          <p:cNvSpPr/>
-          <p:nvPr/>
-        </p:nvSpPr>
-        <p:spPr>
-          <a:xfrm flipH="1" flipV="1">
-            <a:off x="4727448" y="2514600"/>
-            <a:ext cx="5559552" cy="2194560"/>
-          </a:xfrm>
-          <a:prstGeom prst="line">
-            <a:avLst/>
-          </a:prstGeom>
-          <a:noFill/>
-          <a:ln w="17780">
-            <a:solidFill>
-              <a:srgbClr val="666666"/>
-            </a:solidFill>
-            <a:prstDash val="solid"/>
-            <a:headEnd type="triangle"/>
-            <a:tailEnd type="triangle"/>
-          </a:ln>
-        </p:spPr>
-      </p:sp>
-      <p:sp>
-        <p:nvSpPr>
-          <p:cNvPr id="25" name="Shape 23"/>
-          <p:cNvSpPr/>
-          <p:nvPr/>
-        </p:nvSpPr>
-        <p:spPr>
-          <a:xfrm flipV="1">
-            <a:off x="6053328" y="2514600"/>
-            <a:ext cx="1417320" cy="2514600"/>
-          </a:xfrm>
-          <a:prstGeom prst="line">
-            <a:avLst/>
-          </a:prstGeom>
-          <a:noFill/>
-          <a:ln w="17780">
-            <a:solidFill>
-              <a:srgbClr val="666666"/>
-            </a:solidFill>
-            <a:prstDash val="solid"/>
-            <a:headEnd type="triangle"/>
-            <a:tailEnd type="triangle"/>
-          </a:ln>
-        </p:spPr>
-      </p:sp>
-      <p:sp>
-        <p:nvSpPr>
-          <p:cNvPr id="26" name="Text 24"/>
-          <p:cNvSpPr/>
-          <p:nvPr/>
-        </p:nvSpPr>
-        <p:spPr>
-          <a:xfrm>
-            <a:off x="548640" y="1645920"/>
-            <a:ext cx="2651760" cy="201168"/>
-          </a:xfrm>
-          <a:prstGeom prst="rect">
-            <a:avLst/>
-          </a:prstGeom>
-          <a:noFill/>
-          <a:ln/>
-        </p:spPr>
-        <p:txBody>
-          <a:bodyPr wrap="square" lIns="0" tIns="0" rIns="0" bIns="0" rtlCol="0" anchor="ctr"/>
-          <a:lstStyle/>
-          <a:p>
-            <a:pPr algn="ctr" indent="0" marL="0">
-              <a:buNone/>
-            </a:pPr>
-            <a:r>
-              <a:rPr lang="en-US" sz="900" i="1" dirty="0">
-                <a:solidFill>
-                  <a:srgbClr val="666666"/>
-                </a:solidFill>
-                <a:latin typeface="Calibri" pitchFamily="34" charset="0"/>
-                <a:ea typeface="Calibri" pitchFamily="34" charset="-122"/>
-                <a:cs typeface="Calibri" pitchFamily="34" charset="-120"/>
-              </a:rPr>
-              <a:t>Registration, payments</a:t>
-            </a:r>
-            <a:endParaRPr lang="en-US" sz="900" dirty="0"/>
-          </a:p>
-        </p:txBody>
-      </p:sp>
-      <p:sp>
-        <p:nvSpPr>
-          <p:cNvPr id="27" name="Text 25"/>
-          <p:cNvSpPr/>
-          <p:nvPr/>
-        </p:nvSpPr>
-        <p:spPr>
-          <a:xfrm>
-            <a:off x="8961120" y="1645920"/>
-            <a:ext cx="2651760" cy="201168"/>
-          </a:xfrm>
-          <a:prstGeom prst="rect">
-            <a:avLst/>
-          </a:prstGeom>
-          <a:noFill/>
-          <a:ln/>
-        </p:spPr>
-        <p:txBody>
-          <a:bodyPr wrap="square" lIns="0" tIns="0" rIns="0" bIns="0" rtlCol="0" anchor="ctr"/>
-          <a:lstStyle/>
-          <a:p>
-            <a:pPr algn="ctr" indent="0" marL="0">
-              <a:buNone/>
-            </a:pPr>
-            <a:r>
-              <a:rPr lang="en-US" sz="900" i="1" dirty="0">
-                <a:solidFill>
-                  <a:srgbClr val="666666"/>
-                </a:solidFill>
-                <a:latin typeface="Calibri" pitchFamily="34" charset="0"/>
-                <a:ea typeface="Calibri" pitchFamily="34" charset="-122"/>
-                <a:cs typeface="Calibri" pitchFamily="34" charset="-120"/>
-              </a:rPr>
-              <a:t>Settlements, reports</a:t>
-            </a:r>
-            <a:endParaRPr lang="en-US" sz="900" dirty="0"/>
-          </a:p>
-        </p:txBody>
-      </p:sp>
-      <p:sp>
-        <p:nvSpPr>
-          <p:cNvPr id="28" name="Text 26"/>
-          <p:cNvSpPr/>
-          <p:nvPr/>
-        </p:nvSpPr>
-        <p:spPr>
-          <a:xfrm>
-            <a:off x="548640" y="3977640"/>
-            <a:ext cx="2651760" cy="201168"/>
-          </a:xfrm>
-          <a:prstGeom prst="rect">
-            <a:avLst/>
-          </a:prstGeom>
-          <a:noFill/>
-          <a:ln/>
-        </p:spPr>
-        <p:txBody>
-          <a:bodyPr wrap="square" lIns="0" tIns="0" rIns="0" bIns="0" rtlCol="0" anchor="ctr"/>
-          <a:lstStyle/>
-          <a:p>
-            <a:pPr algn="ctr" indent="0" marL="0">
-              <a:buNone/>
-            </a:pPr>
-            <a:r>
-              <a:rPr lang="en-US" sz="900" i="1" dirty="0">
-                <a:solidFill>
-                  <a:srgbClr val="666666"/>
-                </a:solidFill>
-                <a:latin typeface="Calibri" pitchFamily="34" charset="0"/>
-                <a:ea typeface="Calibri" pitchFamily="34" charset="-122"/>
-                <a:cs typeface="Calibri" pitchFamily="34" charset="-120"/>
-              </a:rPr>
-              <a:t>Alerts, case decisions</a:t>
-            </a:r>
-            <a:endParaRPr lang="en-US" sz="900" dirty="0"/>
-          </a:p>
-        </p:txBody>
-      </p:sp>
-      <p:sp>
-        <p:nvSpPr>
-          <p:cNvPr id="29" name="Text 27"/>
-          <p:cNvSpPr/>
-          <p:nvPr/>
-        </p:nvSpPr>
-        <p:spPr>
-          <a:xfrm>
-            <a:off x="8961120" y="3977640"/>
-            <a:ext cx="2651760" cy="201168"/>
-          </a:xfrm>
-          <a:prstGeom prst="rect">
-            <a:avLst/>
-          </a:prstGeom>
-          <a:noFill/>
-          <a:ln/>
-        </p:spPr>
-        <p:txBody>
-          <a:bodyPr wrap="square" lIns="0" tIns="0" rIns="0" bIns="0" rtlCol="0" anchor="ctr"/>
-          <a:lstStyle/>
-          <a:p>
-            <a:pPr algn="ctr" indent="0" marL="0">
-              <a:buNone/>
-            </a:pPr>
-            <a:r>
-              <a:rPr lang="en-US" sz="900" i="1" dirty="0">
-                <a:solidFill>
-                  <a:srgbClr val="666666"/>
-                </a:solidFill>
-                <a:latin typeface="Calibri" pitchFamily="34" charset="0"/>
-                <a:ea typeface="Calibri" pitchFamily="34" charset="-122"/>
-                <a:cs typeface="Calibri" pitchFamily="34" charset="-120"/>
-              </a:rPr>
-              <a:t>AIS/PIS calls, CBDC ops</a:t>
-            </a:r>
-            <a:endParaRPr lang="en-US" sz="900" dirty="0"/>
-          </a:p>
-        </p:txBody>
-      </p:sp>
-      <p:sp>
-        <p:nvSpPr>
-          <p:cNvPr id="30" name="Text 28"/>
-          <p:cNvSpPr/>
-          <p:nvPr/>
-        </p:nvSpPr>
-        <p:spPr>
-          <a:xfrm>
-            <a:off x="3840480" y="4709160"/>
-            <a:ext cx="4480560" cy="201168"/>
-          </a:xfrm>
-          <a:prstGeom prst="rect">
-            <a:avLst/>
-          </a:prstGeom>
-          <a:noFill/>
-          <a:ln/>
-        </p:spPr>
-        <p:txBody>
-          <a:bodyPr wrap="square" lIns="0" tIns="0" rIns="0" bIns="0" rtlCol="0" anchor="ctr"/>
-          <a:lstStyle/>
-          <a:p>
-            <a:pPr algn="ctr" indent="0" marL="0">
-              <a:buNone/>
-            </a:pPr>
-            <a:r>
-              <a:rPr lang="en-US" sz="900" i="1" dirty="0">
-                <a:solidFill>
-                  <a:srgbClr val="666666"/>
-                </a:solidFill>
-                <a:latin typeface="Calibri" pitchFamily="34" charset="0"/>
-                <a:ea typeface="Calibri" pitchFamily="34" charset="-122"/>
-                <a:cs typeface="Calibri" pitchFamily="34" charset="-120"/>
-              </a:rPr>
-              <a:t>KPIs, exec reports</a:t>
-            </a:r>
-            <a:endParaRPr lang="en-US" sz="900" dirty="0"/>
-          </a:p>
-        </p:txBody>
-      </p:sp>
+            <a:ext cx="12192000" cy="6858000"/>
+          </a:xfrm>
+          <a:prstGeom prst="rect">
+            <a:avLst/>
+          </a:prstGeom>
+        </p:spPr>
+      </p:pic>
     </p:spTree>
   </p:cSld>
   <p:clrMapOvr>
@@ -9740,7 +7427,7 @@
 </file>
 
 <file path=ppt/slides/slide13.xml><?xml version="1.0" encoding="utf-8"?>
-<p:sld xmlns:a="http://schemas.openxmlformats.org/drawingml/2006/main" xmlns:r="http://schemas.openxmlformats.org/officeDocument/2006/relationships" xmlns:p="http://schemas.openxmlformats.org/presentationml/2006/main">
+<p:sld xmlns:a="http://schemas.openxmlformats.org/drawingml/2006/main" xmlns:p="http://schemas.openxmlformats.org/presentationml/2006/main" xmlns:r="http://schemas.openxmlformats.org/officeDocument/2006/relationships">
   <p:cSld name="Slide 13">
     <p:bg>
       <p:bgPr>
@@ -9763,1561 +7450,28 @@
           <a:chExt cx="0" cy="0"/>
         </a:xfrm>
       </p:grpSpPr>
-      <p:sp>
-        <p:nvSpPr>
-          <p:cNvPr id="2" name="Shape 0"/>
-          <p:cNvSpPr/>
-          <p:nvPr/>
-        </p:nvSpPr>
+      <p:pic>
+        <p:nvPicPr>
+          <p:cNvPr id="2" name="section8-dfd-level-1.png"/>
+          <p:cNvPicPr/>
+          <p:nvPr/>
+        </p:nvPicPr>
+        <p:blipFill>
+          <a:blip r:embed="rId1"/>
+          <a:stretch>
+            <a:fillRect/>
+          </a:stretch>
+        </p:blipFill>
         <p:spPr>
           <a:xfrm>
             <a:off x="0" y="0"/>
-            <a:ext cx="82296" cy="6858000"/>
-          </a:xfrm>
-          <a:prstGeom prst="rect">
-            <a:avLst/>
-          </a:prstGeom>
-          <a:solidFill>
-            <a:srgbClr val="1E2761"/>
-          </a:solidFill>
-          <a:ln/>
-        </p:spPr>
-      </p:sp>
-      <p:sp>
-        <p:nvSpPr>
-          <p:cNvPr id="3" name="Shape 1"/>
-          <p:cNvSpPr/>
-          <p:nvPr/>
-        </p:nvSpPr>
-        <p:spPr>
-          <a:xfrm>
-            <a:off x="292608" y="182880"/>
-            <a:ext cx="310896" cy="310896"/>
-          </a:xfrm>
-          <a:prstGeom prst="roundRect">
-            <a:avLst>
-              <a:gd name="adj" fmla="val 28000"/>
-            </a:avLst>
-          </a:prstGeom>
-          <a:solidFill>
-            <a:srgbClr val="1E2761"/>
-          </a:solidFill>
-          <a:ln/>
-        </p:spPr>
-      </p:sp>
-      <p:sp>
-        <p:nvSpPr>
-          <p:cNvPr id="4" name="Text 2"/>
-          <p:cNvSpPr/>
-          <p:nvPr/>
-        </p:nvSpPr>
-        <p:spPr>
-          <a:xfrm>
-            <a:off x="292608" y="182880"/>
-            <a:ext cx="310896" cy="310896"/>
-          </a:xfrm>
-          <a:prstGeom prst="rect">
-            <a:avLst/>
-          </a:prstGeom>
-          <a:noFill/>
-          <a:ln/>
-        </p:spPr>
-        <p:txBody>
-          <a:bodyPr wrap="square" lIns="0" tIns="0" rIns="0" bIns="0" rtlCol="0" anchor="ctr"/>
-          <a:lstStyle/>
-          <a:p>
-            <a:pPr algn="ctr" indent="0" marL="0">
-              <a:buNone/>
-            </a:pPr>
-            <a:r>
-              <a:rPr lang="en-US" sz="1428" b="1" dirty="0">
-                <a:solidFill>
-                  <a:srgbClr val="FFFFFF"/>
-                </a:solidFill>
-                <a:latin typeface="Cambria" pitchFamily="34" charset="0"/>
-                <a:ea typeface="Cambria" pitchFamily="34" charset="-122"/>
-                <a:cs typeface="Cambria" pitchFamily="34" charset="-120"/>
-              </a:rPr>
-              <a:t>G</a:t>
-            </a:r>
-            <a:endParaRPr lang="en-US" sz="1428" dirty="0"/>
-          </a:p>
-        </p:txBody>
-      </p:sp>
-      <p:sp>
-        <p:nvSpPr>
-          <p:cNvPr id="5" name="Text 3"/>
-          <p:cNvSpPr/>
-          <p:nvPr/>
-        </p:nvSpPr>
-        <p:spPr>
-          <a:xfrm>
-            <a:off x="749808" y="164592"/>
-            <a:ext cx="9857232" cy="384048"/>
-          </a:xfrm>
-          <a:prstGeom prst="rect">
-            <a:avLst/>
-          </a:prstGeom>
-          <a:noFill/>
-          <a:ln/>
-        </p:spPr>
-        <p:txBody>
-          <a:bodyPr wrap="square" lIns="0" tIns="0" rIns="0" bIns="0" rtlCol="0" anchor="ctr"/>
-          <a:lstStyle/>
-          <a:p>
-            <a:pPr indent="0" marL="0">
-              <a:buNone/>
-            </a:pPr>
-            <a:r>
-              <a:rPr lang="en-US" sz="2000" b="1" dirty="0">
-                <a:solidFill>
-                  <a:srgbClr val="1E2761"/>
-                </a:solidFill>
-                <a:latin typeface="Cambria" pitchFamily="34" charset="0"/>
-                <a:ea typeface="Cambria" pitchFamily="34" charset="-122"/>
-                <a:cs typeface="Cambria" pitchFamily="34" charset="-120"/>
-              </a:rPr>
-              <a:t>Data Flow Diagram — Level 1</a:t>
-            </a:r>
-            <a:endParaRPr lang="en-US" sz="2000" dirty="0"/>
-          </a:p>
-        </p:txBody>
-      </p:sp>
-      <p:sp>
-        <p:nvSpPr>
-          <p:cNvPr id="6" name="Text 4"/>
-          <p:cNvSpPr/>
-          <p:nvPr/>
-        </p:nvSpPr>
-        <p:spPr>
-          <a:xfrm>
-            <a:off x="749808" y="548640"/>
-            <a:ext cx="10607040" cy="237744"/>
-          </a:xfrm>
-          <a:prstGeom prst="rect">
-            <a:avLst/>
-          </a:prstGeom>
-          <a:noFill/>
-          <a:ln/>
-        </p:spPr>
-        <p:txBody>
-          <a:bodyPr wrap="square" lIns="0" tIns="0" rIns="0" bIns="0" rtlCol="0" anchor="ctr"/>
-          <a:lstStyle/>
-          <a:p>
-            <a:pPr indent="0" marL="0">
-              <a:buNone/>
-            </a:pPr>
-            <a:r>
-              <a:rPr lang="en-US" sz="1050" dirty="0">
-                <a:solidFill>
-                  <a:srgbClr val="555555"/>
-                </a:solidFill>
-                <a:latin typeface="Calibri" pitchFamily="34" charset="0"/>
-                <a:ea typeface="Calibri" pitchFamily="34" charset="-122"/>
-                <a:cs typeface="Calibri" pitchFamily="34" charset="-120"/>
-              </a:rPr>
-              <a:t>The platform decomposed into its five core processes</a:t>
-            </a:r>
-            <a:endParaRPr lang="en-US" sz="1050" dirty="0"/>
-          </a:p>
-        </p:txBody>
-      </p:sp>
-      <p:sp>
-        <p:nvSpPr>
-          <p:cNvPr id="7" name="Shape 5"/>
-          <p:cNvSpPr/>
-          <p:nvPr/>
-        </p:nvSpPr>
-        <p:spPr>
-          <a:xfrm>
-            <a:off x="11475720" y="182880"/>
-            <a:ext cx="384048" cy="384048"/>
-          </a:xfrm>
-          <a:prstGeom prst="ellipse">
-            <a:avLst/>
-          </a:prstGeom>
-          <a:solidFill>
-            <a:srgbClr val="1E2761"/>
-          </a:solidFill>
-          <a:ln/>
-        </p:spPr>
-      </p:sp>
-      <p:sp>
-        <p:nvSpPr>
-          <p:cNvPr id="8" name="Text 6"/>
-          <p:cNvSpPr/>
-          <p:nvPr/>
-        </p:nvSpPr>
-        <p:spPr>
-          <a:xfrm>
-            <a:off x="11475720" y="182880"/>
-            <a:ext cx="384048" cy="384048"/>
-          </a:xfrm>
-          <a:prstGeom prst="rect">
-            <a:avLst/>
-          </a:prstGeom>
-          <a:noFill/>
-          <a:ln/>
-        </p:spPr>
-        <p:txBody>
-          <a:bodyPr wrap="square" lIns="0" tIns="0" rIns="0" bIns="0" rtlCol="0" anchor="ctr"/>
-          <a:lstStyle/>
-          <a:p>
-            <a:pPr algn="ctr" indent="0" marL="0">
-              <a:buNone/>
-            </a:pPr>
-            <a:r>
-              <a:rPr lang="en-US" sz="1400" b="1" dirty="0">
-                <a:solidFill>
-                  <a:srgbClr val="FFFFFF"/>
-                </a:solidFill>
-                <a:latin typeface="Calibri" pitchFamily="34" charset="0"/>
-                <a:ea typeface="Calibri" pitchFamily="34" charset="-122"/>
-                <a:cs typeface="Calibri" pitchFamily="34" charset="-120"/>
-              </a:rPr>
-              <a:t>12</a:t>
-            </a:r>
-            <a:endParaRPr lang="en-US" sz="1400" dirty="0"/>
-          </a:p>
-        </p:txBody>
-      </p:sp>
-      <p:sp>
-        <p:nvSpPr>
-          <p:cNvPr id="9" name="Shape 7"/>
-          <p:cNvSpPr/>
-          <p:nvPr/>
-        </p:nvSpPr>
-        <p:spPr>
-          <a:xfrm>
-            <a:off x="722376" y="1188720"/>
-            <a:ext cx="1965960" cy="868680"/>
-          </a:xfrm>
-          <a:prstGeom prst="ellipse">
-            <a:avLst/>
-          </a:prstGeom>
-          <a:solidFill>
-            <a:srgbClr val="E8DFF5"/>
-          </a:solidFill>
-          <a:ln w="19050">
-            <a:solidFill>
-              <a:srgbClr val="8E6FC4"/>
-            </a:solidFill>
-            <a:prstDash val="solid"/>
-          </a:ln>
-        </p:spPr>
-      </p:sp>
-      <p:sp>
-        <p:nvSpPr>
-          <p:cNvPr id="10" name="Text 8"/>
-          <p:cNvSpPr/>
-          <p:nvPr/>
-        </p:nvSpPr>
-        <p:spPr>
-          <a:xfrm>
-            <a:off x="722376" y="1188720"/>
-            <a:ext cx="1965960" cy="868680"/>
-          </a:xfrm>
-          <a:prstGeom prst="rect">
-            <a:avLst/>
-          </a:prstGeom>
-          <a:noFill/>
-          <a:ln/>
-        </p:spPr>
-        <p:txBody>
-          <a:bodyPr wrap="square" lIns="0" tIns="0" rIns="0" bIns="0" rtlCol="0" anchor="ctr"/>
-          <a:lstStyle/>
-          <a:p>
-            <a:pPr algn="ctr" indent="0" marL="0">
-              <a:buNone/>
-            </a:pPr>
-            <a:r>
-              <a:rPr lang="en-US" sz="1000" b="1" dirty="0">
-                <a:solidFill>
-                  <a:srgbClr val="4B2E83"/>
-                </a:solidFill>
-                <a:latin typeface="Calibri" pitchFamily="34" charset="0"/>
-                <a:ea typeface="Calibri" pitchFamily="34" charset="-122"/>
-                <a:cs typeface="Calibri" pitchFamily="34" charset="-120"/>
-              </a:rPr>
-              <a:t>1.0</a:t>
-            </a:r>
-            <a:endParaRPr lang="en-US" sz="1000" dirty="0"/>
-          </a:p>
-          <a:p>
-            <a:pPr algn="ctr" indent="0" marL="0">
-              <a:buNone/>
-            </a:pPr>
-            <a:r>
-              <a:rPr lang="en-US" sz="1000" b="1" dirty="0">
-                <a:solidFill>
-                  <a:srgbClr val="4B2E83"/>
-                </a:solidFill>
-                <a:latin typeface="Calibri" pitchFamily="34" charset="0"/>
-                <a:ea typeface="Calibri" pitchFamily="34" charset="-122"/>
-                <a:cs typeface="Calibri" pitchFamily="34" charset="-120"/>
-              </a:rPr>
-              <a:t>Wallets</a:t>
-            </a:r>
-            <a:endParaRPr lang="en-US" sz="1000" dirty="0"/>
-          </a:p>
-        </p:txBody>
-      </p:sp>
-      <p:sp>
-        <p:nvSpPr>
-          <p:cNvPr id="11" name="Shape 9"/>
-          <p:cNvSpPr/>
-          <p:nvPr/>
-        </p:nvSpPr>
-        <p:spPr>
-          <a:xfrm>
-            <a:off x="2916936" y="1188720"/>
-            <a:ext cx="1965960" cy="868680"/>
-          </a:xfrm>
-          <a:prstGeom prst="ellipse">
-            <a:avLst/>
-          </a:prstGeom>
-          <a:solidFill>
-            <a:srgbClr val="E8DFF5"/>
-          </a:solidFill>
-          <a:ln w="19050">
-            <a:solidFill>
-              <a:srgbClr val="8E6FC4"/>
-            </a:solidFill>
-            <a:prstDash val="solid"/>
-          </a:ln>
-        </p:spPr>
-      </p:sp>
-      <p:sp>
-        <p:nvSpPr>
-          <p:cNvPr id="12" name="Text 10"/>
-          <p:cNvSpPr/>
-          <p:nvPr/>
-        </p:nvSpPr>
-        <p:spPr>
-          <a:xfrm>
-            <a:off x="2916936" y="1188720"/>
-            <a:ext cx="1965960" cy="868680"/>
-          </a:xfrm>
-          <a:prstGeom prst="rect">
-            <a:avLst/>
-          </a:prstGeom>
-          <a:noFill/>
-          <a:ln/>
-        </p:spPr>
-        <p:txBody>
-          <a:bodyPr wrap="square" lIns="0" tIns="0" rIns="0" bIns="0" rtlCol="0" anchor="ctr"/>
-          <a:lstStyle/>
-          <a:p>
-            <a:pPr algn="ctr" indent="0" marL="0">
-              <a:buNone/>
-            </a:pPr>
-            <a:r>
-              <a:rPr lang="en-US" sz="1000" b="1" dirty="0">
-                <a:solidFill>
-                  <a:srgbClr val="4B2E83"/>
-                </a:solidFill>
-                <a:latin typeface="Calibri" pitchFamily="34" charset="0"/>
-                <a:ea typeface="Calibri" pitchFamily="34" charset="-122"/>
-                <a:cs typeface="Calibri" pitchFamily="34" charset="-120"/>
-              </a:rPr>
-              <a:t>2.0</a:t>
-            </a:r>
-            <a:endParaRPr lang="en-US" sz="1000" dirty="0"/>
-          </a:p>
-          <a:p>
-            <a:pPr algn="ctr" indent="0" marL="0">
-              <a:buNone/>
-            </a:pPr>
-            <a:r>
-              <a:rPr lang="en-US" sz="1000" b="1" dirty="0">
-                <a:solidFill>
-                  <a:srgbClr val="4B2E83"/>
-                </a:solidFill>
-                <a:latin typeface="Calibri" pitchFamily="34" charset="0"/>
-                <a:ea typeface="Calibri" pitchFamily="34" charset="-122"/>
-                <a:cs typeface="Calibri" pitchFamily="34" charset="-120"/>
-              </a:rPr>
-              <a:t>Payments</a:t>
-            </a:r>
-            <a:endParaRPr lang="en-US" sz="1000" dirty="0"/>
-          </a:p>
-        </p:txBody>
-      </p:sp>
-      <p:sp>
-        <p:nvSpPr>
-          <p:cNvPr id="13" name="Shape 11"/>
-          <p:cNvSpPr/>
-          <p:nvPr/>
-        </p:nvSpPr>
-        <p:spPr>
-          <a:xfrm>
-            <a:off x="5111496" y="1188720"/>
-            <a:ext cx="1965960" cy="868680"/>
-          </a:xfrm>
-          <a:prstGeom prst="ellipse">
-            <a:avLst/>
-          </a:prstGeom>
-          <a:solidFill>
-            <a:srgbClr val="E8DFF5"/>
-          </a:solidFill>
-          <a:ln w="19050">
-            <a:solidFill>
-              <a:srgbClr val="8E6FC4"/>
-            </a:solidFill>
-            <a:prstDash val="solid"/>
-          </a:ln>
-        </p:spPr>
-      </p:sp>
-      <p:sp>
-        <p:nvSpPr>
-          <p:cNvPr id="14" name="Text 12"/>
-          <p:cNvSpPr/>
-          <p:nvPr/>
-        </p:nvSpPr>
-        <p:spPr>
-          <a:xfrm>
-            <a:off x="5111496" y="1188720"/>
-            <a:ext cx="1965960" cy="868680"/>
-          </a:xfrm>
-          <a:prstGeom prst="rect">
-            <a:avLst/>
-          </a:prstGeom>
-          <a:noFill/>
-          <a:ln/>
-        </p:spPr>
-        <p:txBody>
-          <a:bodyPr wrap="square" lIns="0" tIns="0" rIns="0" bIns="0" rtlCol="0" anchor="ctr"/>
-          <a:lstStyle/>
-          <a:p>
-            <a:pPr algn="ctr" indent="0" marL="0">
-              <a:buNone/>
-            </a:pPr>
-            <a:r>
-              <a:rPr lang="en-US" sz="1000" b="1" dirty="0">
-                <a:solidFill>
-                  <a:srgbClr val="4B2E83"/>
-                </a:solidFill>
-                <a:latin typeface="Calibri" pitchFamily="34" charset="0"/>
-                <a:ea typeface="Calibri" pitchFamily="34" charset="-122"/>
-                <a:cs typeface="Calibri" pitchFamily="34" charset="-120"/>
-              </a:rPr>
-              <a:t>3.0</a:t>
-            </a:r>
-            <a:endParaRPr lang="en-US" sz="1000" dirty="0"/>
-          </a:p>
-          <a:p>
-            <a:pPr algn="ctr" indent="0" marL="0">
-              <a:buNone/>
-            </a:pPr>
-            <a:r>
-              <a:rPr lang="en-US" sz="1000" b="1" dirty="0">
-                <a:solidFill>
-                  <a:srgbClr val="4B2E83"/>
-                </a:solidFill>
-                <a:latin typeface="Calibri" pitchFamily="34" charset="0"/>
-                <a:ea typeface="Calibri" pitchFamily="34" charset="-122"/>
-                <a:cs typeface="Calibri" pitchFamily="34" charset="-120"/>
-              </a:rPr>
-              <a:t>Fraud</a:t>
-            </a:r>
-            <a:endParaRPr lang="en-US" sz="1000" dirty="0"/>
-          </a:p>
-        </p:txBody>
-      </p:sp>
-      <p:sp>
-        <p:nvSpPr>
-          <p:cNvPr id="15" name="Shape 13"/>
-          <p:cNvSpPr/>
-          <p:nvPr/>
-        </p:nvSpPr>
-        <p:spPr>
-          <a:xfrm>
-            <a:off x="7306056" y="1188720"/>
-            <a:ext cx="1965960" cy="868680"/>
-          </a:xfrm>
-          <a:prstGeom prst="ellipse">
-            <a:avLst/>
-          </a:prstGeom>
-          <a:solidFill>
-            <a:srgbClr val="E8DFF5"/>
-          </a:solidFill>
-          <a:ln w="19050">
-            <a:solidFill>
-              <a:srgbClr val="8E6FC4"/>
-            </a:solidFill>
-            <a:prstDash val="solid"/>
-          </a:ln>
-        </p:spPr>
-      </p:sp>
-      <p:sp>
-        <p:nvSpPr>
-          <p:cNvPr id="16" name="Text 14"/>
-          <p:cNvSpPr/>
-          <p:nvPr/>
-        </p:nvSpPr>
-        <p:spPr>
-          <a:xfrm>
-            <a:off x="7306056" y="1188720"/>
-            <a:ext cx="1965960" cy="868680"/>
-          </a:xfrm>
-          <a:prstGeom prst="rect">
-            <a:avLst/>
-          </a:prstGeom>
-          <a:noFill/>
-          <a:ln/>
-        </p:spPr>
-        <p:txBody>
-          <a:bodyPr wrap="square" lIns="0" tIns="0" rIns="0" bIns="0" rtlCol="0" anchor="ctr"/>
-          <a:lstStyle/>
-          <a:p>
-            <a:pPr algn="ctr" indent="0" marL="0">
-              <a:buNone/>
-            </a:pPr>
-            <a:r>
-              <a:rPr lang="en-US" sz="1000" b="1" dirty="0">
-                <a:solidFill>
-                  <a:srgbClr val="4B2E83"/>
-                </a:solidFill>
-                <a:latin typeface="Calibri" pitchFamily="34" charset="0"/>
-                <a:ea typeface="Calibri" pitchFamily="34" charset="-122"/>
-                <a:cs typeface="Calibri" pitchFamily="34" charset="-120"/>
-              </a:rPr>
-              <a:t>4.0</a:t>
-            </a:r>
-            <a:endParaRPr lang="en-US" sz="1000" dirty="0"/>
-          </a:p>
-          <a:p>
-            <a:pPr algn="ctr" indent="0" marL="0">
-              <a:buNone/>
-            </a:pPr>
-            <a:r>
-              <a:rPr lang="en-US" sz="1000" b="1" dirty="0">
-                <a:solidFill>
-                  <a:srgbClr val="4B2E83"/>
-                </a:solidFill>
-                <a:latin typeface="Calibri" pitchFamily="34" charset="0"/>
-                <a:ea typeface="Calibri" pitchFamily="34" charset="-122"/>
-                <a:cs typeface="Calibri" pitchFamily="34" charset="-120"/>
-              </a:rPr>
-              <a:t>Open Bank</a:t>
-            </a:r>
-            <a:endParaRPr lang="en-US" sz="1000" dirty="0"/>
-          </a:p>
-          <a:p>
-            <a:pPr algn="ctr" indent="0" marL="0">
-              <a:buNone/>
-            </a:pPr>
-            <a:r>
-              <a:rPr lang="en-US" sz="1000" b="1" dirty="0">
-                <a:solidFill>
-                  <a:srgbClr val="4B2E83"/>
-                </a:solidFill>
-                <a:latin typeface="Calibri" pitchFamily="34" charset="0"/>
-                <a:ea typeface="Calibri" pitchFamily="34" charset="-122"/>
-                <a:cs typeface="Calibri" pitchFamily="34" charset="-120"/>
-              </a:rPr>
-              <a:t>/ CBDC</a:t>
-            </a:r>
-            <a:endParaRPr lang="en-US" sz="1000" dirty="0"/>
-          </a:p>
-        </p:txBody>
-      </p:sp>
-      <p:sp>
-        <p:nvSpPr>
-          <p:cNvPr id="17" name="Shape 15"/>
-          <p:cNvSpPr/>
-          <p:nvPr/>
-        </p:nvSpPr>
-        <p:spPr>
-          <a:xfrm>
-            <a:off x="9500616" y="1188720"/>
-            <a:ext cx="1965960" cy="868680"/>
-          </a:xfrm>
-          <a:prstGeom prst="ellipse">
-            <a:avLst/>
-          </a:prstGeom>
-          <a:solidFill>
-            <a:srgbClr val="E8DFF5"/>
-          </a:solidFill>
-          <a:ln w="19050">
-            <a:solidFill>
-              <a:srgbClr val="8E6FC4"/>
-            </a:solidFill>
-            <a:prstDash val="solid"/>
-          </a:ln>
-        </p:spPr>
-      </p:sp>
-      <p:sp>
-        <p:nvSpPr>
-          <p:cNvPr id="18" name="Text 16"/>
-          <p:cNvSpPr/>
-          <p:nvPr/>
-        </p:nvSpPr>
-        <p:spPr>
-          <a:xfrm>
-            <a:off x="9500616" y="1188720"/>
-            <a:ext cx="1965960" cy="868680"/>
-          </a:xfrm>
-          <a:prstGeom prst="rect">
-            <a:avLst/>
-          </a:prstGeom>
-          <a:noFill/>
-          <a:ln/>
-        </p:spPr>
-        <p:txBody>
-          <a:bodyPr wrap="square" lIns="0" tIns="0" rIns="0" bIns="0" rtlCol="0" anchor="ctr"/>
-          <a:lstStyle/>
-          <a:p>
-            <a:pPr algn="ctr" indent="0" marL="0">
-              <a:buNone/>
-            </a:pPr>
-            <a:r>
-              <a:rPr lang="en-US" sz="1000" b="1" dirty="0">
-                <a:solidFill>
-                  <a:srgbClr val="4B2E83"/>
-                </a:solidFill>
-                <a:latin typeface="Calibri" pitchFamily="34" charset="0"/>
-                <a:ea typeface="Calibri" pitchFamily="34" charset="-122"/>
-                <a:cs typeface="Calibri" pitchFamily="34" charset="-120"/>
-              </a:rPr>
-              <a:t>5.0</a:t>
-            </a:r>
-            <a:endParaRPr lang="en-US" sz="1000" dirty="0"/>
-          </a:p>
-          <a:p>
-            <a:pPr algn="ctr" indent="0" marL="0">
-              <a:buNone/>
-            </a:pPr>
-            <a:r>
-              <a:rPr lang="en-US" sz="1000" b="1" dirty="0">
-                <a:solidFill>
-                  <a:srgbClr val="4B2E83"/>
-                </a:solidFill>
-                <a:latin typeface="Calibri" pitchFamily="34" charset="0"/>
-                <a:ea typeface="Calibri" pitchFamily="34" charset="-122"/>
-                <a:cs typeface="Calibri" pitchFamily="34" charset="-120"/>
-              </a:rPr>
-              <a:t>Reporting</a:t>
-            </a:r>
-            <a:endParaRPr lang="en-US" sz="1000" dirty="0"/>
-          </a:p>
-        </p:txBody>
-      </p:sp>
-      <p:sp>
-        <p:nvSpPr>
-          <p:cNvPr id="19" name="Shape 17"/>
-          <p:cNvSpPr/>
-          <p:nvPr/>
-        </p:nvSpPr>
-        <p:spPr>
-          <a:xfrm>
-            <a:off x="722376" y="2468880"/>
-            <a:ext cx="1965960" cy="566928"/>
-          </a:xfrm>
-          <a:prstGeom prst="rect">
-            <a:avLst/>
-          </a:prstGeom>
-          <a:solidFill>
-            <a:srgbClr val="FBDCD5"/>
-          </a:solidFill>
-          <a:ln w="12700">
-            <a:solidFill>
-              <a:srgbClr val="E07856"/>
-            </a:solidFill>
-            <a:prstDash val="solid"/>
-          </a:ln>
-        </p:spPr>
-      </p:sp>
-      <p:sp>
-        <p:nvSpPr>
-          <p:cNvPr id="20" name="Text 18"/>
-          <p:cNvSpPr/>
-          <p:nvPr/>
-        </p:nvSpPr>
-        <p:spPr>
-          <a:xfrm>
-            <a:off x="722376" y="2468880"/>
-            <a:ext cx="1965960" cy="566928"/>
-          </a:xfrm>
-          <a:prstGeom prst="rect">
-            <a:avLst/>
-          </a:prstGeom>
-          <a:noFill/>
-          <a:ln/>
-        </p:spPr>
-        <p:txBody>
-          <a:bodyPr wrap="square" lIns="0" tIns="0" rIns="0" bIns="0" rtlCol="0" anchor="ctr"/>
-          <a:lstStyle/>
-          <a:p>
-            <a:pPr algn="ctr" indent="0" marL="0">
-              <a:buNone/>
-            </a:pPr>
-            <a:r>
-              <a:rPr lang="en-US" sz="850" dirty="0">
-                <a:solidFill>
-                  <a:srgbClr val="8A3A1E"/>
-                </a:solidFill>
-                <a:latin typeface="Calibri" pitchFamily="34" charset="0"/>
-                <a:ea typeface="Calibri" pitchFamily="34" charset="-122"/>
-                <a:cs typeface="Calibri" pitchFamily="34" charset="-120"/>
-              </a:rPr>
-              <a:t>D1 customers/</a:t>
-            </a:r>
-            <a:endParaRPr lang="en-US" sz="850" dirty="0"/>
-          </a:p>
-          <a:p>
-            <a:pPr algn="ctr" indent="0" marL="0">
-              <a:buNone/>
-            </a:pPr>
-            <a:r>
-              <a:rPr lang="en-US" sz="850" dirty="0">
-                <a:solidFill>
-                  <a:srgbClr val="8A3A1E"/>
-                </a:solidFill>
-                <a:latin typeface="Calibri" pitchFamily="34" charset="0"/>
-                <a:ea typeface="Calibri" pitchFamily="34" charset="-122"/>
-                <a:cs typeface="Calibri" pitchFamily="34" charset="-120"/>
-              </a:rPr>
-              <a:t>wallets</a:t>
-            </a:r>
-            <a:endParaRPr lang="en-US" sz="850" dirty="0"/>
-          </a:p>
-        </p:txBody>
-      </p:sp>
-      <p:sp>
-        <p:nvSpPr>
-          <p:cNvPr id="21" name="Shape 19"/>
-          <p:cNvSpPr/>
-          <p:nvPr/>
-        </p:nvSpPr>
-        <p:spPr>
-          <a:xfrm>
-            <a:off x="1705356" y="2057400"/>
-            <a:ext cx="9144" cy="411480"/>
-          </a:xfrm>
-          <a:prstGeom prst="line">
-            <a:avLst/>
-          </a:prstGeom>
-          <a:noFill/>
-          <a:ln w="17780">
-            <a:solidFill>
-              <a:srgbClr val="888888"/>
-            </a:solidFill>
-            <a:prstDash val="solid"/>
-            <a:headEnd type="none"/>
-            <a:tailEnd type="triangle"/>
-          </a:ln>
-        </p:spPr>
-      </p:sp>
-      <p:sp>
-        <p:nvSpPr>
-          <p:cNvPr id="22" name="Shape 20"/>
-          <p:cNvSpPr/>
-          <p:nvPr/>
-        </p:nvSpPr>
-        <p:spPr>
-          <a:xfrm>
-            <a:off x="2916936" y="2468880"/>
-            <a:ext cx="1965960" cy="566928"/>
-          </a:xfrm>
-          <a:prstGeom prst="rect">
-            <a:avLst/>
-          </a:prstGeom>
-          <a:solidFill>
-            <a:srgbClr val="FBDCD5"/>
-          </a:solidFill>
-          <a:ln w="12700">
-            <a:solidFill>
-              <a:srgbClr val="E07856"/>
-            </a:solidFill>
-            <a:prstDash val="solid"/>
-          </a:ln>
-        </p:spPr>
-      </p:sp>
-      <p:sp>
-        <p:nvSpPr>
-          <p:cNvPr id="23" name="Text 21"/>
-          <p:cNvSpPr/>
-          <p:nvPr/>
-        </p:nvSpPr>
-        <p:spPr>
-          <a:xfrm>
-            <a:off x="2916936" y="2468880"/>
-            <a:ext cx="1965960" cy="566928"/>
-          </a:xfrm>
-          <a:prstGeom prst="rect">
-            <a:avLst/>
-          </a:prstGeom>
-          <a:noFill/>
-          <a:ln/>
-        </p:spPr>
-        <p:txBody>
-          <a:bodyPr wrap="square" lIns="0" tIns="0" rIns="0" bIns="0" rtlCol="0" anchor="ctr"/>
-          <a:lstStyle/>
-          <a:p>
-            <a:pPr algn="ctr" indent="0" marL="0">
-              <a:buNone/>
-            </a:pPr>
-            <a:r>
-              <a:rPr lang="en-US" sz="850" dirty="0">
-                <a:solidFill>
-                  <a:srgbClr val="8A3A1E"/>
-                </a:solidFill>
-                <a:latin typeface="Calibri" pitchFamily="34" charset="0"/>
-                <a:ea typeface="Calibri" pitchFamily="34" charset="-122"/>
-                <a:cs typeface="Calibri" pitchFamily="34" charset="-120"/>
-              </a:rPr>
-              <a:t>D2 transactions/</a:t>
-            </a:r>
-            <a:endParaRPr lang="en-US" sz="850" dirty="0"/>
-          </a:p>
-          <a:p>
-            <a:pPr algn="ctr" indent="0" marL="0">
-              <a:buNone/>
-            </a:pPr>
-            <a:r>
-              <a:rPr lang="en-US" sz="850" dirty="0">
-                <a:solidFill>
-                  <a:srgbClr val="8A3A1E"/>
-                </a:solidFill>
-                <a:latin typeface="Calibri" pitchFamily="34" charset="0"/>
-                <a:ea typeface="Calibri" pitchFamily="34" charset="-122"/>
-                <a:cs typeface="Calibri" pitchFamily="34" charset="-120"/>
-              </a:rPr>
-              <a:t>ledger</a:t>
-            </a:r>
-            <a:endParaRPr lang="en-US" sz="850" dirty="0"/>
-          </a:p>
-        </p:txBody>
-      </p:sp>
-      <p:sp>
-        <p:nvSpPr>
-          <p:cNvPr id="24" name="Shape 22"/>
-          <p:cNvSpPr/>
-          <p:nvPr/>
-        </p:nvSpPr>
-        <p:spPr>
-          <a:xfrm>
-            <a:off x="3899916" y="2057400"/>
-            <a:ext cx="9144" cy="411480"/>
-          </a:xfrm>
-          <a:prstGeom prst="line">
-            <a:avLst/>
-          </a:prstGeom>
-          <a:noFill/>
-          <a:ln w="17780">
-            <a:solidFill>
-              <a:srgbClr val="888888"/>
-            </a:solidFill>
-            <a:prstDash val="solid"/>
-            <a:headEnd type="none"/>
-            <a:tailEnd type="triangle"/>
-          </a:ln>
-        </p:spPr>
-      </p:sp>
-      <p:sp>
-        <p:nvSpPr>
-          <p:cNvPr id="25" name="Shape 23"/>
-          <p:cNvSpPr/>
-          <p:nvPr/>
-        </p:nvSpPr>
-        <p:spPr>
-          <a:xfrm>
-            <a:off x="5111496" y="2468880"/>
-            <a:ext cx="1965960" cy="566928"/>
-          </a:xfrm>
-          <a:prstGeom prst="rect">
-            <a:avLst/>
-          </a:prstGeom>
-          <a:solidFill>
-            <a:srgbClr val="FBDCD5"/>
-          </a:solidFill>
-          <a:ln w="12700">
-            <a:solidFill>
-              <a:srgbClr val="E07856"/>
-            </a:solidFill>
-            <a:prstDash val="solid"/>
-          </a:ln>
-        </p:spPr>
-      </p:sp>
-      <p:sp>
-        <p:nvSpPr>
-          <p:cNvPr id="26" name="Text 24"/>
-          <p:cNvSpPr/>
-          <p:nvPr/>
-        </p:nvSpPr>
-        <p:spPr>
-          <a:xfrm>
-            <a:off x="5111496" y="2468880"/>
-            <a:ext cx="1965960" cy="566928"/>
-          </a:xfrm>
-          <a:prstGeom prst="rect">
-            <a:avLst/>
-          </a:prstGeom>
-          <a:noFill/>
-          <a:ln/>
-        </p:spPr>
-        <p:txBody>
-          <a:bodyPr wrap="square" lIns="0" tIns="0" rIns="0" bIns="0" rtlCol="0" anchor="ctr"/>
-          <a:lstStyle/>
-          <a:p>
-            <a:pPr algn="ctr" indent="0" marL="0">
-              <a:buNone/>
-            </a:pPr>
-            <a:r>
-              <a:rPr lang="en-US" sz="850" dirty="0">
-                <a:solidFill>
-                  <a:srgbClr val="8A3A1E"/>
-                </a:solidFill>
-                <a:latin typeface="Calibri" pitchFamily="34" charset="0"/>
-                <a:ea typeface="Calibri" pitchFamily="34" charset="-122"/>
-                <a:cs typeface="Calibri" pitchFamily="34" charset="-120"/>
-              </a:rPr>
-              <a:t>D3 alerts/</a:t>
-            </a:r>
-            <a:endParaRPr lang="en-US" sz="850" dirty="0"/>
-          </a:p>
-          <a:p>
-            <a:pPr algn="ctr" indent="0" marL="0">
-              <a:buNone/>
-            </a:pPr>
-            <a:r>
-              <a:rPr lang="en-US" sz="850" dirty="0">
-                <a:solidFill>
-                  <a:srgbClr val="8A3A1E"/>
-                </a:solidFill>
-                <a:latin typeface="Calibri" pitchFamily="34" charset="0"/>
-                <a:ea typeface="Calibri" pitchFamily="34" charset="-122"/>
-                <a:cs typeface="Calibri" pitchFamily="34" charset="-120"/>
-              </a:rPr>
-              <a:t>cases</a:t>
-            </a:r>
-            <a:endParaRPr lang="en-US" sz="850" dirty="0"/>
-          </a:p>
-        </p:txBody>
-      </p:sp>
-      <p:sp>
-        <p:nvSpPr>
-          <p:cNvPr id="27" name="Shape 25"/>
-          <p:cNvSpPr/>
-          <p:nvPr/>
-        </p:nvSpPr>
-        <p:spPr>
-          <a:xfrm>
-            <a:off x="6094476" y="2057400"/>
-            <a:ext cx="9144" cy="411480"/>
-          </a:xfrm>
-          <a:prstGeom prst="line">
-            <a:avLst/>
-          </a:prstGeom>
-          <a:noFill/>
-          <a:ln w="17780">
-            <a:solidFill>
-              <a:srgbClr val="888888"/>
-            </a:solidFill>
-            <a:prstDash val="solid"/>
-            <a:headEnd type="none"/>
-            <a:tailEnd type="triangle"/>
-          </a:ln>
-        </p:spPr>
-      </p:sp>
-      <p:sp>
-        <p:nvSpPr>
-          <p:cNvPr id="28" name="Shape 26"/>
-          <p:cNvSpPr/>
-          <p:nvPr/>
-        </p:nvSpPr>
-        <p:spPr>
-          <a:xfrm>
-            <a:off x="7306056" y="2468880"/>
-            <a:ext cx="1965960" cy="566928"/>
-          </a:xfrm>
-          <a:prstGeom prst="rect">
-            <a:avLst/>
-          </a:prstGeom>
-          <a:solidFill>
-            <a:srgbClr val="FBDCD5"/>
-          </a:solidFill>
-          <a:ln w="12700">
-            <a:solidFill>
-              <a:srgbClr val="E07856"/>
-            </a:solidFill>
-            <a:prstDash val="solid"/>
-          </a:ln>
-        </p:spPr>
-      </p:sp>
-      <p:sp>
-        <p:nvSpPr>
-          <p:cNvPr id="29" name="Text 27"/>
-          <p:cNvSpPr/>
-          <p:nvPr/>
-        </p:nvSpPr>
-        <p:spPr>
-          <a:xfrm>
-            <a:off x="7306056" y="2468880"/>
-            <a:ext cx="1965960" cy="566928"/>
-          </a:xfrm>
-          <a:prstGeom prst="rect">
-            <a:avLst/>
-          </a:prstGeom>
-          <a:noFill/>
-          <a:ln/>
-        </p:spPr>
-        <p:txBody>
-          <a:bodyPr wrap="square" lIns="0" tIns="0" rIns="0" bIns="0" rtlCol="0" anchor="ctr"/>
-          <a:lstStyle/>
-          <a:p>
-            <a:pPr algn="ctr" indent="0" marL="0">
-              <a:buNone/>
-            </a:pPr>
-            <a:r>
-              <a:rPr lang="en-US" sz="850" dirty="0">
-                <a:solidFill>
-                  <a:srgbClr val="8A3A1E"/>
-                </a:solidFill>
-                <a:latin typeface="Calibri" pitchFamily="34" charset="0"/>
-                <a:ea typeface="Calibri" pitchFamily="34" charset="-122"/>
-                <a:cs typeface="Calibri" pitchFamily="34" charset="-120"/>
-              </a:rPr>
-              <a:t>D4 api_calls/</a:t>
-            </a:r>
-            <a:endParaRPr lang="en-US" sz="850" dirty="0"/>
-          </a:p>
-          <a:p>
-            <a:pPr algn="ctr" indent="0" marL="0">
-              <a:buNone/>
-            </a:pPr>
-            <a:r>
-              <a:rPr lang="en-US" sz="850" dirty="0">
-                <a:solidFill>
-                  <a:srgbClr val="8A3A1E"/>
-                </a:solidFill>
-                <a:latin typeface="Calibri" pitchFamily="34" charset="0"/>
-                <a:ea typeface="Calibri" pitchFamily="34" charset="-122"/>
-                <a:cs typeface="Calibri" pitchFamily="34" charset="-120"/>
-              </a:rPr>
-              <a:t>cbdc_ops</a:t>
-            </a:r>
-            <a:endParaRPr lang="en-US" sz="850" dirty="0"/>
-          </a:p>
-        </p:txBody>
-      </p:sp>
-      <p:sp>
-        <p:nvSpPr>
-          <p:cNvPr id="30" name="Shape 28"/>
-          <p:cNvSpPr/>
-          <p:nvPr/>
-        </p:nvSpPr>
-        <p:spPr>
-          <a:xfrm>
-            <a:off x="8289036" y="2057400"/>
-            <a:ext cx="9144" cy="411480"/>
-          </a:xfrm>
-          <a:prstGeom prst="line">
-            <a:avLst/>
-          </a:prstGeom>
-          <a:noFill/>
-          <a:ln w="17780">
-            <a:solidFill>
-              <a:srgbClr val="888888"/>
-            </a:solidFill>
-            <a:prstDash val="solid"/>
-            <a:headEnd type="none"/>
-            <a:tailEnd type="triangle"/>
-          </a:ln>
-        </p:spPr>
-      </p:sp>
-      <p:sp>
-        <p:nvSpPr>
-          <p:cNvPr id="31" name="Shape 29"/>
-          <p:cNvSpPr/>
-          <p:nvPr/>
-        </p:nvSpPr>
-        <p:spPr>
-          <a:xfrm>
-            <a:off x="9500616" y="2468880"/>
-            <a:ext cx="1965960" cy="566928"/>
-          </a:xfrm>
-          <a:prstGeom prst="rect">
-            <a:avLst/>
-          </a:prstGeom>
-          <a:solidFill>
-            <a:srgbClr val="FBDCD5"/>
-          </a:solidFill>
-          <a:ln w="12700">
-            <a:solidFill>
-              <a:srgbClr val="E07856"/>
-            </a:solidFill>
-            <a:prstDash val="solid"/>
-          </a:ln>
-        </p:spPr>
-      </p:sp>
-      <p:sp>
-        <p:nvSpPr>
-          <p:cNvPr id="32" name="Text 30"/>
-          <p:cNvSpPr/>
-          <p:nvPr/>
-        </p:nvSpPr>
-        <p:spPr>
-          <a:xfrm>
-            <a:off x="9500616" y="2468880"/>
-            <a:ext cx="1965960" cy="566928"/>
-          </a:xfrm>
-          <a:prstGeom prst="rect">
-            <a:avLst/>
-          </a:prstGeom>
-          <a:noFill/>
-          <a:ln/>
-        </p:spPr>
-        <p:txBody>
-          <a:bodyPr wrap="square" lIns="0" tIns="0" rIns="0" bIns="0" rtlCol="0" anchor="ctr"/>
-          <a:lstStyle/>
-          <a:p>
-            <a:pPr algn="ctr" indent="0" marL="0">
-              <a:buNone/>
-            </a:pPr>
-            <a:r>
-              <a:rPr lang="en-US" sz="850" dirty="0">
-                <a:solidFill>
-                  <a:srgbClr val="8A3A1E"/>
-                </a:solidFill>
-                <a:latin typeface="Calibri" pitchFamily="34" charset="0"/>
-                <a:ea typeface="Calibri" pitchFamily="34" charset="-122"/>
-                <a:cs typeface="Calibri" pitchFamily="34" charset="-120"/>
-              </a:rPr>
-              <a:t>D5 live KPI/</a:t>
-            </a:r>
-            <a:endParaRPr lang="en-US" sz="850" dirty="0"/>
-          </a:p>
-          <a:p>
-            <a:pPr algn="ctr" indent="0" marL="0">
-              <a:buNone/>
-            </a:pPr>
-            <a:r>
-              <a:rPr lang="en-US" sz="850" dirty="0">
-                <a:solidFill>
-                  <a:srgbClr val="8A3A1E"/>
-                </a:solidFill>
-                <a:latin typeface="Calibri" pitchFamily="34" charset="0"/>
-                <a:ea typeface="Calibri" pitchFamily="34" charset="-122"/>
-                <a:cs typeface="Calibri" pitchFamily="34" charset="-120"/>
-              </a:rPr>
-              <a:t>exports</a:t>
-            </a:r>
-            <a:endParaRPr lang="en-US" sz="850" dirty="0"/>
-          </a:p>
-        </p:txBody>
-      </p:sp>
-      <p:sp>
-        <p:nvSpPr>
-          <p:cNvPr id="33" name="Shape 31"/>
-          <p:cNvSpPr/>
-          <p:nvPr/>
-        </p:nvSpPr>
-        <p:spPr>
-          <a:xfrm>
-            <a:off x="10483596" y="2057400"/>
-            <a:ext cx="9144" cy="411480"/>
-          </a:xfrm>
-          <a:prstGeom prst="line">
-            <a:avLst/>
-          </a:prstGeom>
-          <a:noFill/>
-          <a:ln w="17780">
-            <a:solidFill>
-              <a:srgbClr val="888888"/>
-            </a:solidFill>
-            <a:prstDash val="solid"/>
-            <a:headEnd type="none"/>
-            <a:tailEnd type="triangle"/>
-          </a:ln>
-        </p:spPr>
-      </p:sp>
-      <p:sp>
-        <p:nvSpPr>
-          <p:cNvPr id="34" name="Shape 32"/>
-          <p:cNvSpPr/>
-          <p:nvPr/>
-        </p:nvSpPr>
-        <p:spPr>
-          <a:xfrm>
-            <a:off x="274320" y="4206240"/>
-            <a:ext cx="1828800" cy="402336"/>
-          </a:xfrm>
-          <a:prstGeom prst="roundRect">
-            <a:avLst>
-              <a:gd name="adj" fmla="val 13636"/>
-            </a:avLst>
-          </a:prstGeom>
-          <a:solidFill>
-            <a:srgbClr val="F2F2F2"/>
-          </a:solidFill>
-          <a:ln w="12700">
-            <a:solidFill>
-              <a:srgbClr val="B7B7B7"/>
-            </a:solidFill>
-            <a:prstDash val="solid"/>
-          </a:ln>
-        </p:spPr>
-      </p:sp>
-      <p:sp>
-        <p:nvSpPr>
-          <p:cNvPr id="35" name="Text 33"/>
-          <p:cNvSpPr/>
-          <p:nvPr/>
-        </p:nvSpPr>
-        <p:spPr>
-          <a:xfrm>
-            <a:off x="329184" y="4206240"/>
-            <a:ext cx="1719072" cy="402336"/>
-          </a:xfrm>
-          <a:prstGeom prst="rect">
-            <a:avLst/>
-          </a:prstGeom>
-          <a:noFill/>
-          <a:ln/>
-        </p:spPr>
-        <p:txBody>
-          <a:bodyPr wrap="square" lIns="0" tIns="0" rIns="0" bIns="0" rtlCol="0" anchor="ctr"/>
-          <a:lstStyle/>
-          <a:p>
-            <a:pPr algn="ctr" indent="0" marL="0">
-              <a:buNone/>
-            </a:pPr>
-            <a:r>
-              <a:rPr lang="en-US" sz="900" b="1" dirty="0">
-                <a:solidFill>
-                  <a:srgbClr val="333333"/>
-                </a:solidFill>
-                <a:latin typeface="Calibri" pitchFamily="34" charset="0"/>
-                <a:ea typeface="Calibri" pitchFamily="34" charset="-122"/>
-                <a:cs typeface="Calibri" pitchFamily="34" charset="-120"/>
-              </a:rPr>
-              <a:t>Customer / Merchant</a:t>
-            </a:r>
-            <a:endParaRPr lang="en-US" sz="900" dirty="0"/>
-          </a:p>
-        </p:txBody>
-      </p:sp>
-      <p:sp>
-        <p:nvSpPr>
-          <p:cNvPr id="36" name="Shape 34"/>
-          <p:cNvSpPr/>
-          <p:nvPr/>
-        </p:nvSpPr>
-        <p:spPr>
-          <a:xfrm flipH="1" flipV="1">
-            <a:off x="1179576" y="2057400"/>
-            <a:ext cx="9144" cy="2148840"/>
-          </a:xfrm>
-          <a:prstGeom prst="line">
-            <a:avLst/>
-          </a:prstGeom>
-          <a:noFill/>
-          <a:ln w="17780">
-            <a:solidFill>
-              <a:srgbClr val="888888"/>
-            </a:solidFill>
-            <a:prstDash val="solid"/>
-            <a:headEnd type="none"/>
-            <a:tailEnd type="triangle"/>
-          </a:ln>
-        </p:spPr>
-      </p:sp>
-      <p:sp>
-        <p:nvSpPr>
-          <p:cNvPr id="37" name="Shape 35"/>
-          <p:cNvSpPr/>
-          <p:nvPr/>
-        </p:nvSpPr>
-        <p:spPr>
-          <a:xfrm>
-            <a:off x="10058400" y="4206240"/>
-            <a:ext cx="1828800" cy="402336"/>
-          </a:xfrm>
-          <a:prstGeom prst="roundRect">
-            <a:avLst>
-              <a:gd name="adj" fmla="val 13636"/>
-            </a:avLst>
-          </a:prstGeom>
-          <a:solidFill>
-            <a:srgbClr val="F2F2F2"/>
-          </a:solidFill>
-          <a:ln w="12700">
-            <a:solidFill>
-              <a:srgbClr val="B7B7B7"/>
-            </a:solidFill>
-            <a:prstDash val="solid"/>
-          </a:ln>
-        </p:spPr>
-      </p:sp>
-      <p:sp>
-        <p:nvSpPr>
-          <p:cNvPr id="38" name="Text 36"/>
-          <p:cNvSpPr/>
-          <p:nvPr/>
-        </p:nvSpPr>
-        <p:spPr>
-          <a:xfrm>
-            <a:off x="10113264" y="4206240"/>
-            <a:ext cx="1719072" cy="402336"/>
-          </a:xfrm>
-          <a:prstGeom prst="rect">
-            <a:avLst/>
-          </a:prstGeom>
-          <a:noFill/>
-          <a:ln/>
-        </p:spPr>
-        <p:txBody>
-          <a:bodyPr wrap="square" lIns="0" tIns="0" rIns="0" bIns="0" rtlCol="0" anchor="ctr"/>
-          <a:lstStyle/>
-          <a:p>
-            <a:pPr algn="ctr" indent="0" marL="0">
-              <a:buNone/>
-            </a:pPr>
-            <a:r>
-              <a:rPr lang="en-US" sz="900" b="1" dirty="0">
-                <a:solidFill>
-                  <a:srgbClr val="333333"/>
-                </a:solidFill>
-                <a:latin typeface="Calibri" pitchFamily="34" charset="0"/>
-                <a:ea typeface="Calibri" pitchFamily="34" charset="-122"/>
-                <a:cs typeface="Calibri" pitchFamily="34" charset="-120"/>
-              </a:rPr>
-              <a:t>Fraud analyst / Exec</a:t>
-            </a:r>
-            <a:endParaRPr lang="en-US" sz="900" dirty="0"/>
-          </a:p>
-        </p:txBody>
-      </p:sp>
-      <p:sp>
-        <p:nvSpPr>
-          <p:cNvPr id="39" name="Shape 37"/>
-          <p:cNvSpPr/>
-          <p:nvPr/>
-        </p:nvSpPr>
-        <p:spPr>
-          <a:xfrm flipH="1">
-            <a:off x="10972800" y="2057400"/>
-            <a:ext cx="36576" cy="2148840"/>
-          </a:xfrm>
-          <a:prstGeom prst="line">
-            <a:avLst/>
-          </a:prstGeom>
-          <a:noFill/>
-          <a:ln w="17780">
-            <a:solidFill>
-              <a:srgbClr val="888888"/>
-            </a:solidFill>
-            <a:prstDash val="solid"/>
-            <a:headEnd type="none"/>
-            <a:tailEnd type="triangle"/>
-          </a:ln>
-        </p:spPr>
-      </p:sp>
-      <p:sp>
-        <p:nvSpPr>
-          <p:cNvPr id="40" name="Shape 38"/>
-          <p:cNvSpPr/>
-          <p:nvPr/>
-        </p:nvSpPr>
-        <p:spPr>
-          <a:xfrm>
-            <a:off x="4882896" y="1463040"/>
-            <a:ext cx="228600" cy="9144"/>
-          </a:xfrm>
-          <a:prstGeom prst="line">
-            <a:avLst/>
-          </a:prstGeom>
-          <a:noFill/>
-          <a:ln w="17780">
-            <a:solidFill>
-              <a:srgbClr val="888888"/>
-            </a:solidFill>
-            <a:prstDash val="solid"/>
-            <a:headEnd type="triangle"/>
-            <a:tailEnd type="triangle"/>
-          </a:ln>
-        </p:spPr>
-      </p:sp>
-      <p:sp>
-        <p:nvSpPr>
-          <p:cNvPr id="41" name="Text 39"/>
-          <p:cNvSpPr/>
-          <p:nvPr/>
-        </p:nvSpPr>
-        <p:spPr>
-          <a:xfrm>
-            <a:off x="4608576" y="950976"/>
-            <a:ext cx="2514600" cy="201168"/>
-          </a:xfrm>
-          <a:prstGeom prst="rect">
-            <a:avLst/>
-          </a:prstGeom>
-          <a:noFill/>
-          <a:ln/>
-        </p:spPr>
-        <p:txBody>
-          <a:bodyPr wrap="square" lIns="0" tIns="0" rIns="0" bIns="0" rtlCol="0" anchor="ctr"/>
-          <a:lstStyle/>
-          <a:p>
-            <a:pPr algn="ctr" indent="0" marL="0">
-              <a:buNone/>
-            </a:pPr>
-            <a:r>
-              <a:rPr lang="en-US" sz="900" i="1" dirty="0">
-                <a:solidFill>
-                  <a:srgbClr val="666666"/>
-                </a:solidFill>
-                <a:latin typeface="Calibri" pitchFamily="34" charset="0"/>
-                <a:ea typeface="Calibri" pitchFamily="34" charset="-122"/>
-                <a:cs typeface="Calibri" pitchFamily="34" charset="-120"/>
-              </a:rPr>
-              <a:t>txn stream / decision</a:t>
-            </a:r>
-            <a:endParaRPr lang="en-US" sz="900" dirty="0"/>
-          </a:p>
-        </p:txBody>
-      </p:sp>
-      <p:sp>
-        <p:nvSpPr>
-          <p:cNvPr id="42" name="Shape 40"/>
-          <p:cNvSpPr/>
-          <p:nvPr/>
-        </p:nvSpPr>
-        <p:spPr>
-          <a:xfrm flipV="1">
-            <a:off x="1705356" y="2057400"/>
-            <a:ext cx="8778240" cy="978408"/>
-          </a:xfrm>
-          <a:prstGeom prst="line">
-            <a:avLst/>
-          </a:prstGeom>
-          <a:noFill/>
-          <a:ln w="17780">
-            <a:solidFill>
-              <a:srgbClr val="AAAAAA"/>
-            </a:solidFill>
-            <a:prstDash val="dash"/>
-            <a:headEnd type="none"/>
-            <a:tailEnd type="triangle"/>
-          </a:ln>
-        </p:spPr>
-      </p:sp>
-      <p:sp>
-        <p:nvSpPr>
-          <p:cNvPr id="43" name="Shape 41"/>
-          <p:cNvSpPr/>
-          <p:nvPr/>
-        </p:nvSpPr>
-        <p:spPr>
-          <a:xfrm flipV="1">
-            <a:off x="3899916" y="2057400"/>
-            <a:ext cx="6583680" cy="978408"/>
-          </a:xfrm>
-          <a:prstGeom prst="line">
-            <a:avLst/>
-          </a:prstGeom>
-          <a:noFill/>
-          <a:ln w="17780">
-            <a:solidFill>
-              <a:srgbClr val="AAAAAA"/>
-            </a:solidFill>
-            <a:prstDash val="dash"/>
-            <a:headEnd type="none"/>
-            <a:tailEnd type="triangle"/>
-          </a:ln>
-        </p:spPr>
-      </p:sp>
-      <p:sp>
-        <p:nvSpPr>
-          <p:cNvPr id="44" name="Shape 42"/>
-          <p:cNvSpPr/>
-          <p:nvPr/>
-        </p:nvSpPr>
-        <p:spPr>
-          <a:xfrm flipV="1">
-            <a:off x="6094476" y="2057400"/>
-            <a:ext cx="4389120" cy="978408"/>
-          </a:xfrm>
-          <a:prstGeom prst="line">
-            <a:avLst/>
-          </a:prstGeom>
-          <a:noFill/>
-          <a:ln w="17780">
-            <a:solidFill>
-              <a:srgbClr val="AAAAAA"/>
-            </a:solidFill>
-            <a:prstDash val="dash"/>
-            <a:headEnd type="none"/>
-            <a:tailEnd type="triangle"/>
-          </a:ln>
-        </p:spPr>
-      </p:sp>
-      <p:sp>
-        <p:nvSpPr>
-          <p:cNvPr id="45" name="Shape 43"/>
-          <p:cNvSpPr/>
-          <p:nvPr/>
-        </p:nvSpPr>
-        <p:spPr>
-          <a:xfrm flipV="1">
-            <a:off x="8289036" y="2057400"/>
-            <a:ext cx="2194560" cy="978408"/>
-          </a:xfrm>
-          <a:prstGeom prst="line">
-            <a:avLst/>
-          </a:prstGeom>
-          <a:noFill/>
-          <a:ln w="17780">
-            <a:solidFill>
-              <a:srgbClr val="AAAAAA"/>
-            </a:solidFill>
-            <a:prstDash val="dash"/>
-            <a:headEnd type="none"/>
-            <a:tailEnd type="triangle"/>
-          </a:ln>
-        </p:spPr>
-      </p:sp>
-      <p:sp>
-        <p:nvSpPr>
-          <p:cNvPr id="46" name="Text 44"/>
-          <p:cNvSpPr/>
-          <p:nvPr/>
-        </p:nvSpPr>
-        <p:spPr>
-          <a:xfrm>
-            <a:off x="548640" y="4937760"/>
-            <a:ext cx="11064240" cy="201168"/>
-          </a:xfrm>
-          <a:prstGeom prst="rect">
-            <a:avLst/>
-          </a:prstGeom>
-          <a:noFill/>
-          <a:ln/>
-        </p:spPr>
-        <p:txBody>
-          <a:bodyPr wrap="square" lIns="0" tIns="0" rIns="0" bIns="0" rtlCol="0" anchor="ctr"/>
-          <a:lstStyle/>
-          <a:p>
-            <a:pPr algn="ctr" indent="0" marL="0">
-              <a:buNone/>
-            </a:pPr>
-            <a:r>
-              <a:rPr lang="en-US" sz="900" i="1" dirty="0">
-                <a:solidFill>
-                  <a:srgbClr val="666666"/>
-                </a:solidFill>
-                <a:latin typeface="Calibri" pitchFamily="34" charset="0"/>
-                <a:ea typeface="Calibri" pitchFamily="34" charset="-122"/>
-                <a:cs typeface="Calibri" pitchFamily="34" charset="-120"/>
-              </a:rPr>
-              <a:t>Dashed arrows: on-demand aggregation from data stores into 5.0 Reporting</a:t>
-            </a:r>
-            <a:endParaRPr lang="en-US" sz="900" dirty="0"/>
-          </a:p>
-        </p:txBody>
-      </p:sp>
+            <a:ext cx="12192000" cy="6858000"/>
+          </a:xfrm>
+          <a:prstGeom prst="rect">
+            <a:avLst/>
+          </a:prstGeom>
+        </p:spPr>
+      </p:pic>
     </p:spTree>
   </p:cSld>
   <p:clrMapOvr>
@@ -14680,7 +10834,7 @@
 </file>
 
 <file path=ppt/slides/slide17.xml><?xml version="1.0" encoding="utf-8"?>
-<p:sld xmlns:a="http://schemas.openxmlformats.org/drawingml/2006/main" xmlns:p="http://schemas.openxmlformats.org/presentationml/2006/main">
+<p:sld xmlns:a="http://schemas.openxmlformats.org/drawingml/2006/main" xmlns:p="http://schemas.openxmlformats.org/presentationml/2006/main" xmlns:r="http://schemas.openxmlformats.org/officeDocument/2006/relationships">
   <p:cSld name="Slide 17">
     <p:bg>
       <p:bgPr>
@@ -14703,2531 +10857,28 @@
           <a:chExt cx="0" cy="0"/>
         </a:xfrm>
       </p:grpSpPr>
-      <p:sp>
-        <p:nvSpPr>
-          <p:cNvPr id="2" name="Shape 0"/>
-          <p:cNvSpPr/>
-          <p:nvPr/>
-        </p:nvSpPr>
+      <p:pic>
+        <p:nvPicPr>
+          <p:cNvPr id="2" name="section8-database-erd.png"/>
+          <p:cNvPicPr/>
+          <p:nvPr/>
+        </p:nvPicPr>
+        <p:blipFill>
+          <a:blip r:embed="rId1"/>
+          <a:stretch>
+            <a:fillRect/>
+          </a:stretch>
+        </p:blipFill>
         <p:spPr>
           <a:xfrm>
             <a:off x="0" y="0"/>
-            <a:ext cx="82296" cy="6858000"/>
-          </a:xfrm>
-          <a:prstGeom prst="rect">
-            <a:avLst/>
-          </a:prstGeom>
-          <a:solidFill>
-            <a:srgbClr val="1E2761"/>
-          </a:solidFill>
-          <a:ln/>
-        </p:spPr>
-      </p:sp>
-      <p:sp>
-        <p:nvSpPr>
-          <p:cNvPr id="3" name="Shape 1"/>
-          <p:cNvSpPr/>
-          <p:nvPr/>
-        </p:nvSpPr>
-        <p:spPr>
-          <a:xfrm>
-            <a:off x="292608" y="182880"/>
-            <a:ext cx="310896" cy="310896"/>
-          </a:xfrm>
-          <a:prstGeom prst="roundRect">
-            <a:avLst>
-              <a:gd name="adj" fmla="val 28000"/>
-            </a:avLst>
-          </a:prstGeom>
-          <a:solidFill>
-            <a:srgbClr val="1E2761"/>
-          </a:solidFill>
-          <a:ln/>
-        </p:spPr>
-      </p:sp>
-      <p:sp>
-        <p:nvSpPr>
-          <p:cNvPr id="4" name="Text 2"/>
-          <p:cNvSpPr/>
-          <p:nvPr/>
-        </p:nvSpPr>
-        <p:spPr>
-          <a:xfrm>
-            <a:off x="292608" y="182880"/>
-            <a:ext cx="310896" cy="310896"/>
-          </a:xfrm>
-          <a:prstGeom prst="rect">
-            <a:avLst/>
-          </a:prstGeom>
-          <a:noFill/>
-          <a:ln/>
-        </p:spPr>
-        <p:txBody>
-          <a:bodyPr wrap="square" lIns="0" tIns="0" rIns="0" bIns="0" rtlCol="0" anchor="ctr"/>
-          <a:lstStyle/>
-          <a:p>
-            <a:pPr algn="ctr" indent="0" marL="0">
-              <a:buNone/>
-            </a:pPr>
-            <a:r>
-              <a:rPr lang="en-US" sz="1428" b="1" dirty="0">
-                <a:solidFill>
-                  <a:srgbClr val="FFFFFF"/>
-                </a:solidFill>
-                <a:latin typeface="Cambria" pitchFamily="34" charset="0"/>
-                <a:ea typeface="Cambria" pitchFamily="34" charset="-122"/>
-                <a:cs typeface="Cambria" pitchFamily="34" charset="-120"/>
-              </a:rPr>
-              <a:t>G</a:t>
-            </a:r>
-            <a:endParaRPr lang="en-US" sz="1428" dirty="0"/>
-          </a:p>
-        </p:txBody>
-      </p:sp>
-      <p:sp>
-        <p:nvSpPr>
-          <p:cNvPr id="5" name="Text 3"/>
-          <p:cNvSpPr/>
-          <p:nvPr/>
-        </p:nvSpPr>
-        <p:spPr>
-          <a:xfrm>
-            <a:off x="749808" y="164592"/>
-            <a:ext cx="9857232" cy="384048"/>
-          </a:xfrm>
-          <a:prstGeom prst="rect">
-            <a:avLst/>
-          </a:prstGeom>
-          <a:noFill/>
-          <a:ln/>
-        </p:spPr>
-        <p:txBody>
-          <a:bodyPr wrap="square" lIns="0" tIns="0" rIns="0" bIns="0" rtlCol="0" anchor="ctr"/>
-          <a:lstStyle/>
-          <a:p>
-            <a:pPr indent="0" marL="0">
-              <a:buNone/>
-            </a:pPr>
-            <a:r>
-              <a:rPr lang="en-US" sz="2000" b="1" dirty="0">
-                <a:solidFill>
-                  <a:srgbClr val="1E2761"/>
-                </a:solidFill>
-                <a:latin typeface="Cambria" pitchFamily="34" charset="0"/>
-                <a:ea typeface="Cambria" pitchFamily="34" charset="-122"/>
-                <a:cs typeface="Cambria" pitchFamily="34" charset="-120"/>
-              </a:rPr>
-              <a:t>Database Entity Relationship Diagram (ERD)</a:t>
-            </a:r>
-            <a:endParaRPr lang="en-US" sz="2000" dirty="0"/>
-          </a:p>
-        </p:txBody>
-      </p:sp>
-      <p:sp>
-        <p:nvSpPr>
-          <p:cNvPr id="6" name="Text 4"/>
-          <p:cNvSpPr/>
-          <p:nvPr/>
-        </p:nvSpPr>
-        <p:spPr>
-          <a:xfrm>
-            <a:off x="749808" y="548640"/>
-            <a:ext cx="10607040" cy="237744"/>
-          </a:xfrm>
-          <a:prstGeom prst="rect">
-            <a:avLst/>
-          </a:prstGeom>
-          <a:noFill/>
-          <a:ln/>
-        </p:spPr>
-        <p:txBody>
-          <a:bodyPr wrap="square" lIns="0" tIns="0" rIns="0" bIns="0" rtlCol="0" anchor="ctr"/>
-          <a:lstStyle/>
-          <a:p>
-            <a:pPr indent="0" marL="0">
-              <a:buNone/>
-            </a:pPr>
-            <a:r>
-              <a:rPr lang="en-US" sz="1050" dirty="0">
-                <a:solidFill>
-                  <a:srgbClr val="555555"/>
-                </a:solidFill>
-                <a:latin typeface="Calibri" pitchFamily="34" charset="0"/>
-                <a:ea typeface="Calibri" pitchFamily="34" charset="-122"/>
-                <a:cs typeface="Calibri" pitchFamily="34" charset="-120"/>
-              </a:rPr>
-              <a:t>14 tables from backend/app/models/entities.py</a:t>
-            </a:r>
-            <a:endParaRPr lang="en-US" sz="1050" dirty="0"/>
-          </a:p>
-        </p:txBody>
-      </p:sp>
-      <p:sp>
-        <p:nvSpPr>
-          <p:cNvPr id="7" name="Shape 5"/>
-          <p:cNvSpPr/>
-          <p:nvPr/>
-        </p:nvSpPr>
-        <p:spPr>
-          <a:xfrm>
-            <a:off x="11475720" y="182880"/>
-            <a:ext cx="384048" cy="384048"/>
-          </a:xfrm>
-          <a:prstGeom prst="ellipse">
-            <a:avLst/>
-          </a:prstGeom>
-          <a:solidFill>
-            <a:srgbClr val="1E2761"/>
-          </a:solidFill>
-          <a:ln/>
-        </p:spPr>
-      </p:sp>
-      <p:sp>
-        <p:nvSpPr>
-          <p:cNvPr id="8" name="Text 6"/>
-          <p:cNvSpPr/>
-          <p:nvPr/>
-        </p:nvSpPr>
-        <p:spPr>
-          <a:xfrm>
-            <a:off x="11475720" y="182880"/>
-            <a:ext cx="384048" cy="384048"/>
-          </a:xfrm>
-          <a:prstGeom prst="rect">
-            <a:avLst/>
-          </a:prstGeom>
-          <a:noFill/>
-          <a:ln/>
-        </p:spPr>
-        <p:txBody>
-          <a:bodyPr wrap="square" lIns="0" tIns="0" rIns="0" bIns="0" rtlCol="0" anchor="ctr"/>
-          <a:lstStyle/>
-          <a:p>
-            <a:pPr algn="ctr" indent="0" marL="0">
-              <a:buNone/>
-            </a:pPr>
-            <a:r>
-              <a:rPr lang="en-US" sz="1400" b="1" dirty="0">
-                <a:solidFill>
-                  <a:srgbClr val="FFFFFF"/>
-                </a:solidFill>
-                <a:latin typeface="Calibri" pitchFamily="34" charset="0"/>
-                <a:ea typeface="Calibri" pitchFamily="34" charset="-122"/>
-                <a:cs typeface="Calibri" pitchFamily="34" charset="-120"/>
-              </a:rPr>
-              <a:t>16</a:t>
-            </a:r>
-            <a:endParaRPr lang="en-US" sz="1400" dirty="0"/>
-          </a:p>
-        </p:txBody>
-      </p:sp>
-      <p:sp>
-        <p:nvSpPr>
-          <p:cNvPr id="9" name="Shape 7"/>
-          <p:cNvSpPr/>
-          <p:nvPr/>
-        </p:nvSpPr>
-        <p:spPr>
-          <a:xfrm>
-            <a:off x="274320" y="914400"/>
-            <a:ext cx="1691640" cy="960120"/>
-          </a:xfrm>
-          <a:prstGeom prst="rect">
-            <a:avLst/>
-          </a:prstGeom>
-          <a:solidFill>
-            <a:srgbClr val="FFFFFF"/>
-          </a:solidFill>
-          <a:ln w="13970">
-            <a:solidFill>
-              <a:srgbClr val="8E6FC4"/>
-            </a:solidFill>
-            <a:prstDash val="solid"/>
-          </a:ln>
-        </p:spPr>
-      </p:sp>
-      <p:sp>
-        <p:nvSpPr>
-          <p:cNvPr id="10" name="Shape 8"/>
-          <p:cNvSpPr/>
-          <p:nvPr/>
-        </p:nvSpPr>
-        <p:spPr>
-          <a:xfrm>
-            <a:off x="274320" y="914400"/>
-            <a:ext cx="1691640" cy="237744"/>
-          </a:xfrm>
-          <a:prstGeom prst="rect">
-            <a:avLst/>
-          </a:prstGeom>
-          <a:solidFill>
-            <a:srgbClr val="E8DFF5"/>
-          </a:solidFill>
-          <a:ln w="13970">
-            <a:solidFill>
-              <a:srgbClr val="8E6FC4"/>
-            </a:solidFill>
-            <a:prstDash val="solid"/>
-          </a:ln>
-        </p:spPr>
-      </p:sp>
-      <p:sp>
-        <p:nvSpPr>
-          <p:cNvPr id="11" name="Text 9"/>
-          <p:cNvSpPr/>
-          <p:nvPr/>
-        </p:nvSpPr>
-        <p:spPr>
-          <a:xfrm>
-            <a:off x="274320" y="914400"/>
-            <a:ext cx="1691640" cy="237744"/>
-          </a:xfrm>
-          <a:prstGeom prst="rect">
-            <a:avLst/>
-          </a:prstGeom>
-          <a:noFill/>
-          <a:ln/>
-        </p:spPr>
-        <p:txBody>
-          <a:bodyPr wrap="square" lIns="0" tIns="0" rIns="0" bIns="0" rtlCol="0" anchor="ctr"/>
-          <a:lstStyle/>
-          <a:p>
-            <a:pPr algn="ctr" indent="0" marL="0">
-              <a:buNone/>
-            </a:pPr>
-            <a:r>
-              <a:rPr lang="en-US" sz="950" b="1" dirty="0">
-                <a:solidFill>
-                  <a:srgbClr val="4B2E83"/>
-                </a:solidFill>
-                <a:latin typeface="Calibri" pitchFamily="34" charset="0"/>
-                <a:ea typeface="Calibri" pitchFamily="34" charset="-122"/>
-                <a:cs typeface="Calibri" pitchFamily="34" charset="-120"/>
-              </a:rPr>
-              <a:t>User</a:t>
-            </a:r>
-            <a:endParaRPr lang="en-US" sz="950" dirty="0"/>
-          </a:p>
-        </p:txBody>
-      </p:sp>
-      <p:sp>
-        <p:nvSpPr>
-          <p:cNvPr id="12" name="Text 10"/>
-          <p:cNvSpPr/>
-          <p:nvPr/>
-        </p:nvSpPr>
-        <p:spPr>
-          <a:xfrm>
-            <a:off x="329184" y="1179576"/>
-            <a:ext cx="1581912" cy="649224"/>
-          </a:xfrm>
-          <a:prstGeom prst="rect">
-            <a:avLst/>
-          </a:prstGeom>
-          <a:noFill/>
-          <a:ln/>
-        </p:spPr>
-        <p:txBody>
-          <a:bodyPr wrap="square" lIns="0" tIns="0" rIns="0" bIns="0" rtlCol="0" anchor="t"/>
-          <a:lstStyle/>
-          <a:p>
-            <a:pPr indent="0" marL="0">
-              <a:buNone/>
-            </a:pPr>
-            <a:r>
-              <a:rPr lang="en-US" sz="760" dirty="0">
-                <a:solidFill>
-                  <a:srgbClr val="333333"/>
-                </a:solidFill>
-                <a:latin typeface="Calibri" pitchFamily="34" charset="0"/>
-                <a:ea typeface="Calibri" pitchFamily="34" charset="-122"/>
-                <a:cs typeface="Calibri" pitchFamily="34" charset="-120"/>
-              </a:rPr>
-              <a:t>PK user_id</a:t>
-            </a:r>
-            <a:endParaRPr lang="en-US" sz="760" dirty="0"/>
-          </a:p>
-          <a:p>
-            <a:pPr indent="0" marL="0">
-              <a:buNone/>
-            </a:pPr>
-            <a:r>
-              <a:rPr lang="en-US" sz="760" dirty="0">
-                <a:solidFill>
-                  <a:srgbClr val="333333"/>
-                </a:solidFill>
-                <a:latin typeface="Calibri" pitchFamily="34" charset="0"/>
-                <a:ea typeface="Calibri" pitchFamily="34" charset="-122"/>
-                <a:cs typeface="Calibri" pitchFamily="34" charset="-120"/>
-              </a:rPr>
-              <a:t>email, role</a:t>
-            </a:r>
-            <a:endParaRPr lang="en-US" sz="760" dirty="0"/>
-          </a:p>
-          <a:p>
-            <a:pPr indent="0" marL="0">
-              <a:buNone/>
-            </a:pPr>
-            <a:r>
-              <a:rPr lang="en-US" sz="760" dirty="0">
-                <a:solidFill>
-                  <a:srgbClr val="333333"/>
-                </a:solidFill>
-                <a:latin typeface="Calibri" pitchFamily="34" charset="0"/>
-                <a:ea typeface="Calibri" pitchFamily="34" charset="-122"/>
-                <a:cs typeface="Calibri" pitchFamily="34" charset="-120"/>
-              </a:rPr>
-              <a:t>hashed_pw</a:t>
-            </a:r>
-            <a:endParaRPr lang="en-US" sz="760" dirty="0"/>
-          </a:p>
-        </p:txBody>
-      </p:sp>
-      <p:sp>
-        <p:nvSpPr>
-          <p:cNvPr id="13" name="Shape 11"/>
-          <p:cNvSpPr/>
-          <p:nvPr/>
-        </p:nvSpPr>
-        <p:spPr>
-          <a:xfrm>
-            <a:off x="2057400" y="914400"/>
-            <a:ext cx="1691640" cy="960120"/>
-          </a:xfrm>
-          <a:prstGeom prst="rect">
-            <a:avLst/>
-          </a:prstGeom>
-          <a:solidFill>
-            <a:srgbClr val="FFFFFF"/>
-          </a:solidFill>
-          <a:ln w="13970">
-            <a:solidFill>
-              <a:srgbClr val="8E6FC4"/>
-            </a:solidFill>
-            <a:prstDash val="solid"/>
-          </a:ln>
-        </p:spPr>
-      </p:sp>
-      <p:sp>
-        <p:nvSpPr>
-          <p:cNvPr id="14" name="Shape 12"/>
-          <p:cNvSpPr/>
-          <p:nvPr/>
-        </p:nvSpPr>
-        <p:spPr>
-          <a:xfrm>
-            <a:off x="2057400" y="914400"/>
-            <a:ext cx="1691640" cy="237744"/>
-          </a:xfrm>
-          <a:prstGeom prst="rect">
-            <a:avLst/>
-          </a:prstGeom>
-          <a:solidFill>
-            <a:srgbClr val="E8DFF5"/>
-          </a:solidFill>
-          <a:ln w="13970">
-            <a:solidFill>
-              <a:srgbClr val="8E6FC4"/>
-            </a:solidFill>
-            <a:prstDash val="solid"/>
-          </a:ln>
-        </p:spPr>
-      </p:sp>
-      <p:sp>
-        <p:nvSpPr>
-          <p:cNvPr id="15" name="Text 13"/>
-          <p:cNvSpPr/>
-          <p:nvPr/>
-        </p:nvSpPr>
-        <p:spPr>
-          <a:xfrm>
-            <a:off x="2057400" y="914400"/>
-            <a:ext cx="1691640" cy="237744"/>
-          </a:xfrm>
-          <a:prstGeom prst="rect">
-            <a:avLst/>
-          </a:prstGeom>
-          <a:noFill/>
-          <a:ln/>
-        </p:spPr>
-        <p:txBody>
-          <a:bodyPr wrap="square" lIns="0" tIns="0" rIns="0" bIns="0" rtlCol="0" anchor="ctr"/>
-          <a:lstStyle/>
-          <a:p>
-            <a:pPr algn="ctr" indent="0" marL="0">
-              <a:buNone/>
-            </a:pPr>
-            <a:r>
-              <a:rPr lang="en-US" sz="950" b="1" dirty="0">
-                <a:solidFill>
-                  <a:srgbClr val="4B2E83"/>
-                </a:solidFill>
-                <a:latin typeface="Calibri" pitchFamily="34" charset="0"/>
-                <a:ea typeface="Calibri" pitchFamily="34" charset="-122"/>
-                <a:cs typeface="Calibri" pitchFamily="34" charset="-120"/>
-              </a:rPr>
-              <a:t>Customer</a:t>
-            </a:r>
-            <a:endParaRPr lang="en-US" sz="950" dirty="0"/>
-          </a:p>
-        </p:txBody>
-      </p:sp>
-      <p:sp>
-        <p:nvSpPr>
-          <p:cNvPr id="16" name="Text 14"/>
-          <p:cNvSpPr/>
-          <p:nvPr/>
-        </p:nvSpPr>
-        <p:spPr>
-          <a:xfrm>
-            <a:off x="2112264" y="1179576"/>
-            <a:ext cx="1581912" cy="649224"/>
-          </a:xfrm>
-          <a:prstGeom prst="rect">
-            <a:avLst/>
-          </a:prstGeom>
-          <a:noFill/>
-          <a:ln/>
-        </p:spPr>
-        <p:txBody>
-          <a:bodyPr wrap="square" lIns="0" tIns="0" rIns="0" bIns="0" rtlCol="0" anchor="t"/>
-          <a:lstStyle/>
-          <a:p>
-            <a:pPr indent="0" marL="0">
-              <a:buNone/>
-            </a:pPr>
-            <a:r>
-              <a:rPr lang="en-US" sz="760" dirty="0">
-                <a:solidFill>
-                  <a:srgbClr val="333333"/>
-                </a:solidFill>
-                <a:latin typeface="Calibri" pitchFamily="34" charset="0"/>
-                <a:ea typeface="Calibri" pitchFamily="34" charset="-122"/>
-                <a:cs typeface="Calibri" pitchFamily="34" charset="-120"/>
-              </a:rPr>
-              <a:t>PK customer_id</a:t>
-            </a:r>
-            <a:endParaRPr lang="en-US" sz="760" dirty="0"/>
-          </a:p>
-          <a:p>
-            <a:pPr indent="0" marL="0">
-              <a:buNone/>
-            </a:pPr>
-            <a:r>
-              <a:rPr lang="en-US" sz="760" dirty="0">
-                <a:solidFill>
-                  <a:srgbClr val="333333"/>
-                </a:solidFill>
-                <a:latin typeface="Calibri" pitchFamily="34" charset="0"/>
-                <a:ea typeface="Calibri" pitchFamily="34" charset="-122"/>
-                <a:cs typeface="Calibri" pitchFamily="34" charset="-120"/>
-              </a:rPr>
-              <a:t>FK user_id</a:t>
-            </a:r>
-            <a:endParaRPr lang="en-US" sz="760" dirty="0"/>
-          </a:p>
-          <a:p>
-            <a:pPr indent="0" marL="0">
-              <a:buNone/>
-            </a:pPr>
-            <a:r>
-              <a:rPr lang="en-US" sz="760" dirty="0">
-                <a:solidFill>
-                  <a:srgbClr val="333333"/>
-                </a:solidFill>
-                <a:latin typeface="Calibri" pitchFamily="34" charset="0"/>
-                <a:ea typeface="Calibri" pitchFamily="34" charset="-122"/>
-                <a:cs typeface="Calibri" pitchFamily="34" charset="-120"/>
-              </a:rPr>
-              <a:t>kyc_status</a:t>
-            </a:r>
-            <a:endParaRPr lang="en-US" sz="760" dirty="0"/>
-          </a:p>
-        </p:txBody>
-      </p:sp>
-      <p:sp>
-        <p:nvSpPr>
-          <p:cNvPr id="17" name="Shape 15"/>
-          <p:cNvSpPr/>
-          <p:nvPr/>
-        </p:nvSpPr>
-        <p:spPr>
-          <a:xfrm>
-            <a:off x="3840480" y="914400"/>
-            <a:ext cx="1691640" cy="960120"/>
-          </a:xfrm>
-          <a:prstGeom prst="rect">
-            <a:avLst/>
-          </a:prstGeom>
-          <a:solidFill>
-            <a:srgbClr val="FFFFFF"/>
-          </a:solidFill>
-          <a:ln w="13970">
-            <a:solidFill>
-              <a:srgbClr val="8E6FC4"/>
-            </a:solidFill>
-            <a:prstDash val="solid"/>
-          </a:ln>
-        </p:spPr>
-      </p:sp>
-      <p:sp>
-        <p:nvSpPr>
-          <p:cNvPr id="18" name="Shape 16"/>
-          <p:cNvSpPr/>
-          <p:nvPr/>
-        </p:nvSpPr>
-        <p:spPr>
-          <a:xfrm>
-            <a:off x="3840480" y="914400"/>
-            <a:ext cx="1691640" cy="237744"/>
-          </a:xfrm>
-          <a:prstGeom prst="rect">
-            <a:avLst/>
-          </a:prstGeom>
-          <a:solidFill>
-            <a:srgbClr val="E8DFF5"/>
-          </a:solidFill>
-          <a:ln w="13970">
-            <a:solidFill>
-              <a:srgbClr val="8E6FC4"/>
-            </a:solidFill>
-            <a:prstDash val="solid"/>
-          </a:ln>
-        </p:spPr>
-      </p:sp>
-      <p:sp>
-        <p:nvSpPr>
-          <p:cNvPr id="19" name="Text 17"/>
-          <p:cNvSpPr/>
-          <p:nvPr/>
-        </p:nvSpPr>
-        <p:spPr>
-          <a:xfrm>
-            <a:off x="3840480" y="914400"/>
-            <a:ext cx="1691640" cy="237744"/>
-          </a:xfrm>
-          <a:prstGeom prst="rect">
-            <a:avLst/>
-          </a:prstGeom>
-          <a:noFill/>
-          <a:ln/>
-        </p:spPr>
-        <p:txBody>
-          <a:bodyPr wrap="square" lIns="0" tIns="0" rIns="0" bIns="0" rtlCol="0" anchor="ctr"/>
-          <a:lstStyle/>
-          <a:p>
-            <a:pPr algn="ctr" indent="0" marL="0">
-              <a:buNone/>
-            </a:pPr>
-            <a:r>
-              <a:rPr lang="en-US" sz="950" b="1" dirty="0">
-                <a:solidFill>
-                  <a:srgbClr val="4B2E83"/>
-                </a:solidFill>
-                <a:latin typeface="Calibri" pitchFamily="34" charset="0"/>
-                <a:ea typeface="Calibri" pitchFamily="34" charset="-122"/>
-                <a:cs typeface="Calibri" pitchFamily="34" charset="-120"/>
-              </a:rPr>
-              <a:t>Merchant</a:t>
-            </a:r>
-            <a:endParaRPr lang="en-US" sz="950" dirty="0"/>
-          </a:p>
-        </p:txBody>
-      </p:sp>
-      <p:sp>
-        <p:nvSpPr>
-          <p:cNvPr id="20" name="Text 18"/>
-          <p:cNvSpPr/>
-          <p:nvPr/>
-        </p:nvSpPr>
-        <p:spPr>
-          <a:xfrm>
-            <a:off x="3895344" y="1179576"/>
-            <a:ext cx="1581912" cy="649224"/>
-          </a:xfrm>
-          <a:prstGeom prst="rect">
-            <a:avLst/>
-          </a:prstGeom>
-          <a:noFill/>
-          <a:ln/>
-        </p:spPr>
-        <p:txBody>
-          <a:bodyPr wrap="square" lIns="0" tIns="0" rIns="0" bIns="0" rtlCol="0" anchor="t"/>
-          <a:lstStyle/>
-          <a:p>
-            <a:pPr indent="0" marL="0">
-              <a:buNone/>
-            </a:pPr>
-            <a:r>
-              <a:rPr lang="en-US" sz="760" dirty="0">
-                <a:solidFill>
-                  <a:srgbClr val="333333"/>
-                </a:solidFill>
-                <a:latin typeface="Calibri" pitchFamily="34" charset="0"/>
-                <a:ea typeface="Calibri" pitchFamily="34" charset="-122"/>
-                <a:cs typeface="Calibri" pitchFamily="34" charset="-120"/>
-              </a:rPr>
-              <a:t>PK merchant_id</a:t>
-            </a:r>
-            <a:endParaRPr lang="en-US" sz="760" dirty="0"/>
-          </a:p>
-          <a:p>
-            <a:pPr indent="0" marL="0">
-              <a:buNone/>
-            </a:pPr>
-            <a:r>
-              <a:rPr lang="en-US" sz="760" dirty="0">
-                <a:solidFill>
-                  <a:srgbClr val="333333"/>
-                </a:solidFill>
-                <a:latin typeface="Calibri" pitchFamily="34" charset="0"/>
-                <a:ea typeface="Calibri" pitchFamily="34" charset="-122"/>
-                <a:cs typeface="Calibri" pitchFamily="34" charset="-120"/>
-              </a:rPr>
-              <a:t>FK user_id</a:t>
-            </a:r>
-            <a:endParaRPr lang="en-US" sz="760" dirty="0"/>
-          </a:p>
-          <a:p>
-            <a:pPr indent="0" marL="0">
-              <a:buNone/>
-            </a:pPr>
-            <a:r>
-              <a:rPr lang="en-US" sz="760" dirty="0">
-                <a:solidFill>
-                  <a:srgbClr val="333333"/>
-                </a:solidFill>
-                <a:latin typeface="Calibri" pitchFamily="34" charset="0"/>
-                <a:ea typeface="Calibri" pitchFamily="34" charset="-122"/>
-                <a:cs typeface="Calibri" pitchFamily="34" charset="-120"/>
-              </a:rPr>
-              <a:t>business_name</a:t>
-            </a:r>
-            <a:endParaRPr lang="en-US" sz="760" dirty="0"/>
-          </a:p>
-        </p:txBody>
-      </p:sp>
-      <p:sp>
-        <p:nvSpPr>
-          <p:cNvPr id="21" name="Shape 19"/>
-          <p:cNvSpPr/>
-          <p:nvPr/>
-        </p:nvSpPr>
-        <p:spPr>
-          <a:xfrm>
-            <a:off x="5623560" y="914400"/>
-            <a:ext cx="1691640" cy="960120"/>
-          </a:xfrm>
-          <a:prstGeom prst="rect">
-            <a:avLst/>
-          </a:prstGeom>
-          <a:solidFill>
-            <a:srgbClr val="FFFFFF"/>
-          </a:solidFill>
-          <a:ln w="13970">
-            <a:solidFill>
-              <a:srgbClr val="8E6FC4"/>
-            </a:solidFill>
-            <a:prstDash val="solid"/>
-          </a:ln>
-        </p:spPr>
-      </p:sp>
-      <p:sp>
-        <p:nvSpPr>
-          <p:cNvPr id="22" name="Shape 20"/>
-          <p:cNvSpPr/>
-          <p:nvPr/>
-        </p:nvSpPr>
-        <p:spPr>
-          <a:xfrm>
-            <a:off x="5623560" y="914400"/>
-            <a:ext cx="1691640" cy="237744"/>
-          </a:xfrm>
-          <a:prstGeom prst="rect">
-            <a:avLst/>
-          </a:prstGeom>
-          <a:solidFill>
-            <a:srgbClr val="E8DFF5"/>
-          </a:solidFill>
-          <a:ln w="13970">
-            <a:solidFill>
-              <a:srgbClr val="8E6FC4"/>
-            </a:solidFill>
-            <a:prstDash val="solid"/>
-          </a:ln>
-        </p:spPr>
-      </p:sp>
-      <p:sp>
-        <p:nvSpPr>
-          <p:cNvPr id="23" name="Text 21"/>
-          <p:cNvSpPr/>
-          <p:nvPr/>
-        </p:nvSpPr>
-        <p:spPr>
-          <a:xfrm>
-            <a:off x="5623560" y="914400"/>
-            <a:ext cx="1691640" cy="237744"/>
-          </a:xfrm>
-          <a:prstGeom prst="rect">
-            <a:avLst/>
-          </a:prstGeom>
-          <a:noFill/>
-          <a:ln/>
-        </p:spPr>
-        <p:txBody>
-          <a:bodyPr wrap="square" lIns="0" tIns="0" rIns="0" bIns="0" rtlCol="0" anchor="ctr"/>
-          <a:lstStyle/>
-          <a:p>
-            <a:pPr algn="ctr" indent="0" marL="0">
-              <a:buNone/>
-            </a:pPr>
-            <a:r>
-              <a:rPr lang="en-US" sz="950" b="1" dirty="0">
-                <a:solidFill>
-                  <a:srgbClr val="4B2E83"/>
-                </a:solidFill>
-                <a:latin typeface="Calibri" pitchFamily="34" charset="0"/>
-                <a:ea typeface="Calibri" pitchFamily="34" charset="-122"/>
-                <a:cs typeface="Calibri" pitchFamily="34" charset="-120"/>
-              </a:rPr>
-              <a:t>Wallet</a:t>
-            </a:r>
-            <a:endParaRPr lang="en-US" sz="950" dirty="0"/>
-          </a:p>
-        </p:txBody>
-      </p:sp>
-      <p:sp>
-        <p:nvSpPr>
-          <p:cNvPr id="24" name="Text 22"/>
-          <p:cNvSpPr/>
-          <p:nvPr/>
-        </p:nvSpPr>
-        <p:spPr>
-          <a:xfrm>
-            <a:off x="5678424" y="1179576"/>
-            <a:ext cx="1581912" cy="649224"/>
-          </a:xfrm>
-          <a:prstGeom prst="rect">
-            <a:avLst/>
-          </a:prstGeom>
-          <a:noFill/>
-          <a:ln/>
-        </p:spPr>
-        <p:txBody>
-          <a:bodyPr wrap="square" lIns="0" tIns="0" rIns="0" bIns="0" rtlCol="0" anchor="t"/>
-          <a:lstStyle/>
-          <a:p>
-            <a:pPr indent="0" marL="0">
-              <a:buNone/>
-            </a:pPr>
-            <a:r>
-              <a:rPr lang="en-US" sz="760" dirty="0">
-                <a:solidFill>
-                  <a:srgbClr val="333333"/>
-                </a:solidFill>
-                <a:latin typeface="Calibri" pitchFamily="34" charset="0"/>
-                <a:ea typeface="Calibri" pitchFamily="34" charset="-122"/>
-                <a:cs typeface="Calibri" pitchFamily="34" charset="-120"/>
-              </a:rPr>
-              <a:t>PK wallet_id</a:t>
-            </a:r>
-            <a:endParaRPr lang="en-US" sz="760" dirty="0"/>
-          </a:p>
-          <a:p>
-            <a:pPr indent="0" marL="0">
-              <a:buNone/>
-            </a:pPr>
-            <a:r>
-              <a:rPr lang="en-US" sz="760" dirty="0">
-                <a:solidFill>
-                  <a:srgbClr val="333333"/>
-                </a:solidFill>
-                <a:latin typeface="Calibri" pitchFamily="34" charset="0"/>
-                <a:ea typeface="Calibri" pitchFamily="34" charset="-122"/>
-                <a:cs typeface="Calibri" pitchFamily="34" charset="-120"/>
-              </a:rPr>
-              <a:t>FK customer/merchant</a:t>
-            </a:r>
-            <a:endParaRPr lang="en-US" sz="760" dirty="0"/>
-          </a:p>
-          <a:p>
-            <a:pPr indent="0" marL="0">
-              <a:buNone/>
-            </a:pPr>
-            <a:r>
-              <a:rPr lang="en-US" sz="760" dirty="0">
-                <a:solidFill>
-                  <a:srgbClr val="333333"/>
-                </a:solidFill>
-                <a:latin typeface="Calibri" pitchFamily="34" charset="0"/>
-                <a:ea typeface="Calibri" pitchFamily="34" charset="-122"/>
-                <a:cs typeface="Calibri" pitchFamily="34" charset="-120"/>
-              </a:rPr>
-              <a:t>balance</a:t>
-            </a:r>
-            <a:endParaRPr lang="en-US" sz="760" dirty="0"/>
-          </a:p>
-        </p:txBody>
-      </p:sp>
-      <p:sp>
-        <p:nvSpPr>
-          <p:cNvPr id="25" name="Shape 23"/>
-          <p:cNvSpPr/>
-          <p:nvPr/>
-        </p:nvSpPr>
-        <p:spPr>
-          <a:xfrm>
-            <a:off x="7406640" y="914400"/>
-            <a:ext cx="1691640" cy="960120"/>
-          </a:xfrm>
-          <a:prstGeom prst="rect">
-            <a:avLst/>
-          </a:prstGeom>
-          <a:solidFill>
-            <a:srgbClr val="FFFFFF"/>
-          </a:solidFill>
-          <a:ln w="13970">
-            <a:solidFill>
-              <a:srgbClr val="8E6FC4"/>
-            </a:solidFill>
-            <a:prstDash val="solid"/>
-          </a:ln>
-        </p:spPr>
-      </p:sp>
-      <p:sp>
-        <p:nvSpPr>
-          <p:cNvPr id="26" name="Shape 24"/>
-          <p:cNvSpPr/>
-          <p:nvPr/>
-        </p:nvSpPr>
-        <p:spPr>
-          <a:xfrm>
-            <a:off x="7406640" y="914400"/>
-            <a:ext cx="1691640" cy="237744"/>
-          </a:xfrm>
-          <a:prstGeom prst="rect">
-            <a:avLst/>
-          </a:prstGeom>
-          <a:solidFill>
-            <a:srgbClr val="E8DFF5"/>
-          </a:solidFill>
-          <a:ln w="13970">
-            <a:solidFill>
-              <a:srgbClr val="8E6FC4"/>
-            </a:solidFill>
-            <a:prstDash val="solid"/>
-          </a:ln>
-        </p:spPr>
-      </p:sp>
-      <p:sp>
-        <p:nvSpPr>
-          <p:cNvPr id="27" name="Text 25"/>
-          <p:cNvSpPr/>
-          <p:nvPr/>
-        </p:nvSpPr>
-        <p:spPr>
-          <a:xfrm>
-            <a:off x="7406640" y="914400"/>
-            <a:ext cx="1691640" cy="237744"/>
-          </a:xfrm>
-          <a:prstGeom prst="rect">
-            <a:avLst/>
-          </a:prstGeom>
-          <a:noFill/>
-          <a:ln/>
-        </p:spPr>
-        <p:txBody>
-          <a:bodyPr wrap="square" lIns="0" tIns="0" rIns="0" bIns="0" rtlCol="0" anchor="ctr"/>
-          <a:lstStyle/>
-          <a:p>
-            <a:pPr algn="ctr" indent="0" marL="0">
-              <a:buNone/>
-            </a:pPr>
-            <a:r>
-              <a:rPr lang="en-US" sz="950" b="1" dirty="0">
-                <a:solidFill>
-                  <a:srgbClr val="4B2E83"/>
-                </a:solidFill>
-                <a:latin typeface="Calibri" pitchFamily="34" charset="0"/>
-                <a:ea typeface="Calibri" pitchFamily="34" charset="-122"/>
-                <a:cs typeface="Calibri" pitchFamily="34" charset="-120"/>
-              </a:rPr>
-              <a:t>Consent</a:t>
-            </a:r>
-            <a:endParaRPr lang="en-US" sz="950" dirty="0"/>
-          </a:p>
-        </p:txBody>
-      </p:sp>
-      <p:sp>
-        <p:nvSpPr>
-          <p:cNvPr id="28" name="Text 26"/>
-          <p:cNvSpPr/>
-          <p:nvPr/>
-        </p:nvSpPr>
-        <p:spPr>
-          <a:xfrm>
-            <a:off x="7461504" y="1179576"/>
-            <a:ext cx="1581912" cy="649224"/>
-          </a:xfrm>
-          <a:prstGeom prst="rect">
-            <a:avLst/>
-          </a:prstGeom>
-          <a:noFill/>
-          <a:ln/>
-        </p:spPr>
-        <p:txBody>
-          <a:bodyPr wrap="square" lIns="0" tIns="0" rIns="0" bIns="0" rtlCol="0" anchor="t"/>
-          <a:lstStyle/>
-          <a:p>
-            <a:pPr indent="0" marL="0">
-              <a:buNone/>
-            </a:pPr>
-            <a:r>
-              <a:rPr lang="en-US" sz="760" dirty="0">
-                <a:solidFill>
-                  <a:srgbClr val="333333"/>
-                </a:solidFill>
-                <a:latin typeface="Calibri" pitchFamily="34" charset="0"/>
-                <a:ea typeface="Calibri" pitchFamily="34" charset="-122"/>
-                <a:cs typeface="Calibri" pitchFamily="34" charset="-120"/>
-              </a:rPr>
-              <a:t>PK consent_id</a:t>
-            </a:r>
-            <a:endParaRPr lang="en-US" sz="760" dirty="0"/>
-          </a:p>
-          <a:p>
-            <a:pPr indent="0" marL="0">
-              <a:buNone/>
-            </a:pPr>
-            <a:r>
-              <a:rPr lang="en-US" sz="760" dirty="0">
-                <a:solidFill>
-                  <a:srgbClr val="333333"/>
-                </a:solidFill>
-                <a:latin typeface="Calibri" pitchFamily="34" charset="0"/>
-                <a:ea typeface="Calibri" pitchFamily="34" charset="-122"/>
-                <a:cs typeface="Calibri" pitchFamily="34" charset="-120"/>
-              </a:rPr>
-              <a:t>FK customer_id</a:t>
-            </a:r>
-            <a:endParaRPr lang="en-US" sz="760" dirty="0"/>
-          </a:p>
-          <a:p>
-            <a:pPr indent="0" marL="0">
-              <a:buNone/>
-            </a:pPr>
-            <a:r>
-              <a:rPr lang="en-US" sz="760" dirty="0">
-                <a:solidFill>
-                  <a:srgbClr val="333333"/>
-                </a:solidFill>
-                <a:latin typeface="Calibri" pitchFamily="34" charset="0"/>
-                <a:ea typeface="Calibri" pitchFamily="34" charset="-122"/>
-                <a:cs typeface="Calibri" pitchFamily="34" charset="-120"/>
-              </a:rPr>
-              <a:t>scopes, client</a:t>
-            </a:r>
-            <a:endParaRPr lang="en-US" sz="760" dirty="0"/>
-          </a:p>
-        </p:txBody>
-      </p:sp>
-      <p:sp>
-        <p:nvSpPr>
-          <p:cNvPr id="29" name="Shape 27"/>
-          <p:cNvSpPr/>
-          <p:nvPr/>
-        </p:nvSpPr>
-        <p:spPr>
-          <a:xfrm>
-            <a:off x="9189720" y="914400"/>
-            <a:ext cx="1691640" cy="960120"/>
-          </a:xfrm>
-          <a:prstGeom prst="rect">
-            <a:avLst/>
-          </a:prstGeom>
-          <a:solidFill>
-            <a:srgbClr val="FFFFFF"/>
-          </a:solidFill>
-          <a:ln w="13970">
-            <a:solidFill>
-              <a:srgbClr val="8E6FC4"/>
-            </a:solidFill>
-            <a:prstDash val="solid"/>
-          </a:ln>
-        </p:spPr>
-      </p:sp>
-      <p:sp>
-        <p:nvSpPr>
-          <p:cNvPr id="30" name="Shape 28"/>
-          <p:cNvSpPr/>
-          <p:nvPr/>
-        </p:nvSpPr>
-        <p:spPr>
-          <a:xfrm>
-            <a:off x="9189720" y="914400"/>
-            <a:ext cx="1691640" cy="237744"/>
-          </a:xfrm>
-          <a:prstGeom prst="rect">
-            <a:avLst/>
-          </a:prstGeom>
-          <a:solidFill>
-            <a:srgbClr val="E8DFF5"/>
-          </a:solidFill>
-          <a:ln w="13970">
-            <a:solidFill>
-              <a:srgbClr val="8E6FC4"/>
-            </a:solidFill>
-            <a:prstDash val="solid"/>
-          </a:ln>
-        </p:spPr>
-      </p:sp>
-      <p:sp>
-        <p:nvSpPr>
-          <p:cNvPr id="31" name="Text 29"/>
-          <p:cNvSpPr/>
-          <p:nvPr/>
-        </p:nvSpPr>
-        <p:spPr>
-          <a:xfrm>
-            <a:off x="9189720" y="914400"/>
-            <a:ext cx="1691640" cy="237744"/>
-          </a:xfrm>
-          <a:prstGeom prst="rect">
-            <a:avLst/>
-          </a:prstGeom>
-          <a:noFill/>
-          <a:ln/>
-        </p:spPr>
-        <p:txBody>
-          <a:bodyPr wrap="square" lIns="0" tIns="0" rIns="0" bIns="0" rtlCol="0" anchor="ctr"/>
-          <a:lstStyle/>
-          <a:p>
-            <a:pPr algn="ctr" indent="0" marL="0">
-              <a:buNone/>
-            </a:pPr>
-            <a:r>
-              <a:rPr lang="en-US" sz="950" b="1" dirty="0">
-                <a:solidFill>
-                  <a:srgbClr val="4B2E83"/>
-                </a:solidFill>
-                <a:latin typeface="Calibri" pitchFamily="34" charset="0"/>
-                <a:ea typeface="Calibri" pitchFamily="34" charset="-122"/>
-                <a:cs typeface="Calibri" pitchFamily="34" charset="-120"/>
-              </a:rPr>
-              <a:t>ApiCall</a:t>
-            </a:r>
-            <a:endParaRPr lang="en-US" sz="950" dirty="0"/>
-          </a:p>
-        </p:txBody>
-      </p:sp>
-      <p:sp>
-        <p:nvSpPr>
-          <p:cNvPr id="32" name="Text 30"/>
-          <p:cNvSpPr/>
-          <p:nvPr/>
-        </p:nvSpPr>
-        <p:spPr>
-          <a:xfrm>
-            <a:off x="9244584" y="1179576"/>
-            <a:ext cx="1581912" cy="649224"/>
-          </a:xfrm>
-          <a:prstGeom prst="rect">
-            <a:avLst/>
-          </a:prstGeom>
-          <a:noFill/>
-          <a:ln/>
-        </p:spPr>
-        <p:txBody>
-          <a:bodyPr wrap="square" lIns="0" tIns="0" rIns="0" bIns="0" rtlCol="0" anchor="t"/>
-          <a:lstStyle/>
-          <a:p>
-            <a:pPr indent="0" marL="0">
-              <a:buNone/>
-            </a:pPr>
-            <a:r>
-              <a:rPr lang="en-US" sz="760" dirty="0">
-                <a:solidFill>
-                  <a:srgbClr val="333333"/>
-                </a:solidFill>
-                <a:latin typeface="Calibri" pitchFamily="34" charset="0"/>
-                <a:ea typeface="Calibri" pitchFamily="34" charset="-122"/>
-                <a:cs typeface="Calibri" pitchFamily="34" charset="-120"/>
-              </a:rPr>
-              <a:t>PK call_id</a:t>
-            </a:r>
-            <a:endParaRPr lang="en-US" sz="760" dirty="0"/>
-          </a:p>
-          <a:p>
-            <a:pPr indent="0" marL="0">
-              <a:buNone/>
-            </a:pPr>
-            <a:r>
-              <a:rPr lang="en-US" sz="760" dirty="0">
-                <a:solidFill>
-                  <a:srgbClr val="333333"/>
-                </a:solidFill>
-                <a:latin typeface="Calibri" pitchFamily="34" charset="0"/>
-                <a:ea typeface="Calibri" pitchFamily="34" charset="-122"/>
-                <a:cs typeface="Calibri" pitchFamily="34" charset="-120"/>
-              </a:rPr>
-              <a:t>endpoint</a:t>
-            </a:r>
-            <a:endParaRPr lang="en-US" sz="760" dirty="0"/>
-          </a:p>
-          <a:p>
-            <a:pPr indent="0" marL="0">
-              <a:buNone/>
-            </a:pPr>
-            <a:r>
-              <a:rPr lang="en-US" sz="760" dirty="0">
-                <a:solidFill>
-                  <a:srgbClr val="333333"/>
-                </a:solidFill>
-                <a:latin typeface="Calibri" pitchFamily="34" charset="0"/>
-                <a:ea typeface="Calibri" pitchFamily="34" charset="-122"/>
-                <a:cs typeface="Calibri" pitchFamily="34" charset="-120"/>
-              </a:rPr>
-              <a:t>status_code</a:t>
-            </a:r>
-            <a:endParaRPr lang="en-US" sz="760" dirty="0"/>
-          </a:p>
-        </p:txBody>
-      </p:sp>
-      <p:sp>
-        <p:nvSpPr>
-          <p:cNvPr id="33" name="Shape 31"/>
-          <p:cNvSpPr/>
-          <p:nvPr/>
-        </p:nvSpPr>
-        <p:spPr>
-          <a:xfrm>
-            <a:off x="274320" y="2011680"/>
-            <a:ext cx="1691640" cy="960120"/>
-          </a:xfrm>
-          <a:prstGeom prst="rect">
-            <a:avLst/>
-          </a:prstGeom>
-          <a:solidFill>
-            <a:srgbClr val="FFFFFF"/>
-          </a:solidFill>
-          <a:ln w="13970">
-            <a:solidFill>
-              <a:srgbClr val="8E6FC4"/>
-            </a:solidFill>
-            <a:prstDash val="solid"/>
-          </a:ln>
-        </p:spPr>
-      </p:sp>
-      <p:sp>
-        <p:nvSpPr>
-          <p:cNvPr id="34" name="Shape 32"/>
-          <p:cNvSpPr/>
-          <p:nvPr/>
-        </p:nvSpPr>
-        <p:spPr>
-          <a:xfrm>
-            <a:off x="274320" y="2011680"/>
-            <a:ext cx="1691640" cy="237744"/>
-          </a:xfrm>
-          <a:prstGeom prst="rect">
-            <a:avLst/>
-          </a:prstGeom>
-          <a:solidFill>
-            <a:srgbClr val="E8DFF5"/>
-          </a:solidFill>
-          <a:ln w="13970">
-            <a:solidFill>
-              <a:srgbClr val="8E6FC4"/>
-            </a:solidFill>
-            <a:prstDash val="solid"/>
-          </a:ln>
-        </p:spPr>
-      </p:sp>
-      <p:sp>
-        <p:nvSpPr>
-          <p:cNvPr id="35" name="Text 33"/>
-          <p:cNvSpPr/>
-          <p:nvPr/>
-        </p:nvSpPr>
-        <p:spPr>
-          <a:xfrm>
-            <a:off x="274320" y="2011680"/>
-            <a:ext cx="1691640" cy="237744"/>
-          </a:xfrm>
-          <a:prstGeom prst="rect">
-            <a:avLst/>
-          </a:prstGeom>
-          <a:noFill/>
-          <a:ln/>
-        </p:spPr>
-        <p:txBody>
-          <a:bodyPr wrap="square" lIns="0" tIns="0" rIns="0" bIns="0" rtlCol="0" anchor="ctr"/>
-          <a:lstStyle/>
-          <a:p>
-            <a:pPr algn="ctr" indent="0" marL="0">
-              <a:buNone/>
-            </a:pPr>
-            <a:r>
-              <a:rPr lang="en-US" sz="950" b="1" dirty="0">
-                <a:solidFill>
-                  <a:srgbClr val="4B2E83"/>
-                </a:solidFill>
-                <a:latin typeface="Calibri" pitchFamily="34" charset="0"/>
-                <a:ea typeface="Calibri" pitchFamily="34" charset="-122"/>
-                <a:cs typeface="Calibri" pitchFamily="34" charset="-120"/>
-              </a:rPr>
-              <a:t>Transaction</a:t>
-            </a:r>
-            <a:endParaRPr lang="en-US" sz="950" dirty="0"/>
-          </a:p>
-        </p:txBody>
-      </p:sp>
-      <p:sp>
-        <p:nvSpPr>
-          <p:cNvPr id="36" name="Text 34"/>
-          <p:cNvSpPr/>
-          <p:nvPr/>
-        </p:nvSpPr>
-        <p:spPr>
-          <a:xfrm>
-            <a:off x="329184" y="2276856"/>
-            <a:ext cx="1581912" cy="649224"/>
-          </a:xfrm>
-          <a:prstGeom prst="rect">
-            <a:avLst/>
-          </a:prstGeom>
-          <a:noFill/>
-          <a:ln/>
-        </p:spPr>
-        <p:txBody>
-          <a:bodyPr wrap="square" lIns="0" tIns="0" rIns="0" bIns="0" rtlCol="0" anchor="t"/>
-          <a:lstStyle/>
-          <a:p>
-            <a:pPr indent="0" marL="0">
-              <a:buNone/>
-            </a:pPr>
-            <a:r>
-              <a:rPr lang="en-US" sz="760" dirty="0">
-                <a:solidFill>
-                  <a:srgbClr val="333333"/>
-                </a:solidFill>
-                <a:latin typeface="Calibri" pitchFamily="34" charset="0"/>
-                <a:ea typeface="Calibri" pitchFamily="34" charset="-122"/>
-                <a:cs typeface="Calibri" pitchFamily="34" charset="-120"/>
-              </a:rPr>
-              <a:t>PK txn_id</a:t>
-            </a:r>
-            <a:endParaRPr lang="en-US" sz="760" dirty="0"/>
-          </a:p>
-          <a:p>
-            <a:pPr indent="0" marL="0">
-              <a:buNone/>
-            </a:pPr>
-            <a:r>
-              <a:rPr lang="en-US" sz="760" dirty="0">
-                <a:solidFill>
-                  <a:srgbClr val="333333"/>
-                </a:solidFill>
-                <a:latin typeface="Calibri" pitchFamily="34" charset="0"/>
-                <a:ea typeface="Calibri" pitchFamily="34" charset="-122"/>
-                <a:cs typeface="Calibri" pitchFamily="34" charset="-120"/>
-              </a:rPr>
-              <a:t>sender/receiver_wallet</a:t>
-            </a:r>
-            <a:endParaRPr lang="en-US" sz="760" dirty="0"/>
-          </a:p>
-          <a:p>
-            <a:pPr indent="0" marL="0">
-              <a:buNone/>
-            </a:pPr>
-            <a:r>
-              <a:rPr lang="en-US" sz="760" dirty="0">
-                <a:solidFill>
-                  <a:srgbClr val="333333"/>
-                </a:solidFill>
-                <a:latin typeface="Calibri" pitchFamily="34" charset="0"/>
-                <a:ea typeface="Calibri" pitchFamily="34" charset="-122"/>
-                <a:cs typeface="Calibri" pitchFamily="34" charset="-120"/>
-              </a:rPr>
-              <a:t>amount, status</a:t>
-            </a:r>
-            <a:endParaRPr lang="en-US" sz="760" dirty="0"/>
-          </a:p>
-        </p:txBody>
-      </p:sp>
-      <p:sp>
-        <p:nvSpPr>
-          <p:cNvPr id="37" name="Shape 35"/>
-          <p:cNvSpPr/>
-          <p:nvPr/>
-        </p:nvSpPr>
-        <p:spPr>
-          <a:xfrm>
-            <a:off x="2057400" y="2011680"/>
-            <a:ext cx="1691640" cy="960120"/>
-          </a:xfrm>
-          <a:prstGeom prst="rect">
-            <a:avLst/>
-          </a:prstGeom>
-          <a:solidFill>
-            <a:srgbClr val="FFFFFF"/>
-          </a:solidFill>
-          <a:ln w="13970">
-            <a:solidFill>
-              <a:srgbClr val="8E6FC4"/>
-            </a:solidFill>
-            <a:prstDash val="solid"/>
-          </a:ln>
-        </p:spPr>
-      </p:sp>
-      <p:sp>
-        <p:nvSpPr>
-          <p:cNvPr id="38" name="Shape 36"/>
-          <p:cNvSpPr/>
-          <p:nvPr/>
-        </p:nvSpPr>
-        <p:spPr>
-          <a:xfrm>
-            <a:off x="2057400" y="2011680"/>
-            <a:ext cx="1691640" cy="237744"/>
-          </a:xfrm>
-          <a:prstGeom prst="rect">
-            <a:avLst/>
-          </a:prstGeom>
-          <a:solidFill>
-            <a:srgbClr val="E8DFF5"/>
-          </a:solidFill>
-          <a:ln w="13970">
-            <a:solidFill>
-              <a:srgbClr val="8E6FC4"/>
-            </a:solidFill>
-            <a:prstDash val="solid"/>
-          </a:ln>
-        </p:spPr>
-      </p:sp>
-      <p:sp>
-        <p:nvSpPr>
-          <p:cNvPr id="39" name="Text 37"/>
-          <p:cNvSpPr/>
-          <p:nvPr/>
-        </p:nvSpPr>
-        <p:spPr>
-          <a:xfrm>
-            <a:off x="2057400" y="2011680"/>
-            <a:ext cx="1691640" cy="237744"/>
-          </a:xfrm>
-          <a:prstGeom prst="rect">
-            <a:avLst/>
-          </a:prstGeom>
-          <a:noFill/>
-          <a:ln/>
-        </p:spPr>
-        <p:txBody>
-          <a:bodyPr wrap="square" lIns="0" tIns="0" rIns="0" bIns="0" rtlCol="0" anchor="ctr"/>
-          <a:lstStyle/>
-          <a:p>
-            <a:pPr algn="ctr" indent="0" marL="0">
-              <a:buNone/>
-            </a:pPr>
-            <a:r>
-              <a:rPr lang="en-US" sz="950" b="1" dirty="0">
-                <a:solidFill>
-                  <a:srgbClr val="4B2E83"/>
-                </a:solidFill>
-                <a:latin typeface="Calibri" pitchFamily="34" charset="0"/>
-                <a:ea typeface="Calibri" pitchFamily="34" charset="-122"/>
-                <a:cs typeface="Calibri" pitchFamily="34" charset="-120"/>
-              </a:rPr>
-              <a:t>LedgerEntry</a:t>
-            </a:r>
-            <a:endParaRPr lang="en-US" sz="950" dirty="0"/>
-          </a:p>
-        </p:txBody>
-      </p:sp>
-      <p:sp>
-        <p:nvSpPr>
-          <p:cNvPr id="40" name="Text 38"/>
-          <p:cNvSpPr/>
-          <p:nvPr/>
-        </p:nvSpPr>
-        <p:spPr>
-          <a:xfrm>
-            <a:off x="2112264" y="2276856"/>
-            <a:ext cx="1581912" cy="649224"/>
-          </a:xfrm>
-          <a:prstGeom prst="rect">
-            <a:avLst/>
-          </a:prstGeom>
-          <a:noFill/>
-          <a:ln/>
-        </p:spPr>
-        <p:txBody>
-          <a:bodyPr wrap="square" lIns="0" tIns="0" rIns="0" bIns="0" rtlCol="0" anchor="t"/>
-          <a:lstStyle/>
-          <a:p>
-            <a:pPr indent="0" marL="0">
-              <a:buNone/>
-            </a:pPr>
-            <a:r>
-              <a:rPr lang="en-US" sz="760" dirty="0">
-                <a:solidFill>
-                  <a:srgbClr val="333333"/>
-                </a:solidFill>
-                <a:latin typeface="Calibri" pitchFamily="34" charset="0"/>
-                <a:ea typeface="Calibri" pitchFamily="34" charset="-122"/>
-                <a:cs typeface="Calibri" pitchFamily="34" charset="-120"/>
-              </a:rPr>
-              <a:t>PK entry_id</a:t>
-            </a:r>
-            <a:endParaRPr lang="en-US" sz="760" dirty="0"/>
-          </a:p>
-          <a:p>
-            <a:pPr indent="0" marL="0">
-              <a:buNone/>
-            </a:pPr>
-            <a:r>
-              <a:rPr lang="en-US" sz="760" dirty="0">
-                <a:solidFill>
-                  <a:srgbClr val="333333"/>
-                </a:solidFill>
-                <a:latin typeface="Calibri" pitchFamily="34" charset="0"/>
-                <a:ea typeface="Calibri" pitchFamily="34" charset="-122"/>
-                <a:cs typeface="Calibri" pitchFamily="34" charset="-120"/>
-              </a:rPr>
-              <a:t>FK txn_id</a:t>
-            </a:r>
-            <a:endParaRPr lang="en-US" sz="760" dirty="0"/>
-          </a:p>
-          <a:p>
-            <a:pPr indent="0" marL="0">
-              <a:buNone/>
-            </a:pPr>
-            <a:r>
-              <a:rPr lang="en-US" sz="760" dirty="0">
-                <a:solidFill>
-                  <a:srgbClr val="333333"/>
-                </a:solidFill>
-                <a:latin typeface="Calibri" pitchFamily="34" charset="0"/>
-                <a:ea typeface="Calibri" pitchFamily="34" charset="-122"/>
-                <a:cs typeface="Calibri" pitchFamily="34" charset="-120"/>
-              </a:rPr>
-              <a:t>direction, amount</a:t>
-            </a:r>
-            <a:endParaRPr lang="en-US" sz="760" dirty="0"/>
-          </a:p>
-        </p:txBody>
-      </p:sp>
-      <p:sp>
-        <p:nvSpPr>
-          <p:cNvPr id="41" name="Shape 39"/>
-          <p:cNvSpPr/>
-          <p:nvPr/>
-        </p:nvSpPr>
-        <p:spPr>
-          <a:xfrm>
-            <a:off x="3840480" y="2011680"/>
-            <a:ext cx="1691640" cy="960120"/>
-          </a:xfrm>
-          <a:prstGeom prst="rect">
-            <a:avLst/>
-          </a:prstGeom>
-          <a:solidFill>
-            <a:srgbClr val="FFFFFF"/>
-          </a:solidFill>
-          <a:ln w="13970">
-            <a:solidFill>
-              <a:srgbClr val="8E6FC4"/>
-            </a:solidFill>
-            <a:prstDash val="solid"/>
-          </a:ln>
-        </p:spPr>
-      </p:sp>
-      <p:sp>
-        <p:nvSpPr>
-          <p:cNvPr id="42" name="Shape 40"/>
-          <p:cNvSpPr/>
-          <p:nvPr/>
-        </p:nvSpPr>
-        <p:spPr>
-          <a:xfrm>
-            <a:off x="3840480" y="2011680"/>
-            <a:ext cx="1691640" cy="237744"/>
-          </a:xfrm>
-          <a:prstGeom prst="rect">
-            <a:avLst/>
-          </a:prstGeom>
-          <a:solidFill>
-            <a:srgbClr val="E8DFF5"/>
-          </a:solidFill>
-          <a:ln w="13970">
-            <a:solidFill>
-              <a:srgbClr val="8E6FC4"/>
-            </a:solidFill>
-            <a:prstDash val="solid"/>
-          </a:ln>
-        </p:spPr>
-      </p:sp>
-      <p:sp>
-        <p:nvSpPr>
-          <p:cNvPr id="43" name="Text 41"/>
-          <p:cNvSpPr/>
-          <p:nvPr/>
-        </p:nvSpPr>
-        <p:spPr>
-          <a:xfrm>
-            <a:off x="3840480" y="2011680"/>
-            <a:ext cx="1691640" cy="237744"/>
-          </a:xfrm>
-          <a:prstGeom prst="rect">
-            <a:avLst/>
-          </a:prstGeom>
-          <a:noFill/>
-          <a:ln/>
-        </p:spPr>
-        <p:txBody>
-          <a:bodyPr wrap="square" lIns="0" tIns="0" rIns="0" bIns="0" rtlCol="0" anchor="ctr"/>
-          <a:lstStyle/>
-          <a:p>
-            <a:pPr algn="ctr" indent="0" marL="0">
-              <a:buNone/>
-            </a:pPr>
-            <a:r>
-              <a:rPr lang="en-US" sz="950" b="1" dirty="0">
-                <a:solidFill>
-                  <a:srgbClr val="4B2E83"/>
-                </a:solidFill>
-                <a:latin typeface="Calibri" pitchFamily="34" charset="0"/>
-                <a:ea typeface="Calibri" pitchFamily="34" charset="-122"/>
-                <a:cs typeface="Calibri" pitchFamily="34" charset="-120"/>
-              </a:rPr>
-              <a:t>FraudAlert</a:t>
-            </a:r>
-            <a:endParaRPr lang="en-US" sz="950" dirty="0"/>
-          </a:p>
-        </p:txBody>
-      </p:sp>
-      <p:sp>
-        <p:nvSpPr>
-          <p:cNvPr id="44" name="Text 42"/>
-          <p:cNvSpPr/>
-          <p:nvPr/>
-        </p:nvSpPr>
-        <p:spPr>
-          <a:xfrm>
-            <a:off x="3895344" y="2276856"/>
-            <a:ext cx="1581912" cy="649224"/>
-          </a:xfrm>
-          <a:prstGeom prst="rect">
-            <a:avLst/>
-          </a:prstGeom>
-          <a:noFill/>
-          <a:ln/>
-        </p:spPr>
-        <p:txBody>
-          <a:bodyPr wrap="square" lIns="0" tIns="0" rIns="0" bIns="0" rtlCol="0" anchor="t"/>
-          <a:lstStyle/>
-          <a:p>
-            <a:pPr indent="0" marL="0">
-              <a:buNone/>
-            </a:pPr>
-            <a:r>
-              <a:rPr lang="en-US" sz="760" dirty="0">
-                <a:solidFill>
-                  <a:srgbClr val="333333"/>
-                </a:solidFill>
-                <a:latin typeface="Calibri" pitchFamily="34" charset="0"/>
-                <a:ea typeface="Calibri" pitchFamily="34" charset="-122"/>
-                <a:cs typeface="Calibri" pitchFamily="34" charset="-120"/>
-              </a:rPr>
-              <a:t>PK alert_id</a:t>
-            </a:r>
-            <a:endParaRPr lang="en-US" sz="760" dirty="0"/>
-          </a:p>
-          <a:p>
-            <a:pPr indent="0" marL="0">
-              <a:buNone/>
-            </a:pPr>
-            <a:r>
-              <a:rPr lang="en-US" sz="760" dirty="0">
-                <a:solidFill>
-                  <a:srgbClr val="333333"/>
-                </a:solidFill>
-                <a:latin typeface="Calibri" pitchFamily="34" charset="0"/>
-                <a:ea typeface="Calibri" pitchFamily="34" charset="-122"/>
-                <a:cs typeface="Calibri" pitchFamily="34" charset="-120"/>
-              </a:rPr>
-              <a:t>FK txn_id</a:t>
-            </a:r>
-            <a:endParaRPr lang="en-US" sz="760" dirty="0"/>
-          </a:p>
-          <a:p>
-            <a:pPr indent="0" marL="0">
-              <a:buNone/>
-            </a:pPr>
-            <a:r>
-              <a:rPr lang="en-US" sz="760" dirty="0">
-                <a:solidFill>
-                  <a:srgbClr val="333333"/>
-                </a:solidFill>
-                <a:latin typeface="Calibri" pitchFamily="34" charset="0"/>
-                <a:ea typeface="Calibri" pitchFamily="34" charset="-122"/>
-                <a:cs typeface="Calibri" pitchFamily="34" charset="-120"/>
-              </a:rPr>
-              <a:t>risk_score, status</a:t>
-            </a:r>
-            <a:endParaRPr lang="en-US" sz="760" dirty="0"/>
-          </a:p>
-        </p:txBody>
-      </p:sp>
-      <p:sp>
-        <p:nvSpPr>
-          <p:cNvPr id="45" name="Shape 43"/>
-          <p:cNvSpPr/>
-          <p:nvPr/>
-        </p:nvSpPr>
-        <p:spPr>
-          <a:xfrm>
-            <a:off x="5623560" y="2011680"/>
-            <a:ext cx="1691640" cy="960120"/>
-          </a:xfrm>
-          <a:prstGeom prst="rect">
-            <a:avLst/>
-          </a:prstGeom>
-          <a:solidFill>
-            <a:srgbClr val="FFFFFF"/>
-          </a:solidFill>
-          <a:ln w="13970">
-            <a:solidFill>
-              <a:srgbClr val="8E6FC4"/>
-            </a:solidFill>
-            <a:prstDash val="solid"/>
-          </a:ln>
-        </p:spPr>
-      </p:sp>
-      <p:sp>
-        <p:nvSpPr>
-          <p:cNvPr id="46" name="Shape 44"/>
-          <p:cNvSpPr/>
-          <p:nvPr/>
-        </p:nvSpPr>
-        <p:spPr>
-          <a:xfrm>
-            <a:off x="5623560" y="2011680"/>
-            <a:ext cx="1691640" cy="237744"/>
-          </a:xfrm>
-          <a:prstGeom prst="rect">
-            <a:avLst/>
-          </a:prstGeom>
-          <a:solidFill>
-            <a:srgbClr val="E8DFF5"/>
-          </a:solidFill>
-          <a:ln w="13970">
-            <a:solidFill>
-              <a:srgbClr val="8E6FC4"/>
-            </a:solidFill>
-            <a:prstDash val="solid"/>
-          </a:ln>
-        </p:spPr>
-      </p:sp>
-      <p:sp>
-        <p:nvSpPr>
-          <p:cNvPr id="47" name="Text 45"/>
-          <p:cNvSpPr/>
-          <p:nvPr/>
-        </p:nvSpPr>
-        <p:spPr>
-          <a:xfrm>
-            <a:off x="5623560" y="2011680"/>
-            <a:ext cx="1691640" cy="237744"/>
-          </a:xfrm>
-          <a:prstGeom prst="rect">
-            <a:avLst/>
-          </a:prstGeom>
-          <a:noFill/>
-          <a:ln/>
-        </p:spPr>
-        <p:txBody>
-          <a:bodyPr wrap="square" lIns="0" tIns="0" rIns="0" bIns="0" rtlCol="0" anchor="ctr"/>
-          <a:lstStyle/>
-          <a:p>
-            <a:pPr algn="ctr" indent="0" marL="0">
-              <a:buNone/>
-            </a:pPr>
-            <a:r>
-              <a:rPr lang="en-US" sz="950" b="1" dirty="0">
-                <a:solidFill>
-                  <a:srgbClr val="4B2E83"/>
-                </a:solidFill>
-                <a:latin typeface="Calibri" pitchFamily="34" charset="0"/>
-                <a:ea typeface="Calibri" pitchFamily="34" charset="-122"/>
-                <a:cs typeface="Calibri" pitchFamily="34" charset="-120"/>
-              </a:rPr>
-              <a:t>Investigation</a:t>
-            </a:r>
-            <a:endParaRPr lang="en-US" sz="950" dirty="0"/>
-          </a:p>
-        </p:txBody>
-      </p:sp>
-      <p:sp>
-        <p:nvSpPr>
-          <p:cNvPr id="48" name="Text 46"/>
-          <p:cNvSpPr/>
-          <p:nvPr/>
-        </p:nvSpPr>
-        <p:spPr>
-          <a:xfrm>
-            <a:off x="5678424" y="2276856"/>
-            <a:ext cx="1581912" cy="649224"/>
-          </a:xfrm>
-          <a:prstGeom prst="rect">
-            <a:avLst/>
-          </a:prstGeom>
-          <a:noFill/>
-          <a:ln/>
-        </p:spPr>
-        <p:txBody>
-          <a:bodyPr wrap="square" lIns="0" tIns="0" rIns="0" bIns="0" rtlCol="0" anchor="t"/>
-          <a:lstStyle/>
-          <a:p>
-            <a:pPr indent="0" marL="0">
-              <a:buNone/>
-            </a:pPr>
-            <a:r>
-              <a:rPr lang="en-US" sz="760" dirty="0">
-                <a:solidFill>
-                  <a:srgbClr val="333333"/>
-                </a:solidFill>
-                <a:latin typeface="Calibri" pitchFamily="34" charset="0"/>
-                <a:ea typeface="Calibri" pitchFamily="34" charset="-122"/>
-                <a:cs typeface="Calibri" pitchFamily="34" charset="-120"/>
-              </a:rPr>
-              <a:t>PK investigation_id</a:t>
-            </a:r>
-            <a:endParaRPr lang="en-US" sz="760" dirty="0"/>
-          </a:p>
-          <a:p>
-            <a:pPr indent="0" marL="0">
-              <a:buNone/>
-            </a:pPr>
-            <a:r>
-              <a:rPr lang="en-US" sz="760" dirty="0">
-                <a:solidFill>
-                  <a:srgbClr val="333333"/>
-                </a:solidFill>
-                <a:latin typeface="Calibri" pitchFamily="34" charset="0"/>
-                <a:ea typeface="Calibri" pitchFamily="34" charset="-122"/>
-                <a:cs typeface="Calibri" pitchFamily="34" charset="-120"/>
-              </a:rPr>
-              <a:t>FK alert_id</a:t>
-            </a:r>
-            <a:endParaRPr lang="en-US" sz="760" dirty="0"/>
-          </a:p>
-          <a:p>
-            <a:pPr indent="0" marL="0">
-              <a:buNone/>
-            </a:pPr>
-            <a:r>
-              <a:rPr lang="en-US" sz="760" dirty="0">
-                <a:solidFill>
-                  <a:srgbClr val="333333"/>
-                </a:solidFill>
-                <a:latin typeface="Calibri" pitchFamily="34" charset="0"/>
-                <a:ea typeface="Calibri" pitchFamily="34" charset="-122"/>
-                <a:cs typeface="Calibri" pitchFamily="34" charset="-120"/>
-              </a:rPr>
-              <a:t>reviewer, notes</a:t>
-            </a:r>
-            <a:endParaRPr lang="en-US" sz="760" dirty="0"/>
-          </a:p>
-        </p:txBody>
-      </p:sp>
-      <p:sp>
-        <p:nvSpPr>
-          <p:cNvPr id="49" name="Shape 47"/>
-          <p:cNvSpPr/>
-          <p:nvPr/>
-        </p:nvSpPr>
-        <p:spPr>
-          <a:xfrm>
-            <a:off x="7406640" y="2011680"/>
-            <a:ext cx="1691640" cy="960120"/>
-          </a:xfrm>
-          <a:prstGeom prst="rect">
-            <a:avLst/>
-          </a:prstGeom>
-          <a:solidFill>
-            <a:srgbClr val="FFFFFF"/>
-          </a:solidFill>
-          <a:ln w="13970">
-            <a:solidFill>
-              <a:srgbClr val="8E6FC4"/>
-            </a:solidFill>
-            <a:prstDash val="solid"/>
-          </a:ln>
-        </p:spPr>
-      </p:sp>
-      <p:sp>
-        <p:nvSpPr>
-          <p:cNvPr id="50" name="Shape 48"/>
-          <p:cNvSpPr/>
-          <p:nvPr/>
-        </p:nvSpPr>
-        <p:spPr>
-          <a:xfrm>
-            <a:off x="7406640" y="2011680"/>
-            <a:ext cx="1691640" cy="237744"/>
-          </a:xfrm>
-          <a:prstGeom prst="rect">
-            <a:avLst/>
-          </a:prstGeom>
-          <a:solidFill>
-            <a:srgbClr val="E8DFF5"/>
-          </a:solidFill>
-          <a:ln w="13970">
-            <a:solidFill>
-              <a:srgbClr val="8E6FC4"/>
-            </a:solidFill>
-            <a:prstDash val="solid"/>
-          </a:ln>
-        </p:spPr>
-      </p:sp>
-      <p:sp>
-        <p:nvSpPr>
-          <p:cNvPr id="51" name="Text 49"/>
-          <p:cNvSpPr/>
-          <p:nvPr/>
-        </p:nvSpPr>
-        <p:spPr>
-          <a:xfrm>
-            <a:off x="7406640" y="2011680"/>
-            <a:ext cx="1691640" cy="237744"/>
-          </a:xfrm>
-          <a:prstGeom prst="rect">
-            <a:avLst/>
-          </a:prstGeom>
-          <a:noFill/>
-          <a:ln/>
-        </p:spPr>
-        <p:txBody>
-          <a:bodyPr wrap="square" lIns="0" tIns="0" rIns="0" bIns="0" rtlCol="0" anchor="ctr"/>
-          <a:lstStyle/>
-          <a:p>
-            <a:pPr algn="ctr" indent="0" marL="0">
-              <a:buNone/>
-            </a:pPr>
-            <a:r>
-              <a:rPr lang="en-US" sz="950" b="1" dirty="0">
-                <a:solidFill>
-                  <a:srgbClr val="4B2E83"/>
-                </a:solidFill>
-                <a:latin typeface="Calibri" pitchFamily="34" charset="0"/>
-                <a:ea typeface="Calibri" pitchFamily="34" charset="-122"/>
-                <a:cs typeface="Calibri" pitchFamily="34" charset="-120"/>
-              </a:rPr>
-              <a:t>ModelRegistry</a:t>
-            </a:r>
-            <a:endParaRPr lang="en-US" sz="950" dirty="0"/>
-          </a:p>
-        </p:txBody>
-      </p:sp>
-      <p:sp>
-        <p:nvSpPr>
-          <p:cNvPr id="52" name="Text 50"/>
-          <p:cNvSpPr/>
-          <p:nvPr/>
-        </p:nvSpPr>
-        <p:spPr>
-          <a:xfrm>
-            <a:off x="7461504" y="2276856"/>
-            <a:ext cx="1581912" cy="649224"/>
-          </a:xfrm>
-          <a:prstGeom prst="rect">
-            <a:avLst/>
-          </a:prstGeom>
-          <a:noFill/>
-          <a:ln/>
-        </p:spPr>
-        <p:txBody>
-          <a:bodyPr wrap="square" lIns="0" tIns="0" rIns="0" bIns="0" rtlCol="0" anchor="t"/>
-          <a:lstStyle/>
-          <a:p>
-            <a:pPr indent="0" marL="0">
-              <a:buNone/>
-            </a:pPr>
-            <a:r>
-              <a:rPr lang="en-US" sz="760" dirty="0">
-                <a:solidFill>
-                  <a:srgbClr val="333333"/>
-                </a:solidFill>
-                <a:latin typeface="Calibri" pitchFamily="34" charset="0"/>
-                <a:ea typeface="Calibri" pitchFamily="34" charset="-122"/>
-                <a:cs typeface="Calibri" pitchFamily="34" charset="-120"/>
-              </a:rPr>
-              <a:t>PK model_id</a:t>
-            </a:r>
-            <a:endParaRPr lang="en-US" sz="760" dirty="0"/>
-          </a:p>
-          <a:p>
-            <a:pPr indent="0" marL="0">
-              <a:buNone/>
-            </a:pPr>
-            <a:r>
-              <a:rPr lang="en-US" sz="760" dirty="0">
-                <a:solidFill>
-                  <a:srgbClr val="333333"/>
-                </a:solidFill>
-                <a:latin typeface="Calibri" pitchFamily="34" charset="0"/>
-                <a:ea typeface="Calibri" pitchFamily="34" charset="-122"/>
-                <a:cs typeface="Calibri" pitchFamily="34" charset="-120"/>
-              </a:rPr>
-              <a:t>version, metrics</a:t>
-            </a:r>
-            <a:endParaRPr lang="en-US" sz="760" dirty="0"/>
-          </a:p>
-          <a:p>
-            <a:pPr indent="0" marL="0">
-              <a:buNone/>
-            </a:pPr>
-            <a:r>
-              <a:rPr lang="en-US" sz="760" dirty="0">
-                <a:solidFill>
-                  <a:srgbClr val="333333"/>
-                </a:solidFill>
-                <a:latin typeface="Calibri" pitchFamily="34" charset="0"/>
-                <a:ea typeface="Calibri" pitchFamily="34" charset="-122"/>
-                <a:cs typeface="Calibri" pitchFamily="34" charset="-120"/>
-              </a:rPr>
-              <a:t>trained_at</a:t>
-            </a:r>
-            <a:endParaRPr lang="en-US" sz="760" dirty="0"/>
-          </a:p>
-        </p:txBody>
-      </p:sp>
-      <p:sp>
-        <p:nvSpPr>
-          <p:cNvPr id="53" name="Shape 51"/>
-          <p:cNvSpPr/>
-          <p:nvPr/>
-        </p:nvSpPr>
-        <p:spPr>
-          <a:xfrm>
-            <a:off x="9189720" y="2011680"/>
-            <a:ext cx="1691640" cy="960120"/>
-          </a:xfrm>
-          <a:prstGeom prst="rect">
-            <a:avLst/>
-          </a:prstGeom>
-          <a:solidFill>
-            <a:srgbClr val="FFFFFF"/>
-          </a:solidFill>
-          <a:ln w="13970">
-            <a:solidFill>
-              <a:srgbClr val="8E6FC4"/>
-            </a:solidFill>
-            <a:prstDash val="solid"/>
-          </a:ln>
-        </p:spPr>
-      </p:sp>
-      <p:sp>
-        <p:nvSpPr>
-          <p:cNvPr id="54" name="Shape 52"/>
-          <p:cNvSpPr/>
-          <p:nvPr/>
-        </p:nvSpPr>
-        <p:spPr>
-          <a:xfrm>
-            <a:off x="9189720" y="2011680"/>
-            <a:ext cx="1691640" cy="237744"/>
-          </a:xfrm>
-          <a:prstGeom prst="rect">
-            <a:avLst/>
-          </a:prstGeom>
-          <a:solidFill>
-            <a:srgbClr val="E8DFF5"/>
-          </a:solidFill>
-          <a:ln w="13970">
-            <a:solidFill>
-              <a:srgbClr val="8E6FC4"/>
-            </a:solidFill>
-            <a:prstDash val="solid"/>
-          </a:ln>
-        </p:spPr>
-      </p:sp>
-      <p:sp>
-        <p:nvSpPr>
-          <p:cNvPr id="55" name="Text 53"/>
-          <p:cNvSpPr/>
-          <p:nvPr/>
-        </p:nvSpPr>
-        <p:spPr>
-          <a:xfrm>
-            <a:off x="9189720" y="2011680"/>
-            <a:ext cx="1691640" cy="237744"/>
-          </a:xfrm>
-          <a:prstGeom prst="rect">
-            <a:avLst/>
-          </a:prstGeom>
-          <a:noFill/>
-          <a:ln/>
-        </p:spPr>
-        <p:txBody>
-          <a:bodyPr wrap="square" lIns="0" tIns="0" rIns="0" bIns="0" rtlCol="0" anchor="ctr"/>
-          <a:lstStyle/>
-          <a:p>
-            <a:pPr algn="ctr" indent="0" marL="0">
-              <a:buNone/>
-            </a:pPr>
-            <a:r>
-              <a:rPr lang="en-US" sz="950" b="1" dirty="0">
-                <a:solidFill>
-                  <a:srgbClr val="4B2E83"/>
-                </a:solidFill>
-                <a:latin typeface="Calibri" pitchFamily="34" charset="0"/>
-                <a:ea typeface="Calibri" pitchFamily="34" charset="-122"/>
-                <a:cs typeface="Calibri" pitchFamily="34" charset="-120"/>
-              </a:rPr>
-              <a:t>AuditLog</a:t>
-            </a:r>
-            <a:endParaRPr lang="en-US" sz="950" dirty="0"/>
-          </a:p>
-        </p:txBody>
-      </p:sp>
-      <p:sp>
-        <p:nvSpPr>
-          <p:cNvPr id="56" name="Text 54"/>
-          <p:cNvSpPr/>
-          <p:nvPr/>
-        </p:nvSpPr>
-        <p:spPr>
-          <a:xfrm>
-            <a:off x="9244584" y="2276856"/>
-            <a:ext cx="1581912" cy="649224"/>
-          </a:xfrm>
-          <a:prstGeom prst="rect">
-            <a:avLst/>
-          </a:prstGeom>
-          <a:noFill/>
-          <a:ln/>
-        </p:spPr>
-        <p:txBody>
-          <a:bodyPr wrap="square" lIns="0" tIns="0" rIns="0" bIns="0" rtlCol="0" anchor="t"/>
-          <a:lstStyle/>
-          <a:p>
-            <a:pPr indent="0" marL="0">
-              <a:buNone/>
-            </a:pPr>
-            <a:r>
-              <a:rPr lang="en-US" sz="760" dirty="0">
-                <a:solidFill>
-                  <a:srgbClr val="333333"/>
-                </a:solidFill>
-                <a:latin typeface="Calibri" pitchFamily="34" charset="0"/>
-                <a:ea typeface="Calibri" pitchFamily="34" charset="-122"/>
-                <a:cs typeface="Calibri" pitchFamily="34" charset="-120"/>
-              </a:rPr>
-              <a:t>PK audit_id</a:t>
-            </a:r>
-            <a:endParaRPr lang="en-US" sz="760" dirty="0"/>
-          </a:p>
-          <a:p>
-            <a:pPr indent="0" marL="0">
-              <a:buNone/>
-            </a:pPr>
-            <a:r>
-              <a:rPr lang="en-US" sz="760" dirty="0">
-                <a:solidFill>
-                  <a:srgbClr val="333333"/>
-                </a:solidFill>
-                <a:latin typeface="Calibri" pitchFamily="34" charset="0"/>
-                <a:ea typeface="Calibri" pitchFamily="34" charset="-122"/>
-                <a:cs typeface="Calibri" pitchFamily="34" charset="-120"/>
-              </a:rPr>
-              <a:t>action, actor</a:t>
-            </a:r>
-            <a:endParaRPr lang="en-US" sz="760" dirty="0"/>
-          </a:p>
-          <a:p>
-            <a:pPr indent="0" marL="0">
-              <a:buNone/>
-            </a:pPr>
-            <a:r>
-              <a:rPr lang="en-US" sz="760" dirty="0">
-                <a:solidFill>
-                  <a:srgbClr val="333333"/>
-                </a:solidFill>
-                <a:latin typeface="Calibri" pitchFamily="34" charset="0"/>
-                <a:ea typeface="Calibri" pitchFamily="34" charset="-122"/>
-                <a:cs typeface="Calibri" pitchFamily="34" charset="-120"/>
-              </a:rPr>
-              <a:t>correlation_id</a:t>
-            </a:r>
-            <a:endParaRPr lang="en-US" sz="760" dirty="0"/>
-          </a:p>
-        </p:txBody>
-      </p:sp>
-      <p:sp>
-        <p:nvSpPr>
-          <p:cNvPr id="57" name="Shape 55"/>
-          <p:cNvSpPr/>
-          <p:nvPr/>
-        </p:nvSpPr>
-        <p:spPr>
-          <a:xfrm>
-            <a:off x="274320" y="3108960"/>
-            <a:ext cx="1691640" cy="914400"/>
-          </a:xfrm>
-          <a:prstGeom prst="rect">
-            <a:avLst/>
-          </a:prstGeom>
-          <a:solidFill>
-            <a:srgbClr val="FFFFFF"/>
-          </a:solidFill>
-          <a:ln w="13970">
-            <a:solidFill>
-              <a:srgbClr val="8E6FC4"/>
-            </a:solidFill>
-            <a:prstDash val="solid"/>
-          </a:ln>
-        </p:spPr>
-      </p:sp>
-      <p:sp>
-        <p:nvSpPr>
-          <p:cNvPr id="58" name="Shape 56"/>
-          <p:cNvSpPr/>
-          <p:nvPr/>
-        </p:nvSpPr>
-        <p:spPr>
-          <a:xfrm>
-            <a:off x="274320" y="3108960"/>
-            <a:ext cx="1691640" cy="237744"/>
-          </a:xfrm>
-          <a:prstGeom prst="rect">
-            <a:avLst/>
-          </a:prstGeom>
-          <a:solidFill>
-            <a:srgbClr val="E8DFF5"/>
-          </a:solidFill>
-          <a:ln w="13970">
-            <a:solidFill>
-              <a:srgbClr val="8E6FC4"/>
-            </a:solidFill>
-            <a:prstDash val="solid"/>
-          </a:ln>
-        </p:spPr>
-      </p:sp>
-      <p:sp>
-        <p:nvSpPr>
-          <p:cNvPr id="59" name="Text 57"/>
-          <p:cNvSpPr/>
-          <p:nvPr/>
-        </p:nvSpPr>
-        <p:spPr>
-          <a:xfrm>
-            <a:off x="274320" y="3108960"/>
-            <a:ext cx="1691640" cy="237744"/>
-          </a:xfrm>
-          <a:prstGeom prst="rect">
-            <a:avLst/>
-          </a:prstGeom>
-          <a:noFill/>
-          <a:ln/>
-        </p:spPr>
-        <p:txBody>
-          <a:bodyPr wrap="square" lIns="0" tIns="0" rIns="0" bIns="0" rtlCol="0" anchor="ctr"/>
-          <a:lstStyle/>
-          <a:p>
-            <a:pPr algn="ctr" indent="0" marL="0">
-              <a:buNone/>
-            </a:pPr>
-            <a:r>
-              <a:rPr lang="en-US" sz="950" b="1" dirty="0">
-                <a:solidFill>
-                  <a:srgbClr val="4B2E83"/>
-                </a:solidFill>
-                <a:latin typeface="Calibri" pitchFamily="34" charset="0"/>
-                <a:ea typeface="Calibri" pitchFamily="34" charset="-122"/>
-                <a:cs typeface="Calibri" pitchFamily="34" charset="-120"/>
-              </a:rPr>
-              <a:t>CbdcWallet</a:t>
-            </a:r>
-            <a:endParaRPr lang="en-US" sz="950" dirty="0"/>
-          </a:p>
-        </p:txBody>
-      </p:sp>
-      <p:sp>
-        <p:nvSpPr>
-          <p:cNvPr id="60" name="Text 58"/>
-          <p:cNvSpPr/>
-          <p:nvPr/>
-        </p:nvSpPr>
-        <p:spPr>
-          <a:xfrm>
-            <a:off x="329184" y="3374136"/>
-            <a:ext cx="1581912" cy="603504"/>
-          </a:xfrm>
-          <a:prstGeom prst="rect">
-            <a:avLst/>
-          </a:prstGeom>
-          <a:noFill/>
-          <a:ln/>
-        </p:spPr>
-        <p:txBody>
-          <a:bodyPr wrap="square" lIns="0" tIns="0" rIns="0" bIns="0" rtlCol="0" anchor="t"/>
-          <a:lstStyle/>
-          <a:p>
-            <a:pPr indent="0" marL="0">
-              <a:buNone/>
-            </a:pPr>
-            <a:r>
-              <a:rPr lang="en-US" sz="760" dirty="0">
-                <a:solidFill>
-                  <a:srgbClr val="333333"/>
-                </a:solidFill>
-                <a:latin typeface="Calibri" pitchFamily="34" charset="0"/>
-                <a:ea typeface="Calibri" pitchFamily="34" charset="-122"/>
-                <a:cs typeface="Calibri" pitchFamily="34" charset="-120"/>
-              </a:rPr>
-              <a:t>PK cbdc_wallet_id</a:t>
-            </a:r>
-            <a:endParaRPr lang="en-US" sz="760" dirty="0"/>
-          </a:p>
-          <a:p>
-            <a:pPr indent="0" marL="0">
-              <a:buNone/>
-            </a:pPr>
-            <a:r>
-              <a:rPr lang="en-US" sz="760" dirty="0">
-                <a:solidFill>
-                  <a:srgbClr val="333333"/>
-                </a:solidFill>
-                <a:latin typeface="Calibri" pitchFamily="34" charset="0"/>
-                <a:ea typeface="Calibri" pitchFamily="34" charset="-122"/>
-                <a:cs typeface="Calibri" pitchFamily="34" charset="-120"/>
-              </a:rPr>
-              <a:t>FK customer_id</a:t>
-            </a:r>
-            <a:endParaRPr lang="en-US" sz="760" dirty="0"/>
-          </a:p>
-          <a:p>
-            <a:pPr indent="0" marL="0">
-              <a:buNone/>
-            </a:pPr>
-            <a:r>
-              <a:rPr lang="en-US" sz="760" dirty="0">
-                <a:solidFill>
-                  <a:srgbClr val="333333"/>
-                </a:solidFill>
-                <a:latin typeface="Calibri" pitchFamily="34" charset="0"/>
-                <a:ea typeface="Calibri" pitchFamily="34" charset="-122"/>
-                <a:cs typeface="Calibri" pitchFamily="34" charset="-120"/>
-              </a:rPr>
-              <a:t>balance</a:t>
-            </a:r>
-            <a:endParaRPr lang="en-US" sz="760" dirty="0"/>
-          </a:p>
-        </p:txBody>
-      </p:sp>
-      <p:sp>
-        <p:nvSpPr>
-          <p:cNvPr id="61" name="Shape 59"/>
-          <p:cNvSpPr/>
-          <p:nvPr/>
-        </p:nvSpPr>
-        <p:spPr>
-          <a:xfrm>
-            <a:off x="2057400" y="3108960"/>
-            <a:ext cx="1691640" cy="914400"/>
-          </a:xfrm>
-          <a:prstGeom prst="rect">
-            <a:avLst/>
-          </a:prstGeom>
-          <a:solidFill>
-            <a:srgbClr val="FFFFFF"/>
-          </a:solidFill>
-          <a:ln w="13970">
-            <a:solidFill>
-              <a:srgbClr val="8E6FC4"/>
-            </a:solidFill>
-            <a:prstDash val="solid"/>
-          </a:ln>
-        </p:spPr>
-      </p:sp>
-      <p:sp>
-        <p:nvSpPr>
-          <p:cNvPr id="62" name="Shape 60"/>
-          <p:cNvSpPr/>
-          <p:nvPr/>
-        </p:nvSpPr>
-        <p:spPr>
-          <a:xfrm>
-            <a:off x="2057400" y="3108960"/>
-            <a:ext cx="1691640" cy="237744"/>
-          </a:xfrm>
-          <a:prstGeom prst="rect">
-            <a:avLst/>
-          </a:prstGeom>
-          <a:solidFill>
-            <a:srgbClr val="E8DFF5"/>
-          </a:solidFill>
-          <a:ln w="13970">
-            <a:solidFill>
-              <a:srgbClr val="8E6FC4"/>
-            </a:solidFill>
-            <a:prstDash val="solid"/>
-          </a:ln>
-        </p:spPr>
-      </p:sp>
-      <p:sp>
-        <p:nvSpPr>
-          <p:cNvPr id="63" name="Text 61"/>
-          <p:cNvSpPr/>
-          <p:nvPr/>
-        </p:nvSpPr>
-        <p:spPr>
-          <a:xfrm>
-            <a:off x="2057400" y="3108960"/>
-            <a:ext cx="1691640" cy="237744"/>
-          </a:xfrm>
-          <a:prstGeom prst="rect">
-            <a:avLst/>
-          </a:prstGeom>
-          <a:noFill/>
-          <a:ln/>
-        </p:spPr>
-        <p:txBody>
-          <a:bodyPr wrap="square" lIns="0" tIns="0" rIns="0" bIns="0" rtlCol="0" anchor="ctr"/>
-          <a:lstStyle/>
-          <a:p>
-            <a:pPr algn="ctr" indent="0" marL="0">
-              <a:buNone/>
-            </a:pPr>
-            <a:r>
-              <a:rPr lang="en-US" sz="950" b="1" dirty="0">
-                <a:solidFill>
-                  <a:srgbClr val="4B2E83"/>
-                </a:solidFill>
-                <a:latin typeface="Calibri" pitchFamily="34" charset="0"/>
-                <a:ea typeface="Calibri" pitchFamily="34" charset="-122"/>
-                <a:cs typeface="Calibri" pitchFamily="34" charset="-120"/>
-              </a:rPr>
-              <a:t>CbdcOperation</a:t>
-            </a:r>
-            <a:endParaRPr lang="en-US" sz="950" dirty="0"/>
-          </a:p>
-        </p:txBody>
-      </p:sp>
-      <p:sp>
-        <p:nvSpPr>
-          <p:cNvPr id="64" name="Text 62"/>
-          <p:cNvSpPr/>
-          <p:nvPr/>
-        </p:nvSpPr>
-        <p:spPr>
-          <a:xfrm>
-            <a:off x="2112264" y="3374136"/>
-            <a:ext cx="1581912" cy="603504"/>
-          </a:xfrm>
-          <a:prstGeom prst="rect">
-            <a:avLst/>
-          </a:prstGeom>
-          <a:noFill/>
-          <a:ln/>
-        </p:spPr>
-        <p:txBody>
-          <a:bodyPr wrap="square" lIns="0" tIns="0" rIns="0" bIns="0" rtlCol="0" anchor="t"/>
-          <a:lstStyle/>
-          <a:p>
-            <a:pPr indent="0" marL="0">
-              <a:buNone/>
-            </a:pPr>
-            <a:r>
-              <a:rPr lang="en-US" sz="760" dirty="0">
-                <a:solidFill>
-                  <a:srgbClr val="333333"/>
-                </a:solidFill>
-                <a:latin typeface="Calibri" pitchFamily="34" charset="0"/>
-                <a:ea typeface="Calibri" pitchFamily="34" charset="-122"/>
-                <a:cs typeface="Calibri" pitchFamily="34" charset="-120"/>
-              </a:rPr>
-              <a:t>PK op_id</a:t>
-            </a:r>
-            <a:endParaRPr lang="en-US" sz="760" dirty="0"/>
-          </a:p>
-          <a:p>
-            <a:pPr indent="0" marL="0">
-              <a:buNone/>
-            </a:pPr>
-            <a:r>
-              <a:rPr lang="en-US" sz="760" dirty="0">
-                <a:solidFill>
-                  <a:srgbClr val="333333"/>
-                </a:solidFill>
-                <a:latin typeface="Calibri" pitchFamily="34" charset="0"/>
-                <a:ea typeface="Calibri" pitchFamily="34" charset="-122"/>
-                <a:cs typeface="Calibri" pitchFamily="34" charset="-120"/>
-              </a:rPr>
-              <a:t>FK cbdc_wallet_id</a:t>
-            </a:r>
-            <a:endParaRPr lang="en-US" sz="760" dirty="0"/>
-          </a:p>
-          <a:p>
-            <a:pPr indent="0" marL="0">
-              <a:buNone/>
-            </a:pPr>
-            <a:r>
-              <a:rPr lang="en-US" sz="760" dirty="0">
-                <a:solidFill>
-                  <a:srgbClr val="333333"/>
-                </a:solidFill>
-                <a:latin typeface="Calibri" pitchFamily="34" charset="0"/>
-                <a:ea typeface="Calibri" pitchFamily="34" charset="-122"/>
-                <a:cs typeface="Calibri" pitchFamily="34" charset="-120"/>
-              </a:rPr>
-              <a:t>issue/redeem</a:t>
-            </a:r>
-            <a:endParaRPr lang="en-US" sz="760" dirty="0"/>
-          </a:p>
-        </p:txBody>
-      </p:sp>
-      <p:sp>
-        <p:nvSpPr>
-          <p:cNvPr id="75" name="Text 73"/>
-          <p:cNvSpPr/>
-          <p:nvPr/>
-        </p:nvSpPr>
-        <p:spPr>
-          <a:xfrm>
-            <a:off x="274320" y="4206240"/>
-            <a:ext cx="10607040" cy="201168"/>
-          </a:xfrm>
-          <a:prstGeom prst="rect">
-            <a:avLst/>
-          </a:prstGeom>
-          <a:noFill/>
-          <a:ln/>
-        </p:spPr>
-        <p:txBody>
-          <a:bodyPr wrap="square" lIns="0" tIns="0" rIns="0" bIns="0" rtlCol="0" anchor="ctr"/>
-          <a:lstStyle/>
-          <a:p>
-            <a:pPr algn="l" indent="0" marL="0">
-              <a:buNone/>
-            </a:pPr>
-            <a:r>
-              <a:rPr lang="en-US" sz="900" i="1" dirty="0">
-                <a:solidFill>
-                  <a:srgbClr val="666666"/>
-                </a:solidFill>
-                <a:latin typeface="Calibri" pitchFamily="34" charset="0"/>
-                <a:ea typeface="Calibri" pitchFamily="34" charset="-122"/>
-                <a:cs typeface="Calibri" pitchFamily="34" charset="-120"/>
-              </a:rPr>
-              <a:t>How to read it: FK means foreign key and identifies the related table. A user may have a customer or merchant profile. Profiles own wallets. Transactions create ledger entries and may trigger fraud alerts for investigation.</a:t>
-            </a:r>
-            <a:endParaRPr lang="en-US" sz="900" dirty="0"/>
-          </a:p>
-        </p:txBody>
-      </p:sp>
+            <a:ext cx="12192000" cy="6858000"/>
+          </a:xfrm>
+          <a:prstGeom prst="rect">
+            <a:avLst/>
+          </a:prstGeom>
+        </p:spPr>
+      </p:pic>
     </p:spTree>
   </p:cSld>
   <p:clrMapOvr>

--- a/docs/architecture/GlobalPay_Mandatory_Architecture_Deliverables.pptx
+++ b/docs/architecture/GlobalPay_Mandatory_Architecture_Deliverables.pptx
@@ -2521,7 +2521,7 @@
                 <a:ea typeface="Cambria" pitchFamily="34" charset="-122"/>
                 <a:cs typeface="Cambria" pitchFamily="34" charset="-120"/>
               </a:rPr>
-              <a:t>Mandatory Architecture &amp; Engineering Deliverables</a:t>
+              <a:t>Section 8 — Complete Diagram Pack</a:t>
             </a:r>
             <a:endParaRPr lang="en-US" sz="2200" dirty="0"/>
           </a:p>
@@ -2560,7 +2560,7 @@
                 <a:ea typeface="Calibri" pitchFamily="34" charset="-122"/>
                 <a:cs typeface="Calibri" pitchFamily="34" charset="-120"/>
               </a:rPr>
-              <a:t>Section 8 • 17 required diagrams • numbered to match the examination brief</a:t>
+              <a:t>All 17 mandatory diagrams, numbered exactly as listed in the exam brief</a:t>
             </a:r>
             <a:endParaRPr lang="en-US" sz="1150" dirty="0"/>
           </a:p>
@@ -2747,7 +2747,7 @@
                           <a:ea typeface="Calibri" pitchFamily="34" charset="-122"/>
                           <a:cs typeface="Calibri" pitchFamily="34" charset="-120"/>
                         </a:rPr>
-                        <a:t>Presentation coverage</a:t>
+                        <a:t>Also in Stage 1 deck?</a:t>
                       </a:r>
                       <a:endParaRPr lang="en-US" sz="900" dirty="0">
                         <a:latin typeface="Calibri" charset="0"/>
@@ -6314,7 +6314,7 @@
 </file>
 
 <file path=ppt/slides/slide10.xml><?xml version="1.0" encoding="utf-8"?>
-<p:sld xmlns:a="http://schemas.openxmlformats.org/drawingml/2006/main" xmlns:p="http://schemas.openxmlformats.org/presentationml/2006/main" xmlns:r="http://schemas.openxmlformats.org/officeDocument/2006/relationships">
+<p:sld xmlns:a="http://schemas.openxmlformats.org/drawingml/2006/main" xmlns:r="http://schemas.openxmlformats.org/officeDocument/2006/relationships" xmlns:p="http://schemas.openxmlformats.org/presentationml/2006/main">
   <p:cSld name="Slide 10">
     <p:bg>
       <p:bgPr>
@@ -6337,28 +6337,1346 @@
           <a:chExt cx="0" cy="0"/>
         </a:xfrm>
       </p:grpSpPr>
-      <p:pic>
-        <p:nvPicPr>
-          <p:cNvPr id="2" name="section8-network-architecture.png"/>
-          <p:cNvPicPr/>
-          <p:nvPr/>
-        </p:nvPicPr>
-        <p:blipFill>
-          <a:blip r:embed="rId1"/>
-          <a:stretch>
-            <a:fillRect/>
-          </a:stretch>
-        </p:blipFill>
+      <p:sp>
+        <p:nvSpPr>
+          <p:cNvPr id="2" name="Shape 0"/>
+          <p:cNvSpPr/>
+          <p:nvPr/>
+        </p:nvSpPr>
         <p:spPr>
           <a:xfrm>
             <a:off x="0" y="0"/>
-            <a:ext cx="12192000" cy="6858000"/>
-          </a:xfrm>
-          <a:prstGeom prst="rect">
-            <a:avLst/>
-          </a:prstGeom>
-        </p:spPr>
-      </p:pic>
+            <a:ext cx="82296" cy="6858000"/>
+          </a:xfrm>
+          <a:prstGeom prst="rect">
+            <a:avLst/>
+          </a:prstGeom>
+          <a:solidFill>
+            <a:srgbClr val="1E2761"/>
+          </a:solidFill>
+          <a:ln/>
+        </p:spPr>
+      </p:sp>
+      <p:sp>
+        <p:nvSpPr>
+          <p:cNvPr id="3" name="Shape 1"/>
+          <p:cNvSpPr/>
+          <p:nvPr/>
+        </p:nvSpPr>
+        <p:spPr>
+          <a:xfrm>
+            <a:off x="292608" y="182880"/>
+            <a:ext cx="310896" cy="310896"/>
+          </a:xfrm>
+          <a:prstGeom prst="roundRect">
+            <a:avLst>
+              <a:gd name="adj" fmla="val 28000"/>
+            </a:avLst>
+          </a:prstGeom>
+          <a:solidFill>
+            <a:srgbClr val="1E2761"/>
+          </a:solidFill>
+          <a:ln/>
+        </p:spPr>
+      </p:sp>
+      <p:sp>
+        <p:nvSpPr>
+          <p:cNvPr id="4" name="Text 2"/>
+          <p:cNvSpPr/>
+          <p:nvPr/>
+        </p:nvSpPr>
+        <p:spPr>
+          <a:xfrm>
+            <a:off x="292608" y="182880"/>
+            <a:ext cx="310896" cy="310896"/>
+          </a:xfrm>
+          <a:prstGeom prst="rect">
+            <a:avLst/>
+          </a:prstGeom>
+          <a:noFill/>
+          <a:ln/>
+        </p:spPr>
+        <p:txBody>
+          <a:bodyPr wrap="square" lIns="0" tIns="0" rIns="0" bIns="0" rtlCol="0" anchor="ctr"/>
+          <a:lstStyle/>
+          <a:p>
+            <a:pPr algn="ctr" indent="0" marL="0">
+              <a:buNone/>
+            </a:pPr>
+            <a:r>
+              <a:rPr lang="en-US" sz="1428" b="1" dirty="0">
+                <a:solidFill>
+                  <a:srgbClr val="FFFFFF"/>
+                </a:solidFill>
+                <a:latin typeface="Cambria" pitchFamily="34" charset="0"/>
+                <a:ea typeface="Cambria" pitchFamily="34" charset="-122"/>
+                <a:cs typeface="Cambria" pitchFamily="34" charset="-120"/>
+              </a:rPr>
+              <a:t>G</a:t>
+            </a:r>
+            <a:endParaRPr lang="en-US" sz="1428" dirty="0"/>
+          </a:p>
+        </p:txBody>
+      </p:sp>
+      <p:sp>
+        <p:nvSpPr>
+          <p:cNvPr id="5" name="Text 3"/>
+          <p:cNvSpPr/>
+          <p:nvPr/>
+        </p:nvSpPr>
+        <p:spPr>
+          <a:xfrm>
+            <a:off x="749808" y="164592"/>
+            <a:ext cx="9857232" cy="384048"/>
+          </a:xfrm>
+          <a:prstGeom prst="rect">
+            <a:avLst/>
+          </a:prstGeom>
+          <a:noFill/>
+          <a:ln/>
+        </p:spPr>
+        <p:txBody>
+          <a:bodyPr wrap="square" lIns="0" tIns="0" rIns="0" bIns="0" rtlCol="0" anchor="ctr"/>
+          <a:lstStyle/>
+          <a:p>
+            <a:pPr indent="0" marL="0">
+              <a:buNone/>
+            </a:pPr>
+            <a:r>
+              <a:rPr lang="en-US" sz="2000" b="1" dirty="0">
+                <a:solidFill>
+                  <a:srgbClr val="1E2761"/>
+                </a:solidFill>
+                <a:latin typeface="Cambria" pitchFamily="34" charset="0"/>
+                <a:ea typeface="Cambria" pitchFamily="34" charset="-122"/>
+                <a:cs typeface="Cambria" pitchFamily="34" charset="-120"/>
+              </a:rPr>
+              <a:t>Enterprise Network Architecture</a:t>
+            </a:r>
+            <a:endParaRPr lang="en-US" sz="2000" dirty="0"/>
+          </a:p>
+        </p:txBody>
+      </p:sp>
+      <p:sp>
+        <p:nvSpPr>
+          <p:cNvPr id="6" name="Text 4"/>
+          <p:cNvSpPr/>
+          <p:nvPr/>
+        </p:nvSpPr>
+        <p:spPr>
+          <a:xfrm>
+            <a:off x="749808" y="548640"/>
+            <a:ext cx="10607040" cy="237744"/>
+          </a:xfrm>
+          <a:prstGeom prst="rect">
+            <a:avLst/>
+          </a:prstGeom>
+          <a:noFill/>
+          <a:ln/>
+        </p:spPr>
+        <p:txBody>
+          <a:bodyPr wrap="square" lIns="0" tIns="0" rIns="0" bIns="0" rtlCol="0" anchor="ctr"/>
+          <a:lstStyle/>
+          <a:p>
+            <a:pPr indent="0" marL="0">
+              <a:buNone/>
+            </a:pPr>
+            <a:r>
+              <a:rPr lang="en-US" sz="1050" dirty="0">
+                <a:solidFill>
+                  <a:srgbClr val="555555"/>
+                </a:solidFill>
+                <a:latin typeface="Calibri" pitchFamily="34" charset="0"/>
+                <a:ea typeface="Calibri" pitchFamily="34" charset="-122"/>
+                <a:cs typeface="Calibri" pitchFamily="34" charset="-120"/>
+              </a:rPr>
+              <a:t>compose.yaml — 6 containers on one Docker network (globalpay-net)</a:t>
+            </a:r>
+            <a:endParaRPr lang="en-US" sz="1050" dirty="0"/>
+          </a:p>
+        </p:txBody>
+      </p:sp>
+      <p:sp>
+        <p:nvSpPr>
+          <p:cNvPr id="7" name="Shape 5"/>
+          <p:cNvSpPr/>
+          <p:nvPr/>
+        </p:nvSpPr>
+        <p:spPr>
+          <a:xfrm>
+            <a:off x="11475720" y="182880"/>
+            <a:ext cx="384048" cy="384048"/>
+          </a:xfrm>
+          <a:prstGeom prst="ellipse">
+            <a:avLst/>
+          </a:prstGeom>
+          <a:solidFill>
+            <a:srgbClr val="1E2761"/>
+          </a:solidFill>
+          <a:ln/>
+        </p:spPr>
+      </p:sp>
+      <p:sp>
+        <p:nvSpPr>
+          <p:cNvPr id="8" name="Text 6"/>
+          <p:cNvSpPr/>
+          <p:nvPr/>
+        </p:nvSpPr>
+        <p:spPr>
+          <a:xfrm>
+            <a:off x="11475720" y="182880"/>
+            <a:ext cx="384048" cy="384048"/>
+          </a:xfrm>
+          <a:prstGeom prst="rect">
+            <a:avLst/>
+          </a:prstGeom>
+          <a:noFill/>
+          <a:ln/>
+        </p:spPr>
+        <p:txBody>
+          <a:bodyPr wrap="square" lIns="0" tIns="0" rIns="0" bIns="0" rtlCol="0" anchor="ctr"/>
+          <a:lstStyle/>
+          <a:p>
+            <a:pPr algn="ctr" indent="0" marL="0">
+              <a:buNone/>
+            </a:pPr>
+            <a:r>
+              <a:rPr lang="en-US" sz="1400" b="1" dirty="0">
+                <a:solidFill>
+                  <a:srgbClr val="FFFFFF"/>
+                </a:solidFill>
+                <a:latin typeface="Calibri" pitchFamily="34" charset="0"/>
+                <a:ea typeface="Calibri" pitchFamily="34" charset="-122"/>
+                <a:cs typeface="Calibri" pitchFamily="34" charset="-120"/>
+              </a:rPr>
+              <a:t>9</a:t>
+            </a:r>
+            <a:endParaRPr lang="en-US" sz="1400" dirty="0"/>
+          </a:p>
+        </p:txBody>
+      </p:sp>
+      <p:sp>
+        <p:nvSpPr>
+          <p:cNvPr id="9" name="Shape 7"/>
+          <p:cNvSpPr/>
+          <p:nvPr/>
+        </p:nvSpPr>
+        <p:spPr>
+          <a:xfrm>
+            <a:off x="4937760" y="868680"/>
+            <a:ext cx="2286000" cy="384048"/>
+          </a:xfrm>
+          <a:prstGeom prst="roundRect">
+            <a:avLst>
+              <a:gd name="adj" fmla="val 14286"/>
+            </a:avLst>
+          </a:prstGeom>
+          <a:solidFill>
+            <a:srgbClr val="F2F2F2"/>
+          </a:solidFill>
+          <a:ln w="12700">
+            <a:solidFill>
+              <a:srgbClr val="B7B7B7"/>
+            </a:solidFill>
+            <a:prstDash val="solid"/>
+          </a:ln>
+        </p:spPr>
+      </p:sp>
+      <p:sp>
+        <p:nvSpPr>
+          <p:cNvPr id="10" name="Text 8"/>
+          <p:cNvSpPr/>
+          <p:nvPr/>
+        </p:nvSpPr>
+        <p:spPr>
+          <a:xfrm>
+            <a:off x="4992624" y="868680"/>
+            <a:ext cx="2176272" cy="384048"/>
+          </a:xfrm>
+          <a:prstGeom prst="rect">
+            <a:avLst/>
+          </a:prstGeom>
+          <a:noFill/>
+          <a:ln/>
+        </p:spPr>
+        <p:txBody>
+          <a:bodyPr wrap="square" lIns="0" tIns="0" rIns="0" bIns="0" rtlCol="0" anchor="ctr"/>
+          <a:lstStyle/>
+          <a:p>
+            <a:pPr algn="ctr" indent="0" marL="0">
+              <a:buNone/>
+            </a:pPr>
+            <a:r>
+              <a:rPr lang="en-US" sz="1000" b="1" dirty="0">
+                <a:solidFill>
+                  <a:srgbClr val="333333"/>
+                </a:solidFill>
+                <a:latin typeface="Calibri" pitchFamily="34" charset="0"/>
+                <a:ea typeface="Calibri" pitchFamily="34" charset="-122"/>
+                <a:cs typeface="Calibri" pitchFamily="34" charset="-120"/>
+              </a:rPr>
+              <a:t>Browser (examiner)</a:t>
+            </a:r>
+            <a:endParaRPr lang="en-US" sz="1000" dirty="0"/>
+          </a:p>
+        </p:txBody>
+      </p:sp>
+      <p:sp>
+        <p:nvSpPr>
+          <p:cNvPr id="11" name="Shape 9"/>
+          <p:cNvSpPr/>
+          <p:nvPr/>
+        </p:nvSpPr>
+        <p:spPr>
+          <a:xfrm>
+            <a:off x="6080760" y="1252728"/>
+            <a:ext cx="9144" cy="137160"/>
+          </a:xfrm>
+          <a:prstGeom prst="line">
+            <a:avLst/>
+          </a:prstGeom>
+          <a:noFill/>
+          <a:ln w="17780">
+            <a:solidFill>
+              <a:srgbClr val="666666"/>
+            </a:solidFill>
+            <a:prstDash val="solid"/>
+            <a:headEnd type="none"/>
+            <a:tailEnd type="triangle"/>
+          </a:ln>
+        </p:spPr>
+      </p:sp>
+      <p:sp>
+        <p:nvSpPr>
+          <p:cNvPr id="12" name="Shape 10"/>
+          <p:cNvSpPr/>
+          <p:nvPr/>
+        </p:nvSpPr>
+        <p:spPr>
+          <a:xfrm>
+            <a:off x="4937760" y="1389888"/>
+            <a:ext cx="2286000" cy="402336"/>
+          </a:xfrm>
+          <a:prstGeom prst="roundRect">
+            <a:avLst>
+              <a:gd name="adj" fmla="val 13636"/>
+            </a:avLst>
+          </a:prstGeom>
+          <a:solidFill>
+            <a:srgbClr val="FCEBC9"/>
+          </a:solidFill>
+          <a:ln w="12700">
+            <a:solidFill>
+              <a:srgbClr val="E0A83A"/>
+            </a:solidFill>
+            <a:prstDash val="solid"/>
+          </a:ln>
+        </p:spPr>
+      </p:sp>
+      <p:sp>
+        <p:nvSpPr>
+          <p:cNvPr id="13" name="Text 11"/>
+          <p:cNvSpPr/>
+          <p:nvPr/>
+        </p:nvSpPr>
+        <p:spPr>
+          <a:xfrm>
+            <a:off x="4992624" y="1417320"/>
+            <a:ext cx="2176272" cy="219456"/>
+          </a:xfrm>
+          <a:prstGeom prst="rect">
+            <a:avLst/>
+          </a:prstGeom>
+          <a:noFill/>
+          <a:ln/>
+        </p:spPr>
+        <p:txBody>
+          <a:bodyPr wrap="square" lIns="0" tIns="0" rIns="0" bIns="0" rtlCol="0" anchor="b"/>
+          <a:lstStyle/>
+          <a:p>
+            <a:pPr algn="ctr" indent="0" marL="0">
+              <a:buNone/>
+            </a:pPr>
+            <a:r>
+              <a:rPr lang="en-US" sz="950" b="1" dirty="0">
+                <a:solidFill>
+                  <a:srgbClr val="7A5A12"/>
+                </a:solidFill>
+                <a:latin typeface="Calibri" pitchFamily="34" charset="0"/>
+                <a:ea typeface="Calibri" pitchFamily="34" charset="-122"/>
+                <a:cs typeface="Calibri" pitchFamily="34" charset="-120"/>
+              </a:rPr>
+              <a:t>Nginx (frontend:80)</a:t>
+            </a:r>
+            <a:endParaRPr lang="en-US" sz="950" dirty="0"/>
+          </a:p>
+        </p:txBody>
+      </p:sp>
+      <p:sp>
+        <p:nvSpPr>
+          <p:cNvPr id="14" name="Text 12"/>
+          <p:cNvSpPr/>
+          <p:nvPr/>
+        </p:nvSpPr>
+        <p:spPr>
+          <a:xfrm>
+            <a:off x="4992624" y="1655064"/>
+            <a:ext cx="2176272" cy="164592"/>
+          </a:xfrm>
+          <a:prstGeom prst="rect">
+            <a:avLst/>
+          </a:prstGeom>
+          <a:noFill/>
+          <a:ln/>
+        </p:spPr>
+        <p:txBody>
+          <a:bodyPr wrap="square" lIns="0" tIns="0" rIns="0" bIns="0" rtlCol="0" anchor="t"/>
+          <a:lstStyle/>
+          <a:p>
+            <a:pPr algn="ctr" indent="0" marL="0">
+              <a:buNone/>
+            </a:pPr>
+            <a:r>
+              <a:rPr lang="en-US" sz="900" dirty="0">
+                <a:solidFill>
+                  <a:srgbClr val="7A5A12"/>
+                </a:solidFill>
+                <a:latin typeface="Calibri" pitchFamily="34" charset="0"/>
+                <a:ea typeface="Calibri" pitchFamily="34" charset="-122"/>
+                <a:cs typeface="Calibri" pitchFamily="34" charset="-120"/>
+              </a:rPr>
+              <a:t>host 3000 -&gt; 80</a:t>
+            </a:r>
+            <a:endParaRPr lang="en-US" sz="900" dirty="0"/>
+          </a:p>
+        </p:txBody>
+      </p:sp>
+      <p:sp>
+        <p:nvSpPr>
+          <p:cNvPr id="15" name="Shape 13"/>
+          <p:cNvSpPr/>
+          <p:nvPr/>
+        </p:nvSpPr>
+        <p:spPr>
+          <a:xfrm>
+            <a:off x="6080760" y="1792224"/>
+            <a:ext cx="9144" cy="137160"/>
+          </a:xfrm>
+          <a:prstGeom prst="line">
+            <a:avLst/>
+          </a:prstGeom>
+          <a:noFill/>
+          <a:ln w="17780">
+            <a:solidFill>
+              <a:srgbClr val="666666"/>
+            </a:solidFill>
+            <a:prstDash val="solid"/>
+            <a:headEnd type="none"/>
+            <a:tailEnd type="triangle"/>
+          </a:ln>
+        </p:spPr>
+      </p:sp>
+      <p:sp>
+        <p:nvSpPr>
+          <p:cNvPr id="16" name="Shape 14"/>
+          <p:cNvSpPr/>
+          <p:nvPr/>
+        </p:nvSpPr>
+        <p:spPr>
+          <a:xfrm>
+            <a:off x="4937760" y="1929384"/>
+            <a:ext cx="2286000" cy="402336"/>
+          </a:xfrm>
+          <a:prstGeom prst="roundRect">
+            <a:avLst>
+              <a:gd name="adj" fmla="val 13636"/>
+            </a:avLst>
+          </a:prstGeom>
+          <a:solidFill>
+            <a:srgbClr val="E8DFF5"/>
+          </a:solidFill>
+          <a:ln w="12700">
+            <a:solidFill>
+              <a:srgbClr val="8E6FC4"/>
+            </a:solidFill>
+            <a:prstDash val="solid"/>
+          </a:ln>
+        </p:spPr>
+      </p:sp>
+      <p:sp>
+        <p:nvSpPr>
+          <p:cNvPr id="17" name="Text 15"/>
+          <p:cNvSpPr/>
+          <p:nvPr/>
+        </p:nvSpPr>
+        <p:spPr>
+          <a:xfrm>
+            <a:off x="4992624" y="1956816"/>
+            <a:ext cx="2176272" cy="219456"/>
+          </a:xfrm>
+          <a:prstGeom prst="rect">
+            <a:avLst/>
+          </a:prstGeom>
+          <a:noFill/>
+          <a:ln/>
+        </p:spPr>
+        <p:txBody>
+          <a:bodyPr wrap="square" lIns="0" tIns="0" rIns="0" bIns="0" rtlCol="0" anchor="b"/>
+          <a:lstStyle/>
+          <a:p>
+            <a:pPr algn="ctr" indent="0" marL="0">
+              <a:buNone/>
+            </a:pPr>
+            <a:r>
+              <a:rPr lang="en-US" sz="900" b="1" dirty="0">
+                <a:solidFill>
+                  <a:srgbClr val="4B2E83"/>
+                </a:solidFill>
+                <a:latin typeface="Calibri" pitchFamily="34" charset="0"/>
+                <a:ea typeface="Calibri" pitchFamily="34" charset="-122"/>
+                <a:cs typeface="Calibri" pitchFamily="34" charset="-120"/>
+              </a:rPr>
+              <a:t>FastAPI (backend:8000)</a:t>
+            </a:r>
+            <a:endParaRPr lang="en-US" sz="900" dirty="0"/>
+          </a:p>
+        </p:txBody>
+      </p:sp>
+      <p:sp>
+        <p:nvSpPr>
+          <p:cNvPr id="18" name="Text 16"/>
+          <p:cNvSpPr/>
+          <p:nvPr/>
+        </p:nvSpPr>
+        <p:spPr>
+          <a:xfrm>
+            <a:off x="4992624" y="2194560"/>
+            <a:ext cx="2176272" cy="164592"/>
+          </a:xfrm>
+          <a:prstGeom prst="rect">
+            <a:avLst/>
+          </a:prstGeom>
+          <a:noFill/>
+          <a:ln/>
+        </p:spPr>
+        <p:txBody>
+          <a:bodyPr wrap="square" lIns="0" tIns="0" rIns="0" bIns="0" rtlCol="0" anchor="t"/>
+          <a:lstStyle/>
+          <a:p>
+            <a:pPr algn="ctr" indent="0" marL="0">
+              <a:buNone/>
+            </a:pPr>
+            <a:r>
+              <a:rPr lang="en-US" sz="900" dirty="0">
+                <a:solidFill>
+                  <a:srgbClr val="4B2E83"/>
+                </a:solidFill>
+                <a:latin typeface="Calibri" pitchFamily="34" charset="0"/>
+                <a:ea typeface="Calibri" pitchFamily="34" charset="-122"/>
+                <a:cs typeface="Calibri" pitchFamily="34" charset="-120"/>
+              </a:rPr>
+              <a:t>Correlation-ID, security headers</a:t>
+            </a:r>
+            <a:endParaRPr lang="en-US" sz="900" dirty="0"/>
+          </a:p>
+        </p:txBody>
+      </p:sp>
+      <p:sp>
+        <p:nvSpPr>
+          <p:cNvPr id="19" name="Shape 17"/>
+          <p:cNvSpPr/>
+          <p:nvPr/>
+        </p:nvSpPr>
+        <p:spPr>
+          <a:xfrm>
+            <a:off x="6080760" y="2331720"/>
+            <a:ext cx="9144" cy="155448"/>
+          </a:xfrm>
+          <a:prstGeom prst="line">
+            <a:avLst/>
+          </a:prstGeom>
+          <a:noFill/>
+          <a:ln w="17780">
+            <a:solidFill>
+              <a:srgbClr val="666666"/>
+            </a:solidFill>
+            <a:prstDash val="solid"/>
+            <a:headEnd type="none"/>
+            <a:tailEnd type="triangle"/>
+          </a:ln>
+        </p:spPr>
+      </p:sp>
+      <p:sp>
+        <p:nvSpPr>
+          <p:cNvPr id="20" name="Shape 18"/>
+          <p:cNvSpPr/>
+          <p:nvPr/>
+        </p:nvSpPr>
+        <p:spPr>
+          <a:xfrm>
+            <a:off x="548640" y="2487168"/>
+            <a:ext cx="11064240" cy="1691640"/>
+          </a:xfrm>
+          <a:prstGeom prst="roundRect">
+            <a:avLst>
+              <a:gd name="adj" fmla="val 5405"/>
+            </a:avLst>
+          </a:prstGeom>
+          <a:solidFill>
+            <a:srgbClr val="FAFAFA"/>
+          </a:solidFill>
+          <a:ln w="12700">
+            <a:solidFill>
+              <a:srgbClr val="CCCCCC"/>
+            </a:solidFill>
+            <a:prstDash val="solid"/>
+          </a:ln>
+        </p:spPr>
+      </p:sp>
+      <p:sp>
+        <p:nvSpPr>
+          <p:cNvPr id="21" name="Text 19"/>
+          <p:cNvSpPr/>
+          <p:nvPr/>
+        </p:nvSpPr>
+        <p:spPr>
+          <a:xfrm>
+            <a:off x="548640" y="2551176"/>
+            <a:ext cx="11064240" cy="219456"/>
+          </a:xfrm>
+          <a:prstGeom prst="rect">
+            <a:avLst/>
+          </a:prstGeom>
+          <a:noFill/>
+          <a:ln/>
+        </p:spPr>
+        <p:txBody>
+          <a:bodyPr wrap="square" lIns="0" tIns="0" rIns="0" bIns="0" rtlCol="0" anchor="ctr"/>
+          <a:lstStyle/>
+          <a:p>
+            <a:pPr algn="ctr" indent="0" marL="0">
+              <a:buNone/>
+            </a:pPr>
+            <a:r>
+              <a:rPr lang="en-US" sz="1050" b="1" dirty="0">
+                <a:solidFill>
+                  <a:srgbClr val="333333"/>
+                </a:solidFill>
+                <a:latin typeface="Calibri" pitchFamily="34" charset="0"/>
+                <a:ea typeface="Calibri" pitchFamily="34" charset="-122"/>
+                <a:cs typeface="Calibri" pitchFamily="34" charset="-120"/>
+              </a:rPr>
+              <a:t>Docker network globalpay-net — 9 routers, 5 conceptual modules</a:t>
+            </a:r>
+            <a:endParaRPr lang="en-US" sz="1050" dirty="0"/>
+          </a:p>
+        </p:txBody>
+      </p:sp>
+      <p:sp>
+        <p:nvSpPr>
+          <p:cNvPr id="22" name="Shape 20"/>
+          <p:cNvSpPr/>
+          <p:nvPr/>
+        </p:nvSpPr>
+        <p:spPr>
+          <a:xfrm>
+            <a:off x="1143000" y="2834640"/>
+            <a:ext cx="3108960" cy="457200"/>
+          </a:xfrm>
+          <a:prstGeom prst="roundRect">
+            <a:avLst>
+              <a:gd name="adj" fmla="val 12000"/>
+            </a:avLst>
+          </a:prstGeom>
+          <a:solidFill>
+            <a:srgbClr val="D3F3EF"/>
+          </a:solidFill>
+          <a:ln w="12700">
+            <a:solidFill>
+              <a:srgbClr val="3FA79B"/>
+            </a:solidFill>
+            <a:prstDash val="solid"/>
+          </a:ln>
+        </p:spPr>
+      </p:sp>
+      <p:sp>
+        <p:nvSpPr>
+          <p:cNvPr id="23" name="Text 21"/>
+          <p:cNvSpPr/>
+          <p:nvPr/>
+        </p:nvSpPr>
+        <p:spPr>
+          <a:xfrm>
+            <a:off x="1197864" y="2862072"/>
+            <a:ext cx="2999232" cy="219456"/>
+          </a:xfrm>
+          <a:prstGeom prst="rect">
+            <a:avLst/>
+          </a:prstGeom>
+          <a:noFill/>
+          <a:ln/>
+        </p:spPr>
+        <p:txBody>
+          <a:bodyPr wrap="square" lIns="0" tIns="0" rIns="0" bIns="0" rtlCol="0" anchor="b"/>
+          <a:lstStyle/>
+          <a:p>
+            <a:pPr algn="ctr" indent="0" marL="0">
+              <a:buNone/>
+            </a:pPr>
+            <a:r>
+              <a:rPr lang="en-US" sz="900" b="1" dirty="0">
+                <a:solidFill>
+                  <a:srgbClr val="1F5F58"/>
+                </a:solidFill>
+                <a:latin typeface="Calibri" pitchFamily="34" charset="0"/>
+                <a:ea typeface="Calibri" pitchFamily="34" charset="-122"/>
+                <a:cs typeface="Calibri" pitchFamily="34" charset="-120"/>
+              </a:rPr>
+              <a:t>auth, customers, wallets</a:t>
+            </a:r>
+            <a:endParaRPr lang="en-US" sz="900" dirty="0"/>
+          </a:p>
+        </p:txBody>
+      </p:sp>
+      <p:sp>
+        <p:nvSpPr>
+          <p:cNvPr id="24" name="Text 22"/>
+          <p:cNvSpPr/>
+          <p:nvPr/>
+        </p:nvSpPr>
+        <p:spPr>
+          <a:xfrm>
+            <a:off x="1197864" y="3099816"/>
+            <a:ext cx="2999232" cy="164592"/>
+          </a:xfrm>
+          <a:prstGeom prst="rect">
+            <a:avLst/>
+          </a:prstGeom>
+          <a:noFill/>
+          <a:ln/>
+        </p:spPr>
+        <p:txBody>
+          <a:bodyPr wrap="square" lIns="0" tIns="0" rIns="0" bIns="0" rtlCol="0" anchor="t"/>
+          <a:lstStyle/>
+          <a:p>
+            <a:pPr algn="ctr" indent="0" marL="0">
+              <a:buNone/>
+            </a:pPr>
+            <a:r>
+              <a:rPr lang="en-US" sz="900" dirty="0">
+                <a:solidFill>
+                  <a:srgbClr val="1F5F58"/>
+                </a:solidFill>
+                <a:latin typeface="Calibri" pitchFamily="34" charset="0"/>
+                <a:ea typeface="Calibri" pitchFamily="34" charset="-122"/>
+                <a:cs typeface="Calibri" pitchFamily="34" charset="-120"/>
+              </a:rPr>
+              <a:t>Module 1</a:t>
+            </a:r>
+            <a:endParaRPr lang="en-US" sz="900" dirty="0"/>
+          </a:p>
+        </p:txBody>
+      </p:sp>
+      <p:sp>
+        <p:nvSpPr>
+          <p:cNvPr id="25" name="Shape 23"/>
+          <p:cNvSpPr/>
+          <p:nvPr/>
+        </p:nvSpPr>
+        <p:spPr>
+          <a:xfrm>
+            <a:off x="4526280" y="2834640"/>
+            <a:ext cx="3108960" cy="457200"/>
+          </a:xfrm>
+          <a:prstGeom prst="roundRect">
+            <a:avLst>
+              <a:gd name="adj" fmla="val 12000"/>
+            </a:avLst>
+          </a:prstGeom>
+          <a:solidFill>
+            <a:srgbClr val="D3F3EF"/>
+          </a:solidFill>
+          <a:ln w="12700">
+            <a:solidFill>
+              <a:srgbClr val="3FA79B"/>
+            </a:solidFill>
+            <a:prstDash val="solid"/>
+          </a:ln>
+        </p:spPr>
+      </p:sp>
+      <p:sp>
+        <p:nvSpPr>
+          <p:cNvPr id="26" name="Text 24"/>
+          <p:cNvSpPr/>
+          <p:nvPr/>
+        </p:nvSpPr>
+        <p:spPr>
+          <a:xfrm>
+            <a:off x="4581144" y="2862072"/>
+            <a:ext cx="2999232" cy="219456"/>
+          </a:xfrm>
+          <a:prstGeom prst="rect">
+            <a:avLst/>
+          </a:prstGeom>
+          <a:noFill/>
+          <a:ln/>
+        </p:spPr>
+        <p:txBody>
+          <a:bodyPr wrap="square" lIns="0" tIns="0" rIns="0" bIns="0" rtlCol="0" anchor="b"/>
+          <a:lstStyle/>
+          <a:p>
+            <a:pPr algn="ctr" indent="0" marL="0">
+              <a:buNone/>
+            </a:pPr>
+            <a:r>
+              <a:rPr lang="en-US" sz="900" b="1" dirty="0">
+                <a:solidFill>
+                  <a:srgbClr val="1F5F58"/>
+                </a:solidFill>
+                <a:latin typeface="Calibri" pitchFamily="34" charset="0"/>
+                <a:ea typeface="Calibri" pitchFamily="34" charset="-122"/>
+                <a:cs typeface="Calibri" pitchFamily="34" charset="-120"/>
+              </a:rPr>
+              <a:t>payments, fraud</a:t>
+            </a:r>
+            <a:endParaRPr lang="en-US" sz="900" dirty="0"/>
+          </a:p>
+        </p:txBody>
+      </p:sp>
+      <p:sp>
+        <p:nvSpPr>
+          <p:cNvPr id="27" name="Text 25"/>
+          <p:cNvSpPr/>
+          <p:nvPr/>
+        </p:nvSpPr>
+        <p:spPr>
+          <a:xfrm>
+            <a:off x="4581144" y="3099816"/>
+            <a:ext cx="2999232" cy="164592"/>
+          </a:xfrm>
+          <a:prstGeom prst="rect">
+            <a:avLst/>
+          </a:prstGeom>
+          <a:noFill/>
+          <a:ln/>
+        </p:spPr>
+        <p:txBody>
+          <a:bodyPr wrap="square" lIns="0" tIns="0" rIns="0" bIns="0" rtlCol="0" anchor="t"/>
+          <a:lstStyle/>
+          <a:p>
+            <a:pPr algn="ctr" indent="0" marL="0">
+              <a:buNone/>
+            </a:pPr>
+            <a:r>
+              <a:rPr lang="en-US" sz="900" dirty="0">
+                <a:solidFill>
+                  <a:srgbClr val="1F5F58"/>
+                </a:solidFill>
+                <a:latin typeface="Calibri" pitchFamily="34" charset="0"/>
+                <a:ea typeface="Calibri" pitchFamily="34" charset="-122"/>
+                <a:cs typeface="Calibri" pitchFamily="34" charset="-120"/>
+              </a:rPr>
+              <a:t>Modules 2-3</a:t>
+            </a:r>
+            <a:endParaRPr lang="en-US" sz="900" dirty="0"/>
+          </a:p>
+        </p:txBody>
+      </p:sp>
+      <p:sp>
+        <p:nvSpPr>
+          <p:cNvPr id="28" name="Shape 26"/>
+          <p:cNvSpPr/>
+          <p:nvPr/>
+        </p:nvSpPr>
+        <p:spPr>
+          <a:xfrm>
+            <a:off x="7909560" y="2834640"/>
+            <a:ext cx="3108960" cy="457200"/>
+          </a:xfrm>
+          <a:prstGeom prst="roundRect">
+            <a:avLst>
+              <a:gd name="adj" fmla="val 12000"/>
+            </a:avLst>
+          </a:prstGeom>
+          <a:solidFill>
+            <a:srgbClr val="D3F3EF"/>
+          </a:solidFill>
+          <a:ln w="12700">
+            <a:solidFill>
+              <a:srgbClr val="3FA79B"/>
+            </a:solidFill>
+            <a:prstDash val="solid"/>
+          </a:ln>
+        </p:spPr>
+      </p:sp>
+      <p:sp>
+        <p:nvSpPr>
+          <p:cNvPr id="29" name="Text 27"/>
+          <p:cNvSpPr/>
+          <p:nvPr/>
+        </p:nvSpPr>
+        <p:spPr>
+          <a:xfrm>
+            <a:off x="7964424" y="2862072"/>
+            <a:ext cx="2999232" cy="219456"/>
+          </a:xfrm>
+          <a:prstGeom prst="rect">
+            <a:avLst/>
+          </a:prstGeom>
+          <a:noFill/>
+          <a:ln/>
+        </p:spPr>
+        <p:txBody>
+          <a:bodyPr wrap="square" lIns="0" tIns="0" rIns="0" bIns="0" rtlCol="0" anchor="b"/>
+          <a:lstStyle/>
+          <a:p>
+            <a:pPr algn="ctr" indent="0" marL="0">
+              <a:buNone/>
+            </a:pPr>
+            <a:r>
+              <a:rPr lang="en-US" sz="900" b="1" dirty="0">
+                <a:solidFill>
+                  <a:srgbClr val="1F5F58"/>
+                </a:solidFill>
+                <a:latin typeface="Calibri" pitchFamily="34" charset="0"/>
+                <a:ea typeface="Calibri" pitchFamily="34" charset="-122"/>
+                <a:cs typeface="Calibri" pitchFamily="34" charset="-120"/>
+              </a:rPr>
+              <a:t>open_banking, cbdc, dashboard</a:t>
+            </a:r>
+            <a:endParaRPr lang="en-US" sz="900" dirty="0"/>
+          </a:p>
+        </p:txBody>
+      </p:sp>
+      <p:sp>
+        <p:nvSpPr>
+          <p:cNvPr id="30" name="Text 28"/>
+          <p:cNvSpPr/>
+          <p:nvPr/>
+        </p:nvSpPr>
+        <p:spPr>
+          <a:xfrm>
+            <a:off x="7964424" y="3099816"/>
+            <a:ext cx="2999232" cy="164592"/>
+          </a:xfrm>
+          <a:prstGeom prst="rect">
+            <a:avLst/>
+          </a:prstGeom>
+          <a:noFill/>
+          <a:ln/>
+        </p:spPr>
+        <p:txBody>
+          <a:bodyPr wrap="square" lIns="0" tIns="0" rIns="0" bIns="0" rtlCol="0" anchor="t"/>
+          <a:lstStyle/>
+          <a:p>
+            <a:pPr algn="ctr" indent="0" marL="0">
+              <a:buNone/>
+            </a:pPr>
+            <a:r>
+              <a:rPr lang="en-US" sz="900" dirty="0">
+                <a:solidFill>
+                  <a:srgbClr val="1F5F58"/>
+                </a:solidFill>
+                <a:latin typeface="Calibri" pitchFamily="34" charset="0"/>
+                <a:ea typeface="Calibri" pitchFamily="34" charset="-122"/>
+                <a:cs typeface="Calibri" pitchFamily="34" charset="-120"/>
+              </a:rPr>
+              <a:t>Modules 4-5</a:t>
+            </a:r>
+            <a:endParaRPr lang="en-US" sz="900" dirty="0"/>
+          </a:p>
+        </p:txBody>
+      </p:sp>
+      <p:sp>
+        <p:nvSpPr>
+          <p:cNvPr id="31" name="Shape 29"/>
+          <p:cNvSpPr/>
+          <p:nvPr/>
+        </p:nvSpPr>
+        <p:spPr>
+          <a:xfrm>
+            <a:off x="2697480" y="3291840"/>
+            <a:ext cx="9144" cy="137160"/>
+          </a:xfrm>
+          <a:prstGeom prst="line">
+            <a:avLst/>
+          </a:prstGeom>
+          <a:noFill/>
+          <a:ln w="17780">
+            <a:solidFill>
+              <a:srgbClr val="666666"/>
+            </a:solidFill>
+            <a:prstDash val="solid"/>
+            <a:headEnd type="none"/>
+            <a:tailEnd type="triangle"/>
+          </a:ln>
+        </p:spPr>
+      </p:sp>
+      <p:sp>
+        <p:nvSpPr>
+          <p:cNvPr id="32" name="Shape 30"/>
+          <p:cNvSpPr/>
+          <p:nvPr/>
+        </p:nvSpPr>
+        <p:spPr>
+          <a:xfrm>
+            <a:off x="6080760" y="3291840"/>
+            <a:ext cx="9144" cy="137160"/>
+          </a:xfrm>
+          <a:prstGeom prst="line">
+            <a:avLst/>
+          </a:prstGeom>
+          <a:noFill/>
+          <a:ln w="17780">
+            <a:solidFill>
+              <a:srgbClr val="666666"/>
+            </a:solidFill>
+            <a:prstDash val="solid"/>
+            <a:headEnd type="none"/>
+            <a:tailEnd type="triangle"/>
+          </a:ln>
+        </p:spPr>
+      </p:sp>
+      <p:sp>
+        <p:nvSpPr>
+          <p:cNvPr id="33" name="Shape 31"/>
+          <p:cNvSpPr/>
+          <p:nvPr/>
+        </p:nvSpPr>
+        <p:spPr>
+          <a:xfrm>
+            <a:off x="9464040" y="3291840"/>
+            <a:ext cx="9144" cy="137160"/>
+          </a:xfrm>
+          <a:prstGeom prst="line">
+            <a:avLst/>
+          </a:prstGeom>
+          <a:noFill/>
+          <a:ln w="17780">
+            <a:solidFill>
+              <a:srgbClr val="666666"/>
+            </a:solidFill>
+            <a:prstDash val="solid"/>
+            <a:headEnd type="none"/>
+            <a:tailEnd type="triangle"/>
+          </a:ln>
+        </p:spPr>
+      </p:sp>
+      <p:sp>
+        <p:nvSpPr>
+          <p:cNvPr id="34" name="Shape 32"/>
+          <p:cNvSpPr/>
+          <p:nvPr/>
+        </p:nvSpPr>
+        <p:spPr>
+          <a:xfrm>
+            <a:off x="3154680" y="3429000"/>
+            <a:ext cx="2743200" cy="384048"/>
+          </a:xfrm>
+          <a:prstGeom prst="roundRect">
+            <a:avLst>
+              <a:gd name="adj" fmla="val 14286"/>
+            </a:avLst>
+          </a:prstGeom>
+          <a:solidFill>
+            <a:srgbClr val="FBDCD5"/>
+          </a:solidFill>
+          <a:ln w="12700">
+            <a:solidFill>
+              <a:srgbClr val="E07856"/>
+            </a:solidFill>
+            <a:prstDash val="solid"/>
+          </a:ln>
+        </p:spPr>
+      </p:sp>
+      <p:sp>
+        <p:nvSpPr>
+          <p:cNvPr id="35" name="Text 33"/>
+          <p:cNvSpPr/>
+          <p:nvPr/>
+        </p:nvSpPr>
+        <p:spPr>
+          <a:xfrm>
+            <a:off x="3209544" y="3456432"/>
+            <a:ext cx="2633472" cy="219456"/>
+          </a:xfrm>
+          <a:prstGeom prst="rect">
+            <a:avLst/>
+          </a:prstGeom>
+          <a:noFill/>
+          <a:ln/>
+        </p:spPr>
+        <p:txBody>
+          <a:bodyPr wrap="square" lIns="0" tIns="0" rIns="0" bIns="0" rtlCol="0" anchor="b"/>
+          <a:lstStyle/>
+          <a:p>
+            <a:pPr algn="ctr" indent="0" marL="0">
+              <a:buNone/>
+            </a:pPr>
+            <a:r>
+              <a:rPr lang="en-US" sz="900" b="1" dirty="0">
+                <a:solidFill>
+                  <a:srgbClr val="8A3A1E"/>
+                </a:solidFill>
+                <a:latin typeface="Calibri" pitchFamily="34" charset="0"/>
+                <a:ea typeface="Calibri" pitchFamily="34" charset="-122"/>
+                <a:cs typeface="Calibri" pitchFamily="34" charset="-120"/>
+              </a:rPr>
+              <a:t>PostgreSQL (16-alpine)</a:t>
+            </a:r>
+            <a:endParaRPr lang="en-US" sz="900" dirty="0"/>
+          </a:p>
+        </p:txBody>
+      </p:sp>
+      <p:sp>
+        <p:nvSpPr>
+          <p:cNvPr id="36" name="Text 34"/>
+          <p:cNvSpPr/>
+          <p:nvPr/>
+        </p:nvSpPr>
+        <p:spPr>
+          <a:xfrm>
+            <a:off x="3209544" y="3694176"/>
+            <a:ext cx="2633472" cy="164592"/>
+          </a:xfrm>
+          <a:prstGeom prst="rect">
+            <a:avLst/>
+          </a:prstGeom>
+          <a:noFill/>
+          <a:ln/>
+        </p:spPr>
+        <p:txBody>
+          <a:bodyPr wrap="square" lIns="0" tIns="0" rIns="0" bIns="0" rtlCol="0" anchor="t"/>
+          <a:lstStyle/>
+          <a:p>
+            <a:pPr algn="ctr" indent="0" marL="0">
+              <a:buNone/>
+            </a:pPr>
+            <a:r>
+              <a:rPr lang="en-US" sz="900" dirty="0">
+                <a:solidFill>
+                  <a:srgbClr val="8A3A1E"/>
+                </a:solidFill>
+                <a:latin typeface="Calibri" pitchFamily="34" charset="0"/>
+                <a:ea typeface="Calibri" pitchFamily="34" charset="-122"/>
+                <a:cs typeface="Calibri" pitchFamily="34" charset="-120"/>
+              </a:rPr>
+              <a:t>Source of truth</a:t>
+            </a:r>
+            <a:endParaRPr lang="en-US" sz="900" dirty="0"/>
+          </a:p>
+        </p:txBody>
+      </p:sp>
+      <p:sp>
+        <p:nvSpPr>
+          <p:cNvPr id="37" name="Shape 35"/>
+          <p:cNvSpPr/>
+          <p:nvPr/>
+        </p:nvSpPr>
+        <p:spPr>
+          <a:xfrm>
+            <a:off x="6263640" y="3429000"/>
+            <a:ext cx="2743200" cy="384048"/>
+          </a:xfrm>
+          <a:prstGeom prst="roundRect">
+            <a:avLst>
+              <a:gd name="adj" fmla="val 14286"/>
+            </a:avLst>
+          </a:prstGeom>
+          <a:solidFill>
+            <a:srgbClr val="FBDCD5"/>
+          </a:solidFill>
+          <a:ln w="12700">
+            <a:solidFill>
+              <a:srgbClr val="E07856"/>
+            </a:solidFill>
+            <a:prstDash val="solid"/>
+          </a:ln>
+        </p:spPr>
+      </p:sp>
+      <p:sp>
+        <p:nvSpPr>
+          <p:cNvPr id="38" name="Text 36"/>
+          <p:cNvSpPr/>
+          <p:nvPr/>
+        </p:nvSpPr>
+        <p:spPr>
+          <a:xfrm>
+            <a:off x="6318504" y="3456432"/>
+            <a:ext cx="2633472" cy="219456"/>
+          </a:xfrm>
+          <a:prstGeom prst="rect">
+            <a:avLst/>
+          </a:prstGeom>
+          <a:noFill/>
+          <a:ln/>
+        </p:spPr>
+        <p:txBody>
+          <a:bodyPr wrap="square" lIns="0" tIns="0" rIns="0" bIns="0" rtlCol="0" anchor="b"/>
+          <a:lstStyle/>
+          <a:p>
+            <a:pPr algn="ctr" indent="0" marL="0">
+              <a:buNone/>
+            </a:pPr>
+            <a:r>
+              <a:rPr lang="en-US" sz="900" b="1" dirty="0">
+                <a:solidFill>
+                  <a:srgbClr val="8A3A1E"/>
+                </a:solidFill>
+                <a:latin typeface="Calibri" pitchFamily="34" charset="0"/>
+                <a:ea typeface="Calibri" pitchFamily="34" charset="-122"/>
+                <a:cs typeface="Calibri" pitchFamily="34" charset="-120"/>
+              </a:rPr>
+              <a:t>Redis (7-alpine)</a:t>
+            </a:r>
+            <a:endParaRPr lang="en-US" sz="900" dirty="0"/>
+          </a:p>
+        </p:txBody>
+      </p:sp>
+      <p:sp>
+        <p:nvSpPr>
+          <p:cNvPr id="39" name="Text 37"/>
+          <p:cNvSpPr/>
+          <p:nvPr/>
+        </p:nvSpPr>
+        <p:spPr>
+          <a:xfrm>
+            <a:off x="6318504" y="3694176"/>
+            <a:ext cx="2633472" cy="164592"/>
+          </a:xfrm>
+          <a:prstGeom prst="rect">
+            <a:avLst/>
+          </a:prstGeom>
+          <a:noFill/>
+          <a:ln/>
+        </p:spPr>
+        <p:txBody>
+          <a:bodyPr wrap="square" lIns="0" tIns="0" rIns="0" bIns="0" rtlCol="0" anchor="t"/>
+          <a:lstStyle/>
+          <a:p>
+            <a:pPr algn="ctr" indent="0" marL="0">
+              <a:buNone/>
+            </a:pPr>
+            <a:r>
+              <a:rPr lang="en-US" sz="900" dirty="0">
+                <a:solidFill>
+                  <a:srgbClr val="8A3A1E"/>
+                </a:solidFill>
+                <a:latin typeface="Calibri" pitchFamily="34" charset="0"/>
+                <a:ea typeface="Calibri" pitchFamily="34" charset="-122"/>
+                <a:cs typeface="Calibri" pitchFamily="34" charset="-120"/>
+              </a:rPr>
+              <a:t>Cache / rate-limit only</a:t>
+            </a:r>
+            <a:endParaRPr lang="en-US" sz="900" dirty="0"/>
+          </a:p>
+        </p:txBody>
+      </p:sp>
+      <p:sp>
+        <p:nvSpPr>
+          <p:cNvPr id="40" name="Shape 38"/>
+          <p:cNvSpPr/>
+          <p:nvPr/>
+        </p:nvSpPr>
+        <p:spPr>
+          <a:xfrm>
+            <a:off x="8823960" y="3931920"/>
+            <a:ext cx="2194560" cy="201168"/>
+          </a:xfrm>
+          <a:prstGeom prst="roundRect">
+            <a:avLst>
+              <a:gd name="adj" fmla="val 27273"/>
+            </a:avLst>
+          </a:prstGeom>
+          <a:solidFill>
+            <a:srgbClr val="E8DFF5"/>
+          </a:solidFill>
+          <a:ln w="12700">
+            <a:solidFill>
+              <a:srgbClr val="8E6FC4"/>
+            </a:solidFill>
+            <a:prstDash val="solid"/>
+          </a:ln>
+        </p:spPr>
+      </p:sp>
+      <p:sp>
+        <p:nvSpPr>
+          <p:cNvPr id="41" name="Text 39"/>
+          <p:cNvSpPr/>
+          <p:nvPr/>
+        </p:nvSpPr>
+        <p:spPr>
+          <a:xfrm>
+            <a:off x="8878824" y="3931920"/>
+            <a:ext cx="2084832" cy="201168"/>
+          </a:xfrm>
+          <a:prstGeom prst="rect">
+            <a:avLst/>
+          </a:prstGeom>
+          <a:noFill/>
+          <a:ln/>
+        </p:spPr>
+        <p:txBody>
+          <a:bodyPr wrap="square" lIns="0" tIns="0" rIns="0" bIns="0" rtlCol="0" anchor="ctr"/>
+          <a:lstStyle/>
+          <a:p>
+            <a:pPr algn="ctr" indent="0" marL="0">
+              <a:buNone/>
+            </a:pPr>
+            <a:r>
+              <a:rPr lang="en-US" sz="900" b="1" dirty="0">
+                <a:solidFill>
+                  <a:srgbClr val="4B2E83"/>
+                </a:solidFill>
+                <a:latin typeface="Calibri" pitchFamily="34" charset="0"/>
+                <a:ea typeface="Calibri" pitchFamily="34" charset="-122"/>
+                <a:cs typeface="Calibri" pitchFamily="34" charset="-120"/>
+              </a:rPr>
+              <a:t>Prometheus :9090 + Grafana :3001</a:t>
+            </a:r>
+            <a:endParaRPr lang="en-US" sz="900" dirty="0"/>
+          </a:p>
+        </p:txBody>
+      </p:sp>
+      <p:sp>
+        <p:nvSpPr>
+          <p:cNvPr id="42" name="Text 40"/>
+          <p:cNvSpPr/>
+          <p:nvPr/>
+        </p:nvSpPr>
+        <p:spPr>
+          <a:xfrm>
+            <a:off x="548640" y="4251960"/>
+            <a:ext cx="11064240" cy="201168"/>
+          </a:xfrm>
+          <a:prstGeom prst="rect">
+            <a:avLst/>
+          </a:prstGeom>
+          <a:noFill/>
+          <a:ln/>
+        </p:spPr>
+        <p:txBody>
+          <a:bodyPr wrap="square" lIns="0" tIns="0" rIns="0" bIns="0" rtlCol="0" anchor="ctr"/>
+          <a:lstStyle/>
+          <a:p>
+            <a:pPr algn="ctr" indent="0" marL="0">
+              <a:buNone/>
+            </a:pPr>
+            <a:r>
+              <a:rPr lang="en-US" sz="900" i="1" dirty="0">
+                <a:solidFill>
+                  <a:srgbClr val="666666"/>
+                </a:solidFill>
+                <a:latin typeface="Calibri" pitchFamily="34" charset="0"/>
+                <a:ea typeface="Calibri" pitchFamily="34" charset="-122"/>
+                <a:cs typeface="Calibri" pitchFamily="34" charset="-120"/>
+              </a:rPr>
+              <a:t>Redis never holds the authoritative wallet balance — Postgres is the single source of truth</a:t>
+            </a:r>
+            <a:endParaRPr lang="en-US" sz="900" dirty="0"/>
+          </a:p>
+        </p:txBody>
+      </p:sp>
     </p:spTree>
   </p:cSld>
   <p:clrMapOvr>
@@ -7373,7 +8691,7 @@
 </file>
 
 <file path=ppt/slides/slide12.xml><?xml version="1.0" encoding="utf-8"?>
-<p:sld xmlns:a="http://schemas.openxmlformats.org/drawingml/2006/main" xmlns:p="http://schemas.openxmlformats.org/presentationml/2006/main" xmlns:r="http://schemas.openxmlformats.org/officeDocument/2006/relationships">
+<p:sld xmlns:a="http://schemas.openxmlformats.org/drawingml/2006/main" xmlns:r="http://schemas.openxmlformats.org/officeDocument/2006/relationships" xmlns:p="http://schemas.openxmlformats.org/presentationml/2006/main">
   <p:cSld name="Slide 12">
     <p:bg>
       <p:bgPr>
@@ -7396,28 +8714,1023 @@
           <a:chExt cx="0" cy="0"/>
         </a:xfrm>
       </p:grpSpPr>
-      <p:pic>
-        <p:nvPicPr>
-          <p:cNvPr id="2" name="section8-dfd-level-0.png"/>
-          <p:cNvPicPr/>
-          <p:nvPr/>
-        </p:nvPicPr>
-        <p:blipFill>
-          <a:blip r:embed="rId1"/>
-          <a:stretch>
-            <a:fillRect/>
-          </a:stretch>
-        </p:blipFill>
+      <p:sp>
+        <p:nvSpPr>
+          <p:cNvPr id="2" name="Shape 0"/>
+          <p:cNvSpPr/>
+          <p:nvPr/>
+        </p:nvSpPr>
         <p:spPr>
           <a:xfrm>
             <a:off x="0" y="0"/>
-            <a:ext cx="12192000" cy="6858000"/>
-          </a:xfrm>
-          <a:prstGeom prst="rect">
-            <a:avLst/>
-          </a:prstGeom>
-        </p:spPr>
-      </p:pic>
+            <a:ext cx="82296" cy="6858000"/>
+          </a:xfrm>
+          <a:prstGeom prst="rect">
+            <a:avLst/>
+          </a:prstGeom>
+          <a:solidFill>
+            <a:srgbClr val="1E2761"/>
+          </a:solidFill>
+          <a:ln/>
+        </p:spPr>
+      </p:sp>
+      <p:sp>
+        <p:nvSpPr>
+          <p:cNvPr id="3" name="Shape 1"/>
+          <p:cNvSpPr/>
+          <p:nvPr/>
+        </p:nvSpPr>
+        <p:spPr>
+          <a:xfrm>
+            <a:off x="292608" y="182880"/>
+            <a:ext cx="310896" cy="310896"/>
+          </a:xfrm>
+          <a:prstGeom prst="roundRect">
+            <a:avLst>
+              <a:gd name="adj" fmla="val 28000"/>
+            </a:avLst>
+          </a:prstGeom>
+          <a:solidFill>
+            <a:srgbClr val="1E2761"/>
+          </a:solidFill>
+          <a:ln/>
+        </p:spPr>
+      </p:sp>
+      <p:sp>
+        <p:nvSpPr>
+          <p:cNvPr id="4" name="Text 2"/>
+          <p:cNvSpPr/>
+          <p:nvPr/>
+        </p:nvSpPr>
+        <p:spPr>
+          <a:xfrm>
+            <a:off x="292608" y="182880"/>
+            <a:ext cx="310896" cy="310896"/>
+          </a:xfrm>
+          <a:prstGeom prst="rect">
+            <a:avLst/>
+          </a:prstGeom>
+          <a:noFill/>
+          <a:ln/>
+        </p:spPr>
+        <p:txBody>
+          <a:bodyPr wrap="square" lIns="0" tIns="0" rIns="0" bIns="0" rtlCol="0" anchor="ctr"/>
+          <a:lstStyle/>
+          <a:p>
+            <a:pPr algn="ctr" indent="0" marL="0">
+              <a:buNone/>
+            </a:pPr>
+            <a:r>
+              <a:rPr lang="en-US" sz="1428" b="1" dirty="0">
+                <a:solidFill>
+                  <a:srgbClr val="FFFFFF"/>
+                </a:solidFill>
+                <a:latin typeface="Cambria" pitchFamily="34" charset="0"/>
+                <a:ea typeface="Cambria" pitchFamily="34" charset="-122"/>
+                <a:cs typeface="Cambria" pitchFamily="34" charset="-120"/>
+              </a:rPr>
+              <a:t>G</a:t>
+            </a:r>
+            <a:endParaRPr lang="en-US" sz="1428" dirty="0"/>
+          </a:p>
+        </p:txBody>
+      </p:sp>
+      <p:sp>
+        <p:nvSpPr>
+          <p:cNvPr id="5" name="Text 3"/>
+          <p:cNvSpPr/>
+          <p:nvPr/>
+        </p:nvSpPr>
+        <p:spPr>
+          <a:xfrm>
+            <a:off x="749808" y="164592"/>
+            <a:ext cx="9857232" cy="384048"/>
+          </a:xfrm>
+          <a:prstGeom prst="rect">
+            <a:avLst/>
+          </a:prstGeom>
+          <a:noFill/>
+          <a:ln/>
+        </p:spPr>
+        <p:txBody>
+          <a:bodyPr wrap="square" lIns="0" tIns="0" rIns="0" bIns="0" rtlCol="0" anchor="ctr"/>
+          <a:lstStyle/>
+          <a:p>
+            <a:pPr indent="0" marL="0">
+              <a:buNone/>
+            </a:pPr>
+            <a:r>
+              <a:rPr lang="en-US" sz="2000" b="1" dirty="0">
+                <a:solidFill>
+                  <a:srgbClr val="1E2761"/>
+                </a:solidFill>
+                <a:latin typeface="Cambria" pitchFamily="34" charset="0"/>
+                <a:ea typeface="Cambria" pitchFamily="34" charset="-122"/>
+                <a:cs typeface="Cambria" pitchFamily="34" charset="-120"/>
+              </a:rPr>
+              <a:t>Data Flow Diagram — Level 0 (Context)</a:t>
+            </a:r>
+            <a:endParaRPr lang="en-US" sz="2000" dirty="0"/>
+          </a:p>
+        </p:txBody>
+      </p:sp>
+      <p:sp>
+        <p:nvSpPr>
+          <p:cNvPr id="6" name="Text 4"/>
+          <p:cNvSpPr/>
+          <p:nvPr/>
+        </p:nvSpPr>
+        <p:spPr>
+          <a:xfrm>
+            <a:off x="749808" y="548640"/>
+            <a:ext cx="10607040" cy="237744"/>
+          </a:xfrm>
+          <a:prstGeom prst="rect">
+            <a:avLst/>
+          </a:prstGeom>
+          <a:noFill/>
+          <a:ln/>
+        </p:spPr>
+        <p:txBody>
+          <a:bodyPr wrap="square" lIns="0" tIns="0" rIns="0" bIns="0" rtlCol="0" anchor="ctr"/>
+          <a:lstStyle/>
+          <a:p>
+            <a:pPr indent="0" marL="0">
+              <a:buNone/>
+            </a:pPr>
+            <a:r>
+              <a:rPr lang="en-US" sz="1050" dirty="0">
+                <a:solidFill>
+                  <a:srgbClr val="555555"/>
+                </a:solidFill>
+                <a:latin typeface="Calibri" pitchFamily="34" charset="0"/>
+                <a:ea typeface="Calibri" pitchFamily="34" charset="-122"/>
+                <a:cs typeface="Calibri" pitchFamily="34" charset="-120"/>
+              </a:rPr>
+              <a:t>The platform as a single process, with its external entities</a:t>
+            </a:r>
+            <a:endParaRPr lang="en-US" sz="1050" dirty="0"/>
+          </a:p>
+        </p:txBody>
+      </p:sp>
+      <p:sp>
+        <p:nvSpPr>
+          <p:cNvPr id="7" name="Shape 5"/>
+          <p:cNvSpPr/>
+          <p:nvPr/>
+        </p:nvSpPr>
+        <p:spPr>
+          <a:xfrm>
+            <a:off x="11475720" y="182880"/>
+            <a:ext cx="384048" cy="384048"/>
+          </a:xfrm>
+          <a:prstGeom prst="ellipse">
+            <a:avLst/>
+          </a:prstGeom>
+          <a:solidFill>
+            <a:srgbClr val="1E2761"/>
+          </a:solidFill>
+          <a:ln/>
+        </p:spPr>
+      </p:sp>
+      <p:sp>
+        <p:nvSpPr>
+          <p:cNvPr id="8" name="Text 6"/>
+          <p:cNvSpPr/>
+          <p:nvPr/>
+        </p:nvSpPr>
+        <p:spPr>
+          <a:xfrm>
+            <a:off x="11475720" y="182880"/>
+            <a:ext cx="384048" cy="384048"/>
+          </a:xfrm>
+          <a:prstGeom prst="rect">
+            <a:avLst/>
+          </a:prstGeom>
+          <a:noFill/>
+          <a:ln/>
+        </p:spPr>
+        <p:txBody>
+          <a:bodyPr wrap="square" lIns="0" tIns="0" rIns="0" bIns="0" rtlCol="0" anchor="ctr"/>
+          <a:lstStyle/>
+          <a:p>
+            <a:pPr algn="ctr" indent="0" marL="0">
+              <a:buNone/>
+            </a:pPr>
+            <a:r>
+              <a:rPr lang="en-US" sz="1400" b="1" dirty="0">
+                <a:solidFill>
+                  <a:srgbClr val="FFFFFF"/>
+                </a:solidFill>
+                <a:latin typeface="Calibri" pitchFamily="34" charset="0"/>
+                <a:ea typeface="Calibri" pitchFamily="34" charset="-122"/>
+                <a:cs typeface="Calibri" pitchFamily="34" charset="-120"/>
+              </a:rPr>
+              <a:t>11</a:t>
+            </a:r>
+            <a:endParaRPr lang="en-US" sz="1400" dirty="0"/>
+          </a:p>
+        </p:txBody>
+      </p:sp>
+      <p:sp>
+        <p:nvSpPr>
+          <p:cNvPr id="9" name="Shape 7"/>
+          <p:cNvSpPr/>
+          <p:nvPr/>
+        </p:nvSpPr>
+        <p:spPr>
+          <a:xfrm>
+            <a:off x="4727448" y="2514600"/>
+            <a:ext cx="2743200" cy="1463040"/>
+          </a:xfrm>
+          <a:prstGeom prst="ellipse">
+            <a:avLst/>
+          </a:prstGeom>
+          <a:solidFill>
+            <a:srgbClr val="E8DFF5"/>
+          </a:solidFill>
+          <a:ln w="19050">
+            <a:solidFill>
+              <a:srgbClr val="8E6FC4"/>
+            </a:solidFill>
+            <a:prstDash val="solid"/>
+          </a:ln>
+        </p:spPr>
+      </p:sp>
+      <p:sp>
+        <p:nvSpPr>
+          <p:cNvPr id="10" name="Text 8"/>
+          <p:cNvSpPr/>
+          <p:nvPr/>
+        </p:nvSpPr>
+        <p:spPr>
+          <a:xfrm>
+            <a:off x="4727448" y="2514600"/>
+            <a:ext cx="2743200" cy="1463040"/>
+          </a:xfrm>
+          <a:prstGeom prst="rect">
+            <a:avLst/>
+          </a:prstGeom>
+          <a:noFill/>
+          <a:ln/>
+        </p:spPr>
+        <p:txBody>
+          <a:bodyPr wrap="square" lIns="0" tIns="0" rIns="0" bIns="0" rtlCol="0" anchor="ctr"/>
+          <a:lstStyle/>
+          <a:p>
+            <a:pPr algn="ctr" indent="0" marL="0">
+              <a:buNone/>
+            </a:pPr>
+            <a:r>
+              <a:rPr lang="en-US" sz="1300" b="1" dirty="0">
+                <a:solidFill>
+                  <a:srgbClr val="4B2E83"/>
+                </a:solidFill>
+                <a:latin typeface="Calibri" pitchFamily="34" charset="0"/>
+                <a:ea typeface="Calibri" pitchFamily="34" charset="-122"/>
+                <a:cs typeface="Calibri" pitchFamily="34" charset="-120"/>
+              </a:rPr>
+              <a:t>0</a:t>
+            </a:r>
+            <a:endParaRPr lang="en-US" sz="1300" dirty="0"/>
+          </a:p>
+          <a:p>
+            <a:pPr algn="ctr" indent="0" marL="0">
+              <a:buNone/>
+            </a:pPr>
+            <a:r>
+              <a:rPr lang="en-US" sz="1300" b="1" dirty="0">
+                <a:solidFill>
+                  <a:srgbClr val="4B2E83"/>
+                </a:solidFill>
+                <a:latin typeface="Calibri" pitchFamily="34" charset="0"/>
+                <a:ea typeface="Calibri" pitchFamily="34" charset="-122"/>
+                <a:cs typeface="Calibri" pitchFamily="34" charset="-120"/>
+              </a:rPr>
+              <a:t>GlobalPay</a:t>
+            </a:r>
+            <a:endParaRPr lang="en-US" sz="1300" dirty="0"/>
+          </a:p>
+          <a:p>
+            <a:pPr algn="ctr" indent="0" marL="0">
+              <a:buNone/>
+            </a:pPr>
+            <a:r>
+              <a:rPr lang="en-US" sz="1300" b="1" dirty="0">
+                <a:solidFill>
+                  <a:srgbClr val="4B2E83"/>
+                </a:solidFill>
+                <a:latin typeface="Calibri" pitchFamily="34" charset="0"/>
+                <a:ea typeface="Calibri" pitchFamily="34" charset="-122"/>
+                <a:cs typeface="Calibri" pitchFamily="34" charset="-120"/>
+              </a:rPr>
+              <a:t>Platform</a:t>
+            </a:r>
+            <a:endParaRPr lang="en-US" sz="1300" dirty="0"/>
+          </a:p>
+        </p:txBody>
+      </p:sp>
+      <p:sp>
+        <p:nvSpPr>
+          <p:cNvPr id="11" name="Shape 9"/>
+          <p:cNvSpPr/>
+          <p:nvPr/>
+        </p:nvSpPr>
+        <p:spPr>
+          <a:xfrm>
+            <a:off x="548640" y="868680"/>
+            <a:ext cx="2651760" cy="731520"/>
+          </a:xfrm>
+          <a:prstGeom prst="roundRect">
+            <a:avLst>
+              <a:gd name="adj" fmla="val 7500"/>
+            </a:avLst>
+          </a:prstGeom>
+          <a:solidFill>
+            <a:srgbClr val="F2F2F2"/>
+          </a:solidFill>
+          <a:ln w="12700">
+            <a:solidFill>
+              <a:srgbClr val="B7B7B7"/>
+            </a:solidFill>
+            <a:prstDash val="solid"/>
+          </a:ln>
+        </p:spPr>
+      </p:sp>
+      <p:sp>
+        <p:nvSpPr>
+          <p:cNvPr id="12" name="Text 10"/>
+          <p:cNvSpPr/>
+          <p:nvPr/>
+        </p:nvSpPr>
+        <p:spPr>
+          <a:xfrm>
+            <a:off x="603504" y="868680"/>
+            <a:ext cx="2542032" cy="731520"/>
+          </a:xfrm>
+          <a:prstGeom prst="rect">
+            <a:avLst/>
+          </a:prstGeom>
+          <a:noFill/>
+          <a:ln/>
+        </p:spPr>
+        <p:txBody>
+          <a:bodyPr wrap="square" lIns="0" tIns="0" rIns="0" bIns="0" rtlCol="0" anchor="ctr"/>
+          <a:lstStyle/>
+          <a:p>
+            <a:pPr algn="ctr" indent="0" marL="0">
+              <a:buNone/>
+            </a:pPr>
+            <a:r>
+              <a:rPr lang="en-US" sz="1050" b="1" dirty="0">
+                <a:solidFill>
+                  <a:srgbClr val="333333"/>
+                </a:solidFill>
+                <a:latin typeface="Calibri" pitchFamily="34" charset="0"/>
+                <a:ea typeface="Calibri" pitchFamily="34" charset="-122"/>
+                <a:cs typeface="Calibri" pitchFamily="34" charset="-120"/>
+              </a:rPr>
+              <a:t>Customer</a:t>
+            </a:r>
+            <a:endParaRPr lang="en-US" sz="1050" dirty="0"/>
+          </a:p>
+        </p:txBody>
+      </p:sp>
+      <p:sp>
+        <p:nvSpPr>
+          <p:cNvPr id="13" name="Shape 11"/>
+          <p:cNvSpPr/>
+          <p:nvPr/>
+        </p:nvSpPr>
+        <p:spPr>
+          <a:xfrm>
+            <a:off x="8961120" y="868680"/>
+            <a:ext cx="2651760" cy="731520"/>
+          </a:xfrm>
+          <a:prstGeom prst="roundRect">
+            <a:avLst>
+              <a:gd name="adj" fmla="val 7500"/>
+            </a:avLst>
+          </a:prstGeom>
+          <a:solidFill>
+            <a:srgbClr val="F2F2F2"/>
+          </a:solidFill>
+          <a:ln w="12700">
+            <a:solidFill>
+              <a:srgbClr val="B7B7B7"/>
+            </a:solidFill>
+            <a:prstDash val="solid"/>
+          </a:ln>
+        </p:spPr>
+      </p:sp>
+      <p:sp>
+        <p:nvSpPr>
+          <p:cNvPr id="14" name="Text 12"/>
+          <p:cNvSpPr/>
+          <p:nvPr/>
+        </p:nvSpPr>
+        <p:spPr>
+          <a:xfrm>
+            <a:off x="9015984" y="868680"/>
+            <a:ext cx="2542032" cy="731520"/>
+          </a:xfrm>
+          <a:prstGeom prst="rect">
+            <a:avLst/>
+          </a:prstGeom>
+          <a:noFill/>
+          <a:ln/>
+        </p:spPr>
+        <p:txBody>
+          <a:bodyPr wrap="square" lIns="0" tIns="0" rIns="0" bIns="0" rtlCol="0" anchor="ctr"/>
+          <a:lstStyle/>
+          <a:p>
+            <a:pPr algn="ctr" indent="0" marL="0">
+              <a:buNone/>
+            </a:pPr>
+            <a:r>
+              <a:rPr lang="en-US" sz="1050" b="1" dirty="0">
+                <a:solidFill>
+                  <a:srgbClr val="333333"/>
+                </a:solidFill>
+                <a:latin typeface="Calibri" pitchFamily="34" charset="0"/>
+                <a:ea typeface="Calibri" pitchFamily="34" charset="-122"/>
+                <a:cs typeface="Calibri" pitchFamily="34" charset="-120"/>
+              </a:rPr>
+              <a:t>Merchant</a:t>
+            </a:r>
+            <a:endParaRPr lang="en-US" sz="1050" dirty="0"/>
+          </a:p>
+        </p:txBody>
+      </p:sp>
+      <p:sp>
+        <p:nvSpPr>
+          <p:cNvPr id="15" name="Shape 13"/>
+          <p:cNvSpPr/>
+          <p:nvPr/>
+        </p:nvSpPr>
+        <p:spPr>
+          <a:xfrm>
+            <a:off x="548640" y="4709160"/>
+            <a:ext cx="2651760" cy="731520"/>
+          </a:xfrm>
+          <a:prstGeom prst="roundRect">
+            <a:avLst>
+              <a:gd name="adj" fmla="val 7500"/>
+            </a:avLst>
+          </a:prstGeom>
+          <a:solidFill>
+            <a:srgbClr val="F2F2F2"/>
+          </a:solidFill>
+          <a:ln w="12700">
+            <a:solidFill>
+              <a:srgbClr val="B7B7B7"/>
+            </a:solidFill>
+            <a:prstDash val="solid"/>
+          </a:ln>
+        </p:spPr>
+      </p:sp>
+      <p:sp>
+        <p:nvSpPr>
+          <p:cNvPr id="16" name="Text 14"/>
+          <p:cNvSpPr/>
+          <p:nvPr/>
+        </p:nvSpPr>
+        <p:spPr>
+          <a:xfrm>
+            <a:off x="603504" y="4709160"/>
+            <a:ext cx="2542032" cy="731520"/>
+          </a:xfrm>
+          <a:prstGeom prst="rect">
+            <a:avLst/>
+          </a:prstGeom>
+          <a:noFill/>
+          <a:ln/>
+        </p:spPr>
+        <p:txBody>
+          <a:bodyPr wrap="square" lIns="0" tIns="0" rIns="0" bIns="0" rtlCol="0" anchor="ctr"/>
+          <a:lstStyle/>
+          <a:p>
+            <a:pPr algn="ctr" indent="0" marL="0">
+              <a:buNone/>
+            </a:pPr>
+            <a:r>
+              <a:rPr lang="en-US" sz="1050" b="1" dirty="0">
+                <a:solidFill>
+                  <a:srgbClr val="333333"/>
+                </a:solidFill>
+                <a:latin typeface="Calibri" pitchFamily="34" charset="0"/>
+                <a:ea typeface="Calibri" pitchFamily="34" charset="-122"/>
+                <a:cs typeface="Calibri" pitchFamily="34" charset="-120"/>
+              </a:rPr>
+              <a:t>Fraud analyst /</a:t>
+            </a:r>
+            <a:endParaRPr lang="en-US" sz="1050" dirty="0"/>
+          </a:p>
+          <a:p>
+            <a:pPr algn="ctr" indent="0" marL="0">
+              <a:buNone/>
+            </a:pPr>
+            <a:r>
+              <a:rPr lang="en-US" sz="1050" b="1" dirty="0">
+                <a:solidFill>
+                  <a:srgbClr val="333333"/>
+                </a:solidFill>
+                <a:latin typeface="Calibri" pitchFamily="34" charset="0"/>
+                <a:ea typeface="Calibri" pitchFamily="34" charset="-122"/>
+                <a:cs typeface="Calibri" pitchFamily="34" charset="-120"/>
+              </a:rPr>
+              <a:t>compliance</a:t>
+            </a:r>
+            <a:endParaRPr lang="en-US" sz="1050" dirty="0"/>
+          </a:p>
+        </p:txBody>
+      </p:sp>
+      <p:sp>
+        <p:nvSpPr>
+          <p:cNvPr id="17" name="Shape 15"/>
+          <p:cNvSpPr/>
+          <p:nvPr/>
+        </p:nvSpPr>
+        <p:spPr>
+          <a:xfrm>
+            <a:off x="8961120" y="4709160"/>
+            <a:ext cx="2651760" cy="731520"/>
+          </a:xfrm>
+          <a:prstGeom prst="roundRect">
+            <a:avLst>
+              <a:gd name="adj" fmla="val 7500"/>
+            </a:avLst>
+          </a:prstGeom>
+          <a:solidFill>
+            <a:srgbClr val="F2F2F2"/>
+          </a:solidFill>
+          <a:ln w="12700">
+            <a:solidFill>
+              <a:srgbClr val="B7B7B7"/>
+            </a:solidFill>
+            <a:prstDash val="solid"/>
+          </a:ln>
+        </p:spPr>
+      </p:sp>
+      <p:sp>
+        <p:nvSpPr>
+          <p:cNvPr id="18" name="Text 16"/>
+          <p:cNvSpPr/>
+          <p:nvPr/>
+        </p:nvSpPr>
+        <p:spPr>
+          <a:xfrm>
+            <a:off x="9015984" y="4709160"/>
+            <a:ext cx="2542032" cy="731520"/>
+          </a:xfrm>
+          <a:prstGeom prst="rect">
+            <a:avLst/>
+          </a:prstGeom>
+          <a:noFill/>
+          <a:ln/>
+        </p:spPr>
+        <p:txBody>
+          <a:bodyPr wrap="square" lIns="0" tIns="0" rIns="0" bIns="0" rtlCol="0" anchor="ctr"/>
+          <a:lstStyle/>
+          <a:p>
+            <a:pPr algn="ctr" indent="0" marL="0">
+              <a:buNone/>
+            </a:pPr>
+            <a:r>
+              <a:rPr lang="en-US" sz="1050" b="1" dirty="0">
+                <a:solidFill>
+                  <a:srgbClr val="333333"/>
+                </a:solidFill>
+                <a:latin typeface="Calibri" pitchFamily="34" charset="0"/>
+                <a:ea typeface="Calibri" pitchFamily="34" charset="-122"/>
+                <a:cs typeface="Calibri" pitchFamily="34" charset="-120"/>
+              </a:rPr>
+              <a:t>Partner bank /</a:t>
+            </a:r>
+            <a:endParaRPr lang="en-US" sz="1050" dirty="0"/>
+          </a:p>
+          <a:p>
+            <a:pPr algn="ctr" indent="0" marL="0">
+              <a:buNone/>
+            </a:pPr>
+            <a:r>
+              <a:rPr lang="en-US" sz="1050" b="1" dirty="0">
+                <a:solidFill>
+                  <a:srgbClr val="333333"/>
+                </a:solidFill>
+                <a:latin typeface="Calibri" pitchFamily="34" charset="0"/>
+                <a:ea typeface="Calibri" pitchFamily="34" charset="-122"/>
+                <a:cs typeface="Calibri" pitchFamily="34" charset="-120"/>
+              </a:rPr>
+              <a:t>central bank (sim)</a:t>
+            </a:r>
+            <a:endParaRPr lang="en-US" sz="1050" dirty="0"/>
+          </a:p>
+        </p:txBody>
+      </p:sp>
+      <p:sp>
+        <p:nvSpPr>
+          <p:cNvPr id="19" name="Shape 17"/>
+          <p:cNvSpPr/>
+          <p:nvPr/>
+        </p:nvSpPr>
+        <p:spPr>
+          <a:xfrm>
+            <a:off x="4727448" y="5029200"/>
+            <a:ext cx="2651760" cy="731520"/>
+          </a:xfrm>
+          <a:prstGeom prst="roundRect">
+            <a:avLst>
+              <a:gd name="adj" fmla="val 7500"/>
+            </a:avLst>
+          </a:prstGeom>
+          <a:solidFill>
+            <a:srgbClr val="F2F2F2"/>
+          </a:solidFill>
+          <a:ln w="12700">
+            <a:solidFill>
+              <a:srgbClr val="B7B7B7"/>
+            </a:solidFill>
+            <a:prstDash val="solid"/>
+          </a:ln>
+        </p:spPr>
+      </p:sp>
+      <p:sp>
+        <p:nvSpPr>
+          <p:cNvPr id="20" name="Text 18"/>
+          <p:cNvSpPr/>
+          <p:nvPr/>
+        </p:nvSpPr>
+        <p:spPr>
+          <a:xfrm>
+            <a:off x="4782312" y="5029200"/>
+            <a:ext cx="2542032" cy="731520"/>
+          </a:xfrm>
+          <a:prstGeom prst="rect">
+            <a:avLst/>
+          </a:prstGeom>
+          <a:noFill/>
+          <a:ln/>
+        </p:spPr>
+        <p:txBody>
+          <a:bodyPr wrap="square" lIns="0" tIns="0" rIns="0" bIns="0" rtlCol="0" anchor="ctr"/>
+          <a:lstStyle/>
+          <a:p>
+            <a:pPr algn="ctr" indent="0" marL="0">
+              <a:buNone/>
+            </a:pPr>
+            <a:r>
+              <a:rPr lang="en-US" sz="1050" b="1" dirty="0">
+                <a:solidFill>
+                  <a:srgbClr val="333333"/>
+                </a:solidFill>
+                <a:latin typeface="Calibri" pitchFamily="34" charset="0"/>
+                <a:ea typeface="Calibri" pitchFamily="34" charset="-122"/>
+                <a:cs typeface="Calibri" pitchFamily="34" charset="-120"/>
+              </a:rPr>
+              <a:t>Executive /</a:t>
+            </a:r>
+            <a:endParaRPr lang="en-US" sz="1050" dirty="0"/>
+          </a:p>
+          <a:p>
+            <a:pPr algn="ctr" indent="0" marL="0">
+              <a:buNone/>
+            </a:pPr>
+            <a:r>
+              <a:rPr lang="en-US" sz="1050" b="1" dirty="0">
+                <a:solidFill>
+                  <a:srgbClr val="333333"/>
+                </a:solidFill>
+                <a:latin typeface="Calibri" pitchFamily="34" charset="0"/>
+                <a:ea typeface="Calibri" pitchFamily="34" charset="-122"/>
+                <a:cs typeface="Calibri" pitchFamily="34" charset="-120"/>
+              </a:rPr>
+              <a:t>board</a:t>
+            </a:r>
+            <a:endParaRPr lang="en-US" sz="1050" dirty="0"/>
+          </a:p>
+        </p:txBody>
+      </p:sp>
+      <p:sp>
+        <p:nvSpPr>
+          <p:cNvPr id="21" name="Shape 19"/>
+          <p:cNvSpPr/>
+          <p:nvPr/>
+        </p:nvSpPr>
+        <p:spPr>
+          <a:xfrm>
+            <a:off x="1874520" y="1600200"/>
+            <a:ext cx="5596128" cy="2377440"/>
+          </a:xfrm>
+          <a:prstGeom prst="line">
+            <a:avLst/>
+          </a:prstGeom>
+          <a:noFill/>
+          <a:ln w="17780">
+            <a:solidFill>
+              <a:srgbClr val="666666"/>
+            </a:solidFill>
+            <a:prstDash val="solid"/>
+            <a:headEnd type="triangle"/>
+            <a:tailEnd type="triangle"/>
+          </a:ln>
+        </p:spPr>
+      </p:sp>
+      <p:sp>
+        <p:nvSpPr>
+          <p:cNvPr id="22" name="Shape 20"/>
+          <p:cNvSpPr/>
+          <p:nvPr/>
+        </p:nvSpPr>
+        <p:spPr>
+          <a:xfrm flipH="1">
+            <a:off x="4727448" y="1600200"/>
+            <a:ext cx="5559552" cy="2377440"/>
+          </a:xfrm>
+          <a:prstGeom prst="line">
+            <a:avLst/>
+          </a:prstGeom>
+          <a:noFill/>
+          <a:ln w="17780">
+            <a:solidFill>
+              <a:srgbClr val="666666"/>
+            </a:solidFill>
+            <a:prstDash val="solid"/>
+            <a:headEnd type="triangle"/>
+            <a:tailEnd type="triangle"/>
+          </a:ln>
+        </p:spPr>
+      </p:sp>
+      <p:sp>
+        <p:nvSpPr>
+          <p:cNvPr id="23" name="Shape 21"/>
+          <p:cNvSpPr/>
+          <p:nvPr/>
+        </p:nvSpPr>
+        <p:spPr>
+          <a:xfrm flipV="1">
+            <a:off x="1874520" y="2514600"/>
+            <a:ext cx="5596128" cy="2194560"/>
+          </a:xfrm>
+          <a:prstGeom prst="line">
+            <a:avLst/>
+          </a:prstGeom>
+          <a:noFill/>
+          <a:ln w="17780">
+            <a:solidFill>
+              <a:srgbClr val="666666"/>
+            </a:solidFill>
+            <a:prstDash val="solid"/>
+            <a:headEnd type="triangle"/>
+            <a:tailEnd type="triangle"/>
+          </a:ln>
+        </p:spPr>
+      </p:sp>
+      <p:sp>
+        <p:nvSpPr>
+          <p:cNvPr id="24" name="Shape 22"/>
+          <p:cNvSpPr/>
+          <p:nvPr/>
+        </p:nvSpPr>
+        <p:spPr>
+          <a:xfrm flipH="1" flipV="1">
+            <a:off x="4727448" y="2514600"/>
+            <a:ext cx="5559552" cy="2194560"/>
+          </a:xfrm>
+          <a:prstGeom prst="line">
+            <a:avLst/>
+          </a:prstGeom>
+          <a:noFill/>
+          <a:ln w="17780">
+            <a:solidFill>
+              <a:srgbClr val="666666"/>
+            </a:solidFill>
+            <a:prstDash val="solid"/>
+            <a:headEnd type="triangle"/>
+            <a:tailEnd type="triangle"/>
+          </a:ln>
+        </p:spPr>
+      </p:sp>
+      <p:sp>
+        <p:nvSpPr>
+          <p:cNvPr id="25" name="Shape 23"/>
+          <p:cNvSpPr/>
+          <p:nvPr/>
+        </p:nvSpPr>
+        <p:spPr>
+          <a:xfrm flipV="1">
+            <a:off x="6053328" y="2514600"/>
+            <a:ext cx="1417320" cy="2514600"/>
+          </a:xfrm>
+          <a:prstGeom prst="line">
+            <a:avLst/>
+          </a:prstGeom>
+          <a:noFill/>
+          <a:ln w="17780">
+            <a:solidFill>
+              <a:srgbClr val="666666"/>
+            </a:solidFill>
+            <a:prstDash val="solid"/>
+            <a:headEnd type="triangle"/>
+            <a:tailEnd type="triangle"/>
+          </a:ln>
+        </p:spPr>
+      </p:sp>
+      <p:sp>
+        <p:nvSpPr>
+          <p:cNvPr id="26" name="Text 24"/>
+          <p:cNvSpPr/>
+          <p:nvPr/>
+        </p:nvSpPr>
+        <p:spPr>
+          <a:xfrm>
+            <a:off x="548640" y="1645920"/>
+            <a:ext cx="2651760" cy="201168"/>
+          </a:xfrm>
+          <a:prstGeom prst="rect">
+            <a:avLst/>
+          </a:prstGeom>
+          <a:noFill/>
+          <a:ln/>
+        </p:spPr>
+        <p:txBody>
+          <a:bodyPr wrap="square" lIns="0" tIns="0" rIns="0" bIns="0" rtlCol="0" anchor="ctr"/>
+          <a:lstStyle/>
+          <a:p>
+            <a:pPr algn="ctr" indent="0" marL="0">
+              <a:buNone/>
+            </a:pPr>
+            <a:r>
+              <a:rPr lang="en-US" sz="900" i="1" dirty="0">
+                <a:solidFill>
+                  <a:srgbClr val="666666"/>
+                </a:solidFill>
+                <a:latin typeface="Calibri" pitchFamily="34" charset="0"/>
+                <a:ea typeface="Calibri" pitchFamily="34" charset="-122"/>
+                <a:cs typeface="Calibri" pitchFamily="34" charset="-120"/>
+              </a:rPr>
+              <a:t>Registration, payments</a:t>
+            </a:r>
+            <a:endParaRPr lang="en-US" sz="900" dirty="0"/>
+          </a:p>
+        </p:txBody>
+      </p:sp>
+      <p:sp>
+        <p:nvSpPr>
+          <p:cNvPr id="27" name="Text 25"/>
+          <p:cNvSpPr/>
+          <p:nvPr/>
+        </p:nvSpPr>
+        <p:spPr>
+          <a:xfrm>
+            <a:off x="8961120" y="1645920"/>
+            <a:ext cx="2651760" cy="201168"/>
+          </a:xfrm>
+          <a:prstGeom prst="rect">
+            <a:avLst/>
+          </a:prstGeom>
+          <a:noFill/>
+          <a:ln/>
+        </p:spPr>
+        <p:txBody>
+          <a:bodyPr wrap="square" lIns="0" tIns="0" rIns="0" bIns="0" rtlCol="0" anchor="ctr"/>
+          <a:lstStyle/>
+          <a:p>
+            <a:pPr algn="ctr" indent="0" marL="0">
+              <a:buNone/>
+            </a:pPr>
+            <a:r>
+              <a:rPr lang="en-US" sz="900" i="1" dirty="0">
+                <a:solidFill>
+                  <a:srgbClr val="666666"/>
+                </a:solidFill>
+                <a:latin typeface="Calibri" pitchFamily="34" charset="0"/>
+                <a:ea typeface="Calibri" pitchFamily="34" charset="-122"/>
+                <a:cs typeface="Calibri" pitchFamily="34" charset="-120"/>
+              </a:rPr>
+              <a:t>Settlements, reports</a:t>
+            </a:r>
+            <a:endParaRPr lang="en-US" sz="900" dirty="0"/>
+          </a:p>
+        </p:txBody>
+      </p:sp>
+      <p:sp>
+        <p:nvSpPr>
+          <p:cNvPr id="28" name="Text 26"/>
+          <p:cNvSpPr/>
+          <p:nvPr/>
+        </p:nvSpPr>
+        <p:spPr>
+          <a:xfrm>
+            <a:off x="548640" y="3977640"/>
+            <a:ext cx="2651760" cy="201168"/>
+          </a:xfrm>
+          <a:prstGeom prst="rect">
+            <a:avLst/>
+          </a:prstGeom>
+          <a:noFill/>
+          <a:ln/>
+        </p:spPr>
+        <p:txBody>
+          <a:bodyPr wrap="square" lIns="0" tIns="0" rIns="0" bIns="0" rtlCol="0" anchor="ctr"/>
+          <a:lstStyle/>
+          <a:p>
+            <a:pPr algn="ctr" indent="0" marL="0">
+              <a:buNone/>
+            </a:pPr>
+            <a:r>
+              <a:rPr lang="en-US" sz="900" i="1" dirty="0">
+                <a:solidFill>
+                  <a:srgbClr val="666666"/>
+                </a:solidFill>
+                <a:latin typeface="Calibri" pitchFamily="34" charset="0"/>
+                <a:ea typeface="Calibri" pitchFamily="34" charset="-122"/>
+                <a:cs typeface="Calibri" pitchFamily="34" charset="-120"/>
+              </a:rPr>
+              <a:t>Alerts, case decisions</a:t>
+            </a:r>
+            <a:endParaRPr lang="en-US" sz="900" dirty="0"/>
+          </a:p>
+        </p:txBody>
+      </p:sp>
+      <p:sp>
+        <p:nvSpPr>
+          <p:cNvPr id="29" name="Text 27"/>
+          <p:cNvSpPr/>
+          <p:nvPr/>
+        </p:nvSpPr>
+        <p:spPr>
+          <a:xfrm>
+            <a:off x="8961120" y="3977640"/>
+            <a:ext cx="2651760" cy="201168"/>
+          </a:xfrm>
+          <a:prstGeom prst="rect">
+            <a:avLst/>
+          </a:prstGeom>
+          <a:noFill/>
+          <a:ln/>
+        </p:spPr>
+        <p:txBody>
+          <a:bodyPr wrap="square" lIns="0" tIns="0" rIns="0" bIns="0" rtlCol="0" anchor="ctr"/>
+          <a:lstStyle/>
+          <a:p>
+            <a:pPr algn="ctr" indent="0" marL="0">
+              <a:buNone/>
+            </a:pPr>
+            <a:r>
+              <a:rPr lang="en-US" sz="900" i="1" dirty="0">
+                <a:solidFill>
+                  <a:srgbClr val="666666"/>
+                </a:solidFill>
+                <a:latin typeface="Calibri" pitchFamily="34" charset="0"/>
+                <a:ea typeface="Calibri" pitchFamily="34" charset="-122"/>
+                <a:cs typeface="Calibri" pitchFamily="34" charset="-120"/>
+              </a:rPr>
+              <a:t>AIS/PIS calls, CBDC ops</a:t>
+            </a:r>
+            <a:endParaRPr lang="en-US" sz="900" dirty="0"/>
+          </a:p>
+        </p:txBody>
+      </p:sp>
+      <p:sp>
+        <p:nvSpPr>
+          <p:cNvPr id="30" name="Text 28"/>
+          <p:cNvSpPr/>
+          <p:nvPr/>
+        </p:nvSpPr>
+        <p:spPr>
+          <a:xfrm>
+            <a:off x="3840480" y="4709160"/>
+            <a:ext cx="4480560" cy="201168"/>
+          </a:xfrm>
+          <a:prstGeom prst="rect">
+            <a:avLst/>
+          </a:prstGeom>
+          <a:noFill/>
+          <a:ln/>
+        </p:spPr>
+        <p:txBody>
+          <a:bodyPr wrap="square" lIns="0" tIns="0" rIns="0" bIns="0" rtlCol="0" anchor="ctr"/>
+          <a:lstStyle/>
+          <a:p>
+            <a:pPr algn="ctr" indent="0" marL="0">
+              <a:buNone/>
+            </a:pPr>
+            <a:r>
+              <a:rPr lang="en-US" sz="900" i="1" dirty="0">
+                <a:solidFill>
+                  <a:srgbClr val="666666"/>
+                </a:solidFill>
+                <a:latin typeface="Calibri" pitchFamily="34" charset="0"/>
+                <a:ea typeface="Calibri" pitchFamily="34" charset="-122"/>
+                <a:cs typeface="Calibri" pitchFamily="34" charset="-120"/>
+              </a:rPr>
+              <a:t>KPIs, exec reports</a:t>
+            </a:r>
+            <a:endParaRPr lang="en-US" sz="900" dirty="0"/>
+          </a:p>
+        </p:txBody>
+      </p:sp>
     </p:spTree>
   </p:cSld>
   <p:clrMapOvr>
@@ -7427,7 +9740,7 @@
 </file>
 
 <file path=ppt/slides/slide13.xml><?xml version="1.0" encoding="utf-8"?>
-<p:sld xmlns:a="http://schemas.openxmlformats.org/drawingml/2006/main" xmlns:p="http://schemas.openxmlformats.org/presentationml/2006/main" xmlns:r="http://schemas.openxmlformats.org/officeDocument/2006/relationships">
+<p:sld xmlns:a="http://schemas.openxmlformats.org/drawingml/2006/main" xmlns:r="http://schemas.openxmlformats.org/officeDocument/2006/relationships" xmlns:p="http://schemas.openxmlformats.org/presentationml/2006/main">
   <p:cSld name="Slide 13">
     <p:bg>
       <p:bgPr>
@@ -7450,28 +9763,1561 @@
           <a:chExt cx="0" cy="0"/>
         </a:xfrm>
       </p:grpSpPr>
-      <p:pic>
-        <p:nvPicPr>
-          <p:cNvPr id="2" name="section8-dfd-level-1.png"/>
-          <p:cNvPicPr/>
-          <p:nvPr/>
-        </p:nvPicPr>
-        <p:blipFill>
-          <a:blip r:embed="rId1"/>
-          <a:stretch>
-            <a:fillRect/>
-          </a:stretch>
-        </p:blipFill>
+      <p:sp>
+        <p:nvSpPr>
+          <p:cNvPr id="2" name="Shape 0"/>
+          <p:cNvSpPr/>
+          <p:nvPr/>
+        </p:nvSpPr>
         <p:spPr>
           <a:xfrm>
             <a:off x="0" y="0"/>
-            <a:ext cx="12192000" cy="6858000"/>
-          </a:xfrm>
-          <a:prstGeom prst="rect">
-            <a:avLst/>
-          </a:prstGeom>
-        </p:spPr>
-      </p:pic>
+            <a:ext cx="82296" cy="6858000"/>
+          </a:xfrm>
+          <a:prstGeom prst="rect">
+            <a:avLst/>
+          </a:prstGeom>
+          <a:solidFill>
+            <a:srgbClr val="1E2761"/>
+          </a:solidFill>
+          <a:ln/>
+        </p:spPr>
+      </p:sp>
+      <p:sp>
+        <p:nvSpPr>
+          <p:cNvPr id="3" name="Shape 1"/>
+          <p:cNvSpPr/>
+          <p:nvPr/>
+        </p:nvSpPr>
+        <p:spPr>
+          <a:xfrm>
+            <a:off x="292608" y="182880"/>
+            <a:ext cx="310896" cy="310896"/>
+          </a:xfrm>
+          <a:prstGeom prst="roundRect">
+            <a:avLst>
+              <a:gd name="adj" fmla="val 28000"/>
+            </a:avLst>
+          </a:prstGeom>
+          <a:solidFill>
+            <a:srgbClr val="1E2761"/>
+          </a:solidFill>
+          <a:ln/>
+        </p:spPr>
+      </p:sp>
+      <p:sp>
+        <p:nvSpPr>
+          <p:cNvPr id="4" name="Text 2"/>
+          <p:cNvSpPr/>
+          <p:nvPr/>
+        </p:nvSpPr>
+        <p:spPr>
+          <a:xfrm>
+            <a:off x="292608" y="182880"/>
+            <a:ext cx="310896" cy="310896"/>
+          </a:xfrm>
+          <a:prstGeom prst="rect">
+            <a:avLst/>
+          </a:prstGeom>
+          <a:noFill/>
+          <a:ln/>
+        </p:spPr>
+        <p:txBody>
+          <a:bodyPr wrap="square" lIns="0" tIns="0" rIns="0" bIns="0" rtlCol="0" anchor="ctr"/>
+          <a:lstStyle/>
+          <a:p>
+            <a:pPr algn="ctr" indent="0" marL="0">
+              <a:buNone/>
+            </a:pPr>
+            <a:r>
+              <a:rPr lang="en-US" sz="1428" b="1" dirty="0">
+                <a:solidFill>
+                  <a:srgbClr val="FFFFFF"/>
+                </a:solidFill>
+                <a:latin typeface="Cambria" pitchFamily="34" charset="0"/>
+                <a:ea typeface="Cambria" pitchFamily="34" charset="-122"/>
+                <a:cs typeface="Cambria" pitchFamily="34" charset="-120"/>
+              </a:rPr>
+              <a:t>G</a:t>
+            </a:r>
+            <a:endParaRPr lang="en-US" sz="1428" dirty="0"/>
+          </a:p>
+        </p:txBody>
+      </p:sp>
+      <p:sp>
+        <p:nvSpPr>
+          <p:cNvPr id="5" name="Text 3"/>
+          <p:cNvSpPr/>
+          <p:nvPr/>
+        </p:nvSpPr>
+        <p:spPr>
+          <a:xfrm>
+            <a:off x="749808" y="164592"/>
+            <a:ext cx="9857232" cy="384048"/>
+          </a:xfrm>
+          <a:prstGeom prst="rect">
+            <a:avLst/>
+          </a:prstGeom>
+          <a:noFill/>
+          <a:ln/>
+        </p:spPr>
+        <p:txBody>
+          <a:bodyPr wrap="square" lIns="0" tIns="0" rIns="0" bIns="0" rtlCol="0" anchor="ctr"/>
+          <a:lstStyle/>
+          <a:p>
+            <a:pPr indent="0" marL="0">
+              <a:buNone/>
+            </a:pPr>
+            <a:r>
+              <a:rPr lang="en-US" sz="2000" b="1" dirty="0">
+                <a:solidFill>
+                  <a:srgbClr val="1E2761"/>
+                </a:solidFill>
+                <a:latin typeface="Cambria" pitchFamily="34" charset="0"/>
+                <a:ea typeface="Cambria" pitchFamily="34" charset="-122"/>
+                <a:cs typeface="Cambria" pitchFamily="34" charset="-120"/>
+              </a:rPr>
+              <a:t>Data Flow Diagram — Level 1</a:t>
+            </a:r>
+            <a:endParaRPr lang="en-US" sz="2000" dirty="0"/>
+          </a:p>
+        </p:txBody>
+      </p:sp>
+      <p:sp>
+        <p:nvSpPr>
+          <p:cNvPr id="6" name="Text 4"/>
+          <p:cNvSpPr/>
+          <p:nvPr/>
+        </p:nvSpPr>
+        <p:spPr>
+          <a:xfrm>
+            <a:off x="749808" y="548640"/>
+            <a:ext cx="10607040" cy="237744"/>
+          </a:xfrm>
+          <a:prstGeom prst="rect">
+            <a:avLst/>
+          </a:prstGeom>
+          <a:noFill/>
+          <a:ln/>
+        </p:spPr>
+        <p:txBody>
+          <a:bodyPr wrap="square" lIns="0" tIns="0" rIns="0" bIns="0" rtlCol="0" anchor="ctr"/>
+          <a:lstStyle/>
+          <a:p>
+            <a:pPr indent="0" marL="0">
+              <a:buNone/>
+            </a:pPr>
+            <a:r>
+              <a:rPr lang="en-US" sz="1050" dirty="0">
+                <a:solidFill>
+                  <a:srgbClr val="555555"/>
+                </a:solidFill>
+                <a:latin typeface="Calibri" pitchFamily="34" charset="0"/>
+                <a:ea typeface="Calibri" pitchFamily="34" charset="-122"/>
+                <a:cs typeface="Calibri" pitchFamily="34" charset="-120"/>
+              </a:rPr>
+              <a:t>The platform decomposed into its five core processes</a:t>
+            </a:r>
+            <a:endParaRPr lang="en-US" sz="1050" dirty="0"/>
+          </a:p>
+        </p:txBody>
+      </p:sp>
+      <p:sp>
+        <p:nvSpPr>
+          <p:cNvPr id="7" name="Shape 5"/>
+          <p:cNvSpPr/>
+          <p:nvPr/>
+        </p:nvSpPr>
+        <p:spPr>
+          <a:xfrm>
+            <a:off x="11475720" y="182880"/>
+            <a:ext cx="384048" cy="384048"/>
+          </a:xfrm>
+          <a:prstGeom prst="ellipse">
+            <a:avLst/>
+          </a:prstGeom>
+          <a:solidFill>
+            <a:srgbClr val="1E2761"/>
+          </a:solidFill>
+          <a:ln/>
+        </p:spPr>
+      </p:sp>
+      <p:sp>
+        <p:nvSpPr>
+          <p:cNvPr id="8" name="Text 6"/>
+          <p:cNvSpPr/>
+          <p:nvPr/>
+        </p:nvSpPr>
+        <p:spPr>
+          <a:xfrm>
+            <a:off x="11475720" y="182880"/>
+            <a:ext cx="384048" cy="384048"/>
+          </a:xfrm>
+          <a:prstGeom prst="rect">
+            <a:avLst/>
+          </a:prstGeom>
+          <a:noFill/>
+          <a:ln/>
+        </p:spPr>
+        <p:txBody>
+          <a:bodyPr wrap="square" lIns="0" tIns="0" rIns="0" bIns="0" rtlCol="0" anchor="ctr"/>
+          <a:lstStyle/>
+          <a:p>
+            <a:pPr algn="ctr" indent="0" marL="0">
+              <a:buNone/>
+            </a:pPr>
+            <a:r>
+              <a:rPr lang="en-US" sz="1400" b="1" dirty="0">
+                <a:solidFill>
+                  <a:srgbClr val="FFFFFF"/>
+                </a:solidFill>
+                <a:latin typeface="Calibri" pitchFamily="34" charset="0"/>
+                <a:ea typeface="Calibri" pitchFamily="34" charset="-122"/>
+                <a:cs typeface="Calibri" pitchFamily="34" charset="-120"/>
+              </a:rPr>
+              <a:t>12</a:t>
+            </a:r>
+            <a:endParaRPr lang="en-US" sz="1400" dirty="0"/>
+          </a:p>
+        </p:txBody>
+      </p:sp>
+      <p:sp>
+        <p:nvSpPr>
+          <p:cNvPr id="9" name="Shape 7"/>
+          <p:cNvSpPr/>
+          <p:nvPr/>
+        </p:nvSpPr>
+        <p:spPr>
+          <a:xfrm>
+            <a:off x="722376" y="1188720"/>
+            <a:ext cx="1965960" cy="868680"/>
+          </a:xfrm>
+          <a:prstGeom prst="ellipse">
+            <a:avLst/>
+          </a:prstGeom>
+          <a:solidFill>
+            <a:srgbClr val="E8DFF5"/>
+          </a:solidFill>
+          <a:ln w="19050">
+            <a:solidFill>
+              <a:srgbClr val="8E6FC4"/>
+            </a:solidFill>
+            <a:prstDash val="solid"/>
+          </a:ln>
+        </p:spPr>
+      </p:sp>
+      <p:sp>
+        <p:nvSpPr>
+          <p:cNvPr id="10" name="Text 8"/>
+          <p:cNvSpPr/>
+          <p:nvPr/>
+        </p:nvSpPr>
+        <p:spPr>
+          <a:xfrm>
+            <a:off x="722376" y="1188720"/>
+            <a:ext cx="1965960" cy="868680"/>
+          </a:xfrm>
+          <a:prstGeom prst="rect">
+            <a:avLst/>
+          </a:prstGeom>
+          <a:noFill/>
+          <a:ln/>
+        </p:spPr>
+        <p:txBody>
+          <a:bodyPr wrap="square" lIns="0" tIns="0" rIns="0" bIns="0" rtlCol="0" anchor="ctr"/>
+          <a:lstStyle/>
+          <a:p>
+            <a:pPr algn="ctr" indent="0" marL="0">
+              <a:buNone/>
+            </a:pPr>
+            <a:r>
+              <a:rPr lang="en-US" sz="1000" b="1" dirty="0">
+                <a:solidFill>
+                  <a:srgbClr val="4B2E83"/>
+                </a:solidFill>
+                <a:latin typeface="Calibri" pitchFamily="34" charset="0"/>
+                <a:ea typeface="Calibri" pitchFamily="34" charset="-122"/>
+                <a:cs typeface="Calibri" pitchFamily="34" charset="-120"/>
+              </a:rPr>
+              <a:t>1.0</a:t>
+            </a:r>
+            <a:endParaRPr lang="en-US" sz="1000" dirty="0"/>
+          </a:p>
+          <a:p>
+            <a:pPr algn="ctr" indent="0" marL="0">
+              <a:buNone/>
+            </a:pPr>
+            <a:r>
+              <a:rPr lang="en-US" sz="1000" b="1" dirty="0">
+                <a:solidFill>
+                  <a:srgbClr val="4B2E83"/>
+                </a:solidFill>
+                <a:latin typeface="Calibri" pitchFamily="34" charset="0"/>
+                <a:ea typeface="Calibri" pitchFamily="34" charset="-122"/>
+                <a:cs typeface="Calibri" pitchFamily="34" charset="-120"/>
+              </a:rPr>
+              <a:t>Wallets</a:t>
+            </a:r>
+            <a:endParaRPr lang="en-US" sz="1000" dirty="0"/>
+          </a:p>
+        </p:txBody>
+      </p:sp>
+      <p:sp>
+        <p:nvSpPr>
+          <p:cNvPr id="11" name="Shape 9"/>
+          <p:cNvSpPr/>
+          <p:nvPr/>
+        </p:nvSpPr>
+        <p:spPr>
+          <a:xfrm>
+            <a:off x="2916936" y="1188720"/>
+            <a:ext cx="1965960" cy="868680"/>
+          </a:xfrm>
+          <a:prstGeom prst="ellipse">
+            <a:avLst/>
+          </a:prstGeom>
+          <a:solidFill>
+            <a:srgbClr val="E8DFF5"/>
+          </a:solidFill>
+          <a:ln w="19050">
+            <a:solidFill>
+              <a:srgbClr val="8E6FC4"/>
+            </a:solidFill>
+            <a:prstDash val="solid"/>
+          </a:ln>
+        </p:spPr>
+      </p:sp>
+      <p:sp>
+        <p:nvSpPr>
+          <p:cNvPr id="12" name="Text 10"/>
+          <p:cNvSpPr/>
+          <p:nvPr/>
+        </p:nvSpPr>
+        <p:spPr>
+          <a:xfrm>
+            <a:off x="2916936" y="1188720"/>
+            <a:ext cx="1965960" cy="868680"/>
+          </a:xfrm>
+          <a:prstGeom prst="rect">
+            <a:avLst/>
+          </a:prstGeom>
+          <a:noFill/>
+          <a:ln/>
+        </p:spPr>
+        <p:txBody>
+          <a:bodyPr wrap="square" lIns="0" tIns="0" rIns="0" bIns="0" rtlCol="0" anchor="ctr"/>
+          <a:lstStyle/>
+          <a:p>
+            <a:pPr algn="ctr" indent="0" marL="0">
+              <a:buNone/>
+            </a:pPr>
+            <a:r>
+              <a:rPr lang="en-US" sz="1000" b="1" dirty="0">
+                <a:solidFill>
+                  <a:srgbClr val="4B2E83"/>
+                </a:solidFill>
+                <a:latin typeface="Calibri" pitchFamily="34" charset="0"/>
+                <a:ea typeface="Calibri" pitchFamily="34" charset="-122"/>
+                <a:cs typeface="Calibri" pitchFamily="34" charset="-120"/>
+              </a:rPr>
+              <a:t>2.0</a:t>
+            </a:r>
+            <a:endParaRPr lang="en-US" sz="1000" dirty="0"/>
+          </a:p>
+          <a:p>
+            <a:pPr algn="ctr" indent="0" marL="0">
+              <a:buNone/>
+            </a:pPr>
+            <a:r>
+              <a:rPr lang="en-US" sz="1000" b="1" dirty="0">
+                <a:solidFill>
+                  <a:srgbClr val="4B2E83"/>
+                </a:solidFill>
+                <a:latin typeface="Calibri" pitchFamily="34" charset="0"/>
+                <a:ea typeface="Calibri" pitchFamily="34" charset="-122"/>
+                <a:cs typeface="Calibri" pitchFamily="34" charset="-120"/>
+              </a:rPr>
+              <a:t>Payments</a:t>
+            </a:r>
+            <a:endParaRPr lang="en-US" sz="1000" dirty="0"/>
+          </a:p>
+        </p:txBody>
+      </p:sp>
+      <p:sp>
+        <p:nvSpPr>
+          <p:cNvPr id="13" name="Shape 11"/>
+          <p:cNvSpPr/>
+          <p:nvPr/>
+        </p:nvSpPr>
+        <p:spPr>
+          <a:xfrm>
+            <a:off x="5111496" y="1188720"/>
+            <a:ext cx="1965960" cy="868680"/>
+          </a:xfrm>
+          <a:prstGeom prst="ellipse">
+            <a:avLst/>
+          </a:prstGeom>
+          <a:solidFill>
+            <a:srgbClr val="E8DFF5"/>
+          </a:solidFill>
+          <a:ln w="19050">
+            <a:solidFill>
+              <a:srgbClr val="8E6FC4"/>
+            </a:solidFill>
+            <a:prstDash val="solid"/>
+          </a:ln>
+        </p:spPr>
+      </p:sp>
+      <p:sp>
+        <p:nvSpPr>
+          <p:cNvPr id="14" name="Text 12"/>
+          <p:cNvSpPr/>
+          <p:nvPr/>
+        </p:nvSpPr>
+        <p:spPr>
+          <a:xfrm>
+            <a:off x="5111496" y="1188720"/>
+            <a:ext cx="1965960" cy="868680"/>
+          </a:xfrm>
+          <a:prstGeom prst="rect">
+            <a:avLst/>
+          </a:prstGeom>
+          <a:noFill/>
+          <a:ln/>
+        </p:spPr>
+        <p:txBody>
+          <a:bodyPr wrap="square" lIns="0" tIns="0" rIns="0" bIns="0" rtlCol="0" anchor="ctr"/>
+          <a:lstStyle/>
+          <a:p>
+            <a:pPr algn="ctr" indent="0" marL="0">
+              <a:buNone/>
+            </a:pPr>
+            <a:r>
+              <a:rPr lang="en-US" sz="1000" b="1" dirty="0">
+                <a:solidFill>
+                  <a:srgbClr val="4B2E83"/>
+                </a:solidFill>
+                <a:latin typeface="Calibri" pitchFamily="34" charset="0"/>
+                <a:ea typeface="Calibri" pitchFamily="34" charset="-122"/>
+                <a:cs typeface="Calibri" pitchFamily="34" charset="-120"/>
+              </a:rPr>
+              <a:t>3.0</a:t>
+            </a:r>
+            <a:endParaRPr lang="en-US" sz="1000" dirty="0"/>
+          </a:p>
+          <a:p>
+            <a:pPr algn="ctr" indent="0" marL="0">
+              <a:buNone/>
+            </a:pPr>
+            <a:r>
+              <a:rPr lang="en-US" sz="1000" b="1" dirty="0">
+                <a:solidFill>
+                  <a:srgbClr val="4B2E83"/>
+                </a:solidFill>
+                <a:latin typeface="Calibri" pitchFamily="34" charset="0"/>
+                <a:ea typeface="Calibri" pitchFamily="34" charset="-122"/>
+                <a:cs typeface="Calibri" pitchFamily="34" charset="-120"/>
+              </a:rPr>
+              <a:t>Fraud</a:t>
+            </a:r>
+            <a:endParaRPr lang="en-US" sz="1000" dirty="0"/>
+          </a:p>
+        </p:txBody>
+      </p:sp>
+      <p:sp>
+        <p:nvSpPr>
+          <p:cNvPr id="15" name="Shape 13"/>
+          <p:cNvSpPr/>
+          <p:nvPr/>
+        </p:nvSpPr>
+        <p:spPr>
+          <a:xfrm>
+            <a:off x="7306056" y="1188720"/>
+            <a:ext cx="1965960" cy="868680"/>
+          </a:xfrm>
+          <a:prstGeom prst="ellipse">
+            <a:avLst/>
+          </a:prstGeom>
+          <a:solidFill>
+            <a:srgbClr val="E8DFF5"/>
+          </a:solidFill>
+          <a:ln w="19050">
+            <a:solidFill>
+              <a:srgbClr val="8E6FC4"/>
+            </a:solidFill>
+            <a:prstDash val="solid"/>
+          </a:ln>
+        </p:spPr>
+      </p:sp>
+      <p:sp>
+        <p:nvSpPr>
+          <p:cNvPr id="16" name="Text 14"/>
+          <p:cNvSpPr/>
+          <p:nvPr/>
+        </p:nvSpPr>
+        <p:spPr>
+          <a:xfrm>
+            <a:off x="7306056" y="1188720"/>
+            <a:ext cx="1965960" cy="868680"/>
+          </a:xfrm>
+          <a:prstGeom prst="rect">
+            <a:avLst/>
+          </a:prstGeom>
+          <a:noFill/>
+          <a:ln/>
+        </p:spPr>
+        <p:txBody>
+          <a:bodyPr wrap="square" lIns="0" tIns="0" rIns="0" bIns="0" rtlCol="0" anchor="ctr"/>
+          <a:lstStyle/>
+          <a:p>
+            <a:pPr algn="ctr" indent="0" marL="0">
+              <a:buNone/>
+            </a:pPr>
+            <a:r>
+              <a:rPr lang="en-US" sz="1000" b="1" dirty="0">
+                <a:solidFill>
+                  <a:srgbClr val="4B2E83"/>
+                </a:solidFill>
+                <a:latin typeface="Calibri" pitchFamily="34" charset="0"/>
+                <a:ea typeface="Calibri" pitchFamily="34" charset="-122"/>
+                <a:cs typeface="Calibri" pitchFamily="34" charset="-120"/>
+              </a:rPr>
+              <a:t>4.0</a:t>
+            </a:r>
+            <a:endParaRPr lang="en-US" sz="1000" dirty="0"/>
+          </a:p>
+          <a:p>
+            <a:pPr algn="ctr" indent="0" marL="0">
+              <a:buNone/>
+            </a:pPr>
+            <a:r>
+              <a:rPr lang="en-US" sz="1000" b="1" dirty="0">
+                <a:solidFill>
+                  <a:srgbClr val="4B2E83"/>
+                </a:solidFill>
+                <a:latin typeface="Calibri" pitchFamily="34" charset="0"/>
+                <a:ea typeface="Calibri" pitchFamily="34" charset="-122"/>
+                <a:cs typeface="Calibri" pitchFamily="34" charset="-120"/>
+              </a:rPr>
+              <a:t>Open Bank</a:t>
+            </a:r>
+            <a:endParaRPr lang="en-US" sz="1000" dirty="0"/>
+          </a:p>
+          <a:p>
+            <a:pPr algn="ctr" indent="0" marL="0">
+              <a:buNone/>
+            </a:pPr>
+            <a:r>
+              <a:rPr lang="en-US" sz="1000" b="1" dirty="0">
+                <a:solidFill>
+                  <a:srgbClr val="4B2E83"/>
+                </a:solidFill>
+                <a:latin typeface="Calibri" pitchFamily="34" charset="0"/>
+                <a:ea typeface="Calibri" pitchFamily="34" charset="-122"/>
+                <a:cs typeface="Calibri" pitchFamily="34" charset="-120"/>
+              </a:rPr>
+              <a:t>/ CBDC</a:t>
+            </a:r>
+            <a:endParaRPr lang="en-US" sz="1000" dirty="0"/>
+          </a:p>
+        </p:txBody>
+      </p:sp>
+      <p:sp>
+        <p:nvSpPr>
+          <p:cNvPr id="17" name="Shape 15"/>
+          <p:cNvSpPr/>
+          <p:nvPr/>
+        </p:nvSpPr>
+        <p:spPr>
+          <a:xfrm>
+            <a:off x="9500616" y="1188720"/>
+            <a:ext cx="1965960" cy="868680"/>
+          </a:xfrm>
+          <a:prstGeom prst="ellipse">
+            <a:avLst/>
+          </a:prstGeom>
+          <a:solidFill>
+            <a:srgbClr val="E8DFF5"/>
+          </a:solidFill>
+          <a:ln w="19050">
+            <a:solidFill>
+              <a:srgbClr val="8E6FC4"/>
+            </a:solidFill>
+            <a:prstDash val="solid"/>
+          </a:ln>
+        </p:spPr>
+      </p:sp>
+      <p:sp>
+        <p:nvSpPr>
+          <p:cNvPr id="18" name="Text 16"/>
+          <p:cNvSpPr/>
+          <p:nvPr/>
+        </p:nvSpPr>
+        <p:spPr>
+          <a:xfrm>
+            <a:off x="9500616" y="1188720"/>
+            <a:ext cx="1965960" cy="868680"/>
+          </a:xfrm>
+          <a:prstGeom prst="rect">
+            <a:avLst/>
+          </a:prstGeom>
+          <a:noFill/>
+          <a:ln/>
+        </p:spPr>
+        <p:txBody>
+          <a:bodyPr wrap="square" lIns="0" tIns="0" rIns="0" bIns="0" rtlCol="0" anchor="ctr"/>
+          <a:lstStyle/>
+          <a:p>
+            <a:pPr algn="ctr" indent="0" marL="0">
+              <a:buNone/>
+            </a:pPr>
+            <a:r>
+              <a:rPr lang="en-US" sz="1000" b="1" dirty="0">
+                <a:solidFill>
+                  <a:srgbClr val="4B2E83"/>
+                </a:solidFill>
+                <a:latin typeface="Calibri" pitchFamily="34" charset="0"/>
+                <a:ea typeface="Calibri" pitchFamily="34" charset="-122"/>
+                <a:cs typeface="Calibri" pitchFamily="34" charset="-120"/>
+              </a:rPr>
+              <a:t>5.0</a:t>
+            </a:r>
+            <a:endParaRPr lang="en-US" sz="1000" dirty="0"/>
+          </a:p>
+          <a:p>
+            <a:pPr algn="ctr" indent="0" marL="0">
+              <a:buNone/>
+            </a:pPr>
+            <a:r>
+              <a:rPr lang="en-US" sz="1000" b="1" dirty="0">
+                <a:solidFill>
+                  <a:srgbClr val="4B2E83"/>
+                </a:solidFill>
+                <a:latin typeface="Calibri" pitchFamily="34" charset="0"/>
+                <a:ea typeface="Calibri" pitchFamily="34" charset="-122"/>
+                <a:cs typeface="Calibri" pitchFamily="34" charset="-120"/>
+              </a:rPr>
+              <a:t>Reporting</a:t>
+            </a:r>
+            <a:endParaRPr lang="en-US" sz="1000" dirty="0"/>
+          </a:p>
+        </p:txBody>
+      </p:sp>
+      <p:sp>
+        <p:nvSpPr>
+          <p:cNvPr id="19" name="Shape 17"/>
+          <p:cNvSpPr/>
+          <p:nvPr/>
+        </p:nvSpPr>
+        <p:spPr>
+          <a:xfrm>
+            <a:off x="722376" y="2468880"/>
+            <a:ext cx="1965960" cy="566928"/>
+          </a:xfrm>
+          <a:prstGeom prst="rect">
+            <a:avLst/>
+          </a:prstGeom>
+          <a:solidFill>
+            <a:srgbClr val="FBDCD5"/>
+          </a:solidFill>
+          <a:ln w="12700">
+            <a:solidFill>
+              <a:srgbClr val="E07856"/>
+            </a:solidFill>
+            <a:prstDash val="solid"/>
+          </a:ln>
+        </p:spPr>
+      </p:sp>
+      <p:sp>
+        <p:nvSpPr>
+          <p:cNvPr id="20" name="Text 18"/>
+          <p:cNvSpPr/>
+          <p:nvPr/>
+        </p:nvSpPr>
+        <p:spPr>
+          <a:xfrm>
+            <a:off x="722376" y="2468880"/>
+            <a:ext cx="1965960" cy="566928"/>
+          </a:xfrm>
+          <a:prstGeom prst="rect">
+            <a:avLst/>
+          </a:prstGeom>
+          <a:noFill/>
+          <a:ln/>
+        </p:spPr>
+        <p:txBody>
+          <a:bodyPr wrap="square" lIns="0" tIns="0" rIns="0" bIns="0" rtlCol="0" anchor="ctr"/>
+          <a:lstStyle/>
+          <a:p>
+            <a:pPr algn="ctr" indent="0" marL="0">
+              <a:buNone/>
+            </a:pPr>
+            <a:r>
+              <a:rPr lang="en-US" sz="850" dirty="0">
+                <a:solidFill>
+                  <a:srgbClr val="8A3A1E"/>
+                </a:solidFill>
+                <a:latin typeface="Calibri" pitchFamily="34" charset="0"/>
+                <a:ea typeface="Calibri" pitchFamily="34" charset="-122"/>
+                <a:cs typeface="Calibri" pitchFamily="34" charset="-120"/>
+              </a:rPr>
+              <a:t>D1 customers/</a:t>
+            </a:r>
+            <a:endParaRPr lang="en-US" sz="850" dirty="0"/>
+          </a:p>
+          <a:p>
+            <a:pPr algn="ctr" indent="0" marL="0">
+              <a:buNone/>
+            </a:pPr>
+            <a:r>
+              <a:rPr lang="en-US" sz="850" dirty="0">
+                <a:solidFill>
+                  <a:srgbClr val="8A3A1E"/>
+                </a:solidFill>
+                <a:latin typeface="Calibri" pitchFamily="34" charset="0"/>
+                <a:ea typeface="Calibri" pitchFamily="34" charset="-122"/>
+                <a:cs typeface="Calibri" pitchFamily="34" charset="-120"/>
+              </a:rPr>
+              <a:t>wallets</a:t>
+            </a:r>
+            <a:endParaRPr lang="en-US" sz="850" dirty="0"/>
+          </a:p>
+        </p:txBody>
+      </p:sp>
+      <p:sp>
+        <p:nvSpPr>
+          <p:cNvPr id="21" name="Shape 19"/>
+          <p:cNvSpPr/>
+          <p:nvPr/>
+        </p:nvSpPr>
+        <p:spPr>
+          <a:xfrm>
+            <a:off x="1705356" y="2057400"/>
+            <a:ext cx="9144" cy="411480"/>
+          </a:xfrm>
+          <a:prstGeom prst="line">
+            <a:avLst/>
+          </a:prstGeom>
+          <a:noFill/>
+          <a:ln w="17780">
+            <a:solidFill>
+              <a:srgbClr val="888888"/>
+            </a:solidFill>
+            <a:prstDash val="solid"/>
+            <a:headEnd type="none"/>
+            <a:tailEnd type="triangle"/>
+          </a:ln>
+        </p:spPr>
+      </p:sp>
+      <p:sp>
+        <p:nvSpPr>
+          <p:cNvPr id="22" name="Shape 20"/>
+          <p:cNvSpPr/>
+          <p:nvPr/>
+        </p:nvSpPr>
+        <p:spPr>
+          <a:xfrm>
+            <a:off x="2916936" y="2468880"/>
+            <a:ext cx="1965960" cy="566928"/>
+          </a:xfrm>
+          <a:prstGeom prst="rect">
+            <a:avLst/>
+          </a:prstGeom>
+          <a:solidFill>
+            <a:srgbClr val="FBDCD5"/>
+          </a:solidFill>
+          <a:ln w="12700">
+            <a:solidFill>
+              <a:srgbClr val="E07856"/>
+            </a:solidFill>
+            <a:prstDash val="solid"/>
+          </a:ln>
+        </p:spPr>
+      </p:sp>
+      <p:sp>
+        <p:nvSpPr>
+          <p:cNvPr id="23" name="Text 21"/>
+          <p:cNvSpPr/>
+          <p:nvPr/>
+        </p:nvSpPr>
+        <p:spPr>
+          <a:xfrm>
+            <a:off x="2916936" y="2468880"/>
+            <a:ext cx="1965960" cy="566928"/>
+          </a:xfrm>
+          <a:prstGeom prst="rect">
+            <a:avLst/>
+          </a:prstGeom>
+          <a:noFill/>
+          <a:ln/>
+        </p:spPr>
+        <p:txBody>
+          <a:bodyPr wrap="square" lIns="0" tIns="0" rIns="0" bIns="0" rtlCol="0" anchor="ctr"/>
+          <a:lstStyle/>
+          <a:p>
+            <a:pPr algn="ctr" indent="0" marL="0">
+              <a:buNone/>
+            </a:pPr>
+            <a:r>
+              <a:rPr lang="en-US" sz="850" dirty="0">
+                <a:solidFill>
+                  <a:srgbClr val="8A3A1E"/>
+                </a:solidFill>
+                <a:latin typeface="Calibri" pitchFamily="34" charset="0"/>
+                <a:ea typeface="Calibri" pitchFamily="34" charset="-122"/>
+                <a:cs typeface="Calibri" pitchFamily="34" charset="-120"/>
+              </a:rPr>
+              <a:t>D2 transactions/</a:t>
+            </a:r>
+            <a:endParaRPr lang="en-US" sz="850" dirty="0"/>
+          </a:p>
+          <a:p>
+            <a:pPr algn="ctr" indent="0" marL="0">
+              <a:buNone/>
+            </a:pPr>
+            <a:r>
+              <a:rPr lang="en-US" sz="850" dirty="0">
+                <a:solidFill>
+                  <a:srgbClr val="8A3A1E"/>
+                </a:solidFill>
+                <a:latin typeface="Calibri" pitchFamily="34" charset="0"/>
+                <a:ea typeface="Calibri" pitchFamily="34" charset="-122"/>
+                <a:cs typeface="Calibri" pitchFamily="34" charset="-120"/>
+              </a:rPr>
+              <a:t>ledger</a:t>
+            </a:r>
+            <a:endParaRPr lang="en-US" sz="850" dirty="0"/>
+          </a:p>
+        </p:txBody>
+      </p:sp>
+      <p:sp>
+        <p:nvSpPr>
+          <p:cNvPr id="24" name="Shape 22"/>
+          <p:cNvSpPr/>
+          <p:nvPr/>
+        </p:nvSpPr>
+        <p:spPr>
+          <a:xfrm>
+            <a:off x="3899916" y="2057400"/>
+            <a:ext cx="9144" cy="411480"/>
+          </a:xfrm>
+          <a:prstGeom prst="line">
+            <a:avLst/>
+          </a:prstGeom>
+          <a:noFill/>
+          <a:ln w="17780">
+            <a:solidFill>
+              <a:srgbClr val="888888"/>
+            </a:solidFill>
+            <a:prstDash val="solid"/>
+            <a:headEnd type="none"/>
+            <a:tailEnd type="triangle"/>
+          </a:ln>
+        </p:spPr>
+      </p:sp>
+      <p:sp>
+        <p:nvSpPr>
+          <p:cNvPr id="25" name="Shape 23"/>
+          <p:cNvSpPr/>
+          <p:nvPr/>
+        </p:nvSpPr>
+        <p:spPr>
+          <a:xfrm>
+            <a:off x="5111496" y="2468880"/>
+            <a:ext cx="1965960" cy="566928"/>
+          </a:xfrm>
+          <a:prstGeom prst="rect">
+            <a:avLst/>
+          </a:prstGeom>
+          <a:solidFill>
+            <a:srgbClr val="FBDCD5"/>
+          </a:solidFill>
+          <a:ln w="12700">
+            <a:solidFill>
+              <a:srgbClr val="E07856"/>
+            </a:solidFill>
+            <a:prstDash val="solid"/>
+          </a:ln>
+        </p:spPr>
+      </p:sp>
+      <p:sp>
+        <p:nvSpPr>
+          <p:cNvPr id="26" name="Text 24"/>
+          <p:cNvSpPr/>
+          <p:nvPr/>
+        </p:nvSpPr>
+        <p:spPr>
+          <a:xfrm>
+            <a:off x="5111496" y="2468880"/>
+            <a:ext cx="1965960" cy="566928"/>
+          </a:xfrm>
+          <a:prstGeom prst="rect">
+            <a:avLst/>
+          </a:prstGeom>
+          <a:noFill/>
+          <a:ln/>
+        </p:spPr>
+        <p:txBody>
+          <a:bodyPr wrap="square" lIns="0" tIns="0" rIns="0" bIns="0" rtlCol="0" anchor="ctr"/>
+          <a:lstStyle/>
+          <a:p>
+            <a:pPr algn="ctr" indent="0" marL="0">
+              <a:buNone/>
+            </a:pPr>
+            <a:r>
+              <a:rPr lang="en-US" sz="850" dirty="0">
+                <a:solidFill>
+                  <a:srgbClr val="8A3A1E"/>
+                </a:solidFill>
+                <a:latin typeface="Calibri" pitchFamily="34" charset="0"/>
+                <a:ea typeface="Calibri" pitchFamily="34" charset="-122"/>
+                <a:cs typeface="Calibri" pitchFamily="34" charset="-120"/>
+              </a:rPr>
+              <a:t>D3 alerts/</a:t>
+            </a:r>
+            <a:endParaRPr lang="en-US" sz="850" dirty="0"/>
+          </a:p>
+          <a:p>
+            <a:pPr algn="ctr" indent="0" marL="0">
+              <a:buNone/>
+            </a:pPr>
+            <a:r>
+              <a:rPr lang="en-US" sz="850" dirty="0">
+                <a:solidFill>
+                  <a:srgbClr val="8A3A1E"/>
+                </a:solidFill>
+                <a:latin typeface="Calibri" pitchFamily="34" charset="0"/>
+                <a:ea typeface="Calibri" pitchFamily="34" charset="-122"/>
+                <a:cs typeface="Calibri" pitchFamily="34" charset="-120"/>
+              </a:rPr>
+              <a:t>cases</a:t>
+            </a:r>
+            <a:endParaRPr lang="en-US" sz="850" dirty="0"/>
+          </a:p>
+        </p:txBody>
+      </p:sp>
+      <p:sp>
+        <p:nvSpPr>
+          <p:cNvPr id="27" name="Shape 25"/>
+          <p:cNvSpPr/>
+          <p:nvPr/>
+        </p:nvSpPr>
+        <p:spPr>
+          <a:xfrm>
+            <a:off x="6094476" y="2057400"/>
+            <a:ext cx="9144" cy="411480"/>
+          </a:xfrm>
+          <a:prstGeom prst="line">
+            <a:avLst/>
+          </a:prstGeom>
+          <a:noFill/>
+          <a:ln w="17780">
+            <a:solidFill>
+              <a:srgbClr val="888888"/>
+            </a:solidFill>
+            <a:prstDash val="solid"/>
+            <a:headEnd type="none"/>
+            <a:tailEnd type="triangle"/>
+          </a:ln>
+        </p:spPr>
+      </p:sp>
+      <p:sp>
+        <p:nvSpPr>
+          <p:cNvPr id="28" name="Shape 26"/>
+          <p:cNvSpPr/>
+          <p:nvPr/>
+        </p:nvSpPr>
+        <p:spPr>
+          <a:xfrm>
+            <a:off x="7306056" y="2468880"/>
+            <a:ext cx="1965960" cy="566928"/>
+          </a:xfrm>
+          <a:prstGeom prst="rect">
+            <a:avLst/>
+          </a:prstGeom>
+          <a:solidFill>
+            <a:srgbClr val="FBDCD5"/>
+          </a:solidFill>
+          <a:ln w="12700">
+            <a:solidFill>
+              <a:srgbClr val="E07856"/>
+            </a:solidFill>
+            <a:prstDash val="solid"/>
+          </a:ln>
+        </p:spPr>
+      </p:sp>
+      <p:sp>
+        <p:nvSpPr>
+          <p:cNvPr id="29" name="Text 27"/>
+          <p:cNvSpPr/>
+          <p:nvPr/>
+        </p:nvSpPr>
+        <p:spPr>
+          <a:xfrm>
+            <a:off x="7306056" y="2468880"/>
+            <a:ext cx="1965960" cy="566928"/>
+          </a:xfrm>
+          <a:prstGeom prst="rect">
+            <a:avLst/>
+          </a:prstGeom>
+          <a:noFill/>
+          <a:ln/>
+        </p:spPr>
+        <p:txBody>
+          <a:bodyPr wrap="square" lIns="0" tIns="0" rIns="0" bIns="0" rtlCol="0" anchor="ctr"/>
+          <a:lstStyle/>
+          <a:p>
+            <a:pPr algn="ctr" indent="0" marL="0">
+              <a:buNone/>
+            </a:pPr>
+            <a:r>
+              <a:rPr lang="en-US" sz="850" dirty="0">
+                <a:solidFill>
+                  <a:srgbClr val="8A3A1E"/>
+                </a:solidFill>
+                <a:latin typeface="Calibri" pitchFamily="34" charset="0"/>
+                <a:ea typeface="Calibri" pitchFamily="34" charset="-122"/>
+                <a:cs typeface="Calibri" pitchFamily="34" charset="-120"/>
+              </a:rPr>
+              <a:t>D4 api_calls/</a:t>
+            </a:r>
+            <a:endParaRPr lang="en-US" sz="850" dirty="0"/>
+          </a:p>
+          <a:p>
+            <a:pPr algn="ctr" indent="0" marL="0">
+              <a:buNone/>
+            </a:pPr>
+            <a:r>
+              <a:rPr lang="en-US" sz="850" dirty="0">
+                <a:solidFill>
+                  <a:srgbClr val="8A3A1E"/>
+                </a:solidFill>
+                <a:latin typeface="Calibri" pitchFamily="34" charset="0"/>
+                <a:ea typeface="Calibri" pitchFamily="34" charset="-122"/>
+                <a:cs typeface="Calibri" pitchFamily="34" charset="-120"/>
+              </a:rPr>
+              <a:t>cbdc_ops</a:t>
+            </a:r>
+            <a:endParaRPr lang="en-US" sz="850" dirty="0"/>
+          </a:p>
+        </p:txBody>
+      </p:sp>
+      <p:sp>
+        <p:nvSpPr>
+          <p:cNvPr id="30" name="Shape 28"/>
+          <p:cNvSpPr/>
+          <p:nvPr/>
+        </p:nvSpPr>
+        <p:spPr>
+          <a:xfrm>
+            <a:off x="8289036" y="2057400"/>
+            <a:ext cx="9144" cy="411480"/>
+          </a:xfrm>
+          <a:prstGeom prst="line">
+            <a:avLst/>
+          </a:prstGeom>
+          <a:noFill/>
+          <a:ln w="17780">
+            <a:solidFill>
+              <a:srgbClr val="888888"/>
+            </a:solidFill>
+            <a:prstDash val="solid"/>
+            <a:headEnd type="none"/>
+            <a:tailEnd type="triangle"/>
+          </a:ln>
+        </p:spPr>
+      </p:sp>
+      <p:sp>
+        <p:nvSpPr>
+          <p:cNvPr id="31" name="Shape 29"/>
+          <p:cNvSpPr/>
+          <p:nvPr/>
+        </p:nvSpPr>
+        <p:spPr>
+          <a:xfrm>
+            <a:off x="9500616" y="2468880"/>
+            <a:ext cx="1965960" cy="566928"/>
+          </a:xfrm>
+          <a:prstGeom prst="rect">
+            <a:avLst/>
+          </a:prstGeom>
+          <a:solidFill>
+            <a:srgbClr val="FBDCD5"/>
+          </a:solidFill>
+          <a:ln w="12700">
+            <a:solidFill>
+              <a:srgbClr val="E07856"/>
+            </a:solidFill>
+            <a:prstDash val="solid"/>
+          </a:ln>
+        </p:spPr>
+      </p:sp>
+      <p:sp>
+        <p:nvSpPr>
+          <p:cNvPr id="32" name="Text 30"/>
+          <p:cNvSpPr/>
+          <p:nvPr/>
+        </p:nvSpPr>
+        <p:spPr>
+          <a:xfrm>
+            <a:off x="9500616" y="2468880"/>
+            <a:ext cx="1965960" cy="566928"/>
+          </a:xfrm>
+          <a:prstGeom prst="rect">
+            <a:avLst/>
+          </a:prstGeom>
+          <a:noFill/>
+          <a:ln/>
+        </p:spPr>
+        <p:txBody>
+          <a:bodyPr wrap="square" lIns="0" tIns="0" rIns="0" bIns="0" rtlCol="0" anchor="ctr"/>
+          <a:lstStyle/>
+          <a:p>
+            <a:pPr algn="ctr" indent="0" marL="0">
+              <a:buNone/>
+            </a:pPr>
+            <a:r>
+              <a:rPr lang="en-US" sz="850" dirty="0">
+                <a:solidFill>
+                  <a:srgbClr val="8A3A1E"/>
+                </a:solidFill>
+                <a:latin typeface="Calibri" pitchFamily="34" charset="0"/>
+                <a:ea typeface="Calibri" pitchFamily="34" charset="-122"/>
+                <a:cs typeface="Calibri" pitchFamily="34" charset="-120"/>
+              </a:rPr>
+              <a:t>D5 live KPI/</a:t>
+            </a:r>
+            <a:endParaRPr lang="en-US" sz="850" dirty="0"/>
+          </a:p>
+          <a:p>
+            <a:pPr algn="ctr" indent="0" marL="0">
+              <a:buNone/>
+            </a:pPr>
+            <a:r>
+              <a:rPr lang="en-US" sz="850" dirty="0">
+                <a:solidFill>
+                  <a:srgbClr val="8A3A1E"/>
+                </a:solidFill>
+                <a:latin typeface="Calibri" pitchFamily="34" charset="0"/>
+                <a:ea typeface="Calibri" pitchFamily="34" charset="-122"/>
+                <a:cs typeface="Calibri" pitchFamily="34" charset="-120"/>
+              </a:rPr>
+              <a:t>exports</a:t>
+            </a:r>
+            <a:endParaRPr lang="en-US" sz="850" dirty="0"/>
+          </a:p>
+        </p:txBody>
+      </p:sp>
+      <p:sp>
+        <p:nvSpPr>
+          <p:cNvPr id="33" name="Shape 31"/>
+          <p:cNvSpPr/>
+          <p:nvPr/>
+        </p:nvSpPr>
+        <p:spPr>
+          <a:xfrm>
+            <a:off x="10483596" y="2057400"/>
+            <a:ext cx="9144" cy="411480"/>
+          </a:xfrm>
+          <a:prstGeom prst="line">
+            <a:avLst/>
+          </a:prstGeom>
+          <a:noFill/>
+          <a:ln w="17780">
+            <a:solidFill>
+              <a:srgbClr val="888888"/>
+            </a:solidFill>
+            <a:prstDash val="solid"/>
+            <a:headEnd type="none"/>
+            <a:tailEnd type="triangle"/>
+          </a:ln>
+        </p:spPr>
+      </p:sp>
+      <p:sp>
+        <p:nvSpPr>
+          <p:cNvPr id="34" name="Shape 32"/>
+          <p:cNvSpPr/>
+          <p:nvPr/>
+        </p:nvSpPr>
+        <p:spPr>
+          <a:xfrm>
+            <a:off x="274320" y="4206240"/>
+            <a:ext cx="1828800" cy="402336"/>
+          </a:xfrm>
+          <a:prstGeom prst="roundRect">
+            <a:avLst>
+              <a:gd name="adj" fmla="val 13636"/>
+            </a:avLst>
+          </a:prstGeom>
+          <a:solidFill>
+            <a:srgbClr val="F2F2F2"/>
+          </a:solidFill>
+          <a:ln w="12700">
+            <a:solidFill>
+              <a:srgbClr val="B7B7B7"/>
+            </a:solidFill>
+            <a:prstDash val="solid"/>
+          </a:ln>
+        </p:spPr>
+      </p:sp>
+      <p:sp>
+        <p:nvSpPr>
+          <p:cNvPr id="35" name="Text 33"/>
+          <p:cNvSpPr/>
+          <p:nvPr/>
+        </p:nvSpPr>
+        <p:spPr>
+          <a:xfrm>
+            <a:off x="329184" y="4206240"/>
+            <a:ext cx="1719072" cy="402336"/>
+          </a:xfrm>
+          <a:prstGeom prst="rect">
+            <a:avLst/>
+          </a:prstGeom>
+          <a:noFill/>
+          <a:ln/>
+        </p:spPr>
+        <p:txBody>
+          <a:bodyPr wrap="square" lIns="0" tIns="0" rIns="0" bIns="0" rtlCol="0" anchor="ctr"/>
+          <a:lstStyle/>
+          <a:p>
+            <a:pPr algn="ctr" indent="0" marL="0">
+              <a:buNone/>
+            </a:pPr>
+            <a:r>
+              <a:rPr lang="en-US" sz="900" b="1" dirty="0">
+                <a:solidFill>
+                  <a:srgbClr val="333333"/>
+                </a:solidFill>
+                <a:latin typeface="Calibri" pitchFamily="34" charset="0"/>
+                <a:ea typeface="Calibri" pitchFamily="34" charset="-122"/>
+                <a:cs typeface="Calibri" pitchFamily="34" charset="-120"/>
+              </a:rPr>
+              <a:t>Customer / Merchant</a:t>
+            </a:r>
+            <a:endParaRPr lang="en-US" sz="900" dirty="0"/>
+          </a:p>
+        </p:txBody>
+      </p:sp>
+      <p:sp>
+        <p:nvSpPr>
+          <p:cNvPr id="36" name="Shape 34"/>
+          <p:cNvSpPr/>
+          <p:nvPr/>
+        </p:nvSpPr>
+        <p:spPr>
+          <a:xfrm flipH="1" flipV="1">
+            <a:off x="1179576" y="2057400"/>
+            <a:ext cx="9144" cy="2148840"/>
+          </a:xfrm>
+          <a:prstGeom prst="line">
+            <a:avLst/>
+          </a:prstGeom>
+          <a:noFill/>
+          <a:ln w="17780">
+            <a:solidFill>
+              <a:srgbClr val="888888"/>
+            </a:solidFill>
+            <a:prstDash val="solid"/>
+            <a:headEnd type="none"/>
+            <a:tailEnd type="triangle"/>
+          </a:ln>
+        </p:spPr>
+      </p:sp>
+      <p:sp>
+        <p:nvSpPr>
+          <p:cNvPr id="37" name="Shape 35"/>
+          <p:cNvSpPr/>
+          <p:nvPr/>
+        </p:nvSpPr>
+        <p:spPr>
+          <a:xfrm>
+            <a:off x="10058400" y="4206240"/>
+            <a:ext cx="1828800" cy="402336"/>
+          </a:xfrm>
+          <a:prstGeom prst="roundRect">
+            <a:avLst>
+              <a:gd name="adj" fmla="val 13636"/>
+            </a:avLst>
+          </a:prstGeom>
+          <a:solidFill>
+            <a:srgbClr val="F2F2F2"/>
+          </a:solidFill>
+          <a:ln w="12700">
+            <a:solidFill>
+              <a:srgbClr val="B7B7B7"/>
+            </a:solidFill>
+            <a:prstDash val="solid"/>
+          </a:ln>
+        </p:spPr>
+      </p:sp>
+      <p:sp>
+        <p:nvSpPr>
+          <p:cNvPr id="38" name="Text 36"/>
+          <p:cNvSpPr/>
+          <p:nvPr/>
+        </p:nvSpPr>
+        <p:spPr>
+          <a:xfrm>
+            <a:off x="10113264" y="4206240"/>
+            <a:ext cx="1719072" cy="402336"/>
+          </a:xfrm>
+          <a:prstGeom prst="rect">
+            <a:avLst/>
+          </a:prstGeom>
+          <a:noFill/>
+          <a:ln/>
+        </p:spPr>
+        <p:txBody>
+          <a:bodyPr wrap="square" lIns="0" tIns="0" rIns="0" bIns="0" rtlCol="0" anchor="ctr"/>
+          <a:lstStyle/>
+          <a:p>
+            <a:pPr algn="ctr" indent="0" marL="0">
+              <a:buNone/>
+            </a:pPr>
+            <a:r>
+              <a:rPr lang="en-US" sz="900" b="1" dirty="0">
+                <a:solidFill>
+                  <a:srgbClr val="333333"/>
+                </a:solidFill>
+                <a:latin typeface="Calibri" pitchFamily="34" charset="0"/>
+                <a:ea typeface="Calibri" pitchFamily="34" charset="-122"/>
+                <a:cs typeface="Calibri" pitchFamily="34" charset="-120"/>
+              </a:rPr>
+              <a:t>Fraud analyst / Exec</a:t>
+            </a:r>
+            <a:endParaRPr lang="en-US" sz="900" dirty="0"/>
+          </a:p>
+        </p:txBody>
+      </p:sp>
+      <p:sp>
+        <p:nvSpPr>
+          <p:cNvPr id="39" name="Shape 37"/>
+          <p:cNvSpPr/>
+          <p:nvPr/>
+        </p:nvSpPr>
+        <p:spPr>
+          <a:xfrm flipH="1">
+            <a:off x="10972800" y="2057400"/>
+            <a:ext cx="36576" cy="2148840"/>
+          </a:xfrm>
+          <a:prstGeom prst="line">
+            <a:avLst/>
+          </a:prstGeom>
+          <a:noFill/>
+          <a:ln w="17780">
+            <a:solidFill>
+              <a:srgbClr val="888888"/>
+            </a:solidFill>
+            <a:prstDash val="solid"/>
+            <a:headEnd type="none"/>
+            <a:tailEnd type="triangle"/>
+          </a:ln>
+        </p:spPr>
+      </p:sp>
+      <p:sp>
+        <p:nvSpPr>
+          <p:cNvPr id="40" name="Shape 38"/>
+          <p:cNvSpPr/>
+          <p:nvPr/>
+        </p:nvSpPr>
+        <p:spPr>
+          <a:xfrm>
+            <a:off x="4882896" y="1463040"/>
+            <a:ext cx="228600" cy="9144"/>
+          </a:xfrm>
+          <a:prstGeom prst="line">
+            <a:avLst/>
+          </a:prstGeom>
+          <a:noFill/>
+          <a:ln w="17780">
+            <a:solidFill>
+              <a:srgbClr val="888888"/>
+            </a:solidFill>
+            <a:prstDash val="solid"/>
+            <a:headEnd type="triangle"/>
+            <a:tailEnd type="triangle"/>
+          </a:ln>
+        </p:spPr>
+      </p:sp>
+      <p:sp>
+        <p:nvSpPr>
+          <p:cNvPr id="41" name="Text 39"/>
+          <p:cNvSpPr/>
+          <p:nvPr/>
+        </p:nvSpPr>
+        <p:spPr>
+          <a:xfrm>
+            <a:off x="4608576" y="950976"/>
+            <a:ext cx="2514600" cy="201168"/>
+          </a:xfrm>
+          <a:prstGeom prst="rect">
+            <a:avLst/>
+          </a:prstGeom>
+          <a:noFill/>
+          <a:ln/>
+        </p:spPr>
+        <p:txBody>
+          <a:bodyPr wrap="square" lIns="0" tIns="0" rIns="0" bIns="0" rtlCol="0" anchor="ctr"/>
+          <a:lstStyle/>
+          <a:p>
+            <a:pPr algn="ctr" indent="0" marL="0">
+              <a:buNone/>
+            </a:pPr>
+            <a:r>
+              <a:rPr lang="en-US" sz="900" i="1" dirty="0">
+                <a:solidFill>
+                  <a:srgbClr val="666666"/>
+                </a:solidFill>
+                <a:latin typeface="Calibri" pitchFamily="34" charset="0"/>
+                <a:ea typeface="Calibri" pitchFamily="34" charset="-122"/>
+                <a:cs typeface="Calibri" pitchFamily="34" charset="-120"/>
+              </a:rPr>
+              <a:t>txn stream / decision</a:t>
+            </a:r>
+            <a:endParaRPr lang="en-US" sz="900" dirty="0"/>
+          </a:p>
+        </p:txBody>
+      </p:sp>
+      <p:sp>
+        <p:nvSpPr>
+          <p:cNvPr id="42" name="Shape 40"/>
+          <p:cNvSpPr/>
+          <p:nvPr/>
+        </p:nvSpPr>
+        <p:spPr>
+          <a:xfrm flipV="1">
+            <a:off x="1705356" y="2057400"/>
+            <a:ext cx="8778240" cy="978408"/>
+          </a:xfrm>
+          <a:prstGeom prst="line">
+            <a:avLst/>
+          </a:prstGeom>
+          <a:noFill/>
+          <a:ln w="17780">
+            <a:solidFill>
+              <a:srgbClr val="AAAAAA"/>
+            </a:solidFill>
+            <a:prstDash val="dash"/>
+            <a:headEnd type="none"/>
+            <a:tailEnd type="triangle"/>
+          </a:ln>
+        </p:spPr>
+      </p:sp>
+      <p:sp>
+        <p:nvSpPr>
+          <p:cNvPr id="43" name="Shape 41"/>
+          <p:cNvSpPr/>
+          <p:nvPr/>
+        </p:nvSpPr>
+        <p:spPr>
+          <a:xfrm flipV="1">
+            <a:off x="3899916" y="2057400"/>
+            <a:ext cx="6583680" cy="978408"/>
+          </a:xfrm>
+          <a:prstGeom prst="line">
+            <a:avLst/>
+          </a:prstGeom>
+          <a:noFill/>
+          <a:ln w="17780">
+            <a:solidFill>
+              <a:srgbClr val="AAAAAA"/>
+            </a:solidFill>
+            <a:prstDash val="dash"/>
+            <a:headEnd type="none"/>
+            <a:tailEnd type="triangle"/>
+          </a:ln>
+        </p:spPr>
+      </p:sp>
+      <p:sp>
+        <p:nvSpPr>
+          <p:cNvPr id="44" name="Shape 42"/>
+          <p:cNvSpPr/>
+          <p:nvPr/>
+        </p:nvSpPr>
+        <p:spPr>
+          <a:xfrm flipV="1">
+            <a:off x="6094476" y="2057400"/>
+            <a:ext cx="4389120" cy="978408"/>
+          </a:xfrm>
+          <a:prstGeom prst="line">
+            <a:avLst/>
+          </a:prstGeom>
+          <a:noFill/>
+          <a:ln w="17780">
+            <a:solidFill>
+              <a:srgbClr val="AAAAAA"/>
+            </a:solidFill>
+            <a:prstDash val="dash"/>
+            <a:headEnd type="none"/>
+            <a:tailEnd type="triangle"/>
+          </a:ln>
+        </p:spPr>
+      </p:sp>
+      <p:sp>
+        <p:nvSpPr>
+          <p:cNvPr id="45" name="Shape 43"/>
+          <p:cNvSpPr/>
+          <p:nvPr/>
+        </p:nvSpPr>
+        <p:spPr>
+          <a:xfrm flipV="1">
+            <a:off x="8289036" y="2057400"/>
+            <a:ext cx="2194560" cy="978408"/>
+          </a:xfrm>
+          <a:prstGeom prst="line">
+            <a:avLst/>
+          </a:prstGeom>
+          <a:noFill/>
+          <a:ln w="17780">
+            <a:solidFill>
+              <a:srgbClr val="AAAAAA"/>
+            </a:solidFill>
+            <a:prstDash val="dash"/>
+            <a:headEnd type="none"/>
+            <a:tailEnd type="triangle"/>
+          </a:ln>
+        </p:spPr>
+      </p:sp>
+      <p:sp>
+        <p:nvSpPr>
+          <p:cNvPr id="46" name="Text 44"/>
+          <p:cNvSpPr/>
+          <p:nvPr/>
+        </p:nvSpPr>
+        <p:spPr>
+          <a:xfrm>
+            <a:off x="548640" y="4937760"/>
+            <a:ext cx="11064240" cy="201168"/>
+          </a:xfrm>
+          <a:prstGeom prst="rect">
+            <a:avLst/>
+          </a:prstGeom>
+          <a:noFill/>
+          <a:ln/>
+        </p:spPr>
+        <p:txBody>
+          <a:bodyPr wrap="square" lIns="0" tIns="0" rIns="0" bIns="0" rtlCol="0" anchor="ctr"/>
+          <a:lstStyle/>
+          <a:p>
+            <a:pPr algn="ctr" indent="0" marL="0">
+              <a:buNone/>
+            </a:pPr>
+            <a:r>
+              <a:rPr lang="en-US" sz="900" i="1" dirty="0">
+                <a:solidFill>
+                  <a:srgbClr val="666666"/>
+                </a:solidFill>
+                <a:latin typeface="Calibri" pitchFamily="34" charset="0"/>
+                <a:ea typeface="Calibri" pitchFamily="34" charset="-122"/>
+                <a:cs typeface="Calibri" pitchFamily="34" charset="-120"/>
+              </a:rPr>
+              <a:t>Dashed arrows: on-demand aggregation from data stores into 5.0 Reporting</a:t>
+            </a:r>
+            <a:endParaRPr lang="en-US" sz="900" dirty="0"/>
+          </a:p>
+        </p:txBody>
+      </p:sp>
     </p:spTree>
   </p:cSld>
   <p:clrMapOvr>
@@ -10834,7 +14680,7 @@
 </file>
 
 <file path=ppt/slides/slide17.xml><?xml version="1.0" encoding="utf-8"?>
-<p:sld xmlns:a="http://schemas.openxmlformats.org/drawingml/2006/main" xmlns:p="http://schemas.openxmlformats.org/presentationml/2006/main" xmlns:r="http://schemas.openxmlformats.org/officeDocument/2006/relationships">
+<p:sld xmlns:a="http://schemas.openxmlformats.org/drawingml/2006/main" xmlns:r="http://schemas.openxmlformats.org/officeDocument/2006/relationships" xmlns:p="http://schemas.openxmlformats.org/presentationml/2006/main">
   <p:cSld name="Slide 17">
     <p:bg>
       <p:bgPr>
@@ -10857,28 +14703,2781 @@
           <a:chExt cx="0" cy="0"/>
         </a:xfrm>
       </p:grpSpPr>
-      <p:pic>
-        <p:nvPicPr>
-          <p:cNvPr id="2" name="section8-database-erd.png"/>
-          <p:cNvPicPr/>
-          <p:nvPr/>
-        </p:nvPicPr>
-        <p:blipFill>
-          <a:blip r:embed="rId1"/>
-          <a:stretch>
-            <a:fillRect/>
-          </a:stretch>
-        </p:blipFill>
+      <p:sp>
+        <p:nvSpPr>
+          <p:cNvPr id="2" name="Shape 0"/>
+          <p:cNvSpPr/>
+          <p:nvPr/>
+        </p:nvSpPr>
         <p:spPr>
           <a:xfrm>
             <a:off x="0" y="0"/>
-            <a:ext cx="12192000" cy="6858000"/>
-          </a:xfrm>
-          <a:prstGeom prst="rect">
-            <a:avLst/>
-          </a:prstGeom>
-        </p:spPr>
-      </p:pic>
+            <a:ext cx="82296" cy="6858000"/>
+          </a:xfrm>
+          <a:prstGeom prst="rect">
+            <a:avLst/>
+          </a:prstGeom>
+          <a:solidFill>
+            <a:srgbClr val="1E2761"/>
+          </a:solidFill>
+          <a:ln/>
+        </p:spPr>
+      </p:sp>
+      <p:sp>
+        <p:nvSpPr>
+          <p:cNvPr id="3" name="Shape 1"/>
+          <p:cNvSpPr/>
+          <p:nvPr/>
+        </p:nvSpPr>
+        <p:spPr>
+          <a:xfrm>
+            <a:off x="292608" y="182880"/>
+            <a:ext cx="310896" cy="310896"/>
+          </a:xfrm>
+          <a:prstGeom prst="roundRect">
+            <a:avLst>
+              <a:gd name="adj" fmla="val 28000"/>
+            </a:avLst>
+          </a:prstGeom>
+          <a:solidFill>
+            <a:srgbClr val="1E2761"/>
+          </a:solidFill>
+          <a:ln/>
+        </p:spPr>
+      </p:sp>
+      <p:sp>
+        <p:nvSpPr>
+          <p:cNvPr id="4" name="Text 2"/>
+          <p:cNvSpPr/>
+          <p:nvPr/>
+        </p:nvSpPr>
+        <p:spPr>
+          <a:xfrm>
+            <a:off x="292608" y="182880"/>
+            <a:ext cx="310896" cy="310896"/>
+          </a:xfrm>
+          <a:prstGeom prst="rect">
+            <a:avLst/>
+          </a:prstGeom>
+          <a:noFill/>
+          <a:ln/>
+        </p:spPr>
+        <p:txBody>
+          <a:bodyPr wrap="square" lIns="0" tIns="0" rIns="0" bIns="0" rtlCol="0" anchor="ctr"/>
+          <a:lstStyle/>
+          <a:p>
+            <a:pPr algn="ctr" indent="0" marL="0">
+              <a:buNone/>
+            </a:pPr>
+            <a:r>
+              <a:rPr lang="en-US" sz="1428" b="1" dirty="0">
+                <a:solidFill>
+                  <a:srgbClr val="FFFFFF"/>
+                </a:solidFill>
+                <a:latin typeface="Cambria" pitchFamily="34" charset="0"/>
+                <a:ea typeface="Cambria" pitchFamily="34" charset="-122"/>
+                <a:cs typeface="Cambria" pitchFamily="34" charset="-120"/>
+              </a:rPr>
+              <a:t>G</a:t>
+            </a:r>
+            <a:endParaRPr lang="en-US" sz="1428" dirty="0"/>
+          </a:p>
+        </p:txBody>
+      </p:sp>
+      <p:sp>
+        <p:nvSpPr>
+          <p:cNvPr id="5" name="Text 3"/>
+          <p:cNvSpPr/>
+          <p:nvPr/>
+        </p:nvSpPr>
+        <p:spPr>
+          <a:xfrm>
+            <a:off x="749808" y="164592"/>
+            <a:ext cx="9857232" cy="384048"/>
+          </a:xfrm>
+          <a:prstGeom prst="rect">
+            <a:avLst/>
+          </a:prstGeom>
+          <a:noFill/>
+          <a:ln/>
+        </p:spPr>
+        <p:txBody>
+          <a:bodyPr wrap="square" lIns="0" tIns="0" rIns="0" bIns="0" rtlCol="0" anchor="ctr"/>
+          <a:lstStyle/>
+          <a:p>
+            <a:pPr indent="0" marL="0">
+              <a:buNone/>
+            </a:pPr>
+            <a:r>
+              <a:rPr lang="en-US" sz="2000" b="1" dirty="0">
+                <a:solidFill>
+                  <a:srgbClr val="1E2761"/>
+                </a:solidFill>
+                <a:latin typeface="Cambria" pitchFamily="34" charset="0"/>
+                <a:ea typeface="Cambria" pitchFamily="34" charset="-122"/>
+                <a:cs typeface="Cambria" pitchFamily="34" charset="-120"/>
+              </a:rPr>
+              <a:t>Database Entity Relationship Diagram (ERD)</a:t>
+            </a:r>
+            <a:endParaRPr lang="en-US" sz="2000" dirty="0"/>
+          </a:p>
+        </p:txBody>
+      </p:sp>
+      <p:sp>
+        <p:nvSpPr>
+          <p:cNvPr id="6" name="Text 4"/>
+          <p:cNvSpPr/>
+          <p:nvPr/>
+        </p:nvSpPr>
+        <p:spPr>
+          <a:xfrm>
+            <a:off x="749808" y="548640"/>
+            <a:ext cx="10607040" cy="237744"/>
+          </a:xfrm>
+          <a:prstGeom prst="rect">
+            <a:avLst/>
+          </a:prstGeom>
+          <a:noFill/>
+          <a:ln/>
+        </p:spPr>
+        <p:txBody>
+          <a:bodyPr wrap="square" lIns="0" tIns="0" rIns="0" bIns="0" rtlCol="0" anchor="ctr"/>
+          <a:lstStyle/>
+          <a:p>
+            <a:pPr indent="0" marL="0">
+              <a:buNone/>
+            </a:pPr>
+            <a:r>
+              <a:rPr lang="en-US" sz="1050" dirty="0">
+                <a:solidFill>
+                  <a:srgbClr val="555555"/>
+                </a:solidFill>
+                <a:latin typeface="Calibri" pitchFamily="34" charset="0"/>
+                <a:ea typeface="Calibri" pitchFamily="34" charset="-122"/>
+                <a:cs typeface="Calibri" pitchFamily="34" charset="-120"/>
+              </a:rPr>
+              <a:t>14 tables from backend/app/models/entities.py</a:t>
+            </a:r>
+            <a:endParaRPr lang="en-US" sz="1050" dirty="0"/>
+          </a:p>
+        </p:txBody>
+      </p:sp>
+      <p:sp>
+        <p:nvSpPr>
+          <p:cNvPr id="7" name="Shape 5"/>
+          <p:cNvSpPr/>
+          <p:nvPr/>
+        </p:nvSpPr>
+        <p:spPr>
+          <a:xfrm>
+            <a:off x="11475720" y="182880"/>
+            <a:ext cx="384048" cy="384048"/>
+          </a:xfrm>
+          <a:prstGeom prst="ellipse">
+            <a:avLst/>
+          </a:prstGeom>
+          <a:solidFill>
+            <a:srgbClr val="1E2761"/>
+          </a:solidFill>
+          <a:ln/>
+        </p:spPr>
+      </p:sp>
+      <p:sp>
+        <p:nvSpPr>
+          <p:cNvPr id="8" name="Text 6"/>
+          <p:cNvSpPr/>
+          <p:nvPr/>
+        </p:nvSpPr>
+        <p:spPr>
+          <a:xfrm>
+            <a:off x="11475720" y="182880"/>
+            <a:ext cx="384048" cy="384048"/>
+          </a:xfrm>
+          <a:prstGeom prst="rect">
+            <a:avLst/>
+          </a:prstGeom>
+          <a:noFill/>
+          <a:ln/>
+        </p:spPr>
+        <p:txBody>
+          <a:bodyPr wrap="square" lIns="0" tIns="0" rIns="0" bIns="0" rtlCol="0" anchor="ctr"/>
+          <a:lstStyle/>
+          <a:p>
+            <a:pPr algn="ctr" indent="0" marL="0">
+              <a:buNone/>
+            </a:pPr>
+            <a:r>
+              <a:rPr lang="en-US" sz="1400" b="1" dirty="0">
+                <a:solidFill>
+                  <a:srgbClr val="FFFFFF"/>
+                </a:solidFill>
+                <a:latin typeface="Calibri" pitchFamily="34" charset="0"/>
+                <a:ea typeface="Calibri" pitchFamily="34" charset="-122"/>
+                <a:cs typeface="Calibri" pitchFamily="34" charset="-120"/>
+              </a:rPr>
+              <a:t>16</a:t>
+            </a:r>
+            <a:endParaRPr lang="en-US" sz="1400" dirty="0"/>
+          </a:p>
+        </p:txBody>
+      </p:sp>
+      <p:sp>
+        <p:nvSpPr>
+          <p:cNvPr id="9" name="Shape 7"/>
+          <p:cNvSpPr/>
+          <p:nvPr/>
+        </p:nvSpPr>
+        <p:spPr>
+          <a:xfrm>
+            <a:off x="274320" y="914400"/>
+            <a:ext cx="1691640" cy="960120"/>
+          </a:xfrm>
+          <a:prstGeom prst="rect">
+            <a:avLst/>
+          </a:prstGeom>
+          <a:solidFill>
+            <a:srgbClr val="FFFFFF"/>
+          </a:solidFill>
+          <a:ln w="13970">
+            <a:solidFill>
+              <a:srgbClr val="8E6FC4"/>
+            </a:solidFill>
+            <a:prstDash val="solid"/>
+          </a:ln>
+        </p:spPr>
+      </p:sp>
+      <p:sp>
+        <p:nvSpPr>
+          <p:cNvPr id="10" name="Shape 8"/>
+          <p:cNvSpPr/>
+          <p:nvPr/>
+        </p:nvSpPr>
+        <p:spPr>
+          <a:xfrm>
+            <a:off x="274320" y="914400"/>
+            <a:ext cx="1691640" cy="237744"/>
+          </a:xfrm>
+          <a:prstGeom prst="rect">
+            <a:avLst/>
+          </a:prstGeom>
+          <a:solidFill>
+            <a:srgbClr val="E8DFF5"/>
+          </a:solidFill>
+          <a:ln w="13970">
+            <a:solidFill>
+              <a:srgbClr val="8E6FC4"/>
+            </a:solidFill>
+            <a:prstDash val="solid"/>
+          </a:ln>
+        </p:spPr>
+      </p:sp>
+      <p:sp>
+        <p:nvSpPr>
+          <p:cNvPr id="11" name="Text 9"/>
+          <p:cNvSpPr/>
+          <p:nvPr/>
+        </p:nvSpPr>
+        <p:spPr>
+          <a:xfrm>
+            <a:off x="274320" y="914400"/>
+            <a:ext cx="1691640" cy="237744"/>
+          </a:xfrm>
+          <a:prstGeom prst="rect">
+            <a:avLst/>
+          </a:prstGeom>
+          <a:noFill/>
+          <a:ln/>
+        </p:spPr>
+        <p:txBody>
+          <a:bodyPr wrap="square" lIns="0" tIns="0" rIns="0" bIns="0" rtlCol="0" anchor="ctr"/>
+          <a:lstStyle/>
+          <a:p>
+            <a:pPr algn="ctr" indent="0" marL="0">
+              <a:buNone/>
+            </a:pPr>
+            <a:r>
+              <a:rPr lang="en-US" sz="950" b="1" dirty="0">
+                <a:solidFill>
+                  <a:srgbClr val="4B2E83"/>
+                </a:solidFill>
+                <a:latin typeface="Calibri" pitchFamily="34" charset="0"/>
+                <a:ea typeface="Calibri" pitchFamily="34" charset="-122"/>
+                <a:cs typeface="Calibri" pitchFamily="34" charset="-120"/>
+              </a:rPr>
+              <a:t>User</a:t>
+            </a:r>
+            <a:endParaRPr lang="en-US" sz="950" dirty="0"/>
+          </a:p>
+        </p:txBody>
+      </p:sp>
+      <p:sp>
+        <p:nvSpPr>
+          <p:cNvPr id="12" name="Text 10"/>
+          <p:cNvSpPr/>
+          <p:nvPr/>
+        </p:nvSpPr>
+        <p:spPr>
+          <a:xfrm>
+            <a:off x="329184" y="1179576"/>
+            <a:ext cx="1581912" cy="649224"/>
+          </a:xfrm>
+          <a:prstGeom prst="rect">
+            <a:avLst/>
+          </a:prstGeom>
+          <a:noFill/>
+          <a:ln/>
+        </p:spPr>
+        <p:txBody>
+          <a:bodyPr wrap="square" lIns="0" tIns="0" rIns="0" bIns="0" rtlCol="0" anchor="t"/>
+          <a:lstStyle/>
+          <a:p>
+            <a:pPr indent="0" marL="0">
+              <a:buNone/>
+            </a:pPr>
+            <a:r>
+              <a:rPr lang="en-US" sz="760" dirty="0">
+                <a:solidFill>
+                  <a:srgbClr val="333333"/>
+                </a:solidFill>
+                <a:latin typeface="Calibri" pitchFamily="34" charset="0"/>
+                <a:ea typeface="Calibri" pitchFamily="34" charset="-122"/>
+                <a:cs typeface="Calibri" pitchFamily="34" charset="-120"/>
+              </a:rPr>
+              <a:t>PK user_id</a:t>
+            </a:r>
+            <a:endParaRPr lang="en-US" sz="760" dirty="0"/>
+          </a:p>
+          <a:p>
+            <a:pPr indent="0" marL="0">
+              <a:buNone/>
+            </a:pPr>
+            <a:r>
+              <a:rPr lang="en-US" sz="760" dirty="0">
+                <a:solidFill>
+                  <a:srgbClr val="333333"/>
+                </a:solidFill>
+                <a:latin typeface="Calibri" pitchFamily="34" charset="0"/>
+                <a:ea typeface="Calibri" pitchFamily="34" charset="-122"/>
+                <a:cs typeface="Calibri" pitchFamily="34" charset="-120"/>
+              </a:rPr>
+              <a:t>email, role</a:t>
+            </a:r>
+            <a:endParaRPr lang="en-US" sz="760" dirty="0"/>
+          </a:p>
+          <a:p>
+            <a:pPr indent="0" marL="0">
+              <a:buNone/>
+            </a:pPr>
+            <a:r>
+              <a:rPr lang="en-US" sz="760" dirty="0">
+                <a:solidFill>
+                  <a:srgbClr val="333333"/>
+                </a:solidFill>
+                <a:latin typeface="Calibri" pitchFamily="34" charset="0"/>
+                <a:ea typeface="Calibri" pitchFamily="34" charset="-122"/>
+                <a:cs typeface="Calibri" pitchFamily="34" charset="-120"/>
+              </a:rPr>
+              <a:t>hashed_pw</a:t>
+            </a:r>
+            <a:endParaRPr lang="en-US" sz="760" dirty="0"/>
+          </a:p>
+        </p:txBody>
+      </p:sp>
+      <p:sp>
+        <p:nvSpPr>
+          <p:cNvPr id="13" name="Shape 11"/>
+          <p:cNvSpPr/>
+          <p:nvPr/>
+        </p:nvSpPr>
+        <p:spPr>
+          <a:xfrm>
+            <a:off x="2057400" y="914400"/>
+            <a:ext cx="1691640" cy="960120"/>
+          </a:xfrm>
+          <a:prstGeom prst="rect">
+            <a:avLst/>
+          </a:prstGeom>
+          <a:solidFill>
+            <a:srgbClr val="FFFFFF"/>
+          </a:solidFill>
+          <a:ln w="13970">
+            <a:solidFill>
+              <a:srgbClr val="8E6FC4"/>
+            </a:solidFill>
+            <a:prstDash val="solid"/>
+          </a:ln>
+        </p:spPr>
+      </p:sp>
+      <p:sp>
+        <p:nvSpPr>
+          <p:cNvPr id="14" name="Shape 12"/>
+          <p:cNvSpPr/>
+          <p:nvPr/>
+        </p:nvSpPr>
+        <p:spPr>
+          <a:xfrm>
+            <a:off x="2057400" y="914400"/>
+            <a:ext cx="1691640" cy="237744"/>
+          </a:xfrm>
+          <a:prstGeom prst="rect">
+            <a:avLst/>
+          </a:prstGeom>
+          <a:solidFill>
+            <a:srgbClr val="E8DFF5"/>
+          </a:solidFill>
+          <a:ln w="13970">
+            <a:solidFill>
+              <a:srgbClr val="8E6FC4"/>
+            </a:solidFill>
+            <a:prstDash val="solid"/>
+          </a:ln>
+        </p:spPr>
+      </p:sp>
+      <p:sp>
+        <p:nvSpPr>
+          <p:cNvPr id="15" name="Text 13"/>
+          <p:cNvSpPr/>
+          <p:nvPr/>
+        </p:nvSpPr>
+        <p:spPr>
+          <a:xfrm>
+            <a:off x="2057400" y="914400"/>
+            <a:ext cx="1691640" cy="237744"/>
+          </a:xfrm>
+          <a:prstGeom prst="rect">
+            <a:avLst/>
+          </a:prstGeom>
+          <a:noFill/>
+          <a:ln/>
+        </p:spPr>
+        <p:txBody>
+          <a:bodyPr wrap="square" lIns="0" tIns="0" rIns="0" bIns="0" rtlCol="0" anchor="ctr"/>
+          <a:lstStyle/>
+          <a:p>
+            <a:pPr algn="ctr" indent="0" marL="0">
+              <a:buNone/>
+            </a:pPr>
+            <a:r>
+              <a:rPr lang="en-US" sz="950" b="1" dirty="0">
+                <a:solidFill>
+                  <a:srgbClr val="4B2E83"/>
+                </a:solidFill>
+                <a:latin typeface="Calibri" pitchFamily="34" charset="0"/>
+                <a:ea typeface="Calibri" pitchFamily="34" charset="-122"/>
+                <a:cs typeface="Calibri" pitchFamily="34" charset="-120"/>
+              </a:rPr>
+              <a:t>Customer</a:t>
+            </a:r>
+            <a:endParaRPr lang="en-US" sz="950" dirty="0"/>
+          </a:p>
+        </p:txBody>
+      </p:sp>
+      <p:sp>
+        <p:nvSpPr>
+          <p:cNvPr id="16" name="Text 14"/>
+          <p:cNvSpPr/>
+          <p:nvPr/>
+        </p:nvSpPr>
+        <p:spPr>
+          <a:xfrm>
+            <a:off x="2112264" y="1179576"/>
+            <a:ext cx="1581912" cy="649224"/>
+          </a:xfrm>
+          <a:prstGeom prst="rect">
+            <a:avLst/>
+          </a:prstGeom>
+          <a:noFill/>
+          <a:ln/>
+        </p:spPr>
+        <p:txBody>
+          <a:bodyPr wrap="square" lIns="0" tIns="0" rIns="0" bIns="0" rtlCol="0" anchor="t"/>
+          <a:lstStyle/>
+          <a:p>
+            <a:pPr indent="0" marL="0">
+              <a:buNone/>
+            </a:pPr>
+            <a:r>
+              <a:rPr lang="en-US" sz="760" dirty="0">
+                <a:solidFill>
+                  <a:srgbClr val="333333"/>
+                </a:solidFill>
+                <a:latin typeface="Calibri" pitchFamily="34" charset="0"/>
+                <a:ea typeface="Calibri" pitchFamily="34" charset="-122"/>
+                <a:cs typeface="Calibri" pitchFamily="34" charset="-120"/>
+              </a:rPr>
+              <a:t>PK customer_id</a:t>
+            </a:r>
+            <a:endParaRPr lang="en-US" sz="760" dirty="0"/>
+          </a:p>
+          <a:p>
+            <a:pPr indent="0" marL="0">
+              <a:buNone/>
+            </a:pPr>
+            <a:r>
+              <a:rPr lang="en-US" sz="760" dirty="0">
+                <a:solidFill>
+                  <a:srgbClr val="333333"/>
+                </a:solidFill>
+                <a:latin typeface="Calibri" pitchFamily="34" charset="0"/>
+                <a:ea typeface="Calibri" pitchFamily="34" charset="-122"/>
+                <a:cs typeface="Calibri" pitchFamily="34" charset="-120"/>
+              </a:rPr>
+              <a:t>FK user_id</a:t>
+            </a:r>
+            <a:endParaRPr lang="en-US" sz="760" dirty="0"/>
+          </a:p>
+          <a:p>
+            <a:pPr indent="0" marL="0">
+              <a:buNone/>
+            </a:pPr>
+            <a:r>
+              <a:rPr lang="en-US" sz="760" dirty="0">
+                <a:solidFill>
+                  <a:srgbClr val="333333"/>
+                </a:solidFill>
+                <a:latin typeface="Calibri" pitchFamily="34" charset="0"/>
+                <a:ea typeface="Calibri" pitchFamily="34" charset="-122"/>
+                <a:cs typeface="Calibri" pitchFamily="34" charset="-120"/>
+              </a:rPr>
+              <a:t>kyc_status</a:t>
+            </a:r>
+            <a:endParaRPr lang="en-US" sz="760" dirty="0"/>
+          </a:p>
+        </p:txBody>
+      </p:sp>
+      <p:sp>
+        <p:nvSpPr>
+          <p:cNvPr id="17" name="Shape 15"/>
+          <p:cNvSpPr/>
+          <p:nvPr/>
+        </p:nvSpPr>
+        <p:spPr>
+          <a:xfrm>
+            <a:off x="3840480" y="914400"/>
+            <a:ext cx="1691640" cy="960120"/>
+          </a:xfrm>
+          <a:prstGeom prst="rect">
+            <a:avLst/>
+          </a:prstGeom>
+          <a:solidFill>
+            <a:srgbClr val="FFFFFF"/>
+          </a:solidFill>
+          <a:ln w="13970">
+            <a:solidFill>
+              <a:srgbClr val="8E6FC4"/>
+            </a:solidFill>
+            <a:prstDash val="solid"/>
+          </a:ln>
+        </p:spPr>
+      </p:sp>
+      <p:sp>
+        <p:nvSpPr>
+          <p:cNvPr id="18" name="Shape 16"/>
+          <p:cNvSpPr/>
+          <p:nvPr/>
+        </p:nvSpPr>
+        <p:spPr>
+          <a:xfrm>
+            <a:off x="3840480" y="914400"/>
+            <a:ext cx="1691640" cy="237744"/>
+          </a:xfrm>
+          <a:prstGeom prst="rect">
+            <a:avLst/>
+          </a:prstGeom>
+          <a:solidFill>
+            <a:srgbClr val="E8DFF5"/>
+          </a:solidFill>
+          <a:ln w="13970">
+            <a:solidFill>
+              <a:srgbClr val="8E6FC4"/>
+            </a:solidFill>
+            <a:prstDash val="solid"/>
+          </a:ln>
+        </p:spPr>
+      </p:sp>
+      <p:sp>
+        <p:nvSpPr>
+          <p:cNvPr id="19" name="Text 17"/>
+          <p:cNvSpPr/>
+          <p:nvPr/>
+        </p:nvSpPr>
+        <p:spPr>
+          <a:xfrm>
+            <a:off x="3840480" y="914400"/>
+            <a:ext cx="1691640" cy="237744"/>
+          </a:xfrm>
+          <a:prstGeom prst="rect">
+            <a:avLst/>
+          </a:prstGeom>
+          <a:noFill/>
+          <a:ln/>
+        </p:spPr>
+        <p:txBody>
+          <a:bodyPr wrap="square" lIns="0" tIns="0" rIns="0" bIns="0" rtlCol="0" anchor="ctr"/>
+          <a:lstStyle/>
+          <a:p>
+            <a:pPr algn="ctr" indent="0" marL="0">
+              <a:buNone/>
+            </a:pPr>
+            <a:r>
+              <a:rPr lang="en-US" sz="950" b="1" dirty="0">
+                <a:solidFill>
+                  <a:srgbClr val="4B2E83"/>
+                </a:solidFill>
+                <a:latin typeface="Calibri" pitchFamily="34" charset="0"/>
+                <a:ea typeface="Calibri" pitchFamily="34" charset="-122"/>
+                <a:cs typeface="Calibri" pitchFamily="34" charset="-120"/>
+              </a:rPr>
+              <a:t>Merchant</a:t>
+            </a:r>
+            <a:endParaRPr lang="en-US" sz="950" dirty="0"/>
+          </a:p>
+        </p:txBody>
+      </p:sp>
+      <p:sp>
+        <p:nvSpPr>
+          <p:cNvPr id="20" name="Text 18"/>
+          <p:cNvSpPr/>
+          <p:nvPr/>
+        </p:nvSpPr>
+        <p:spPr>
+          <a:xfrm>
+            <a:off x="3895344" y="1179576"/>
+            <a:ext cx="1581912" cy="649224"/>
+          </a:xfrm>
+          <a:prstGeom prst="rect">
+            <a:avLst/>
+          </a:prstGeom>
+          <a:noFill/>
+          <a:ln/>
+        </p:spPr>
+        <p:txBody>
+          <a:bodyPr wrap="square" lIns="0" tIns="0" rIns="0" bIns="0" rtlCol="0" anchor="t"/>
+          <a:lstStyle/>
+          <a:p>
+            <a:pPr indent="0" marL="0">
+              <a:buNone/>
+            </a:pPr>
+            <a:r>
+              <a:rPr lang="en-US" sz="760" dirty="0">
+                <a:solidFill>
+                  <a:srgbClr val="333333"/>
+                </a:solidFill>
+                <a:latin typeface="Calibri" pitchFamily="34" charset="0"/>
+                <a:ea typeface="Calibri" pitchFamily="34" charset="-122"/>
+                <a:cs typeface="Calibri" pitchFamily="34" charset="-120"/>
+              </a:rPr>
+              <a:t>PK merchant_id</a:t>
+            </a:r>
+            <a:endParaRPr lang="en-US" sz="760" dirty="0"/>
+          </a:p>
+          <a:p>
+            <a:pPr indent="0" marL="0">
+              <a:buNone/>
+            </a:pPr>
+            <a:r>
+              <a:rPr lang="en-US" sz="760" dirty="0">
+                <a:solidFill>
+                  <a:srgbClr val="333333"/>
+                </a:solidFill>
+                <a:latin typeface="Calibri" pitchFamily="34" charset="0"/>
+                <a:ea typeface="Calibri" pitchFamily="34" charset="-122"/>
+                <a:cs typeface="Calibri" pitchFamily="34" charset="-120"/>
+              </a:rPr>
+              <a:t>FK user_id</a:t>
+            </a:r>
+            <a:endParaRPr lang="en-US" sz="760" dirty="0"/>
+          </a:p>
+          <a:p>
+            <a:pPr indent="0" marL="0">
+              <a:buNone/>
+            </a:pPr>
+            <a:r>
+              <a:rPr lang="en-US" sz="760" dirty="0">
+                <a:solidFill>
+                  <a:srgbClr val="333333"/>
+                </a:solidFill>
+                <a:latin typeface="Calibri" pitchFamily="34" charset="0"/>
+                <a:ea typeface="Calibri" pitchFamily="34" charset="-122"/>
+                <a:cs typeface="Calibri" pitchFamily="34" charset="-120"/>
+              </a:rPr>
+              <a:t>business_name</a:t>
+            </a:r>
+            <a:endParaRPr lang="en-US" sz="760" dirty="0"/>
+          </a:p>
+        </p:txBody>
+      </p:sp>
+      <p:sp>
+        <p:nvSpPr>
+          <p:cNvPr id="21" name="Shape 19"/>
+          <p:cNvSpPr/>
+          <p:nvPr/>
+        </p:nvSpPr>
+        <p:spPr>
+          <a:xfrm>
+            <a:off x="5623560" y="914400"/>
+            <a:ext cx="1691640" cy="960120"/>
+          </a:xfrm>
+          <a:prstGeom prst="rect">
+            <a:avLst/>
+          </a:prstGeom>
+          <a:solidFill>
+            <a:srgbClr val="FFFFFF"/>
+          </a:solidFill>
+          <a:ln w="13970">
+            <a:solidFill>
+              <a:srgbClr val="8E6FC4"/>
+            </a:solidFill>
+            <a:prstDash val="solid"/>
+          </a:ln>
+        </p:spPr>
+      </p:sp>
+      <p:sp>
+        <p:nvSpPr>
+          <p:cNvPr id="22" name="Shape 20"/>
+          <p:cNvSpPr/>
+          <p:nvPr/>
+        </p:nvSpPr>
+        <p:spPr>
+          <a:xfrm>
+            <a:off x="5623560" y="914400"/>
+            <a:ext cx="1691640" cy="237744"/>
+          </a:xfrm>
+          <a:prstGeom prst="rect">
+            <a:avLst/>
+          </a:prstGeom>
+          <a:solidFill>
+            <a:srgbClr val="E8DFF5"/>
+          </a:solidFill>
+          <a:ln w="13970">
+            <a:solidFill>
+              <a:srgbClr val="8E6FC4"/>
+            </a:solidFill>
+            <a:prstDash val="solid"/>
+          </a:ln>
+        </p:spPr>
+      </p:sp>
+      <p:sp>
+        <p:nvSpPr>
+          <p:cNvPr id="23" name="Text 21"/>
+          <p:cNvSpPr/>
+          <p:nvPr/>
+        </p:nvSpPr>
+        <p:spPr>
+          <a:xfrm>
+            <a:off x="5623560" y="914400"/>
+            <a:ext cx="1691640" cy="237744"/>
+          </a:xfrm>
+          <a:prstGeom prst="rect">
+            <a:avLst/>
+          </a:prstGeom>
+          <a:noFill/>
+          <a:ln/>
+        </p:spPr>
+        <p:txBody>
+          <a:bodyPr wrap="square" lIns="0" tIns="0" rIns="0" bIns="0" rtlCol="0" anchor="ctr"/>
+          <a:lstStyle/>
+          <a:p>
+            <a:pPr algn="ctr" indent="0" marL="0">
+              <a:buNone/>
+            </a:pPr>
+            <a:r>
+              <a:rPr lang="en-US" sz="950" b="1" dirty="0">
+                <a:solidFill>
+                  <a:srgbClr val="4B2E83"/>
+                </a:solidFill>
+                <a:latin typeface="Calibri" pitchFamily="34" charset="0"/>
+                <a:ea typeface="Calibri" pitchFamily="34" charset="-122"/>
+                <a:cs typeface="Calibri" pitchFamily="34" charset="-120"/>
+              </a:rPr>
+              <a:t>Wallet</a:t>
+            </a:r>
+            <a:endParaRPr lang="en-US" sz="950" dirty="0"/>
+          </a:p>
+        </p:txBody>
+      </p:sp>
+      <p:sp>
+        <p:nvSpPr>
+          <p:cNvPr id="24" name="Text 22"/>
+          <p:cNvSpPr/>
+          <p:nvPr/>
+        </p:nvSpPr>
+        <p:spPr>
+          <a:xfrm>
+            <a:off x="5678424" y="1179576"/>
+            <a:ext cx="1581912" cy="649224"/>
+          </a:xfrm>
+          <a:prstGeom prst="rect">
+            <a:avLst/>
+          </a:prstGeom>
+          <a:noFill/>
+          <a:ln/>
+        </p:spPr>
+        <p:txBody>
+          <a:bodyPr wrap="square" lIns="0" tIns="0" rIns="0" bIns="0" rtlCol="0" anchor="t"/>
+          <a:lstStyle/>
+          <a:p>
+            <a:pPr indent="0" marL="0">
+              <a:buNone/>
+            </a:pPr>
+            <a:r>
+              <a:rPr lang="en-US" sz="760" dirty="0">
+                <a:solidFill>
+                  <a:srgbClr val="333333"/>
+                </a:solidFill>
+                <a:latin typeface="Calibri" pitchFamily="34" charset="0"/>
+                <a:ea typeface="Calibri" pitchFamily="34" charset="-122"/>
+                <a:cs typeface="Calibri" pitchFamily="34" charset="-120"/>
+              </a:rPr>
+              <a:t>PK wallet_id</a:t>
+            </a:r>
+            <a:endParaRPr lang="en-US" sz="760" dirty="0"/>
+          </a:p>
+          <a:p>
+            <a:pPr indent="0" marL="0">
+              <a:buNone/>
+            </a:pPr>
+            <a:r>
+              <a:rPr lang="en-US" sz="760" dirty="0">
+                <a:solidFill>
+                  <a:srgbClr val="333333"/>
+                </a:solidFill>
+                <a:latin typeface="Calibri" pitchFamily="34" charset="0"/>
+                <a:ea typeface="Calibri" pitchFamily="34" charset="-122"/>
+                <a:cs typeface="Calibri" pitchFamily="34" charset="-120"/>
+              </a:rPr>
+              <a:t>FK customer/merchant</a:t>
+            </a:r>
+            <a:endParaRPr lang="en-US" sz="760" dirty="0"/>
+          </a:p>
+          <a:p>
+            <a:pPr indent="0" marL="0">
+              <a:buNone/>
+            </a:pPr>
+            <a:r>
+              <a:rPr lang="en-US" sz="760" dirty="0">
+                <a:solidFill>
+                  <a:srgbClr val="333333"/>
+                </a:solidFill>
+                <a:latin typeface="Calibri" pitchFamily="34" charset="0"/>
+                <a:ea typeface="Calibri" pitchFamily="34" charset="-122"/>
+                <a:cs typeface="Calibri" pitchFamily="34" charset="-120"/>
+              </a:rPr>
+              <a:t>balance</a:t>
+            </a:r>
+            <a:endParaRPr lang="en-US" sz="760" dirty="0"/>
+          </a:p>
+        </p:txBody>
+      </p:sp>
+      <p:sp>
+        <p:nvSpPr>
+          <p:cNvPr id="25" name="Shape 23"/>
+          <p:cNvSpPr/>
+          <p:nvPr/>
+        </p:nvSpPr>
+        <p:spPr>
+          <a:xfrm>
+            <a:off x="7406640" y="914400"/>
+            <a:ext cx="1691640" cy="960120"/>
+          </a:xfrm>
+          <a:prstGeom prst="rect">
+            <a:avLst/>
+          </a:prstGeom>
+          <a:solidFill>
+            <a:srgbClr val="FFFFFF"/>
+          </a:solidFill>
+          <a:ln w="13970">
+            <a:solidFill>
+              <a:srgbClr val="8E6FC4"/>
+            </a:solidFill>
+            <a:prstDash val="solid"/>
+          </a:ln>
+        </p:spPr>
+      </p:sp>
+      <p:sp>
+        <p:nvSpPr>
+          <p:cNvPr id="26" name="Shape 24"/>
+          <p:cNvSpPr/>
+          <p:nvPr/>
+        </p:nvSpPr>
+        <p:spPr>
+          <a:xfrm>
+            <a:off x="7406640" y="914400"/>
+            <a:ext cx="1691640" cy="237744"/>
+          </a:xfrm>
+          <a:prstGeom prst="rect">
+            <a:avLst/>
+          </a:prstGeom>
+          <a:solidFill>
+            <a:srgbClr val="E8DFF5"/>
+          </a:solidFill>
+          <a:ln w="13970">
+            <a:solidFill>
+              <a:srgbClr val="8E6FC4"/>
+            </a:solidFill>
+            <a:prstDash val="solid"/>
+          </a:ln>
+        </p:spPr>
+      </p:sp>
+      <p:sp>
+        <p:nvSpPr>
+          <p:cNvPr id="27" name="Text 25"/>
+          <p:cNvSpPr/>
+          <p:nvPr/>
+        </p:nvSpPr>
+        <p:spPr>
+          <a:xfrm>
+            <a:off x="7406640" y="914400"/>
+            <a:ext cx="1691640" cy="237744"/>
+          </a:xfrm>
+          <a:prstGeom prst="rect">
+            <a:avLst/>
+          </a:prstGeom>
+          <a:noFill/>
+          <a:ln/>
+        </p:spPr>
+        <p:txBody>
+          <a:bodyPr wrap="square" lIns="0" tIns="0" rIns="0" bIns="0" rtlCol="0" anchor="ctr"/>
+          <a:lstStyle/>
+          <a:p>
+            <a:pPr algn="ctr" indent="0" marL="0">
+              <a:buNone/>
+            </a:pPr>
+            <a:r>
+              <a:rPr lang="en-US" sz="950" b="1" dirty="0">
+                <a:solidFill>
+                  <a:srgbClr val="4B2E83"/>
+                </a:solidFill>
+                <a:latin typeface="Calibri" pitchFamily="34" charset="0"/>
+                <a:ea typeface="Calibri" pitchFamily="34" charset="-122"/>
+                <a:cs typeface="Calibri" pitchFamily="34" charset="-120"/>
+              </a:rPr>
+              <a:t>Consent</a:t>
+            </a:r>
+            <a:endParaRPr lang="en-US" sz="950" dirty="0"/>
+          </a:p>
+        </p:txBody>
+      </p:sp>
+      <p:sp>
+        <p:nvSpPr>
+          <p:cNvPr id="28" name="Text 26"/>
+          <p:cNvSpPr/>
+          <p:nvPr/>
+        </p:nvSpPr>
+        <p:spPr>
+          <a:xfrm>
+            <a:off x="7461504" y="1179576"/>
+            <a:ext cx="1581912" cy="649224"/>
+          </a:xfrm>
+          <a:prstGeom prst="rect">
+            <a:avLst/>
+          </a:prstGeom>
+          <a:noFill/>
+          <a:ln/>
+        </p:spPr>
+        <p:txBody>
+          <a:bodyPr wrap="square" lIns="0" tIns="0" rIns="0" bIns="0" rtlCol="0" anchor="t"/>
+          <a:lstStyle/>
+          <a:p>
+            <a:pPr indent="0" marL="0">
+              <a:buNone/>
+            </a:pPr>
+            <a:r>
+              <a:rPr lang="en-US" sz="760" dirty="0">
+                <a:solidFill>
+                  <a:srgbClr val="333333"/>
+                </a:solidFill>
+                <a:latin typeface="Calibri" pitchFamily="34" charset="0"/>
+                <a:ea typeface="Calibri" pitchFamily="34" charset="-122"/>
+                <a:cs typeface="Calibri" pitchFamily="34" charset="-120"/>
+              </a:rPr>
+              <a:t>PK consent_id</a:t>
+            </a:r>
+            <a:endParaRPr lang="en-US" sz="760" dirty="0"/>
+          </a:p>
+          <a:p>
+            <a:pPr indent="0" marL="0">
+              <a:buNone/>
+            </a:pPr>
+            <a:r>
+              <a:rPr lang="en-US" sz="760" dirty="0">
+                <a:solidFill>
+                  <a:srgbClr val="333333"/>
+                </a:solidFill>
+                <a:latin typeface="Calibri" pitchFamily="34" charset="0"/>
+                <a:ea typeface="Calibri" pitchFamily="34" charset="-122"/>
+                <a:cs typeface="Calibri" pitchFamily="34" charset="-120"/>
+              </a:rPr>
+              <a:t>FK customer_id</a:t>
+            </a:r>
+            <a:endParaRPr lang="en-US" sz="760" dirty="0"/>
+          </a:p>
+          <a:p>
+            <a:pPr indent="0" marL="0">
+              <a:buNone/>
+            </a:pPr>
+            <a:r>
+              <a:rPr lang="en-US" sz="760" dirty="0">
+                <a:solidFill>
+                  <a:srgbClr val="333333"/>
+                </a:solidFill>
+                <a:latin typeface="Calibri" pitchFamily="34" charset="0"/>
+                <a:ea typeface="Calibri" pitchFamily="34" charset="-122"/>
+                <a:cs typeface="Calibri" pitchFamily="34" charset="-120"/>
+              </a:rPr>
+              <a:t>scopes, client</a:t>
+            </a:r>
+            <a:endParaRPr lang="en-US" sz="760" dirty="0"/>
+          </a:p>
+        </p:txBody>
+      </p:sp>
+      <p:sp>
+        <p:nvSpPr>
+          <p:cNvPr id="29" name="Shape 27"/>
+          <p:cNvSpPr/>
+          <p:nvPr/>
+        </p:nvSpPr>
+        <p:spPr>
+          <a:xfrm>
+            <a:off x="9189720" y="914400"/>
+            <a:ext cx="1691640" cy="960120"/>
+          </a:xfrm>
+          <a:prstGeom prst="rect">
+            <a:avLst/>
+          </a:prstGeom>
+          <a:solidFill>
+            <a:srgbClr val="FFFFFF"/>
+          </a:solidFill>
+          <a:ln w="13970">
+            <a:solidFill>
+              <a:srgbClr val="8E6FC4"/>
+            </a:solidFill>
+            <a:prstDash val="solid"/>
+          </a:ln>
+        </p:spPr>
+      </p:sp>
+      <p:sp>
+        <p:nvSpPr>
+          <p:cNvPr id="30" name="Shape 28"/>
+          <p:cNvSpPr/>
+          <p:nvPr/>
+        </p:nvSpPr>
+        <p:spPr>
+          <a:xfrm>
+            <a:off x="9189720" y="914400"/>
+            <a:ext cx="1691640" cy="237744"/>
+          </a:xfrm>
+          <a:prstGeom prst="rect">
+            <a:avLst/>
+          </a:prstGeom>
+          <a:solidFill>
+            <a:srgbClr val="E8DFF5"/>
+          </a:solidFill>
+          <a:ln w="13970">
+            <a:solidFill>
+              <a:srgbClr val="8E6FC4"/>
+            </a:solidFill>
+            <a:prstDash val="solid"/>
+          </a:ln>
+        </p:spPr>
+      </p:sp>
+      <p:sp>
+        <p:nvSpPr>
+          <p:cNvPr id="31" name="Text 29"/>
+          <p:cNvSpPr/>
+          <p:nvPr/>
+        </p:nvSpPr>
+        <p:spPr>
+          <a:xfrm>
+            <a:off x="9189720" y="914400"/>
+            <a:ext cx="1691640" cy="237744"/>
+          </a:xfrm>
+          <a:prstGeom prst="rect">
+            <a:avLst/>
+          </a:prstGeom>
+          <a:noFill/>
+          <a:ln/>
+        </p:spPr>
+        <p:txBody>
+          <a:bodyPr wrap="square" lIns="0" tIns="0" rIns="0" bIns="0" rtlCol="0" anchor="ctr"/>
+          <a:lstStyle/>
+          <a:p>
+            <a:pPr algn="ctr" indent="0" marL="0">
+              <a:buNone/>
+            </a:pPr>
+            <a:r>
+              <a:rPr lang="en-US" sz="950" b="1" dirty="0">
+                <a:solidFill>
+                  <a:srgbClr val="4B2E83"/>
+                </a:solidFill>
+                <a:latin typeface="Calibri" pitchFamily="34" charset="0"/>
+                <a:ea typeface="Calibri" pitchFamily="34" charset="-122"/>
+                <a:cs typeface="Calibri" pitchFamily="34" charset="-120"/>
+              </a:rPr>
+              <a:t>ApiCall</a:t>
+            </a:r>
+            <a:endParaRPr lang="en-US" sz="950" dirty="0"/>
+          </a:p>
+        </p:txBody>
+      </p:sp>
+      <p:sp>
+        <p:nvSpPr>
+          <p:cNvPr id="32" name="Text 30"/>
+          <p:cNvSpPr/>
+          <p:nvPr/>
+        </p:nvSpPr>
+        <p:spPr>
+          <a:xfrm>
+            <a:off x="9244584" y="1179576"/>
+            <a:ext cx="1581912" cy="649224"/>
+          </a:xfrm>
+          <a:prstGeom prst="rect">
+            <a:avLst/>
+          </a:prstGeom>
+          <a:noFill/>
+          <a:ln/>
+        </p:spPr>
+        <p:txBody>
+          <a:bodyPr wrap="square" lIns="0" tIns="0" rIns="0" bIns="0" rtlCol="0" anchor="t"/>
+          <a:lstStyle/>
+          <a:p>
+            <a:pPr indent="0" marL="0">
+              <a:buNone/>
+            </a:pPr>
+            <a:r>
+              <a:rPr lang="en-US" sz="760" dirty="0">
+                <a:solidFill>
+                  <a:srgbClr val="333333"/>
+                </a:solidFill>
+                <a:latin typeface="Calibri" pitchFamily="34" charset="0"/>
+                <a:ea typeface="Calibri" pitchFamily="34" charset="-122"/>
+                <a:cs typeface="Calibri" pitchFamily="34" charset="-120"/>
+              </a:rPr>
+              <a:t>PK call_id</a:t>
+            </a:r>
+            <a:endParaRPr lang="en-US" sz="760" dirty="0"/>
+          </a:p>
+          <a:p>
+            <a:pPr indent="0" marL="0">
+              <a:buNone/>
+            </a:pPr>
+            <a:r>
+              <a:rPr lang="en-US" sz="760" dirty="0">
+                <a:solidFill>
+                  <a:srgbClr val="333333"/>
+                </a:solidFill>
+                <a:latin typeface="Calibri" pitchFamily="34" charset="0"/>
+                <a:ea typeface="Calibri" pitchFamily="34" charset="-122"/>
+                <a:cs typeface="Calibri" pitchFamily="34" charset="-120"/>
+              </a:rPr>
+              <a:t>endpoint</a:t>
+            </a:r>
+            <a:endParaRPr lang="en-US" sz="760" dirty="0"/>
+          </a:p>
+          <a:p>
+            <a:pPr indent="0" marL="0">
+              <a:buNone/>
+            </a:pPr>
+            <a:r>
+              <a:rPr lang="en-US" sz="760" dirty="0">
+                <a:solidFill>
+                  <a:srgbClr val="333333"/>
+                </a:solidFill>
+                <a:latin typeface="Calibri" pitchFamily="34" charset="0"/>
+                <a:ea typeface="Calibri" pitchFamily="34" charset="-122"/>
+                <a:cs typeface="Calibri" pitchFamily="34" charset="-120"/>
+              </a:rPr>
+              <a:t>status_code</a:t>
+            </a:r>
+            <a:endParaRPr lang="en-US" sz="760" dirty="0"/>
+          </a:p>
+        </p:txBody>
+      </p:sp>
+      <p:sp>
+        <p:nvSpPr>
+          <p:cNvPr id="33" name="Shape 31"/>
+          <p:cNvSpPr/>
+          <p:nvPr/>
+        </p:nvSpPr>
+        <p:spPr>
+          <a:xfrm>
+            <a:off x="274320" y="2011680"/>
+            <a:ext cx="1691640" cy="960120"/>
+          </a:xfrm>
+          <a:prstGeom prst="rect">
+            <a:avLst/>
+          </a:prstGeom>
+          <a:solidFill>
+            <a:srgbClr val="FFFFFF"/>
+          </a:solidFill>
+          <a:ln w="13970">
+            <a:solidFill>
+              <a:srgbClr val="8E6FC4"/>
+            </a:solidFill>
+            <a:prstDash val="solid"/>
+          </a:ln>
+        </p:spPr>
+      </p:sp>
+      <p:sp>
+        <p:nvSpPr>
+          <p:cNvPr id="34" name="Shape 32"/>
+          <p:cNvSpPr/>
+          <p:nvPr/>
+        </p:nvSpPr>
+        <p:spPr>
+          <a:xfrm>
+            <a:off x="274320" y="2011680"/>
+            <a:ext cx="1691640" cy="237744"/>
+          </a:xfrm>
+          <a:prstGeom prst="rect">
+            <a:avLst/>
+          </a:prstGeom>
+          <a:solidFill>
+            <a:srgbClr val="E8DFF5"/>
+          </a:solidFill>
+          <a:ln w="13970">
+            <a:solidFill>
+              <a:srgbClr val="8E6FC4"/>
+            </a:solidFill>
+            <a:prstDash val="solid"/>
+          </a:ln>
+        </p:spPr>
+      </p:sp>
+      <p:sp>
+        <p:nvSpPr>
+          <p:cNvPr id="35" name="Text 33"/>
+          <p:cNvSpPr/>
+          <p:nvPr/>
+        </p:nvSpPr>
+        <p:spPr>
+          <a:xfrm>
+            <a:off x="274320" y="2011680"/>
+            <a:ext cx="1691640" cy="237744"/>
+          </a:xfrm>
+          <a:prstGeom prst="rect">
+            <a:avLst/>
+          </a:prstGeom>
+          <a:noFill/>
+          <a:ln/>
+        </p:spPr>
+        <p:txBody>
+          <a:bodyPr wrap="square" lIns="0" tIns="0" rIns="0" bIns="0" rtlCol="0" anchor="ctr"/>
+          <a:lstStyle/>
+          <a:p>
+            <a:pPr algn="ctr" indent="0" marL="0">
+              <a:buNone/>
+            </a:pPr>
+            <a:r>
+              <a:rPr lang="en-US" sz="950" b="1" dirty="0">
+                <a:solidFill>
+                  <a:srgbClr val="4B2E83"/>
+                </a:solidFill>
+                <a:latin typeface="Calibri" pitchFamily="34" charset="0"/>
+                <a:ea typeface="Calibri" pitchFamily="34" charset="-122"/>
+                <a:cs typeface="Calibri" pitchFamily="34" charset="-120"/>
+              </a:rPr>
+              <a:t>Transaction</a:t>
+            </a:r>
+            <a:endParaRPr lang="en-US" sz="950" dirty="0"/>
+          </a:p>
+        </p:txBody>
+      </p:sp>
+      <p:sp>
+        <p:nvSpPr>
+          <p:cNvPr id="36" name="Text 34"/>
+          <p:cNvSpPr/>
+          <p:nvPr/>
+        </p:nvSpPr>
+        <p:spPr>
+          <a:xfrm>
+            <a:off x="329184" y="2276856"/>
+            <a:ext cx="1581912" cy="649224"/>
+          </a:xfrm>
+          <a:prstGeom prst="rect">
+            <a:avLst/>
+          </a:prstGeom>
+          <a:noFill/>
+          <a:ln/>
+        </p:spPr>
+        <p:txBody>
+          <a:bodyPr wrap="square" lIns="0" tIns="0" rIns="0" bIns="0" rtlCol="0" anchor="t"/>
+          <a:lstStyle/>
+          <a:p>
+            <a:pPr indent="0" marL="0">
+              <a:buNone/>
+            </a:pPr>
+            <a:r>
+              <a:rPr lang="en-US" sz="760" dirty="0">
+                <a:solidFill>
+                  <a:srgbClr val="333333"/>
+                </a:solidFill>
+                <a:latin typeface="Calibri" pitchFamily="34" charset="0"/>
+                <a:ea typeface="Calibri" pitchFamily="34" charset="-122"/>
+                <a:cs typeface="Calibri" pitchFamily="34" charset="-120"/>
+              </a:rPr>
+              <a:t>PK txn_id</a:t>
+            </a:r>
+            <a:endParaRPr lang="en-US" sz="760" dirty="0"/>
+          </a:p>
+          <a:p>
+            <a:pPr indent="0" marL="0">
+              <a:buNone/>
+            </a:pPr>
+            <a:r>
+              <a:rPr lang="en-US" sz="760" dirty="0">
+                <a:solidFill>
+                  <a:srgbClr val="333333"/>
+                </a:solidFill>
+                <a:latin typeface="Calibri" pitchFamily="34" charset="0"/>
+                <a:ea typeface="Calibri" pitchFamily="34" charset="-122"/>
+                <a:cs typeface="Calibri" pitchFamily="34" charset="-120"/>
+              </a:rPr>
+              <a:t>sender/receiver_wallet</a:t>
+            </a:r>
+            <a:endParaRPr lang="en-US" sz="760" dirty="0"/>
+          </a:p>
+          <a:p>
+            <a:pPr indent="0" marL="0">
+              <a:buNone/>
+            </a:pPr>
+            <a:r>
+              <a:rPr lang="en-US" sz="760" dirty="0">
+                <a:solidFill>
+                  <a:srgbClr val="333333"/>
+                </a:solidFill>
+                <a:latin typeface="Calibri" pitchFamily="34" charset="0"/>
+                <a:ea typeface="Calibri" pitchFamily="34" charset="-122"/>
+                <a:cs typeface="Calibri" pitchFamily="34" charset="-120"/>
+              </a:rPr>
+              <a:t>amount, status</a:t>
+            </a:r>
+            <a:endParaRPr lang="en-US" sz="760" dirty="0"/>
+          </a:p>
+        </p:txBody>
+      </p:sp>
+      <p:sp>
+        <p:nvSpPr>
+          <p:cNvPr id="37" name="Shape 35"/>
+          <p:cNvSpPr/>
+          <p:nvPr/>
+        </p:nvSpPr>
+        <p:spPr>
+          <a:xfrm>
+            <a:off x="2057400" y="2011680"/>
+            <a:ext cx="1691640" cy="960120"/>
+          </a:xfrm>
+          <a:prstGeom prst="rect">
+            <a:avLst/>
+          </a:prstGeom>
+          <a:solidFill>
+            <a:srgbClr val="FFFFFF"/>
+          </a:solidFill>
+          <a:ln w="13970">
+            <a:solidFill>
+              <a:srgbClr val="8E6FC4"/>
+            </a:solidFill>
+            <a:prstDash val="solid"/>
+          </a:ln>
+        </p:spPr>
+      </p:sp>
+      <p:sp>
+        <p:nvSpPr>
+          <p:cNvPr id="38" name="Shape 36"/>
+          <p:cNvSpPr/>
+          <p:nvPr/>
+        </p:nvSpPr>
+        <p:spPr>
+          <a:xfrm>
+            <a:off x="2057400" y="2011680"/>
+            <a:ext cx="1691640" cy="237744"/>
+          </a:xfrm>
+          <a:prstGeom prst="rect">
+            <a:avLst/>
+          </a:prstGeom>
+          <a:solidFill>
+            <a:srgbClr val="E8DFF5"/>
+          </a:solidFill>
+          <a:ln w="13970">
+            <a:solidFill>
+              <a:srgbClr val="8E6FC4"/>
+            </a:solidFill>
+            <a:prstDash val="solid"/>
+          </a:ln>
+        </p:spPr>
+      </p:sp>
+      <p:sp>
+        <p:nvSpPr>
+          <p:cNvPr id="39" name="Text 37"/>
+          <p:cNvSpPr/>
+          <p:nvPr/>
+        </p:nvSpPr>
+        <p:spPr>
+          <a:xfrm>
+            <a:off x="2057400" y="2011680"/>
+            <a:ext cx="1691640" cy="237744"/>
+          </a:xfrm>
+          <a:prstGeom prst="rect">
+            <a:avLst/>
+          </a:prstGeom>
+          <a:noFill/>
+          <a:ln/>
+        </p:spPr>
+        <p:txBody>
+          <a:bodyPr wrap="square" lIns="0" tIns="0" rIns="0" bIns="0" rtlCol="0" anchor="ctr"/>
+          <a:lstStyle/>
+          <a:p>
+            <a:pPr algn="ctr" indent="0" marL="0">
+              <a:buNone/>
+            </a:pPr>
+            <a:r>
+              <a:rPr lang="en-US" sz="950" b="1" dirty="0">
+                <a:solidFill>
+                  <a:srgbClr val="4B2E83"/>
+                </a:solidFill>
+                <a:latin typeface="Calibri" pitchFamily="34" charset="0"/>
+                <a:ea typeface="Calibri" pitchFamily="34" charset="-122"/>
+                <a:cs typeface="Calibri" pitchFamily="34" charset="-120"/>
+              </a:rPr>
+              <a:t>LedgerEntry</a:t>
+            </a:r>
+            <a:endParaRPr lang="en-US" sz="950" dirty="0"/>
+          </a:p>
+        </p:txBody>
+      </p:sp>
+      <p:sp>
+        <p:nvSpPr>
+          <p:cNvPr id="40" name="Text 38"/>
+          <p:cNvSpPr/>
+          <p:nvPr/>
+        </p:nvSpPr>
+        <p:spPr>
+          <a:xfrm>
+            <a:off x="2112264" y="2276856"/>
+            <a:ext cx="1581912" cy="649224"/>
+          </a:xfrm>
+          <a:prstGeom prst="rect">
+            <a:avLst/>
+          </a:prstGeom>
+          <a:noFill/>
+          <a:ln/>
+        </p:spPr>
+        <p:txBody>
+          <a:bodyPr wrap="square" lIns="0" tIns="0" rIns="0" bIns="0" rtlCol="0" anchor="t"/>
+          <a:lstStyle/>
+          <a:p>
+            <a:pPr indent="0" marL="0">
+              <a:buNone/>
+            </a:pPr>
+            <a:r>
+              <a:rPr lang="en-US" sz="760" dirty="0">
+                <a:solidFill>
+                  <a:srgbClr val="333333"/>
+                </a:solidFill>
+                <a:latin typeface="Calibri" pitchFamily="34" charset="0"/>
+                <a:ea typeface="Calibri" pitchFamily="34" charset="-122"/>
+                <a:cs typeface="Calibri" pitchFamily="34" charset="-120"/>
+              </a:rPr>
+              <a:t>PK entry_id</a:t>
+            </a:r>
+            <a:endParaRPr lang="en-US" sz="760" dirty="0"/>
+          </a:p>
+          <a:p>
+            <a:pPr indent="0" marL="0">
+              <a:buNone/>
+            </a:pPr>
+            <a:r>
+              <a:rPr lang="en-US" sz="760" dirty="0">
+                <a:solidFill>
+                  <a:srgbClr val="333333"/>
+                </a:solidFill>
+                <a:latin typeface="Calibri" pitchFamily="34" charset="0"/>
+                <a:ea typeface="Calibri" pitchFamily="34" charset="-122"/>
+                <a:cs typeface="Calibri" pitchFamily="34" charset="-120"/>
+              </a:rPr>
+              <a:t>FK txn_id</a:t>
+            </a:r>
+            <a:endParaRPr lang="en-US" sz="760" dirty="0"/>
+          </a:p>
+          <a:p>
+            <a:pPr indent="0" marL="0">
+              <a:buNone/>
+            </a:pPr>
+            <a:r>
+              <a:rPr lang="en-US" sz="760" dirty="0">
+                <a:solidFill>
+                  <a:srgbClr val="333333"/>
+                </a:solidFill>
+                <a:latin typeface="Calibri" pitchFamily="34" charset="0"/>
+                <a:ea typeface="Calibri" pitchFamily="34" charset="-122"/>
+                <a:cs typeface="Calibri" pitchFamily="34" charset="-120"/>
+              </a:rPr>
+              <a:t>direction, amount</a:t>
+            </a:r>
+            <a:endParaRPr lang="en-US" sz="760" dirty="0"/>
+          </a:p>
+        </p:txBody>
+      </p:sp>
+      <p:sp>
+        <p:nvSpPr>
+          <p:cNvPr id="41" name="Shape 39"/>
+          <p:cNvSpPr/>
+          <p:nvPr/>
+        </p:nvSpPr>
+        <p:spPr>
+          <a:xfrm>
+            <a:off x="3840480" y="2011680"/>
+            <a:ext cx="1691640" cy="960120"/>
+          </a:xfrm>
+          <a:prstGeom prst="rect">
+            <a:avLst/>
+          </a:prstGeom>
+          <a:solidFill>
+            <a:srgbClr val="FFFFFF"/>
+          </a:solidFill>
+          <a:ln w="13970">
+            <a:solidFill>
+              <a:srgbClr val="8E6FC4"/>
+            </a:solidFill>
+            <a:prstDash val="solid"/>
+          </a:ln>
+        </p:spPr>
+      </p:sp>
+      <p:sp>
+        <p:nvSpPr>
+          <p:cNvPr id="42" name="Shape 40"/>
+          <p:cNvSpPr/>
+          <p:nvPr/>
+        </p:nvSpPr>
+        <p:spPr>
+          <a:xfrm>
+            <a:off x="3840480" y="2011680"/>
+            <a:ext cx="1691640" cy="237744"/>
+          </a:xfrm>
+          <a:prstGeom prst="rect">
+            <a:avLst/>
+          </a:prstGeom>
+          <a:solidFill>
+            <a:srgbClr val="E8DFF5"/>
+          </a:solidFill>
+          <a:ln w="13970">
+            <a:solidFill>
+              <a:srgbClr val="8E6FC4"/>
+            </a:solidFill>
+            <a:prstDash val="solid"/>
+          </a:ln>
+        </p:spPr>
+      </p:sp>
+      <p:sp>
+        <p:nvSpPr>
+          <p:cNvPr id="43" name="Text 41"/>
+          <p:cNvSpPr/>
+          <p:nvPr/>
+        </p:nvSpPr>
+        <p:spPr>
+          <a:xfrm>
+            <a:off x="3840480" y="2011680"/>
+            <a:ext cx="1691640" cy="237744"/>
+          </a:xfrm>
+          <a:prstGeom prst="rect">
+            <a:avLst/>
+          </a:prstGeom>
+          <a:noFill/>
+          <a:ln/>
+        </p:spPr>
+        <p:txBody>
+          <a:bodyPr wrap="square" lIns="0" tIns="0" rIns="0" bIns="0" rtlCol="0" anchor="ctr"/>
+          <a:lstStyle/>
+          <a:p>
+            <a:pPr algn="ctr" indent="0" marL="0">
+              <a:buNone/>
+            </a:pPr>
+            <a:r>
+              <a:rPr lang="en-US" sz="950" b="1" dirty="0">
+                <a:solidFill>
+                  <a:srgbClr val="4B2E83"/>
+                </a:solidFill>
+                <a:latin typeface="Calibri" pitchFamily="34" charset="0"/>
+                <a:ea typeface="Calibri" pitchFamily="34" charset="-122"/>
+                <a:cs typeface="Calibri" pitchFamily="34" charset="-120"/>
+              </a:rPr>
+              <a:t>FraudAlert</a:t>
+            </a:r>
+            <a:endParaRPr lang="en-US" sz="950" dirty="0"/>
+          </a:p>
+        </p:txBody>
+      </p:sp>
+      <p:sp>
+        <p:nvSpPr>
+          <p:cNvPr id="44" name="Text 42"/>
+          <p:cNvSpPr/>
+          <p:nvPr/>
+        </p:nvSpPr>
+        <p:spPr>
+          <a:xfrm>
+            <a:off x="3895344" y="2276856"/>
+            <a:ext cx="1581912" cy="649224"/>
+          </a:xfrm>
+          <a:prstGeom prst="rect">
+            <a:avLst/>
+          </a:prstGeom>
+          <a:noFill/>
+          <a:ln/>
+        </p:spPr>
+        <p:txBody>
+          <a:bodyPr wrap="square" lIns="0" tIns="0" rIns="0" bIns="0" rtlCol="0" anchor="t"/>
+          <a:lstStyle/>
+          <a:p>
+            <a:pPr indent="0" marL="0">
+              <a:buNone/>
+            </a:pPr>
+            <a:r>
+              <a:rPr lang="en-US" sz="760" dirty="0">
+                <a:solidFill>
+                  <a:srgbClr val="333333"/>
+                </a:solidFill>
+                <a:latin typeface="Calibri" pitchFamily="34" charset="0"/>
+                <a:ea typeface="Calibri" pitchFamily="34" charset="-122"/>
+                <a:cs typeface="Calibri" pitchFamily="34" charset="-120"/>
+              </a:rPr>
+              <a:t>PK alert_id</a:t>
+            </a:r>
+            <a:endParaRPr lang="en-US" sz="760" dirty="0"/>
+          </a:p>
+          <a:p>
+            <a:pPr indent="0" marL="0">
+              <a:buNone/>
+            </a:pPr>
+            <a:r>
+              <a:rPr lang="en-US" sz="760" dirty="0">
+                <a:solidFill>
+                  <a:srgbClr val="333333"/>
+                </a:solidFill>
+                <a:latin typeface="Calibri" pitchFamily="34" charset="0"/>
+                <a:ea typeface="Calibri" pitchFamily="34" charset="-122"/>
+                <a:cs typeface="Calibri" pitchFamily="34" charset="-120"/>
+              </a:rPr>
+              <a:t>FK txn_id</a:t>
+            </a:r>
+            <a:endParaRPr lang="en-US" sz="760" dirty="0"/>
+          </a:p>
+          <a:p>
+            <a:pPr indent="0" marL="0">
+              <a:buNone/>
+            </a:pPr>
+            <a:r>
+              <a:rPr lang="en-US" sz="760" dirty="0">
+                <a:solidFill>
+                  <a:srgbClr val="333333"/>
+                </a:solidFill>
+                <a:latin typeface="Calibri" pitchFamily="34" charset="0"/>
+                <a:ea typeface="Calibri" pitchFamily="34" charset="-122"/>
+                <a:cs typeface="Calibri" pitchFamily="34" charset="-120"/>
+              </a:rPr>
+              <a:t>risk_score, status</a:t>
+            </a:r>
+            <a:endParaRPr lang="en-US" sz="760" dirty="0"/>
+          </a:p>
+        </p:txBody>
+      </p:sp>
+      <p:sp>
+        <p:nvSpPr>
+          <p:cNvPr id="45" name="Shape 43"/>
+          <p:cNvSpPr/>
+          <p:nvPr/>
+        </p:nvSpPr>
+        <p:spPr>
+          <a:xfrm>
+            <a:off x="5623560" y="2011680"/>
+            <a:ext cx="1691640" cy="960120"/>
+          </a:xfrm>
+          <a:prstGeom prst="rect">
+            <a:avLst/>
+          </a:prstGeom>
+          <a:solidFill>
+            <a:srgbClr val="FFFFFF"/>
+          </a:solidFill>
+          <a:ln w="13970">
+            <a:solidFill>
+              <a:srgbClr val="8E6FC4"/>
+            </a:solidFill>
+            <a:prstDash val="solid"/>
+          </a:ln>
+        </p:spPr>
+      </p:sp>
+      <p:sp>
+        <p:nvSpPr>
+          <p:cNvPr id="46" name="Shape 44"/>
+          <p:cNvSpPr/>
+          <p:nvPr/>
+        </p:nvSpPr>
+        <p:spPr>
+          <a:xfrm>
+            <a:off x="5623560" y="2011680"/>
+            <a:ext cx="1691640" cy="237744"/>
+          </a:xfrm>
+          <a:prstGeom prst="rect">
+            <a:avLst/>
+          </a:prstGeom>
+          <a:solidFill>
+            <a:srgbClr val="E8DFF5"/>
+          </a:solidFill>
+          <a:ln w="13970">
+            <a:solidFill>
+              <a:srgbClr val="8E6FC4"/>
+            </a:solidFill>
+            <a:prstDash val="solid"/>
+          </a:ln>
+        </p:spPr>
+      </p:sp>
+      <p:sp>
+        <p:nvSpPr>
+          <p:cNvPr id="47" name="Text 45"/>
+          <p:cNvSpPr/>
+          <p:nvPr/>
+        </p:nvSpPr>
+        <p:spPr>
+          <a:xfrm>
+            <a:off x="5623560" y="2011680"/>
+            <a:ext cx="1691640" cy="237744"/>
+          </a:xfrm>
+          <a:prstGeom prst="rect">
+            <a:avLst/>
+          </a:prstGeom>
+          <a:noFill/>
+          <a:ln/>
+        </p:spPr>
+        <p:txBody>
+          <a:bodyPr wrap="square" lIns="0" tIns="0" rIns="0" bIns="0" rtlCol="0" anchor="ctr"/>
+          <a:lstStyle/>
+          <a:p>
+            <a:pPr algn="ctr" indent="0" marL="0">
+              <a:buNone/>
+            </a:pPr>
+            <a:r>
+              <a:rPr lang="en-US" sz="950" b="1" dirty="0">
+                <a:solidFill>
+                  <a:srgbClr val="4B2E83"/>
+                </a:solidFill>
+                <a:latin typeface="Calibri" pitchFamily="34" charset="0"/>
+                <a:ea typeface="Calibri" pitchFamily="34" charset="-122"/>
+                <a:cs typeface="Calibri" pitchFamily="34" charset="-120"/>
+              </a:rPr>
+              <a:t>Investigation</a:t>
+            </a:r>
+            <a:endParaRPr lang="en-US" sz="950" dirty="0"/>
+          </a:p>
+        </p:txBody>
+      </p:sp>
+      <p:sp>
+        <p:nvSpPr>
+          <p:cNvPr id="48" name="Text 46"/>
+          <p:cNvSpPr/>
+          <p:nvPr/>
+        </p:nvSpPr>
+        <p:spPr>
+          <a:xfrm>
+            <a:off x="5678424" y="2276856"/>
+            <a:ext cx="1581912" cy="649224"/>
+          </a:xfrm>
+          <a:prstGeom prst="rect">
+            <a:avLst/>
+          </a:prstGeom>
+          <a:noFill/>
+          <a:ln/>
+        </p:spPr>
+        <p:txBody>
+          <a:bodyPr wrap="square" lIns="0" tIns="0" rIns="0" bIns="0" rtlCol="0" anchor="t"/>
+          <a:lstStyle/>
+          <a:p>
+            <a:pPr indent="0" marL="0">
+              <a:buNone/>
+            </a:pPr>
+            <a:r>
+              <a:rPr lang="en-US" sz="760" dirty="0">
+                <a:solidFill>
+                  <a:srgbClr val="333333"/>
+                </a:solidFill>
+                <a:latin typeface="Calibri" pitchFamily="34" charset="0"/>
+                <a:ea typeface="Calibri" pitchFamily="34" charset="-122"/>
+                <a:cs typeface="Calibri" pitchFamily="34" charset="-120"/>
+              </a:rPr>
+              <a:t>PK investigation_id</a:t>
+            </a:r>
+            <a:endParaRPr lang="en-US" sz="760" dirty="0"/>
+          </a:p>
+          <a:p>
+            <a:pPr indent="0" marL="0">
+              <a:buNone/>
+            </a:pPr>
+            <a:r>
+              <a:rPr lang="en-US" sz="760" dirty="0">
+                <a:solidFill>
+                  <a:srgbClr val="333333"/>
+                </a:solidFill>
+                <a:latin typeface="Calibri" pitchFamily="34" charset="0"/>
+                <a:ea typeface="Calibri" pitchFamily="34" charset="-122"/>
+                <a:cs typeface="Calibri" pitchFamily="34" charset="-120"/>
+              </a:rPr>
+              <a:t>FK alert_id</a:t>
+            </a:r>
+            <a:endParaRPr lang="en-US" sz="760" dirty="0"/>
+          </a:p>
+          <a:p>
+            <a:pPr indent="0" marL="0">
+              <a:buNone/>
+            </a:pPr>
+            <a:r>
+              <a:rPr lang="en-US" sz="760" dirty="0">
+                <a:solidFill>
+                  <a:srgbClr val="333333"/>
+                </a:solidFill>
+                <a:latin typeface="Calibri" pitchFamily="34" charset="0"/>
+                <a:ea typeface="Calibri" pitchFamily="34" charset="-122"/>
+                <a:cs typeface="Calibri" pitchFamily="34" charset="-120"/>
+              </a:rPr>
+              <a:t>reviewer, notes</a:t>
+            </a:r>
+            <a:endParaRPr lang="en-US" sz="760" dirty="0"/>
+          </a:p>
+        </p:txBody>
+      </p:sp>
+      <p:sp>
+        <p:nvSpPr>
+          <p:cNvPr id="49" name="Shape 47"/>
+          <p:cNvSpPr/>
+          <p:nvPr/>
+        </p:nvSpPr>
+        <p:spPr>
+          <a:xfrm>
+            <a:off x="7406640" y="2011680"/>
+            <a:ext cx="1691640" cy="960120"/>
+          </a:xfrm>
+          <a:prstGeom prst="rect">
+            <a:avLst/>
+          </a:prstGeom>
+          <a:solidFill>
+            <a:srgbClr val="FFFFFF"/>
+          </a:solidFill>
+          <a:ln w="13970">
+            <a:solidFill>
+              <a:srgbClr val="8E6FC4"/>
+            </a:solidFill>
+            <a:prstDash val="solid"/>
+          </a:ln>
+        </p:spPr>
+      </p:sp>
+      <p:sp>
+        <p:nvSpPr>
+          <p:cNvPr id="50" name="Shape 48"/>
+          <p:cNvSpPr/>
+          <p:nvPr/>
+        </p:nvSpPr>
+        <p:spPr>
+          <a:xfrm>
+            <a:off x="7406640" y="2011680"/>
+            <a:ext cx="1691640" cy="237744"/>
+          </a:xfrm>
+          <a:prstGeom prst="rect">
+            <a:avLst/>
+          </a:prstGeom>
+          <a:solidFill>
+            <a:srgbClr val="E8DFF5"/>
+          </a:solidFill>
+          <a:ln w="13970">
+            <a:solidFill>
+              <a:srgbClr val="8E6FC4"/>
+            </a:solidFill>
+            <a:prstDash val="solid"/>
+          </a:ln>
+        </p:spPr>
+      </p:sp>
+      <p:sp>
+        <p:nvSpPr>
+          <p:cNvPr id="51" name="Text 49"/>
+          <p:cNvSpPr/>
+          <p:nvPr/>
+        </p:nvSpPr>
+        <p:spPr>
+          <a:xfrm>
+            <a:off x="7406640" y="2011680"/>
+            <a:ext cx="1691640" cy="237744"/>
+          </a:xfrm>
+          <a:prstGeom prst="rect">
+            <a:avLst/>
+          </a:prstGeom>
+          <a:noFill/>
+          <a:ln/>
+        </p:spPr>
+        <p:txBody>
+          <a:bodyPr wrap="square" lIns="0" tIns="0" rIns="0" bIns="0" rtlCol="0" anchor="ctr"/>
+          <a:lstStyle/>
+          <a:p>
+            <a:pPr algn="ctr" indent="0" marL="0">
+              <a:buNone/>
+            </a:pPr>
+            <a:r>
+              <a:rPr lang="en-US" sz="950" b="1" dirty="0">
+                <a:solidFill>
+                  <a:srgbClr val="4B2E83"/>
+                </a:solidFill>
+                <a:latin typeface="Calibri" pitchFamily="34" charset="0"/>
+                <a:ea typeface="Calibri" pitchFamily="34" charset="-122"/>
+                <a:cs typeface="Calibri" pitchFamily="34" charset="-120"/>
+              </a:rPr>
+              <a:t>ModelRegistry</a:t>
+            </a:r>
+            <a:endParaRPr lang="en-US" sz="950" dirty="0"/>
+          </a:p>
+        </p:txBody>
+      </p:sp>
+      <p:sp>
+        <p:nvSpPr>
+          <p:cNvPr id="52" name="Text 50"/>
+          <p:cNvSpPr/>
+          <p:nvPr/>
+        </p:nvSpPr>
+        <p:spPr>
+          <a:xfrm>
+            <a:off x="7461504" y="2276856"/>
+            <a:ext cx="1581912" cy="649224"/>
+          </a:xfrm>
+          <a:prstGeom prst="rect">
+            <a:avLst/>
+          </a:prstGeom>
+          <a:noFill/>
+          <a:ln/>
+        </p:spPr>
+        <p:txBody>
+          <a:bodyPr wrap="square" lIns="0" tIns="0" rIns="0" bIns="0" rtlCol="0" anchor="t"/>
+          <a:lstStyle/>
+          <a:p>
+            <a:pPr indent="0" marL="0">
+              <a:buNone/>
+            </a:pPr>
+            <a:r>
+              <a:rPr lang="en-US" sz="760" dirty="0">
+                <a:solidFill>
+                  <a:srgbClr val="333333"/>
+                </a:solidFill>
+                <a:latin typeface="Calibri" pitchFamily="34" charset="0"/>
+                <a:ea typeface="Calibri" pitchFamily="34" charset="-122"/>
+                <a:cs typeface="Calibri" pitchFamily="34" charset="-120"/>
+              </a:rPr>
+              <a:t>PK model_id</a:t>
+            </a:r>
+            <a:endParaRPr lang="en-US" sz="760" dirty="0"/>
+          </a:p>
+          <a:p>
+            <a:pPr indent="0" marL="0">
+              <a:buNone/>
+            </a:pPr>
+            <a:r>
+              <a:rPr lang="en-US" sz="760" dirty="0">
+                <a:solidFill>
+                  <a:srgbClr val="333333"/>
+                </a:solidFill>
+                <a:latin typeface="Calibri" pitchFamily="34" charset="0"/>
+                <a:ea typeface="Calibri" pitchFamily="34" charset="-122"/>
+                <a:cs typeface="Calibri" pitchFamily="34" charset="-120"/>
+              </a:rPr>
+              <a:t>version, metrics</a:t>
+            </a:r>
+            <a:endParaRPr lang="en-US" sz="760" dirty="0"/>
+          </a:p>
+          <a:p>
+            <a:pPr indent="0" marL="0">
+              <a:buNone/>
+            </a:pPr>
+            <a:r>
+              <a:rPr lang="en-US" sz="760" dirty="0">
+                <a:solidFill>
+                  <a:srgbClr val="333333"/>
+                </a:solidFill>
+                <a:latin typeface="Calibri" pitchFamily="34" charset="0"/>
+                <a:ea typeface="Calibri" pitchFamily="34" charset="-122"/>
+                <a:cs typeface="Calibri" pitchFamily="34" charset="-120"/>
+              </a:rPr>
+              <a:t>trained_at</a:t>
+            </a:r>
+            <a:endParaRPr lang="en-US" sz="760" dirty="0"/>
+          </a:p>
+        </p:txBody>
+      </p:sp>
+      <p:sp>
+        <p:nvSpPr>
+          <p:cNvPr id="53" name="Shape 51"/>
+          <p:cNvSpPr/>
+          <p:nvPr/>
+        </p:nvSpPr>
+        <p:spPr>
+          <a:xfrm>
+            <a:off x="9189720" y="2011680"/>
+            <a:ext cx="1691640" cy="960120"/>
+          </a:xfrm>
+          <a:prstGeom prst="rect">
+            <a:avLst/>
+          </a:prstGeom>
+          <a:solidFill>
+            <a:srgbClr val="FFFFFF"/>
+          </a:solidFill>
+          <a:ln w="13970">
+            <a:solidFill>
+              <a:srgbClr val="8E6FC4"/>
+            </a:solidFill>
+            <a:prstDash val="solid"/>
+          </a:ln>
+        </p:spPr>
+      </p:sp>
+      <p:sp>
+        <p:nvSpPr>
+          <p:cNvPr id="54" name="Shape 52"/>
+          <p:cNvSpPr/>
+          <p:nvPr/>
+        </p:nvSpPr>
+        <p:spPr>
+          <a:xfrm>
+            <a:off x="9189720" y="2011680"/>
+            <a:ext cx="1691640" cy="237744"/>
+          </a:xfrm>
+          <a:prstGeom prst="rect">
+            <a:avLst/>
+          </a:prstGeom>
+          <a:solidFill>
+            <a:srgbClr val="E8DFF5"/>
+          </a:solidFill>
+          <a:ln w="13970">
+            <a:solidFill>
+              <a:srgbClr val="8E6FC4"/>
+            </a:solidFill>
+            <a:prstDash val="solid"/>
+          </a:ln>
+        </p:spPr>
+      </p:sp>
+      <p:sp>
+        <p:nvSpPr>
+          <p:cNvPr id="55" name="Text 53"/>
+          <p:cNvSpPr/>
+          <p:nvPr/>
+        </p:nvSpPr>
+        <p:spPr>
+          <a:xfrm>
+            <a:off x="9189720" y="2011680"/>
+            <a:ext cx="1691640" cy="237744"/>
+          </a:xfrm>
+          <a:prstGeom prst="rect">
+            <a:avLst/>
+          </a:prstGeom>
+          <a:noFill/>
+          <a:ln/>
+        </p:spPr>
+        <p:txBody>
+          <a:bodyPr wrap="square" lIns="0" tIns="0" rIns="0" bIns="0" rtlCol="0" anchor="ctr"/>
+          <a:lstStyle/>
+          <a:p>
+            <a:pPr algn="ctr" indent="0" marL="0">
+              <a:buNone/>
+            </a:pPr>
+            <a:r>
+              <a:rPr lang="en-US" sz="950" b="1" dirty="0">
+                <a:solidFill>
+                  <a:srgbClr val="4B2E83"/>
+                </a:solidFill>
+                <a:latin typeface="Calibri" pitchFamily="34" charset="0"/>
+                <a:ea typeface="Calibri" pitchFamily="34" charset="-122"/>
+                <a:cs typeface="Calibri" pitchFamily="34" charset="-120"/>
+              </a:rPr>
+              <a:t>AuditLog</a:t>
+            </a:r>
+            <a:endParaRPr lang="en-US" sz="950" dirty="0"/>
+          </a:p>
+        </p:txBody>
+      </p:sp>
+      <p:sp>
+        <p:nvSpPr>
+          <p:cNvPr id="56" name="Text 54"/>
+          <p:cNvSpPr/>
+          <p:nvPr/>
+        </p:nvSpPr>
+        <p:spPr>
+          <a:xfrm>
+            <a:off x="9244584" y="2276856"/>
+            <a:ext cx="1581912" cy="649224"/>
+          </a:xfrm>
+          <a:prstGeom prst="rect">
+            <a:avLst/>
+          </a:prstGeom>
+          <a:noFill/>
+          <a:ln/>
+        </p:spPr>
+        <p:txBody>
+          <a:bodyPr wrap="square" lIns="0" tIns="0" rIns="0" bIns="0" rtlCol="0" anchor="t"/>
+          <a:lstStyle/>
+          <a:p>
+            <a:pPr indent="0" marL="0">
+              <a:buNone/>
+            </a:pPr>
+            <a:r>
+              <a:rPr lang="en-US" sz="760" dirty="0">
+                <a:solidFill>
+                  <a:srgbClr val="333333"/>
+                </a:solidFill>
+                <a:latin typeface="Calibri" pitchFamily="34" charset="0"/>
+                <a:ea typeface="Calibri" pitchFamily="34" charset="-122"/>
+                <a:cs typeface="Calibri" pitchFamily="34" charset="-120"/>
+              </a:rPr>
+              <a:t>PK audit_id</a:t>
+            </a:r>
+            <a:endParaRPr lang="en-US" sz="760" dirty="0"/>
+          </a:p>
+          <a:p>
+            <a:pPr indent="0" marL="0">
+              <a:buNone/>
+            </a:pPr>
+            <a:r>
+              <a:rPr lang="en-US" sz="760" dirty="0">
+                <a:solidFill>
+                  <a:srgbClr val="333333"/>
+                </a:solidFill>
+                <a:latin typeface="Calibri" pitchFamily="34" charset="0"/>
+                <a:ea typeface="Calibri" pitchFamily="34" charset="-122"/>
+                <a:cs typeface="Calibri" pitchFamily="34" charset="-120"/>
+              </a:rPr>
+              <a:t>action, actor</a:t>
+            </a:r>
+            <a:endParaRPr lang="en-US" sz="760" dirty="0"/>
+          </a:p>
+          <a:p>
+            <a:pPr indent="0" marL="0">
+              <a:buNone/>
+            </a:pPr>
+            <a:r>
+              <a:rPr lang="en-US" sz="760" dirty="0">
+                <a:solidFill>
+                  <a:srgbClr val="333333"/>
+                </a:solidFill>
+                <a:latin typeface="Calibri" pitchFamily="34" charset="0"/>
+                <a:ea typeface="Calibri" pitchFamily="34" charset="-122"/>
+                <a:cs typeface="Calibri" pitchFamily="34" charset="-120"/>
+              </a:rPr>
+              <a:t>correlation_id</a:t>
+            </a:r>
+            <a:endParaRPr lang="en-US" sz="760" dirty="0"/>
+          </a:p>
+        </p:txBody>
+      </p:sp>
+      <p:sp>
+        <p:nvSpPr>
+          <p:cNvPr id="57" name="Shape 55"/>
+          <p:cNvSpPr/>
+          <p:nvPr/>
+        </p:nvSpPr>
+        <p:spPr>
+          <a:xfrm>
+            <a:off x="274320" y="3108960"/>
+            <a:ext cx="1691640" cy="914400"/>
+          </a:xfrm>
+          <a:prstGeom prst="rect">
+            <a:avLst/>
+          </a:prstGeom>
+          <a:solidFill>
+            <a:srgbClr val="FFFFFF"/>
+          </a:solidFill>
+          <a:ln w="13970">
+            <a:solidFill>
+              <a:srgbClr val="8E6FC4"/>
+            </a:solidFill>
+            <a:prstDash val="solid"/>
+          </a:ln>
+        </p:spPr>
+      </p:sp>
+      <p:sp>
+        <p:nvSpPr>
+          <p:cNvPr id="58" name="Shape 56"/>
+          <p:cNvSpPr/>
+          <p:nvPr/>
+        </p:nvSpPr>
+        <p:spPr>
+          <a:xfrm>
+            <a:off x="274320" y="3108960"/>
+            <a:ext cx="1691640" cy="237744"/>
+          </a:xfrm>
+          <a:prstGeom prst="rect">
+            <a:avLst/>
+          </a:prstGeom>
+          <a:solidFill>
+            <a:srgbClr val="E8DFF5"/>
+          </a:solidFill>
+          <a:ln w="13970">
+            <a:solidFill>
+              <a:srgbClr val="8E6FC4"/>
+            </a:solidFill>
+            <a:prstDash val="solid"/>
+          </a:ln>
+        </p:spPr>
+      </p:sp>
+      <p:sp>
+        <p:nvSpPr>
+          <p:cNvPr id="59" name="Text 57"/>
+          <p:cNvSpPr/>
+          <p:nvPr/>
+        </p:nvSpPr>
+        <p:spPr>
+          <a:xfrm>
+            <a:off x="274320" y="3108960"/>
+            <a:ext cx="1691640" cy="237744"/>
+          </a:xfrm>
+          <a:prstGeom prst="rect">
+            <a:avLst/>
+          </a:prstGeom>
+          <a:noFill/>
+          <a:ln/>
+        </p:spPr>
+        <p:txBody>
+          <a:bodyPr wrap="square" lIns="0" tIns="0" rIns="0" bIns="0" rtlCol="0" anchor="ctr"/>
+          <a:lstStyle/>
+          <a:p>
+            <a:pPr algn="ctr" indent="0" marL="0">
+              <a:buNone/>
+            </a:pPr>
+            <a:r>
+              <a:rPr lang="en-US" sz="950" b="1" dirty="0">
+                <a:solidFill>
+                  <a:srgbClr val="4B2E83"/>
+                </a:solidFill>
+                <a:latin typeface="Calibri" pitchFamily="34" charset="0"/>
+                <a:ea typeface="Calibri" pitchFamily="34" charset="-122"/>
+                <a:cs typeface="Calibri" pitchFamily="34" charset="-120"/>
+              </a:rPr>
+              <a:t>CbdcWallet</a:t>
+            </a:r>
+            <a:endParaRPr lang="en-US" sz="950" dirty="0"/>
+          </a:p>
+        </p:txBody>
+      </p:sp>
+      <p:sp>
+        <p:nvSpPr>
+          <p:cNvPr id="60" name="Text 58"/>
+          <p:cNvSpPr/>
+          <p:nvPr/>
+        </p:nvSpPr>
+        <p:spPr>
+          <a:xfrm>
+            <a:off x="329184" y="3374136"/>
+            <a:ext cx="1581912" cy="603504"/>
+          </a:xfrm>
+          <a:prstGeom prst="rect">
+            <a:avLst/>
+          </a:prstGeom>
+          <a:noFill/>
+          <a:ln/>
+        </p:spPr>
+        <p:txBody>
+          <a:bodyPr wrap="square" lIns="0" tIns="0" rIns="0" bIns="0" rtlCol="0" anchor="t"/>
+          <a:lstStyle/>
+          <a:p>
+            <a:pPr indent="0" marL="0">
+              <a:buNone/>
+            </a:pPr>
+            <a:r>
+              <a:rPr lang="en-US" sz="760" dirty="0">
+                <a:solidFill>
+                  <a:srgbClr val="333333"/>
+                </a:solidFill>
+                <a:latin typeface="Calibri" pitchFamily="34" charset="0"/>
+                <a:ea typeface="Calibri" pitchFamily="34" charset="-122"/>
+                <a:cs typeface="Calibri" pitchFamily="34" charset="-120"/>
+              </a:rPr>
+              <a:t>PK cbdc_wallet_id</a:t>
+            </a:r>
+            <a:endParaRPr lang="en-US" sz="760" dirty="0"/>
+          </a:p>
+          <a:p>
+            <a:pPr indent="0" marL="0">
+              <a:buNone/>
+            </a:pPr>
+            <a:r>
+              <a:rPr lang="en-US" sz="760" dirty="0">
+                <a:solidFill>
+                  <a:srgbClr val="333333"/>
+                </a:solidFill>
+                <a:latin typeface="Calibri" pitchFamily="34" charset="0"/>
+                <a:ea typeface="Calibri" pitchFamily="34" charset="-122"/>
+                <a:cs typeface="Calibri" pitchFamily="34" charset="-120"/>
+              </a:rPr>
+              <a:t>FK customer_id</a:t>
+            </a:r>
+            <a:endParaRPr lang="en-US" sz="760" dirty="0"/>
+          </a:p>
+          <a:p>
+            <a:pPr indent="0" marL="0">
+              <a:buNone/>
+            </a:pPr>
+            <a:r>
+              <a:rPr lang="en-US" sz="760" dirty="0">
+                <a:solidFill>
+                  <a:srgbClr val="333333"/>
+                </a:solidFill>
+                <a:latin typeface="Calibri" pitchFamily="34" charset="0"/>
+                <a:ea typeface="Calibri" pitchFamily="34" charset="-122"/>
+                <a:cs typeface="Calibri" pitchFamily="34" charset="-120"/>
+              </a:rPr>
+              <a:t>balance</a:t>
+            </a:r>
+            <a:endParaRPr lang="en-US" sz="760" dirty="0"/>
+          </a:p>
+        </p:txBody>
+      </p:sp>
+      <p:sp>
+        <p:nvSpPr>
+          <p:cNvPr id="61" name="Shape 59"/>
+          <p:cNvSpPr/>
+          <p:nvPr/>
+        </p:nvSpPr>
+        <p:spPr>
+          <a:xfrm>
+            <a:off x="2057400" y="3108960"/>
+            <a:ext cx="1691640" cy="914400"/>
+          </a:xfrm>
+          <a:prstGeom prst="rect">
+            <a:avLst/>
+          </a:prstGeom>
+          <a:solidFill>
+            <a:srgbClr val="FFFFFF"/>
+          </a:solidFill>
+          <a:ln w="13970">
+            <a:solidFill>
+              <a:srgbClr val="8E6FC4"/>
+            </a:solidFill>
+            <a:prstDash val="solid"/>
+          </a:ln>
+        </p:spPr>
+      </p:sp>
+      <p:sp>
+        <p:nvSpPr>
+          <p:cNvPr id="62" name="Shape 60"/>
+          <p:cNvSpPr/>
+          <p:nvPr/>
+        </p:nvSpPr>
+        <p:spPr>
+          <a:xfrm>
+            <a:off x="2057400" y="3108960"/>
+            <a:ext cx="1691640" cy="237744"/>
+          </a:xfrm>
+          <a:prstGeom prst="rect">
+            <a:avLst/>
+          </a:prstGeom>
+          <a:solidFill>
+            <a:srgbClr val="E8DFF5"/>
+          </a:solidFill>
+          <a:ln w="13970">
+            <a:solidFill>
+              <a:srgbClr val="8E6FC4"/>
+            </a:solidFill>
+            <a:prstDash val="solid"/>
+          </a:ln>
+        </p:spPr>
+      </p:sp>
+      <p:sp>
+        <p:nvSpPr>
+          <p:cNvPr id="63" name="Text 61"/>
+          <p:cNvSpPr/>
+          <p:nvPr/>
+        </p:nvSpPr>
+        <p:spPr>
+          <a:xfrm>
+            <a:off x="2057400" y="3108960"/>
+            <a:ext cx="1691640" cy="237744"/>
+          </a:xfrm>
+          <a:prstGeom prst="rect">
+            <a:avLst/>
+          </a:prstGeom>
+          <a:noFill/>
+          <a:ln/>
+        </p:spPr>
+        <p:txBody>
+          <a:bodyPr wrap="square" lIns="0" tIns="0" rIns="0" bIns="0" rtlCol="0" anchor="ctr"/>
+          <a:lstStyle/>
+          <a:p>
+            <a:pPr algn="ctr" indent="0" marL="0">
+              <a:buNone/>
+            </a:pPr>
+            <a:r>
+              <a:rPr lang="en-US" sz="950" b="1" dirty="0">
+                <a:solidFill>
+                  <a:srgbClr val="4B2E83"/>
+                </a:solidFill>
+                <a:latin typeface="Calibri" pitchFamily="34" charset="0"/>
+                <a:ea typeface="Calibri" pitchFamily="34" charset="-122"/>
+                <a:cs typeface="Calibri" pitchFamily="34" charset="-120"/>
+              </a:rPr>
+              <a:t>CbdcOperation</a:t>
+            </a:r>
+            <a:endParaRPr lang="en-US" sz="950" dirty="0"/>
+          </a:p>
+        </p:txBody>
+      </p:sp>
+      <p:sp>
+        <p:nvSpPr>
+          <p:cNvPr id="64" name="Text 62"/>
+          <p:cNvSpPr/>
+          <p:nvPr/>
+        </p:nvSpPr>
+        <p:spPr>
+          <a:xfrm>
+            <a:off x="2112264" y="3374136"/>
+            <a:ext cx="1581912" cy="603504"/>
+          </a:xfrm>
+          <a:prstGeom prst="rect">
+            <a:avLst/>
+          </a:prstGeom>
+          <a:noFill/>
+          <a:ln/>
+        </p:spPr>
+        <p:txBody>
+          <a:bodyPr wrap="square" lIns="0" tIns="0" rIns="0" bIns="0" rtlCol="0" anchor="t"/>
+          <a:lstStyle/>
+          <a:p>
+            <a:pPr indent="0" marL="0">
+              <a:buNone/>
+            </a:pPr>
+            <a:r>
+              <a:rPr lang="en-US" sz="760" dirty="0">
+                <a:solidFill>
+                  <a:srgbClr val="333333"/>
+                </a:solidFill>
+                <a:latin typeface="Calibri" pitchFamily="34" charset="0"/>
+                <a:ea typeface="Calibri" pitchFamily="34" charset="-122"/>
+                <a:cs typeface="Calibri" pitchFamily="34" charset="-120"/>
+              </a:rPr>
+              <a:t>PK op_id</a:t>
+            </a:r>
+            <a:endParaRPr lang="en-US" sz="760" dirty="0"/>
+          </a:p>
+          <a:p>
+            <a:pPr indent="0" marL="0">
+              <a:buNone/>
+            </a:pPr>
+            <a:r>
+              <a:rPr lang="en-US" sz="760" dirty="0">
+                <a:solidFill>
+                  <a:srgbClr val="333333"/>
+                </a:solidFill>
+                <a:latin typeface="Calibri" pitchFamily="34" charset="0"/>
+                <a:ea typeface="Calibri" pitchFamily="34" charset="-122"/>
+                <a:cs typeface="Calibri" pitchFamily="34" charset="-120"/>
+              </a:rPr>
+              <a:t>FK cbdc_wallet_id</a:t>
+            </a:r>
+            <a:endParaRPr lang="en-US" sz="760" dirty="0"/>
+          </a:p>
+          <a:p>
+            <a:pPr indent="0" marL="0">
+              <a:buNone/>
+            </a:pPr>
+            <a:r>
+              <a:rPr lang="en-US" sz="760" dirty="0">
+                <a:solidFill>
+                  <a:srgbClr val="333333"/>
+                </a:solidFill>
+                <a:latin typeface="Calibri" pitchFamily="34" charset="0"/>
+                <a:ea typeface="Calibri" pitchFamily="34" charset="-122"/>
+                <a:cs typeface="Calibri" pitchFamily="34" charset="-120"/>
+              </a:rPr>
+              <a:t>issue/redeem</a:t>
+            </a:r>
+            <a:endParaRPr lang="en-US" sz="760" dirty="0"/>
+          </a:p>
+        </p:txBody>
+      </p:sp>
+      <p:sp>
+        <p:nvSpPr>
+          <p:cNvPr id="65" name="Shape 63"/>
+          <p:cNvSpPr/>
+          <p:nvPr/>
+        </p:nvSpPr>
+        <p:spPr>
+          <a:xfrm>
+            <a:off x="1965960" y="1389888"/>
+            <a:ext cx="91440" cy="9144"/>
+          </a:xfrm>
+          <a:prstGeom prst="line">
+            <a:avLst/>
+          </a:prstGeom>
+          <a:noFill/>
+          <a:ln w="17780">
+            <a:solidFill>
+              <a:srgbClr val="666666"/>
+            </a:solidFill>
+            <a:prstDash val="solid"/>
+            <a:headEnd type="none"/>
+            <a:tailEnd type="triangle"/>
+          </a:ln>
+        </p:spPr>
+      </p:sp>
+      <p:sp>
+        <p:nvSpPr>
+          <p:cNvPr id="66" name="Shape 64"/>
+          <p:cNvSpPr/>
+          <p:nvPr/>
+        </p:nvSpPr>
+        <p:spPr>
+          <a:xfrm>
+            <a:off x="3749040" y="1389888"/>
+            <a:ext cx="91440" cy="9144"/>
+          </a:xfrm>
+          <a:prstGeom prst="line">
+            <a:avLst/>
+          </a:prstGeom>
+          <a:noFill/>
+          <a:ln w="17780">
+            <a:solidFill>
+              <a:srgbClr val="666666"/>
+            </a:solidFill>
+            <a:prstDash val="solid"/>
+            <a:headEnd type="none"/>
+            <a:tailEnd type="triangle"/>
+          </a:ln>
+        </p:spPr>
+      </p:sp>
+      <p:sp>
+        <p:nvSpPr>
+          <p:cNvPr id="67" name="Shape 65"/>
+          <p:cNvSpPr/>
+          <p:nvPr/>
+        </p:nvSpPr>
+        <p:spPr>
+          <a:xfrm>
+            <a:off x="5532120" y="1389888"/>
+            <a:ext cx="91440" cy="9144"/>
+          </a:xfrm>
+          <a:prstGeom prst="line">
+            <a:avLst/>
+          </a:prstGeom>
+          <a:noFill/>
+          <a:ln w="17780">
+            <a:solidFill>
+              <a:srgbClr val="666666"/>
+            </a:solidFill>
+            <a:prstDash val="solid"/>
+            <a:headEnd type="none"/>
+            <a:tailEnd type="triangle"/>
+          </a:ln>
+        </p:spPr>
+      </p:sp>
+      <p:sp>
+        <p:nvSpPr>
+          <p:cNvPr id="68" name="Shape 66"/>
+          <p:cNvSpPr/>
+          <p:nvPr/>
+        </p:nvSpPr>
+        <p:spPr>
+          <a:xfrm>
+            <a:off x="2903220" y="1828800"/>
+            <a:ext cx="9144" cy="182880"/>
+          </a:xfrm>
+          <a:prstGeom prst="line">
+            <a:avLst/>
+          </a:prstGeom>
+          <a:noFill/>
+          <a:ln w="17780">
+            <a:solidFill>
+              <a:srgbClr val="666666"/>
+            </a:solidFill>
+            <a:prstDash val="solid"/>
+            <a:headEnd type="none"/>
+            <a:tailEnd type="triangle"/>
+          </a:ln>
+        </p:spPr>
+      </p:sp>
+      <p:sp>
+        <p:nvSpPr>
+          <p:cNvPr id="69" name="Shape 67"/>
+          <p:cNvSpPr/>
+          <p:nvPr/>
+        </p:nvSpPr>
+        <p:spPr>
+          <a:xfrm>
+            <a:off x="1965960" y="2487168"/>
+            <a:ext cx="91440" cy="9144"/>
+          </a:xfrm>
+          <a:prstGeom prst="line">
+            <a:avLst/>
+          </a:prstGeom>
+          <a:noFill/>
+          <a:ln w="17780">
+            <a:solidFill>
+              <a:srgbClr val="666666"/>
+            </a:solidFill>
+            <a:prstDash val="solid"/>
+            <a:headEnd type="none"/>
+            <a:tailEnd type="triangle"/>
+          </a:ln>
+        </p:spPr>
+      </p:sp>
+      <p:sp>
+        <p:nvSpPr>
+          <p:cNvPr id="70" name="Shape 68"/>
+          <p:cNvSpPr/>
+          <p:nvPr/>
+        </p:nvSpPr>
+        <p:spPr>
+          <a:xfrm>
+            <a:off x="3749040" y="2487168"/>
+            <a:ext cx="91440" cy="9144"/>
+          </a:xfrm>
+          <a:prstGeom prst="line">
+            <a:avLst/>
+          </a:prstGeom>
+          <a:noFill/>
+          <a:ln w="17780">
+            <a:solidFill>
+              <a:srgbClr val="666666"/>
+            </a:solidFill>
+            <a:prstDash val="solid"/>
+            <a:headEnd type="none"/>
+            <a:tailEnd type="triangle"/>
+          </a:ln>
+        </p:spPr>
+      </p:sp>
+      <p:sp>
+        <p:nvSpPr>
+          <p:cNvPr id="71" name="Shape 69"/>
+          <p:cNvSpPr/>
+          <p:nvPr/>
+        </p:nvSpPr>
+        <p:spPr>
+          <a:xfrm>
+            <a:off x="5532120" y="2487168"/>
+            <a:ext cx="91440" cy="9144"/>
+          </a:xfrm>
+          <a:prstGeom prst="line">
+            <a:avLst/>
+          </a:prstGeom>
+          <a:noFill/>
+          <a:ln w="17780">
+            <a:solidFill>
+              <a:srgbClr val="666666"/>
+            </a:solidFill>
+            <a:prstDash val="solid"/>
+            <a:headEnd type="none"/>
+            <a:tailEnd type="triangle"/>
+          </a:ln>
+        </p:spPr>
+      </p:sp>
+      <p:sp>
+        <p:nvSpPr>
+          <p:cNvPr id="72" name="Shape 70"/>
+          <p:cNvSpPr/>
+          <p:nvPr/>
+        </p:nvSpPr>
+        <p:spPr>
+          <a:xfrm>
+            <a:off x="7315200" y="2487168"/>
+            <a:ext cx="91440" cy="9144"/>
+          </a:xfrm>
+          <a:prstGeom prst="line">
+            <a:avLst/>
+          </a:prstGeom>
+          <a:noFill/>
+          <a:ln w="17780">
+            <a:solidFill>
+              <a:srgbClr val="666666"/>
+            </a:solidFill>
+            <a:prstDash val="solid"/>
+            <a:headEnd type="none"/>
+            <a:tailEnd type="triangle"/>
+          </a:ln>
+        </p:spPr>
+      </p:sp>
+      <p:sp>
+        <p:nvSpPr>
+          <p:cNvPr id="73" name="Shape 71"/>
+          <p:cNvSpPr/>
+          <p:nvPr/>
+        </p:nvSpPr>
+        <p:spPr>
+          <a:xfrm>
+            <a:off x="1120140" y="2926080"/>
+            <a:ext cx="9144" cy="182880"/>
+          </a:xfrm>
+          <a:prstGeom prst="line">
+            <a:avLst/>
+          </a:prstGeom>
+          <a:noFill/>
+          <a:ln w="17780">
+            <a:solidFill>
+              <a:srgbClr val="666666"/>
+            </a:solidFill>
+            <a:prstDash val="solid"/>
+            <a:headEnd type="none"/>
+            <a:tailEnd type="triangle"/>
+          </a:ln>
+        </p:spPr>
+      </p:sp>
+      <p:sp>
+        <p:nvSpPr>
+          <p:cNvPr id="74" name="Shape 72"/>
+          <p:cNvSpPr/>
+          <p:nvPr/>
+        </p:nvSpPr>
+        <p:spPr>
+          <a:xfrm>
+            <a:off x="1965960" y="3520440"/>
+            <a:ext cx="91440" cy="9144"/>
+          </a:xfrm>
+          <a:prstGeom prst="line">
+            <a:avLst/>
+          </a:prstGeom>
+          <a:noFill/>
+          <a:ln w="17780">
+            <a:solidFill>
+              <a:srgbClr val="666666"/>
+            </a:solidFill>
+            <a:prstDash val="solid"/>
+            <a:headEnd type="none"/>
+            <a:tailEnd type="triangle"/>
+          </a:ln>
+        </p:spPr>
+      </p:sp>
+      <p:sp>
+        <p:nvSpPr>
+          <p:cNvPr id="75" name="Text 73"/>
+          <p:cNvSpPr/>
+          <p:nvPr/>
+        </p:nvSpPr>
+        <p:spPr>
+          <a:xfrm>
+            <a:off x="274320" y="4206240"/>
+            <a:ext cx="10607040" cy="201168"/>
+          </a:xfrm>
+          <a:prstGeom prst="rect">
+            <a:avLst/>
+          </a:prstGeom>
+          <a:noFill/>
+          <a:ln/>
+        </p:spPr>
+        <p:txBody>
+          <a:bodyPr wrap="square" lIns="0" tIns="0" rIns="0" bIns="0" rtlCol="0" anchor="ctr"/>
+          <a:lstStyle/>
+          <a:p>
+            <a:pPr algn="l" indent="0" marL="0">
+              <a:buNone/>
+            </a:pPr>
+            <a:r>
+              <a:rPr lang="en-US" sz="900" i="1" dirty="0">
+                <a:solidFill>
+                  <a:srgbClr val="666666"/>
+                </a:solidFill>
+                <a:latin typeface="Calibri" pitchFamily="34" charset="0"/>
+                <a:ea typeface="Calibri" pitchFamily="34" charset="-122"/>
+                <a:cs typeface="Calibri" pitchFamily="34" charset="-120"/>
+              </a:rPr>
+              <a:t>User -&gt; {Customer, Merchant}; Customer -&gt; {Wallet, Consent, CbdcWallet}; Merchant -&gt; Wallet. Transaction -&gt; {LedgerEntry, FraudAlert -&gt; Investigation}. ModelRegistry and AuditLog are cross-cutting.</a:t>
+            </a:r>
+            <a:endParaRPr lang="en-US" sz="900" dirty="0"/>
+          </a:p>
+        </p:txBody>
+      </p:sp>
     </p:spTree>
   </p:cSld>
   <p:clrMapOvr>

--- a/docs/architecture/GlobalPay_Mandatory_Architecture_Deliverables.pptx
+++ b/docs/architecture/GlobalPay_Mandatory_Architecture_Deliverables.pptx
@@ -2521,7 +2521,7 @@
                 <a:ea typeface="Cambria" pitchFamily="34" charset="-122"/>
                 <a:cs typeface="Cambria" pitchFamily="34" charset="-120"/>
               </a:rPr>
-              <a:t>Section 8 — Complete Diagram Pack</a:t>
+              <a:t>Mandatory Architecture &amp; Engineering Deliverables</a:t>
             </a:r>
             <a:endParaRPr lang="en-US" sz="2200" dirty="0"/>
           </a:p>

--- a/docs/architecture/GlobalPay_Mandatory_Architecture_Deliverables.pptx
+++ b/docs/architecture/GlobalPay_Mandatory_Architecture_Deliverables.pptx
@@ -31719,7 +31719,7 @@
 </file>
 
 <file path=ppt/slides/slide9.xml><?xml version="1.0" encoding="utf-8"?>
-<p:sld xmlns:a="http://schemas.openxmlformats.org/drawingml/2006/main" xmlns:r="http://schemas.openxmlformats.org/officeDocument/2006/relationships" xmlns:p="http://schemas.openxmlformats.org/presentationml/2006/main">
+<p:sld xmlns:a="http://schemas.openxmlformats.org/drawingml/2006/main" xmlns:p="http://schemas.openxmlformats.org/presentationml/2006/main">
   <p:cSld name="Slide 9">
     <p:bg>
       <p:bgPr>
@@ -32219,7 +32219,7 @@
                 <a:ea typeface="Calibri" pitchFamily="34" charset="-122"/>
                 <a:cs typeface="Calibri" pitchFamily="34" charset="-120"/>
               </a:rPr>
-              <a:t>CBDC ledger</a:t>
+              <a:t>CBDC records</a:t>
             </a:r>
             <a:endParaRPr lang="en-US" sz="1050" dirty="0"/>
           </a:p>
@@ -32310,7 +32310,7 @@
                 <a:ea typeface="Calibri" pitchFamily="34" charset="-122"/>
                 <a:cs typeface="Calibri" pitchFamily="34" charset="-120"/>
               </a:rPr>
-              <a:t>Analytics svc</a:t>
+              <a:t>Read-only reporting</a:t>
             </a:r>
             <a:endParaRPr lang="en-US" sz="1050" dirty="0"/>
           </a:p>
@@ -32409,31 +32409,6 @@
       </p:sp>
       <p:sp>
         <p:nvSpPr>
-          <p:cNvPr id="23" name="Shape 21"/>
-          <p:cNvSpPr/>
-          <p:nvPr/>
-        </p:nvSpPr>
-        <p:spPr>
-          <a:xfrm flipH="1">
-            <a:off x="1339596" y="3429000"/>
-            <a:ext cx="6812280" cy="685800"/>
-          </a:xfrm>
-          <a:prstGeom prst="line">
-            <a:avLst/>
-          </a:prstGeom>
-          <a:noFill/>
-          <a:ln w="17780">
-            <a:solidFill>
-              <a:srgbClr val="888888"/>
-            </a:solidFill>
-            <a:prstDash val="dash"/>
-            <a:headEnd type="none"/>
-            <a:tailEnd type="triangle"/>
-          </a:ln>
-        </p:spPr>
-      </p:sp>
-      <p:sp>
-        <p:nvSpPr>
           <p:cNvPr id="24" name="Text 22"/>
           <p:cNvSpPr/>
           <p:nvPr/>
@@ -32465,7 +32440,7 @@
                 <a:ea typeface="Calibri" pitchFamily="34" charset="-122"/>
                 <a:cs typeface="Calibri" pitchFamily="34" charset="-120"/>
               </a:rPr>
-              <a:t>CBDC analytics reports activity; balances remain separate from Module 1 wallets — kept as a separate ledger for audit clarity</a:t>
+              <a:t>Reporting reads cbdc_wallets and cbdc_operations; these records remain separate from commercial wallet data</a:t>
             </a:r>
             <a:endParaRPr lang="en-US" sz="900" dirty="0"/>
           </a:p>

--- a/docs/architecture/GlobalPay_Mandatory_Architecture_Deliverables.pptx
+++ b/docs/architecture/GlobalPay_Mandatory_Architecture_Deliverables.pptx
@@ -6314,7 +6314,7 @@
 </file>
 
 <file path=ppt/slides/slide10.xml><?xml version="1.0" encoding="utf-8"?>
-<p:sld xmlns:a="http://schemas.openxmlformats.org/drawingml/2006/main" xmlns:r="http://schemas.openxmlformats.org/officeDocument/2006/relationships" xmlns:p="http://schemas.openxmlformats.org/presentationml/2006/main">
+<p:sld xmlns:a="http://schemas.openxmlformats.org/drawingml/2006/main" xmlns:p="http://schemas.openxmlformats.org/presentationml/2006/main">
   <p:cSld name="Slide 10">
     <p:bg>
       <p:bgPr>
@@ -7296,7 +7296,7 @@
         <p:spPr>
           <a:xfrm>
             <a:off x="2697480" y="3291840"/>
-            <a:ext cx="9144" cy="137160"/>
+            <a:ext cx="1828800" cy="137160"/>
           </a:xfrm>
           <a:prstGeom prst="line">
             <a:avLst/>
@@ -7319,9 +7319,9 @@
           <p:nvPr/>
         </p:nvSpPr>
         <p:spPr>
-          <a:xfrm>
-            <a:off x="6080760" y="3291840"/>
-            <a:ext cx="9144" cy="137160"/>
+          <a:xfrm flipH="1">
+            <a:off x="4526280" y="3291840"/>
+            <a:ext cx="1554480" cy="137160"/>
           </a:xfrm>
           <a:prstGeom prst="line">
             <a:avLst/>
@@ -7339,14 +7339,39 @@
       </p:sp>
       <p:sp>
         <p:nvSpPr>
+          <p:cNvPr id="41" name="Shape 30 cache connection"/>
+          <p:cNvSpPr/>
+          <p:nvPr/>
+        </p:nvSpPr>
+        <p:spPr>
+          <a:xfrm>
+            <a:off x="6080760" y="3291840"/>
+            <a:ext cx="1554480" cy="137160"/>
+          </a:xfrm>
+          <a:prstGeom prst="line">
+            <a:avLst/>
+          </a:prstGeom>
+          <a:noFill/>
+          <a:ln w="17780">
+            <a:solidFill>
+              <a:srgbClr val="666666"/>
+            </a:solidFill>
+            <a:prstDash val="solid"/>
+            <a:headEnd type="none"/>
+            <a:tailEnd type="triangle"/>
+          </a:ln>
+        </p:spPr>
+      </p:sp>
+      <p:sp>
+        <p:nvSpPr>
           <p:cNvPr id="33" name="Shape 31"/>
           <p:cNvSpPr/>
           <p:nvPr/>
         </p:nvSpPr>
         <p:spPr>
-          <a:xfrm>
-            <a:off x="9464040" y="3291840"/>
-            <a:ext cx="9144" cy="137160"/>
+          <a:xfrm flipH="1">
+            <a:off x="7635240" y="3291840"/>
+            <a:ext cx="1828800" cy="137160"/>
           </a:xfrm>
           <a:prstGeom prst="line">
             <a:avLst/>

--- a/docs/architecture/GlobalPay_Mandatory_Architecture_Deliverables.pptx
+++ b/docs/architecture/GlobalPay_Mandatory_Architecture_Deliverables.pptx
@@ -6615,7 +6615,7 @@
                 <a:ea typeface="Calibri" pitchFamily="34" charset="-122"/>
                 <a:cs typeface="Calibri" pitchFamily="34" charset="-120"/>
               </a:rPr>
-              <a:t>Browser (examiner)</a:t>
+              <a:t>User web browser</a:t>
             </a:r>
             <a:endParaRPr lang="en-US" sz="1000" dirty="0"/>
           </a:p>
@@ -7296,7 +7296,7 @@
         <p:spPr>
           <a:xfrm>
             <a:off x="2697480" y="3291840"/>
-            <a:ext cx="1828800" cy="137160"/>
+            <a:ext cx="1828800" cy="274320"/>
           </a:xfrm>
           <a:prstGeom prst="line">
             <a:avLst/>
@@ -7321,7 +7321,7 @@
         <p:spPr>
           <a:xfrm flipH="1">
             <a:off x="4526280" y="3291840"/>
-            <a:ext cx="1554480" cy="137160"/>
+            <a:ext cx="1554480" cy="274320"/>
           </a:xfrm>
           <a:prstGeom prst="line">
             <a:avLst/>
@@ -7346,7 +7346,7 @@
         <p:spPr>
           <a:xfrm>
             <a:off x="6080760" y="3291840"/>
-            <a:ext cx="1554480" cy="137160"/>
+            <a:ext cx="1554480" cy="274320"/>
           </a:xfrm>
           <a:prstGeom prst="line">
             <a:avLst/>
@@ -7371,7 +7371,7 @@
         <p:spPr>
           <a:xfrm flipH="1">
             <a:off x="7635240" y="3291840"/>
-            <a:ext cx="1828800" cy="137160"/>
+            <a:ext cx="1828800" cy="274320"/>
           </a:xfrm>
           <a:prstGeom prst="line">
             <a:avLst/>
@@ -7395,7 +7395,7 @@
         </p:nvSpPr>
         <p:spPr>
           <a:xfrm>
-            <a:off x="3154680" y="3429000"/>
+            <a:off x="3154680" y="3566160"/>
             <a:ext cx="2743200" cy="384048"/>
           </a:xfrm>
           <a:prstGeom prst="roundRect">
@@ -7422,7 +7422,7 @@
         </p:nvSpPr>
         <p:spPr>
           <a:xfrm>
-            <a:off x="3209544" y="3456432"/>
+            <a:off x="3209544" y="3593592"/>
             <a:ext cx="2633472" cy="219456"/>
           </a:xfrm>
           <a:prstGeom prst="rect">
@@ -7461,7 +7461,7 @@
         </p:nvSpPr>
         <p:spPr>
           <a:xfrm>
-            <a:off x="3209544" y="3694176"/>
+            <a:off x="3209544" y="3831336"/>
             <a:ext cx="2633472" cy="164592"/>
           </a:xfrm>
           <a:prstGeom prst="rect">
@@ -7500,7 +7500,7 @@
         </p:nvSpPr>
         <p:spPr>
           <a:xfrm>
-            <a:off x="6263640" y="3429000"/>
+            <a:off x="6263640" y="3566160"/>
             <a:ext cx="2743200" cy="384048"/>
           </a:xfrm>
           <a:prstGeom prst="roundRect">
@@ -7527,7 +7527,7 @@
         </p:nvSpPr>
         <p:spPr>
           <a:xfrm>
-            <a:off x="6318504" y="3456432"/>
+            <a:off x="6318504" y="3593592"/>
             <a:ext cx="2633472" cy="219456"/>
           </a:xfrm>
           <a:prstGeom prst="rect">
@@ -7566,7 +7566,7 @@
         </p:nvSpPr>
         <p:spPr>
           <a:xfrm>
-            <a:off x="6318504" y="3694176"/>
+            <a:off x="6318504" y="3831336"/>
             <a:ext cx="2633472" cy="164592"/>
           </a:xfrm>
           <a:prstGeom prst="rect">
@@ -7605,7 +7605,7 @@
         </p:nvSpPr>
         <p:spPr>
           <a:xfrm>
-            <a:off x="8823960" y="3931920"/>
+            <a:off x="8823960" y="3977640"/>
             <a:ext cx="2194560" cy="201168"/>
           </a:xfrm>
           <a:prstGeom prst="roundRect">
@@ -7632,7 +7632,7 @@
         </p:nvSpPr>
         <p:spPr>
           <a:xfrm>
-            <a:off x="8878824" y="3931920"/>
+            <a:off x="8878824" y="3977640"/>
             <a:ext cx="2084832" cy="201168"/>
           </a:xfrm>
           <a:prstGeom prst="rect">
@@ -8716,7 +8716,7 @@
 </file>
 
 <file path=ppt/slides/slide12.xml><?xml version="1.0" encoding="utf-8"?>
-<p:sld xmlns:a="http://schemas.openxmlformats.org/drawingml/2006/main" xmlns:r="http://schemas.openxmlformats.org/officeDocument/2006/relationships" xmlns:p="http://schemas.openxmlformats.org/presentationml/2006/main">
+<p:sld xmlns:a="http://schemas.openxmlformats.org/drawingml/2006/main" xmlns:p="http://schemas.openxmlformats.org/presentationml/2006/main">
   <p:cSld name="Slide 12">
     <p:bg>
       <p:bgPr>
@@ -9451,13 +9451,13 @@
             <a:avLst/>
           </a:prstGeom>
           <a:noFill/>
-          <a:ln w="17780">
+          <a:ln w="25400">
             <a:solidFill>
-              <a:srgbClr val="666666"/>
+              <a:srgbClr val="4B5563"/>
             </a:solidFill>
             <a:prstDash val="solid"/>
-            <a:headEnd type="triangle"/>
-            <a:tailEnd type="triangle"/>
+            <a:headEnd type="triangle" w="lg" len="lg"/>
+            <a:tailEnd type="triangle" w="lg" len="lg"/>
           </a:ln>
         </p:spPr>
       </p:sp>
@@ -9476,13 +9476,13 @@
             <a:avLst/>
           </a:prstGeom>
           <a:noFill/>
-          <a:ln w="17780">
+          <a:ln w="25400">
             <a:solidFill>
-              <a:srgbClr val="666666"/>
+              <a:srgbClr val="4B5563"/>
             </a:solidFill>
             <a:prstDash val="solid"/>
-            <a:headEnd type="triangle"/>
-            <a:tailEnd type="triangle"/>
+            <a:headEnd type="triangle" w="lg" len="lg"/>
+            <a:tailEnd type="triangle" w="lg" len="lg"/>
           </a:ln>
         </p:spPr>
       </p:sp>
@@ -9501,13 +9501,13 @@
             <a:avLst/>
           </a:prstGeom>
           <a:noFill/>
-          <a:ln w="17780">
+          <a:ln w="25400">
             <a:solidFill>
-              <a:srgbClr val="666666"/>
+              <a:srgbClr val="4B5563"/>
             </a:solidFill>
             <a:prstDash val="solid"/>
-            <a:headEnd type="triangle"/>
-            <a:tailEnd type="triangle"/>
+            <a:headEnd type="triangle" w="lg" len="lg"/>
+            <a:tailEnd type="triangle" w="lg" len="lg"/>
           </a:ln>
         </p:spPr>
       </p:sp>
@@ -9526,13 +9526,13 @@
             <a:avLst/>
           </a:prstGeom>
           <a:noFill/>
-          <a:ln w="17780">
+          <a:ln w="25400">
             <a:solidFill>
-              <a:srgbClr val="666666"/>
+              <a:srgbClr val="4B5563"/>
             </a:solidFill>
             <a:prstDash val="solid"/>
-            <a:headEnd type="triangle"/>
-            <a:tailEnd type="triangle"/>
+            <a:headEnd type="triangle" w="lg" len="lg"/>
+            <a:tailEnd type="triangle" w="lg" len="lg"/>
           </a:ln>
         </p:spPr>
       </p:sp>
@@ -9551,13 +9551,13 @@
             <a:avLst/>
           </a:prstGeom>
           <a:noFill/>
-          <a:ln w="17780">
+          <a:ln w="25400">
             <a:solidFill>
-              <a:srgbClr val="666666"/>
+              <a:srgbClr val="4B5563"/>
             </a:solidFill>
             <a:prstDash val="solid"/>
-            <a:headEnd type="triangle"/>
-            <a:tailEnd type="triangle"/>
+            <a:headEnd type="triangle" w="lg" len="lg"/>
+            <a:tailEnd type="triangle" w="lg" len="lg"/>
           </a:ln>
         </p:spPr>
       </p:sp>
@@ -9765,7 +9765,7 @@
 </file>
 
 <file path=ppt/slides/slide13.xml><?xml version="1.0" encoding="utf-8"?>
-<p:sld xmlns:a="http://schemas.openxmlformats.org/drawingml/2006/main" xmlns:r="http://schemas.openxmlformats.org/officeDocument/2006/relationships" xmlns:p="http://schemas.openxmlformats.org/presentationml/2006/main">
+<p:sld xmlns:a="http://schemas.openxmlformats.org/drawingml/2006/main" xmlns:p="http://schemas.openxmlformats.org/presentationml/2006/main">
   <p:cSld name="Slide 13">
     <p:bg>
       <p:bgPr>
@@ -10524,13 +10524,13 @@
             <a:avLst/>
           </a:prstGeom>
           <a:noFill/>
-          <a:ln w="17780">
+          <a:ln w="25400">
             <a:solidFill>
-              <a:srgbClr val="888888"/>
+              <a:srgbClr val="596273"/>
             </a:solidFill>
             <a:prstDash val="solid"/>
             <a:headEnd type="none"/>
-            <a:tailEnd type="triangle"/>
+            <a:tailEnd type="triangle" w="lg" len="lg"/>
           </a:ln>
         </p:spPr>
       </p:sp>
@@ -10630,13 +10630,13 @@
             <a:avLst/>
           </a:prstGeom>
           <a:noFill/>
-          <a:ln w="17780">
+          <a:ln w="25400">
             <a:solidFill>
-              <a:srgbClr val="888888"/>
+              <a:srgbClr val="596273"/>
             </a:solidFill>
             <a:prstDash val="solid"/>
             <a:headEnd type="none"/>
-            <a:tailEnd type="triangle"/>
+            <a:tailEnd type="triangle" w="lg" len="lg"/>
           </a:ln>
         </p:spPr>
       </p:sp>
@@ -10736,13 +10736,13 @@
             <a:avLst/>
           </a:prstGeom>
           <a:noFill/>
-          <a:ln w="17780">
+          <a:ln w="25400">
             <a:solidFill>
-              <a:srgbClr val="888888"/>
+              <a:srgbClr val="596273"/>
             </a:solidFill>
             <a:prstDash val="solid"/>
             <a:headEnd type="none"/>
-            <a:tailEnd type="triangle"/>
+            <a:tailEnd type="triangle" w="lg" len="lg"/>
           </a:ln>
         </p:spPr>
       </p:sp>
@@ -10842,13 +10842,13 @@
             <a:avLst/>
           </a:prstGeom>
           <a:noFill/>
-          <a:ln w="17780">
+          <a:ln w="25400">
             <a:solidFill>
-              <a:srgbClr val="888888"/>
+              <a:srgbClr val="596273"/>
             </a:solidFill>
             <a:prstDash val="solid"/>
             <a:headEnd type="none"/>
-            <a:tailEnd type="triangle"/>
+            <a:tailEnd type="triangle" w="lg" len="lg"/>
           </a:ln>
         </p:spPr>
       </p:sp>
@@ -10948,13 +10948,13 @@
             <a:avLst/>
           </a:prstGeom>
           <a:noFill/>
-          <a:ln w="17780">
+          <a:ln w="25400">
             <a:solidFill>
-              <a:srgbClr val="888888"/>
+              <a:srgbClr val="596273"/>
             </a:solidFill>
             <a:prstDash val="solid"/>
             <a:headEnd type="none"/>
-            <a:tailEnd type="triangle"/>
+            <a:tailEnd type="triangle" w="lg" len="lg"/>
           </a:ln>
         </p:spPr>
       </p:sp>
@@ -11039,13 +11039,13 @@
             <a:avLst/>
           </a:prstGeom>
           <a:noFill/>
-          <a:ln w="17780">
+          <a:ln w="25400">
             <a:solidFill>
-              <a:srgbClr val="888888"/>
+              <a:srgbClr val="596273"/>
             </a:solidFill>
             <a:prstDash val="solid"/>
             <a:headEnd type="none"/>
-            <a:tailEnd type="triangle"/>
+            <a:tailEnd type="triangle" w="lg" len="lg"/>
           </a:ln>
         </p:spPr>
       </p:sp>
@@ -11130,13 +11130,13 @@
             <a:avLst/>
           </a:prstGeom>
           <a:noFill/>
-          <a:ln w="17780">
+          <a:ln w="25400">
             <a:solidFill>
-              <a:srgbClr val="888888"/>
+              <a:srgbClr val="596273"/>
             </a:solidFill>
             <a:prstDash val="solid"/>
             <a:headEnd type="none"/>
-            <a:tailEnd type="triangle"/>
+            <a:tailEnd type="triangle" w="lg" len="lg"/>
           </a:ln>
         </p:spPr>
       </p:sp>
@@ -11155,13 +11155,13 @@
             <a:avLst/>
           </a:prstGeom>
           <a:noFill/>
-          <a:ln w="17780">
+          <a:ln w="25400">
             <a:solidFill>
-              <a:srgbClr val="888888"/>
+              <a:srgbClr val="596273"/>
             </a:solidFill>
             <a:prstDash val="solid"/>
-            <a:headEnd type="triangle"/>
-            <a:tailEnd type="triangle"/>
+            <a:headEnd type="triangle" w="lg" len="lg"/>
+            <a:tailEnd type="triangle" w="lg" len="lg"/>
           </a:ln>
         </p:spPr>
       </p:sp>
@@ -11219,13 +11219,13 @@
             <a:avLst/>
           </a:prstGeom>
           <a:noFill/>
-          <a:ln w="17780">
+          <a:ln w="25400">
             <a:solidFill>
-              <a:srgbClr val="AAAAAA"/>
+              <a:srgbClr val="596273"/>
             </a:solidFill>
             <a:prstDash val="dash"/>
             <a:headEnd type="none"/>
-            <a:tailEnd type="triangle"/>
+            <a:tailEnd type="triangle" w="lg" len="lg"/>
           </a:ln>
         </p:spPr>
       </p:sp>
@@ -11244,13 +11244,13 @@
             <a:avLst/>
           </a:prstGeom>
           <a:noFill/>
-          <a:ln w="17780">
+          <a:ln w="25400">
             <a:solidFill>
-              <a:srgbClr val="AAAAAA"/>
+              <a:srgbClr val="596273"/>
             </a:solidFill>
             <a:prstDash val="dash"/>
             <a:headEnd type="none"/>
-            <a:tailEnd type="triangle"/>
+            <a:tailEnd type="triangle" w="lg" len="lg"/>
           </a:ln>
         </p:spPr>
       </p:sp>
@@ -11269,13 +11269,13 @@
             <a:avLst/>
           </a:prstGeom>
           <a:noFill/>
-          <a:ln w="17780">
+          <a:ln w="25400">
             <a:solidFill>
-              <a:srgbClr val="AAAAAA"/>
+              <a:srgbClr val="596273"/>
             </a:solidFill>
             <a:prstDash val="dash"/>
             <a:headEnd type="none"/>
-            <a:tailEnd type="triangle"/>
+            <a:tailEnd type="triangle" w="lg" len="lg"/>
           </a:ln>
         </p:spPr>
       </p:sp>
@@ -11294,13 +11294,13 @@
             <a:avLst/>
           </a:prstGeom>
           <a:noFill/>
-          <a:ln w="17780">
+          <a:ln w="25400">
             <a:solidFill>
-              <a:srgbClr val="AAAAAA"/>
+              <a:srgbClr val="596273"/>
             </a:solidFill>
             <a:prstDash val="dash"/>
             <a:headEnd type="none"/>
-            <a:tailEnd type="triangle"/>
+            <a:tailEnd type="triangle" w="lg" len="lg"/>
           </a:ln>
         </p:spPr>
       </p:sp>
@@ -20762,7 +20762,7 @@
 </file>
 
 <file path=ppt/slides/slide3.xml><?xml version="1.0" encoding="utf-8"?>
-<p:sld xmlns:a="http://schemas.openxmlformats.org/drawingml/2006/main" xmlns:r="http://schemas.openxmlformats.org/officeDocument/2006/relationships" xmlns:p="http://schemas.openxmlformats.org/presentationml/2006/main">
+<p:sld xmlns:a="http://schemas.openxmlformats.org/drawingml/2006/main" xmlns:p="http://schemas.openxmlformats.org/presentationml/2006/main">
   <p:cSld name="Slide 3">
     <p:bg>
       <p:bgPr>
@@ -20938,7 +20938,7 @@
                 <a:ea typeface="Calibri" pitchFamily="34" charset="-122"/>
                 <a:cs typeface="Calibri" pitchFamily="34" charset="-120"/>
               </a:rPr>
-              <a:t>The 30,000-ft view</a:t>
+              <a:t>Layered platform view</a:t>
             </a:r>
             <a:endParaRPr lang="en-US" sz="1050" dirty="0"/>
           </a:p>
@@ -21609,7 +21609,7 @@
                 <a:ea typeface="Calibri" pitchFamily="34" charset="-122"/>
                 <a:cs typeface="Calibri" pitchFamily="34" charset="-120"/>
               </a:rPr>
-              <a:t>This is the 30,000-ft view — each module diagram (4-7) zooms into one API layer service</a:t>
+              <a:t>Security and compliance controls apply across the presentation, API and data layers</a:t>
             </a:r>
             <a:endParaRPr lang="en-US" sz="900" dirty="0"/>
           </a:p>
@@ -21624,7 +21624,7 @@
 </file>
 
 <file path=ppt/slides/slide4.xml><?xml version="1.0" encoding="utf-8"?>
-<p:sld xmlns:a="http://schemas.openxmlformats.org/drawingml/2006/main" xmlns:r="http://schemas.openxmlformats.org/officeDocument/2006/relationships" xmlns:p="http://schemas.openxmlformats.org/presentationml/2006/main">
+<p:sld xmlns:a="http://schemas.openxmlformats.org/drawingml/2006/main" xmlns:p="http://schemas.openxmlformats.org/presentationml/2006/main">
   <p:cSld name="Slide 4">
     <p:bg>
       <p:bgPr>
@@ -21800,7 +21800,7 @@
                 <a:ea typeface="Calibri" pitchFamily="34" charset="-122"/>
                 <a:cs typeface="Calibri" pitchFamily="34" charset="-120"/>
               </a:rPr>
-              <a:t>Composite reference — each module is fully detailed in diagrams 4-8</a:t>
+              <a:t>Five implementation modules and their primary responsibilities</a:t>
             </a:r>
             <a:endParaRPr lang="en-US" sz="1050" dirty="0"/>
           </a:p>
@@ -22753,7 +22753,7 @@
                 <a:ea typeface="Calibri" pitchFamily="34" charset="-122"/>
                 <a:cs typeface="Calibri" pitchFamily="34" charset="-120"/>
               </a:rPr>
-              <a:t>This slide exists to index the detail, not duplicate it — see diagrams 4-8 for full architecture, framework badges, and data model per module</a:t>
+              <a:t>Each module follows the shared React, FastAPI and PostgreSQL architecture with common security, audit and reporting controls</a:t>
             </a:r>
             <a:endParaRPr lang="en-US" sz="900" dirty="0"/>
           </a:p>
@@ -22768,7 +22768,7 @@
 </file>
 
 <file path=ppt/slides/slide5.xml><?xml version="1.0" encoding="utf-8"?>
-<p:sld xmlns:a="http://schemas.openxmlformats.org/drawingml/2006/main" xmlns:r="http://schemas.openxmlformats.org/officeDocument/2006/relationships" xmlns:p="http://schemas.openxmlformats.org/presentationml/2006/main">
+<p:sld xmlns:a="http://schemas.openxmlformats.org/drawingml/2006/main" xmlns:p="http://schemas.openxmlformats.org/presentationml/2006/main">
   <p:cSld name="Slide 5">
     <p:bg>
       <p:bgPr>
@@ -24997,7 +24997,7 @@
                 <a:ea typeface="Calibri" pitchFamily="34" charset="-122"/>
                 <a:cs typeface="Calibri" pitchFamily="34" charset="-120"/>
               </a:rPr>
-              <a:t>Writes directly into PostgreSQL — see diagram 1 for the full enterprise data-flow context</a:t>
+              <a:t>Wallet and identity operations write directly to PostgreSQL</a:t>
             </a:r>
             <a:endParaRPr lang="en-US" sz="900" dirty="0"/>
           </a:p>
@@ -27256,7 +27256,7 @@
 </file>
 
 <file path=ppt/slides/slide7.xml><?xml version="1.0" encoding="utf-8"?>
-<p:sld xmlns:a="http://schemas.openxmlformats.org/drawingml/2006/main" xmlns:r="http://schemas.openxmlformats.org/officeDocument/2006/relationships" xmlns:p="http://schemas.openxmlformats.org/presentationml/2006/main">
+<p:sld xmlns:a="http://schemas.openxmlformats.org/drawingml/2006/main" xmlns:p="http://schemas.openxmlformats.org/presentationml/2006/main">
   <p:cSld name="Slide 7">
     <p:bg>
       <p:bgPr>
@@ -29485,7 +29485,7 @@
                 <a:ea typeface="Calibri" pitchFamily="34" charset="-122"/>
                 <a:cs typeface="Calibri" pitchFamily="34" charset="-120"/>
               </a:rPr>
-              <a:t>PIS calls Module 2's transfer logic directly rather than duplicating it — see diagram 8 for CBDC's separate ledger</a:t>
+              <a:t>PIS reuses Module 2 transfer logic; CBDC wallet and operation records remain separate from commercial wallets</a:t>
             </a:r>
             <a:endParaRPr lang="en-US" sz="900" dirty="0"/>
           </a:p>

--- a/docs/architecture/GlobalPay_Mandatory_Architecture_Deliverables.pptx
+++ b/docs/architecture/GlobalPay_Mandatory_Architecture_Deliverables.pptx
@@ -9445,19 +9445,19 @@
         <p:spPr>
           <a:xfrm>
             <a:off x="1874520" y="1600200"/>
-            <a:ext cx="5596128" cy="2377440"/>
+            <a:ext cx="3277000" cy="1150000"/>
           </a:xfrm>
           <a:prstGeom prst="line">
             <a:avLst/>
           </a:prstGeom>
           <a:noFill/>
-          <a:ln w="25400">
+          <a:ln w="17780">
             <a:solidFill>
-              <a:srgbClr val="4B5563"/>
+              <a:srgbClr val="858F9E"/>
             </a:solidFill>
             <a:prstDash val="solid"/>
-            <a:headEnd type="triangle" w="lg" len="lg"/>
-            <a:tailEnd type="triangle" w="lg" len="lg"/>
+            <a:headEnd type="triangle" w="med" len="med"/>
+            <a:tailEnd type="triangle" w="med" len="med"/>
           </a:ln>
         </p:spPr>
       </p:sp>
@@ -9469,20 +9469,20 @@
         </p:nvSpPr>
         <p:spPr>
           <a:xfrm flipH="1">
-            <a:off x="4727448" y="1600200"/>
-            <a:ext cx="5559552" cy="2377440"/>
+            <a:off x="7050000" y="1600200"/>
+            <a:ext cx="3236000" cy="1150000"/>
           </a:xfrm>
           <a:prstGeom prst="line">
             <a:avLst/>
           </a:prstGeom>
           <a:noFill/>
-          <a:ln w="25400">
+          <a:ln w="17780">
             <a:solidFill>
-              <a:srgbClr val="4B5563"/>
+              <a:srgbClr val="858F9E"/>
             </a:solidFill>
             <a:prstDash val="solid"/>
-            <a:headEnd type="triangle" w="lg" len="lg"/>
-            <a:tailEnd type="triangle" w="lg" len="lg"/>
+            <a:headEnd type="triangle" w="med" len="med"/>
+            <a:tailEnd type="triangle" w="med" len="med"/>
           </a:ln>
         </p:spPr>
       </p:sp>
@@ -9494,20 +9494,20 @@
         </p:nvSpPr>
         <p:spPr>
           <a:xfrm flipV="1">
-            <a:off x="1874520" y="2514600"/>
-            <a:ext cx="5596128" cy="2194560"/>
+            <a:off x="1874520" y="3740000"/>
+            <a:ext cx="3277000" cy="969160"/>
           </a:xfrm>
           <a:prstGeom prst="line">
             <a:avLst/>
           </a:prstGeom>
           <a:noFill/>
-          <a:ln w="25400">
+          <a:ln w="17780">
             <a:solidFill>
-              <a:srgbClr val="4B5563"/>
+              <a:srgbClr val="858F9E"/>
             </a:solidFill>
             <a:prstDash val="solid"/>
-            <a:headEnd type="triangle" w="lg" len="lg"/>
-            <a:tailEnd type="triangle" w="lg" len="lg"/>
+            <a:headEnd type="triangle" w="med" len="med"/>
+            <a:tailEnd type="triangle" w="med" len="med"/>
           </a:ln>
         </p:spPr>
       </p:sp>
@@ -9519,20 +9519,20 @@
         </p:nvSpPr>
         <p:spPr>
           <a:xfrm flipH="1" flipV="1">
-            <a:off x="4727448" y="2514600"/>
-            <a:ext cx="5559552" cy="2194560"/>
+            <a:off x="7050000" y="3740000"/>
+            <a:ext cx="3236000" cy="969160"/>
           </a:xfrm>
           <a:prstGeom prst="line">
             <a:avLst/>
           </a:prstGeom>
           <a:noFill/>
-          <a:ln w="25400">
+          <a:ln w="17780">
             <a:solidFill>
-              <a:srgbClr val="4B5563"/>
+              <a:srgbClr val="858F9E"/>
             </a:solidFill>
             <a:prstDash val="solid"/>
-            <a:headEnd type="triangle" w="lg" len="lg"/>
-            <a:tailEnd type="triangle" w="lg" len="lg"/>
+            <a:headEnd type="triangle" w="med" len="med"/>
+            <a:tailEnd type="triangle" w="med" len="med"/>
           </a:ln>
         </p:spPr>
       </p:sp>
@@ -9544,20 +9544,20 @@
         </p:nvSpPr>
         <p:spPr>
           <a:xfrm flipV="1">
-            <a:off x="6053328" y="2514600"/>
-            <a:ext cx="1417320" cy="2514600"/>
+            <a:off x="6048756" y="3977640"/>
+            <a:ext cx="9144" cy="1051560"/>
           </a:xfrm>
           <a:prstGeom prst="line">
             <a:avLst/>
           </a:prstGeom>
           <a:noFill/>
-          <a:ln w="25400">
+          <a:ln w="17780">
             <a:solidFill>
-              <a:srgbClr val="4B5563"/>
+              <a:srgbClr val="858F9E"/>
             </a:solidFill>
             <a:prstDash val="solid"/>
-            <a:headEnd type="triangle" w="lg" len="lg"/>
-            <a:tailEnd type="triangle" w="lg" len="lg"/>
+            <a:headEnd type="triangle" w="med" len="med"/>
+            <a:tailEnd type="triangle" w="med" len="med"/>
           </a:ln>
         </p:spPr>
       </p:sp>
@@ -10524,13 +10524,13 @@
             <a:avLst/>
           </a:prstGeom>
           <a:noFill/>
-          <a:ln w="25400">
+          <a:ln w="17780">
             <a:solidFill>
-              <a:srgbClr val="596273"/>
+              <a:srgbClr val="858F9E"/>
             </a:solidFill>
             <a:prstDash val="solid"/>
             <a:headEnd type="none"/>
-            <a:tailEnd type="triangle" w="lg" len="lg"/>
+            <a:tailEnd type="triangle" w="med" len="med"/>
           </a:ln>
         </p:spPr>
       </p:sp>
@@ -10630,13 +10630,13 @@
             <a:avLst/>
           </a:prstGeom>
           <a:noFill/>
-          <a:ln w="25400">
+          <a:ln w="17780">
             <a:solidFill>
-              <a:srgbClr val="596273"/>
+              <a:srgbClr val="858F9E"/>
             </a:solidFill>
             <a:prstDash val="solid"/>
             <a:headEnd type="none"/>
-            <a:tailEnd type="triangle" w="lg" len="lg"/>
+            <a:tailEnd type="triangle" w="med" len="med"/>
           </a:ln>
         </p:spPr>
       </p:sp>
@@ -10736,13 +10736,13 @@
             <a:avLst/>
           </a:prstGeom>
           <a:noFill/>
-          <a:ln w="25400">
+          <a:ln w="17780">
             <a:solidFill>
-              <a:srgbClr val="596273"/>
+              <a:srgbClr val="858F9E"/>
             </a:solidFill>
             <a:prstDash val="solid"/>
             <a:headEnd type="none"/>
-            <a:tailEnd type="triangle" w="lg" len="lg"/>
+            <a:tailEnd type="triangle" w="med" len="med"/>
           </a:ln>
         </p:spPr>
       </p:sp>
@@ -10842,13 +10842,13 @@
             <a:avLst/>
           </a:prstGeom>
           <a:noFill/>
-          <a:ln w="25400">
+          <a:ln w="17780">
             <a:solidFill>
-              <a:srgbClr val="596273"/>
+              <a:srgbClr val="858F9E"/>
             </a:solidFill>
             <a:prstDash val="solid"/>
             <a:headEnd type="none"/>
-            <a:tailEnd type="triangle" w="lg" len="lg"/>
+            <a:tailEnd type="triangle" w="med" len="med"/>
           </a:ln>
         </p:spPr>
       </p:sp>
@@ -10948,13 +10948,13 @@
             <a:avLst/>
           </a:prstGeom>
           <a:noFill/>
-          <a:ln w="25400">
+          <a:ln w="17780">
             <a:solidFill>
-              <a:srgbClr val="596273"/>
+              <a:srgbClr val="858F9E"/>
             </a:solidFill>
             <a:prstDash val="solid"/>
             <a:headEnd type="none"/>
-            <a:tailEnd type="triangle" w="lg" len="lg"/>
+            <a:tailEnd type="triangle" w="med" len="med"/>
           </a:ln>
         </p:spPr>
       </p:sp>
@@ -11039,13 +11039,13 @@
             <a:avLst/>
           </a:prstGeom>
           <a:noFill/>
-          <a:ln w="25400">
+          <a:ln w="17780">
             <a:solidFill>
-              <a:srgbClr val="596273"/>
+              <a:srgbClr val="858F9E"/>
             </a:solidFill>
             <a:prstDash val="solid"/>
             <a:headEnd type="none"/>
-            <a:tailEnd type="triangle" w="lg" len="lg"/>
+            <a:tailEnd type="triangle" w="med" len="med"/>
           </a:ln>
         </p:spPr>
       </p:sp>
@@ -11130,13 +11130,13 @@
             <a:avLst/>
           </a:prstGeom>
           <a:noFill/>
-          <a:ln w="25400">
+          <a:ln w="17780">
             <a:solidFill>
-              <a:srgbClr val="596273"/>
+              <a:srgbClr val="858F9E"/>
             </a:solidFill>
             <a:prstDash val="solid"/>
             <a:headEnd type="none"/>
-            <a:tailEnd type="triangle" w="lg" len="lg"/>
+            <a:tailEnd type="triangle" w="med" len="med"/>
           </a:ln>
         </p:spPr>
       </p:sp>
@@ -11155,13 +11155,13 @@
             <a:avLst/>
           </a:prstGeom>
           <a:noFill/>
-          <a:ln w="25400">
+          <a:ln w="17780">
             <a:solidFill>
-              <a:srgbClr val="596273"/>
+              <a:srgbClr val="858F9E"/>
             </a:solidFill>
             <a:prstDash val="solid"/>
-            <a:headEnd type="triangle" w="lg" len="lg"/>
-            <a:tailEnd type="triangle" w="lg" len="lg"/>
+            <a:headEnd type="triangle" w="med" len="med"/>
+            <a:tailEnd type="triangle" w="med" len="med"/>
           </a:ln>
         </p:spPr>
       </p:sp>
@@ -11219,13 +11219,13 @@
             <a:avLst/>
           </a:prstGeom>
           <a:noFill/>
-          <a:ln w="25400">
+          <a:ln w="17780">
             <a:solidFill>
-              <a:srgbClr val="596273"/>
+              <a:srgbClr val="B6BCC6"/>
             </a:solidFill>
-            <a:prstDash val="dash"/>
+            <a:prstDash val="dot"/>
             <a:headEnd type="none"/>
-            <a:tailEnd type="triangle" w="lg" len="lg"/>
+            <a:tailEnd type="triangle" w="med" len="med"/>
           </a:ln>
         </p:spPr>
       </p:sp>
@@ -11244,13 +11244,13 @@
             <a:avLst/>
           </a:prstGeom>
           <a:noFill/>
-          <a:ln w="25400">
+          <a:ln w="17780">
             <a:solidFill>
-              <a:srgbClr val="596273"/>
+              <a:srgbClr val="B6BCC6"/>
             </a:solidFill>
-            <a:prstDash val="dash"/>
+            <a:prstDash val="dot"/>
             <a:headEnd type="none"/>
-            <a:tailEnd type="triangle" w="lg" len="lg"/>
+            <a:tailEnd type="triangle" w="med" len="med"/>
           </a:ln>
         </p:spPr>
       </p:sp>
@@ -11269,13 +11269,13 @@
             <a:avLst/>
           </a:prstGeom>
           <a:noFill/>
-          <a:ln w="25400">
+          <a:ln w="17780">
             <a:solidFill>
-              <a:srgbClr val="596273"/>
+              <a:srgbClr val="B6BCC6"/>
             </a:solidFill>
-            <a:prstDash val="dash"/>
+            <a:prstDash val="dot"/>
             <a:headEnd type="none"/>
-            <a:tailEnd type="triangle" w="lg" len="lg"/>
+            <a:tailEnd type="triangle" w="med" len="med"/>
           </a:ln>
         </p:spPr>
       </p:sp>
@@ -11294,13 +11294,13 @@
             <a:avLst/>
           </a:prstGeom>
           <a:noFill/>
-          <a:ln w="25400">
+          <a:ln w="17780">
             <a:solidFill>
-              <a:srgbClr val="596273"/>
+              <a:srgbClr val="B6BCC6"/>
             </a:solidFill>
-            <a:prstDash val="dash"/>
+            <a:prstDash val="dot"/>
             <a:headEnd type="none"/>
-            <a:tailEnd type="triangle" w="lg" len="lg"/>
+            <a:tailEnd type="triangle" w="med" len="med"/>
           </a:ln>
         </p:spPr>
       </p:sp>
